--- a/docs/CONTENT_DISTRIBUTION_STRATEGY.pptx
+++ b/docs/CONTENT_DISTRIBUTION_STRATEGY.pptx
@@ -18,9 +18,10 @@
     <p:sldId id="266" r:id="rId12"/>
     <p:sldId id="267" r:id="rId13"/>
     <p:sldId id="268" r:id="rId14"/>
+    <p:sldId id="269" r:id="rId15"/>
   </p:sldIdLst>
   <p:notesMasterIdLst>
-    <p:notesMasterId r:id="rId15"/>
+    <p:notesMasterId r:id="rId16"/>
   </p:notesMasterIdLst>
   <p:sldSz cx="9144000" cy="5143500"/>
   <p:notesSz cx="5143500" cy="9144000"/>
@@ -890,6 +891,94 @@
             <a:fld id="{F7021451-1387-4CA6-816F-3879F97B5CBC}" type="slidenum">
               <a:rPr lang="en-US"/>
               <a:t>13</a:t>
+            </a:fld>
+            <a:endParaRPr lang="en-US"/>
+          </a:p>
+        </p:txBody>
+      </p:sp>
+    </p:spTree>
+    <p:extLst>
+      <p:ext uri="{BB962C8B-B14F-4D97-AF65-F5344CB8AC3E}">
+        <p14:creationId xmlns:p14="http://schemas.microsoft.com/office/powerpoint/2010/main" val="1024086991"/>
+      </p:ext>
+    </p:extLst>
+  </p:cSld>
+  <p:clrMapOvr>
+    <a:masterClrMapping/>
+  </p:clrMapOvr>
+</p:notes>
+</file>
+
+<file path=ppt/notesSlides/notesSlide14.xml><?xml version="1.0" encoding="utf-8"?>
+<p:notes xmlns:a="http://schemas.openxmlformats.org/drawingml/2006/main" xmlns:r="http://schemas.openxmlformats.org/officeDocument/2006/relationships" xmlns:p="http://schemas.openxmlformats.org/presentationml/2006/main">
+  <p:cSld>
+    <p:spTree>
+      <p:nvGrpSpPr>
+        <p:cNvPr id="1" name=""/>
+        <p:cNvGrpSpPr/>
+        <p:nvPr/>
+      </p:nvGrpSpPr>
+      <p:grpSpPr>
+        <a:xfrm>
+          <a:off x="0" y="0"/>
+          <a:ext cx="0" cy="0"/>
+          <a:chOff x="0" y="0"/>
+          <a:chExt cx="0" cy="0"/>
+        </a:xfrm>
+      </p:grpSpPr>
+      <p:sp>
+        <p:nvSpPr>
+          <p:cNvPr id="2" name="Slide Image Placeholder 1"/>
+          <p:cNvSpPr>
+            <a:spLocks noGrp="1" noRot="1" noChangeAspect="1"/>
+          </p:cNvSpPr>
+          <p:nvPr>
+            <p:ph type="sldImg"/>
+          </p:nvPr>
+        </p:nvSpPr>
+        <p:spPr/>
+      </p:sp>
+      <p:sp>
+        <p:nvSpPr>
+          <p:cNvPr id="3" name="Notes Placeholder 2"/>
+          <p:cNvSpPr>
+            <a:spLocks noGrp="1"/>
+          </p:cNvSpPr>
+          <p:nvPr>
+            <p:ph type="body" idx="1"/>
+          </p:nvPr>
+        </p:nvSpPr>
+        <p:spPr/>
+        <p:txBody>
+          <a:bodyPr/>
+          <a:lstStyle/>
+          <a:p>
+            <a:r>
+              <a:rPr lang="en-US" dirty="0"/>
+              <a:t/>
+            </a:r>
+            <a:endParaRPr lang="en-US" dirty="0"/>
+          </a:p>
+        </p:txBody>
+      </p:sp>
+      <p:sp>
+        <p:nvSpPr>
+          <p:cNvPr id="4" name="Slide Number Placeholder 3"/>
+          <p:cNvSpPr>
+            <a:spLocks noGrp="1"/>
+          </p:cNvSpPr>
+          <p:nvPr>
+            <p:ph type="sldNum" sz="quarter" idx="10"/>
+          </p:nvPr>
+        </p:nvSpPr>
+        <p:spPr/>
+        <p:txBody>
+          <a:bodyPr/>
+          <a:lstStyle/>
+          <a:p>
+            <a:fld id="{F7021451-1387-4CA6-816F-3879F97B5CBC}" type="slidenum">
+              <a:rPr lang="en-US"/>
+              <a:t>14</a:t>
             </a:fld>
             <a:endParaRPr lang="en-US"/>
           </a:p>
@@ -4194,8 +4283,8 @@
         </p:nvSpPr>
         <p:spPr>
           <a:xfrm>
-            <a:off x="731520" y="365760"/>
-            <a:ext cx="7315200" cy="365760"/>
+            <a:off x="731520" y="274320"/>
+            <a:ext cx="7315200" cy="274320"/>
           </a:xfrm>
           <a:prstGeom prst="rect">
             <a:avLst/>
@@ -4219,7 +4308,7 @@
                 <a:ea typeface="Arial" pitchFamily="34" charset="-122"/>
                 <a:cs typeface="Arial" pitchFamily="34" charset="-120"/>
               </a:rPr>
-              <a:t>BUILD SEQUENCE</a:t>
+              <a:t>SETUP &amp; ACCOUNTS</a:t>
             </a:r>
             <a:endParaRPr lang="en-US" sz="1100" dirty="0"/>
           </a:p>
@@ -4233,7 +4322,7 @@
         </p:nvSpPr>
         <p:spPr>
           <a:xfrm>
-            <a:off x="731520" y="731520"/>
+            <a:off x="731520" y="594360"/>
             <a:ext cx="7315200" cy="457200"/>
           </a:xfrm>
           <a:prstGeom prst="rect">
@@ -4258,7 +4347,7 @@
                 <a:ea typeface="Georgia" pitchFamily="34" charset="-122"/>
                 <a:cs typeface="Georgia" pitchFamily="34" charset="-120"/>
               </a:rPr>
-              <a:t>Phased Rollout — Content Engine + Distribution</a:t>
+              <a:t>What Needs to Be Created Before Publishing</a:t>
             </a:r>
             <a:endParaRPr lang="en-US" sz="2600" dirty="0"/>
           </a:p>
@@ -4272,8 +4361,8 @@
         </p:nvSpPr>
         <p:spPr>
           <a:xfrm>
-            <a:off x="548640" y="1371600"/>
-            <a:ext cx="8046720" cy="640080"/>
+            <a:off x="365760" y="1234440"/>
+            <a:ext cx="2743200" cy="3291840"/>
           </a:xfrm>
           <a:prstGeom prst="rect">
             <a:avLst/>
@@ -4299,14 +4388,14 @@
         </p:nvSpPr>
         <p:spPr>
           <a:xfrm>
-            <a:off x="548640" y="1371600"/>
-            <a:ext cx="54864" cy="640080"/>
+            <a:off x="365760" y="1234440"/>
+            <a:ext cx="2743200" cy="365760"/>
           </a:xfrm>
           <a:prstGeom prst="rect">
             <a:avLst/>
           </a:prstGeom>
           <a:solidFill>
-            <a:srgbClr val="10B981"/>
+            <a:srgbClr val="2563EB"/>
           </a:solidFill>
           <a:ln/>
         </p:spPr>
@@ -4319,8 +4408,8 @@
         </p:nvSpPr>
         <p:spPr>
           <a:xfrm>
-            <a:off x="731520" y="1371600"/>
-            <a:ext cx="731520" cy="320040"/>
+            <a:off x="502920" y="1261872"/>
+            <a:ext cx="2468880" cy="320040"/>
           </a:xfrm>
           <a:prstGeom prst="rect">
             <a:avLst/>
@@ -4338,13 +4427,13 @@
             <a:r>
               <a:rPr lang="en-US" sz="900" b="1" dirty="0">
                 <a:solidFill>
-                  <a:srgbClr val="10B981"/>
+                  <a:srgbClr val="FFFFFF"/>
                 </a:solidFill>
                 <a:latin typeface="Arial" pitchFamily="34" charset="0"/>
                 <a:ea typeface="Arial" pitchFamily="34" charset="-122"/>
                 <a:cs typeface="Arial" pitchFamily="34" charset="-120"/>
               </a:rPr>
-              <a:t>PHASE 1</a:t>
+              <a:t>PLATFORM ACCOUNTS</a:t>
             </a:r>
             <a:endParaRPr lang="en-US" sz="900" dirty="0"/>
           </a:p>
@@ -4358,24 +4447,63 @@
         </p:nvSpPr>
         <p:spPr>
           <a:xfrm>
-            <a:off x="731520" y="1664208"/>
-            <a:ext cx="731520" cy="274320"/>
-          </a:xfrm>
-          <a:prstGeom prst="rect">
-            <a:avLst/>
-          </a:prstGeom>
-          <a:noFill/>
-          <a:ln/>
-        </p:spPr>
-        <p:txBody>
-          <a:bodyPr wrap="square" lIns="0" tIns="0" rIns="0" bIns="0" rtlCol="0" anchor="ctr"/>
-          <a:lstStyle/>
-          <a:p>
-            <a:pPr indent="0" marL="0">
-              <a:buNone/>
-            </a:pPr>
-            <a:r>
-              <a:rPr lang="en-US" sz="800" dirty="0">
+            <a:off x="548640" y="1737360"/>
+            <a:ext cx="2377440" cy="182880"/>
+          </a:xfrm>
+          <a:prstGeom prst="rect">
+            <a:avLst/>
+          </a:prstGeom>
+          <a:noFill/>
+          <a:ln/>
+        </p:spPr>
+        <p:txBody>
+          <a:bodyPr wrap="square" lIns="0" tIns="0" rIns="0" bIns="0" rtlCol="0" anchor="ctr"/>
+          <a:lstStyle/>
+          <a:p>
+            <a:pPr indent="0" marL="0">
+              <a:buNone/>
+            </a:pPr>
+            <a:r>
+              <a:rPr lang="en-US" sz="900" b="1" dirty="0">
+                <a:solidFill>
+                  <a:srgbClr val="1A1F36"/>
+                </a:solidFill>
+                <a:latin typeface="Calibri" pitchFamily="34" charset="0"/>
+                <a:ea typeface="Calibri" pitchFamily="34" charset="-122"/>
+                <a:cs typeface="Calibri" pitchFamily="34" charset="-120"/>
+              </a:rPr>
+              <a:t>LinkedIn Company Page</a:t>
+            </a:r>
+            <a:endParaRPr lang="en-US" sz="900" dirty="0"/>
+          </a:p>
+        </p:txBody>
+      </p:sp>
+      <p:sp>
+        <p:nvSpPr>
+          <p:cNvPr id="8" name="Text 6"/>
+          <p:cNvSpPr/>
+          <p:nvPr/>
+        </p:nvSpPr>
+        <p:spPr>
+          <a:xfrm>
+            <a:off x="548640" y="1920240"/>
+            <a:ext cx="2377440" cy="320040"/>
+          </a:xfrm>
+          <a:prstGeom prst="rect">
+            <a:avLst/>
+          </a:prstGeom>
+          <a:noFill/>
+          <a:ln/>
+        </p:spPr>
+        <p:txBody>
+          <a:bodyPr wrap="square" lIns="0" tIns="0" rIns="0" bIns="0" rtlCol="0" anchor="ctr"/>
+          <a:lstStyle/>
+          <a:p>
+            <a:pPr indent="0" marL="0">
+              <a:buNone/>
+            </a:pPr>
+            <a:r>
+              <a:rPr lang="en-US" sz="750" dirty="0">
                 <a:solidFill>
                   <a:srgbClr val="64748B"/>
                 </a:solidFill>
@@ -4383,155 +4511,65 @@
                 <a:ea typeface="Calibri" pitchFamily="34" charset="-122"/>
                 <a:cs typeface="Calibri" pitchFamily="34" charset="-120"/>
               </a:rPr>
-              <a:t>Pre-Launch</a:t>
-            </a:r>
-            <a:endParaRPr lang="en-US" sz="800" dirty="0"/>
-          </a:p>
-        </p:txBody>
-      </p:sp>
-      <p:sp>
-        <p:nvSpPr>
-          <p:cNvPr id="8" name="Text 6"/>
-          <p:cNvSpPr/>
-          <p:nvPr/>
-        </p:nvSpPr>
-        <p:spPr>
-          <a:xfrm>
-            <a:off x="1554480" y="1371600"/>
-            <a:ext cx="731520" cy="640080"/>
-          </a:xfrm>
-          <a:prstGeom prst="rect">
-            <a:avLst/>
-          </a:prstGeom>
-          <a:noFill/>
-          <a:ln/>
-        </p:spPr>
-        <p:txBody>
-          <a:bodyPr wrap="square" lIns="0" tIns="0" rIns="0" bIns="0" rtlCol="0" anchor="ctr"/>
-          <a:lstStyle/>
-          <a:p>
-            <a:pPr indent="0" marL="0">
-              <a:buNone/>
-            </a:pPr>
-            <a:r>
-              <a:rPr lang="en-US" sz="1000" b="1" dirty="0">
+              <a:t>Create "Brilliant Jobs" company page.</a:t>
+            </a:r>
+            <a:endParaRPr lang="en-US" sz="750" dirty="0"/>
+          </a:p>
+          <a:p>
+            <a:pPr indent="0" marL="0">
+              <a:buNone/>
+            </a:pPr>
+            <a:r>
+              <a:rPr lang="en-US" sz="750" dirty="0">
+                <a:solidFill>
+                  <a:srgbClr val="64748B"/>
+                </a:solidFill>
+                <a:latin typeface="Calibri" pitchFamily="34" charset="0"/>
+                <a:ea typeface="Calibri" pitchFamily="34" charset="-122"/>
+                <a:cs typeface="Calibri" pitchFamily="34" charset="-120"/>
+              </a:rPr>
+              <a:t>Marston as admin. Verify domain.</a:t>
+            </a:r>
+            <a:endParaRPr lang="en-US" sz="750" dirty="0"/>
+          </a:p>
+        </p:txBody>
+      </p:sp>
+      <p:sp>
+        <p:nvSpPr>
+          <p:cNvPr id="9" name="Text 7"/>
+          <p:cNvSpPr/>
+          <p:nvPr/>
+        </p:nvSpPr>
+        <p:spPr>
+          <a:xfrm>
+            <a:off x="548640" y="2267712"/>
+            <a:ext cx="2377440" cy="182880"/>
+          </a:xfrm>
+          <a:prstGeom prst="rect">
+            <a:avLst/>
+          </a:prstGeom>
+          <a:noFill/>
+          <a:ln/>
+        </p:spPr>
+        <p:txBody>
+          <a:bodyPr wrap="square" lIns="0" tIns="0" rIns="0" bIns="0" rtlCol="0" anchor="ctr"/>
+          <a:lstStyle/>
+          <a:p>
+            <a:pPr indent="0" marL="0">
+              <a:buNone/>
+            </a:pPr>
+            <a:r>
+              <a:rPr lang="en-US" sz="900" b="1" dirty="0">
                 <a:solidFill>
                   <a:srgbClr val="1A1F36"/>
                 </a:solidFill>
-                <a:latin typeface="Georgia" pitchFamily="34" charset="0"/>
-                <a:ea typeface="Georgia" pitchFamily="34" charset="-122"/>
-                <a:cs typeface="Georgia" pitchFamily="34" charset="-120"/>
-              </a:rPr>
-              <a:t>5-7 days</a:t>
-            </a:r>
-            <a:endParaRPr lang="en-US" sz="1000" dirty="0"/>
-          </a:p>
-        </p:txBody>
-      </p:sp>
-      <p:sp>
-        <p:nvSpPr>
-          <p:cNvPr id="9" name="Text 7"/>
-          <p:cNvSpPr/>
-          <p:nvPr/>
-        </p:nvSpPr>
-        <p:spPr>
-          <a:xfrm>
-            <a:off x="2377440" y="1417320"/>
-            <a:ext cx="3657600" cy="548640"/>
-          </a:xfrm>
-          <a:prstGeom prst="rect">
-            <a:avLst/>
-          </a:prstGeom>
-          <a:noFill/>
-          <a:ln/>
-        </p:spPr>
-        <p:txBody>
-          <a:bodyPr wrap="square" lIns="0" tIns="0" rIns="0" bIns="0" rtlCol="0" anchor="ctr"/>
-          <a:lstStyle/>
-          <a:p>
-            <a:pPr indent="0" marL="0">
-              <a:buNone/>
-            </a:pPr>
-            <a:r>
-              <a:rPr lang="en-US" sz="800" dirty="0">
-                <a:solidFill>
-                  <a:srgbClr val="334155"/>
-                </a:solidFill>
-                <a:latin typeface="Calibri" pitchFamily="34" charset="0"/>
-                <a:ea typeface="Calibri" pitchFamily="34" charset="-122"/>
-                <a:cs typeface="Calibri" pitchFamily="34" charset="-120"/>
-              </a:rPr>
-              <a:t>Evergreen SEO infrastructure</a:t>
-            </a:r>
-            <a:endParaRPr lang="en-US" sz="800" dirty="0"/>
-          </a:p>
-          <a:p>
-            <a:pPr indent="0" marL="0">
-              <a:buNone/>
-            </a:pPr>
-            <a:r>
-              <a:rPr lang="en-US" sz="800" dirty="0">
-                <a:solidFill>
-                  <a:srgbClr val="334155"/>
-                </a:solidFill>
-                <a:latin typeface="Calibri" pitchFamily="34" charset="0"/>
-                <a:ea typeface="Calibri" pitchFamily="34" charset="-122"/>
-                <a:cs typeface="Calibri" pitchFamily="34" charset="-120"/>
-              </a:rPr>
-              <a:t>Trend page template engine</a:t>
-            </a:r>
-            <a:endParaRPr lang="en-US" sz="800" dirty="0"/>
-          </a:p>
-          <a:p>
-            <a:pPr indent="0" marL="0">
-              <a:buNone/>
-            </a:pPr>
-            <a:r>
-              <a:rPr lang="en-US" sz="800" dirty="0">
-                <a:solidFill>
-                  <a:srgbClr val="334155"/>
-                </a:solidFill>
-                <a:latin typeface="Calibri" pitchFamily="34" charset="0"/>
-                <a:ea typeface="Calibri" pitchFamily="34" charset="-122"/>
-                <a:cs typeface="Calibri" pitchFamily="34" charset="-120"/>
-              </a:rPr>
-              <a:t>Jobs by Location page</a:t>
-            </a:r>
-            <a:endParaRPr lang="en-US" sz="800" dirty="0"/>
-          </a:p>
-          <a:p>
-            <a:pPr indent="0" marL="0">
-              <a:buNone/>
-            </a:pPr>
-            <a:r>
-              <a:rPr lang="en-US" sz="800" dirty="0">
-                <a:solidFill>
-                  <a:srgbClr val="334155"/>
-                </a:solidFill>
-                <a:latin typeface="Calibri" pitchFamily="34" charset="0"/>
-                <a:ea typeface="Calibri" pitchFamily="34" charset="-122"/>
-                <a:cs typeface="Calibri" pitchFamily="34" charset="-120"/>
-              </a:rPr>
-              <a:t>First 10 metro comparison pages</a:t>
-            </a:r>
-            <a:endParaRPr lang="en-US" sz="800" dirty="0"/>
-          </a:p>
-          <a:p>
-            <a:pPr indent="0" marL="0">
-              <a:buNone/>
-            </a:pPr>
-            <a:r>
-              <a:rPr lang="en-US" sz="800" dirty="0">
-                <a:solidFill>
-                  <a:srgbClr val="334155"/>
-                </a:solidFill>
-                <a:latin typeface="Calibri" pitchFamily="34" charset="0"/>
-                <a:ea typeface="Calibri" pitchFamily="34" charset="-122"/>
-                <a:cs typeface="Calibri" pitchFamily="34" charset="-120"/>
-              </a:rPr>
-              <a:t>DataForSEO keyword validation</a:t>
-            </a:r>
-            <a:endParaRPr lang="en-US" sz="800" dirty="0"/>
+                <a:latin typeface="Calibri" pitchFamily="34" charset="0"/>
+                <a:ea typeface="Calibri" pitchFamily="34" charset="-122"/>
+                <a:cs typeface="Calibri" pitchFamily="34" charset="-120"/>
+              </a:rPr>
+              <a:t>YouTube Brand Account</a:t>
+            </a:r>
+            <a:endParaRPr lang="en-US" sz="900" dirty="0"/>
           </a:p>
         </p:txBody>
       </p:sp>
@@ -4543,24 +4581,24 @@
         </p:nvSpPr>
         <p:spPr>
           <a:xfrm>
-            <a:off x="6400800" y="1417320"/>
-            <a:ext cx="2011680" cy="548640"/>
-          </a:xfrm>
-          <a:prstGeom prst="rect">
-            <a:avLst/>
-          </a:prstGeom>
-          <a:noFill/>
-          <a:ln/>
-        </p:spPr>
-        <p:txBody>
-          <a:bodyPr wrap="square" lIns="0" tIns="0" rIns="0" bIns="0" rtlCol="0" anchor="ctr"/>
-          <a:lstStyle/>
-          <a:p>
-            <a:pPr indent="0" marL="0">
-              <a:buNone/>
-            </a:pPr>
-            <a:r>
-              <a:rPr lang="en-US" sz="800" dirty="0">
+            <a:off x="548640" y="2450592"/>
+            <a:ext cx="2377440" cy="320040"/>
+          </a:xfrm>
+          <a:prstGeom prst="rect">
+            <a:avLst/>
+          </a:prstGeom>
+          <a:noFill/>
+          <a:ln/>
+        </p:spPr>
+        <p:txBody>
+          <a:bodyPr wrap="square" lIns="0" tIns="0" rIns="0" bIns="0" rtlCol="0" anchor="ctr"/>
+          <a:lstStyle/>
+          <a:p>
+            <a:pPr indent="0" marL="0">
+              <a:buNone/>
+            </a:pPr>
+            <a:r>
+              <a:rPr lang="en-US" sz="750" dirty="0">
                 <a:solidFill>
                   <a:srgbClr val="64748B"/>
                 </a:solidFill>
@@ -4568,16 +4606,16 @@
                 <a:ea typeface="Calibri" pitchFamily="34" charset="-122"/>
                 <a:cs typeface="Calibri" pitchFamily="34" charset="-120"/>
               </a:rPr>
-              <a:t>Pod 1 specs</a:t>
-            </a:r>
-            <a:endParaRPr lang="en-US" sz="800" dirty="0"/>
-          </a:p>
-          <a:p>
-            <a:pPr indent="0" marL="0">
-              <a:buNone/>
-            </a:pPr>
-            <a:r>
-              <a:rPr lang="en-US" sz="800" dirty="0">
+              <a:t>Create channel under BJ brand.</a:t>
+            </a:r>
+            <a:endParaRPr lang="en-US" sz="750" dirty="0"/>
+          </a:p>
+          <a:p>
+            <a:pPr indent="0" marL="0">
+              <a:buNone/>
+            </a:pPr>
+            <a:r>
+              <a:rPr lang="en-US" sz="750" dirty="0">
                 <a:solidFill>
                   <a:srgbClr val="64748B"/>
                 </a:solidFill>
@@ -4585,22 +4623,307 @@
                 <a:ea typeface="Calibri" pitchFamily="34" charset="-122"/>
                 <a:cs typeface="Calibri" pitchFamily="34" charset="-120"/>
               </a:rPr>
-              <a:t>Pod 2 builds</a:t>
-            </a:r>
-            <a:endParaRPr lang="en-US" sz="800" dirty="0"/>
-          </a:p>
-        </p:txBody>
-      </p:sp>
-      <p:sp>
-        <p:nvSpPr>
-          <p:cNvPr id="11" name="Shape 9"/>
-          <p:cNvSpPr/>
-          <p:nvPr/>
-        </p:nvSpPr>
-        <p:spPr>
-          <a:xfrm>
-            <a:off x="548640" y="2084832"/>
-            <a:ext cx="8046720" cy="640080"/>
+              <a:t>Custom URL, banner, profile.</a:t>
+            </a:r>
+            <a:endParaRPr lang="en-US" sz="750" dirty="0"/>
+          </a:p>
+        </p:txBody>
+      </p:sp>
+      <p:sp>
+        <p:nvSpPr>
+          <p:cNvPr id="11" name="Text 9"/>
+          <p:cNvSpPr/>
+          <p:nvPr/>
+        </p:nvSpPr>
+        <p:spPr>
+          <a:xfrm>
+            <a:off x="548640" y="2798064"/>
+            <a:ext cx="2377440" cy="182880"/>
+          </a:xfrm>
+          <a:prstGeom prst="rect">
+            <a:avLst/>
+          </a:prstGeom>
+          <a:noFill/>
+          <a:ln/>
+        </p:spPr>
+        <p:txBody>
+          <a:bodyPr wrap="square" lIns="0" tIns="0" rIns="0" bIns="0" rtlCol="0" anchor="ctr"/>
+          <a:lstStyle/>
+          <a:p>
+            <a:pPr indent="0" marL="0">
+              <a:buNone/>
+            </a:pPr>
+            <a:r>
+              <a:rPr lang="en-US" sz="900" b="1" dirty="0">
+                <a:solidFill>
+                  <a:srgbClr val="1A1F36"/>
+                </a:solidFill>
+                <a:latin typeface="Calibri" pitchFamily="34" charset="0"/>
+                <a:ea typeface="Calibri" pitchFamily="34" charset="-122"/>
+                <a:cs typeface="Calibri" pitchFamily="34" charset="-120"/>
+              </a:rPr>
+              <a:t>X (Twitter) Account</a:t>
+            </a:r>
+            <a:endParaRPr lang="en-US" sz="900" dirty="0"/>
+          </a:p>
+        </p:txBody>
+      </p:sp>
+      <p:sp>
+        <p:nvSpPr>
+          <p:cNvPr id="12" name="Text 10"/>
+          <p:cNvSpPr/>
+          <p:nvPr/>
+        </p:nvSpPr>
+        <p:spPr>
+          <a:xfrm>
+            <a:off x="548640" y="2980944"/>
+            <a:ext cx="2377440" cy="320040"/>
+          </a:xfrm>
+          <a:prstGeom prst="rect">
+            <a:avLst/>
+          </a:prstGeom>
+          <a:noFill/>
+          <a:ln/>
+        </p:spPr>
+        <p:txBody>
+          <a:bodyPr wrap="square" lIns="0" tIns="0" rIns="0" bIns="0" rtlCol="0" anchor="ctr"/>
+          <a:lstStyle/>
+          <a:p>
+            <a:pPr indent="0" marL="0">
+              <a:buNone/>
+            </a:pPr>
+            <a:r>
+              <a:rPr lang="en-US" sz="750" dirty="0">
+                <a:solidFill>
+                  <a:srgbClr val="64748B"/>
+                </a:solidFill>
+                <a:latin typeface="Calibri" pitchFamily="34" charset="0"/>
+                <a:ea typeface="Calibri" pitchFamily="34" charset="-122"/>
+                <a:cs typeface="Calibri" pitchFamily="34" charset="-120"/>
+              </a:rPr>
+              <a:t>@brilliantjobs or similar.</a:t>
+            </a:r>
+            <a:endParaRPr lang="en-US" sz="750" dirty="0"/>
+          </a:p>
+          <a:p>
+            <a:pPr indent="0" marL="0">
+              <a:buNone/>
+            </a:pPr>
+            <a:r>
+              <a:rPr lang="en-US" sz="750" dirty="0">
+                <a:solidFill>
+                  <a:srgbClr val="64748B"/>
+                </a:solidFill>
+                <a:latin typeface="Calibri" pitchFamily="34" charset="0"/>
+                <a:ea typeface="Calibri" pitchFamily="34" charset="-122"/>
+                <a:cs typeface="Calibri" pitchFamily="34" charset="-120"/>
+              </a:rPr>
+              <a:t>Bio links to brilliantjobs.app.</a:t>
+            </a:r>
+            <a:endParaRPr lang="en-US" sz="750" dirty="0"/>
+          </a:p>
+        </p:txBody>
+      </p:sp>
+      <p:sp>
+        <p:nvSpPr>
+          <p:cNvPr id="13" name="Text 11"/>
+          <p:cNvSpPr/>
+          <p:nvPr/>
+        </p:nvSpPr>
+        <p:spPr>
+          <a:xfrm>
+            <a:off x="548640" y="3328416"/>
+            <a:ext cx="2377440" cy="182880"/>
+          </a:xfrm>
+          <a:prstGeom prst="rect">
+            <a:avLst/>
+          </a:prstGeom>
+          <a:noFill/>
+          <a:ln/>
+        </p:spPr>
+        <p:txBody>
+          <a:bodyPr wrap="square" lIns="0" tIns="0" rIns="0" bIns="0" rtlCol="0" anchor="ctr"/>
+          <a:lstStyle/>
+          <a:p>
+            <a:pPr indent="0" marL="0">
+              <a:buNone/>
+            </a:pPr>
+            <a:r>
+              <a:rPr lang="en-US" sz="900" b="1" dirty="0">
+                <a:solidFill>
+                  <a:srgbClr val="1A1F36"/>
+                </a:solidFill>
+                <a:latin typeface="Calibri" pitchFamily="34" charset="0"/>
+                <a:ea typeface="Calibri" pitchFamily="34" charset="-122"/>
+                <a:cs typeface="Calibri" pitchFamily="34" charset="-120"/>
+              </a:rPr>
+              <a:t>Reddit Account</a:t>
+            </a:r>
+            <a:endParaRPr lang="en-US" sz="900" dirty="0"/>
+          </a:p>
+        </p:txBody>
+      </p:sp>
+      <p:sp>
+        <p:nvSpPr>
+          <p:cNvPr id="14" name="Text 12"/>
+          <p:cNvSpPr/>
+          <p:nvPr/>
+        </p:nvSpPr>
+        <p:spPr>
+          <a:xfrm>
+            <a:off x="548640" y="3511296"/>
+            <a:ext cx="2377440" cy="320040"/>
+          </a:xfrm>
+          <a:prstGeom prst="rect">
+            <a:avLst/>
+          </a:prstGeom>
+          <a:noFill/>
+          <a:ln/>
+        </p:spPr>
+        <p:txBody>
+          <a:bodyPr wrap="square" lIns="0" tIns="0" rIns="0" bIns="0" rtlCol="0" anchor="ctr"/>
+          <a:lstStyle/>
+          <a:p>
+            <a:pPr indent="0" marL="0">
+              <a:buNone/>
+            </a:pPr>
+            <a:r>
+              <a:rPr lang="en-US" sz="750" dirty="0">
+                <a:solidFill>
+                  <a:srgbClr val="64748B"/>
+                </a:solidFill>
+                <a:latin typeface="Calibri" pitchFamily="34" charset="0"/>
+                <a:ea typeface="Calibri" pitchFamily="34" charset="-122"/>
+                <a:cs typeface="Calibri" pitchFamily="34" charset="-120"/>
+              </a:rPr>
+              <a:t>u/brilliantjobs_data or similar.</a:t>
+            </a:r>
+            <a:endParaRPr lang="en-US" sz="750" dirty="0"/>
+          </a:p>
+          <a:p>
+            <a:pPr indent="0" marL="0">
+              <a:buNone/>
+            </a:pPr>
+            <a:r>
+              <a:rPr lang="en-US" sz="750" dirty="0">
+                <a:solidFill>
+                  <a:srgbClr val="64748B"/>
+                </a:solidFill>
+                <a:latin typeface="Calibri" pitchFamily="34" charset="0"/>
+                <a:ea typeface="Calibri" pitchFamily="34" charset="-122"/>
+                <a:cs typeface="Calibri" pitchFamily="34" charset="-120"/>
+              </a:rPr>
+              <a:t>Build karma before posting.</a:t>
+            </a:r>
+            <a:endParaRPr lang="en-US" sz="750" dirty="0"/>
+          </a:p>
+        </p:txBody>
+      </p:sp>
+      <p:sp>
+        <p:nvSpPr>
+          <p:cNvPr id="15" name="Text 13"/>
+          <p:cNvSpPr/>
+          <p:nvPr/>
+        </p:nvSpPr>
+        <p:spPr>
+          <a:xfrm>
+            <a:off x="548640" y="3858768"/>
+            <a:ext cx="2377440" cy="182880"/>
+          </a:xfrm>
+          <a:prstGeom prst="rect">
+            <a:avLst/>
+          </a:prstGeom>
+          <a:noFill/>
+          <a:ln/>
+        </p:spPr>
+        <p:txBody>
+          <a:bodyPr wrap="square" lIns="0" tIns="0" rIns="0" bIns="0" rtlCol="0" anchor="ctr"/>
+          <a:lstStyle/>
+          <a:p>
+            <a:pPr indent="0" marL="0">
+              <a:buNone/>
+            </a:pPr>
+            <a:r>
+              <a:rPr lang="en-US" sz="900" b="1" dirty="0">
+                <a:solidFill>
+                  <a:srgbClr val="1A1F36"/>
+                </a:solidFill>
+                <a:latin typeface="Calibri" pitchFamily="34" charset="0"/>
+                <a:ea typeface="Calibri" pitchFamily="34" charset="-122"/>
+                <a:cs typeface="Calibri" pitchFamily="34" charset="-120"/>
+              </a:rPr>
+              <a:t>Bluesky Account</a:t>
+            </a:r>
+            <a:endParaRPr lang="en-US" sz="900" dirty="0"/>
+          </a:p>
+        </p:txBody>
+      </p:sp>
+      <p:sp>
+        <p:nvSpPr>
+          <p:cNvPr id="16" name="Text 14"/>
+          <p:cNvSpPr/>
+          <p:nvPr/>
+        </p:nvSpPr>
+        <p:spPr>
+          <a:xfrm>
+            <a:off x="548640" y="4041648"/>
+            <a:ext cx="2377440" cy="320040"/>
+          </a:xfrm>
+          <a:prstGeom prst="rect">
+            <a:avLst/>
+          </a:prstGeom>
+          <a:noFill/>
+          <a:ln/>
+        </p:spPr>
+        <p:txBody>
+          <a:bodyPr wrap="square" lIns="0" tIns="0" rIns="0" bIns="0" rtlCol="0" anchor="ctr"/>
+          <a:lstStyle/>
+          <a:p>
+            <a:pPr indent="0" marL="0">
+              <a:buNone/>
+            </a:pPr>
+            <a:r>
+              <a:rPr lang="en-US" sz="750" dirty="0">
+                <a:solidFill>
+                  <a:srgbClr val="64748B"/>
+                </a:solidFill>
+                <a:latin typeface="Calibri" pitchFamily="34" charset="0"/>
+                <a:ea typeface="Calibri" pitchFamily="34" charset="-122"/>
+                <a:cs typeface="Calibri" pitchFamily="34" charset="-120"/>
+              </a:rPr>
+              <a:t>@brilliantjobs.bsky.social</a:t>
+            </a:r>
+            <a:endParaRPr lang="en-US" sz="750" dirty="0"/>
+          </a:p>
+          <a:p>
+            <a:pPr indent="0" marL="0">
+              <a:buNone/>
+            </a:pPr>
+            <a:r>
+              <a:rPr lang="en-US" sz="750" dirty="0">
+                <a:solidFill>
+                  <a:srgbClr val="64748B"/>
+                </a:solidFill>
+                <a:latin typeface="Calibri" pitchFamily="34" charset="0"/>
+                <a:ea typeface="Calibri" pitchFamily="34" charset="-122"/>
+                <a:cs typeface="Calibri" pitchFamily="34" charset="-120"/>
+              </a:rPr>
+              <a:t>or custom domain handle.</a:t>
+            </a:r>
+            <a:endParaRPr lang="en-US" sz="750" dirty="0"/>
+          </a:p>
+        </p:txBody>
+      </p:sp>
+      <p:sp>
+        <p:nvSpPr>
+          <p:cNvPr id="17" name="Shape 15"/>
+          <p:cNvSpPr/>
+          <p:nvPr/>
+        </p:nvSpPr>
+        <p:spPr>
+          <a:xfrm>
+            <a:off x="3246120" y="1234440"/>
+            <a:ext cx="2743200" cy="3291840"/>
           </a:xfrm>
           <a:prstGeom prst="rect">
             <a:avLst/>
@@ -4620,34 +4943,34 @@
       </p:sp>
       <p:sp>
         <p:nvSpPr>
-          <p:cNvPr id="12" name="Shape 10"/>
-          <p:cNvSpPr/>
-          <p:nvPr/>
-        </p:nvSpPr>
-        <p:spPr>
-          <a:xfrm>
-            <a:off x="548640" y="2084832"/>
-            <a:ext cx="54864" cy="640080"/>
+          <p:cNvPr id="18" name="Shape 16"/>
+          <p:cNvSpPr/>
+          <p:nvPr/>
+        </p:nvSpPr>
+        <p:spPr>
+          <a:xfrm>
+            <a:off x="3246120" y="1234440"/>
+            <a:ext cx="2743200" cy="365760"/>
           </a:xfrm>
           <a:prstGeom prst="rect">
             <a:avLst/>
           </a:prstGeom>
           <a:solidFill>
-            <a:srgbClr val="2563EB"/>
+            <a:srgbClr val="0D9488"/>
           </a:solidFill>
           <a:ln/>
         </p:spPr>
       </p:sp>
       <p:sp>
         <p:nvSpPr>
-          <p:cNvPr id="13" name="Text 11"/>
-          <p:cNvSpPr/>
-          <p:nvPr/>
-        </p:nvSpPr>
-        <p:spPr>
-          <a:xfrm>
-            <a:off x="731520" y="2084832"/>
-            <a:ext cx="731520" cy="320040"/>
+          <p:cNvPr id="19" name="Text 17"/>
+          <p:cNvSpPr/>
+          <p:nvPr/>
+        </p:nvSpPr>
+        <p:spPr>
+          <a:xfrm>
+            <a:off x="3383280" y="1261872"/>
+            <a:ext cx="2468880" cy="320040"/>
           </a:xfrm>
           <a:prstGeom prst="rect">
             <a:avLst/>
@@ -4665,13 +4988,13 @@
             <a:r>
               <a:rPr lang="en-US" sz="900" b="1" dirty="0">
                 <a:solidFill>
-                  <a:srgbClr val="2563EB"/>
+                  <a:srgbClr val="FFFFFF"/>
                 </a:solidFill>
                 <a:latin typeface="Arial" pitchFamily="34" charset="0"/>
                 <a:ea typeface="Arial" pitchFamily="34" charset="-122"/>
                 <a:cs typeface="Arial" pitchFamily="34" charset="-120"/>
               </a:rPr>
-              <a:t>PHASE 2</a:t>
+              <a:t>API KEYS &amp; SERVICES</a:t>
             </a:r>
             <a:endParaRPr lang="en-US" sz="900" dirty="0"/>
           </a:p>
@@ -4679,30 +5002,69 @@
       </p:sp>
       <p:sp>
         <p:nvSpPr>
-          <p:cNvPr id="14" name="Text 12"/>
-          <p:cNvSpPr/>
-          <p:nvPr/>
-        </p:nvSpPr>
-        <p:spPr>
-          <a:xfrm>
-            <a:off x="731520" y="2377440"/>
-            <a:ext cx="731520" cy="274320"/>
-          </a:xfrm>
-          <a:prstGeom prst="rect">
-            <a:avLst/>
-          </a:prstGeom>
-          <a:noFill/>
-          <a:ln/>
-        </p:spPr>
-        <p:txBody>
-          <a:bodyPr wrap="square" lIns="0" tIns="0" rIns="0" bIns="0" rtlCol="0" anchor="ctr"/>
-          <a:lstStyle/>
-          <a:p>
-            <a:pPr indent="0" marL="0">
-              <a:buNone/>
-            </a:pPr>
-            <a:r>
-              <a:rPr lang="en-US" sz="800" dirty="0">
+          <p:cNvPr id="20" name="Text 18"/>
+          <p:cNvSpPr/>
+          <p:nvPr/>
+        </p:nvSpPr>
+        <p:spPr>
+          <a:xfrm>
+            <a:off x="3429000" y="1737360"/>
+            <a:ext cx="2377440" cy="182880"/>
+          </a:xfrm>
+          <a:prstGeom prst="rect">
+            <a:avLst/>
+          </a:prstGeom>
+          <a:noFill/>
+          <a:ln/>
+        </p:spPr>
+        <p:txBody>
+          <a:bodyPr wrap="square" lIns="0" tIns="0" rIns="0" bIns="0" rtlCol="0" anchor="ctr"/>
+          <a:lstStyle/>
+          <a:p>
+            <a:pPr indent="0" marL="0">
+              <a:buNone/>
+            </a:pPr>
+            <a:r>
+              <a:rPr lang="en-US" sz="900" b="1" dirty="0">
+                <a:solidFill>
+                  <a:srgbClr val="1A1F36"/>
+                </a:solidFill>
+                <a:latin typeface="Calibri" pitchFamily="34" charset="0"/>
+                <a:ea typeface="Calibri" pitchFamily="34" charset="-122"/>
+                <a:cs typeface="Calibri" pitchFamily="34" charset="-120"/>
+              </a:rPr>
+              <a:t>Late (getlate.dev)</a:t>
+            </a:r>
+            <a:endParaRPr lang="en-US" sz="900" dirty="0"/>
+          </a:p>
+        </p:txBody>
+      </p:sp>
+      <p:sp>
+        <p:nvSpPr>
+          <p:cNvPr id="21" name="Text 19"/>
+          <p:cNvSpPr/>
+          <p:nvPr/>
+        </p:nvSpPr>
+        <p:spPr>
+          <a:xfrm>
+            <a:off x="3429000" y="1920240"/>
+            <a:ext cx="2377440" cy="320040"/>
+          </a:xfrm>
+          <a:prstGeom prst="rect">
+            <a:avLst/>
+          </a:prstGeom>
+          <a:noFill/>
+          <a:ln/>
+        </p:spPr>
+        <p:txBody>
+          <a:bodyPr wrap="square" lIns="0" tIns="0" rIns="0" bIns="0" rtlCol="0" anchor="ctr"/>
+          <a:lstStyle/>
+          <a:p>
+            <a:pPr indent="0" marL="0">
+              <a:buNone/>
+            </a:pPr>
+            <a:r>
+              <a:rPr lang="en-US" sz="750" dirty="0">
                 <a:solidFill>
                   <a:srgbClr val="64748B"/>
                 </a:solidFill>
@@ -4710,184 +5072,111 @@
                 <a:ea typeface="Calibri" pitchFamily="34" charset="-122"/>
                 <a:cs typeface="Calibri" pitchFamily="34" charset="-120"/>
               </a:rPr>
-              <a:t>Month 1</a:t>
-            </a:r>
-            <a:endParaRPr lang="en-US" sz="800" dirty="0"/>
-          </a:p>
-        </p:txBody>
-      </p:sp>
-      <p:sp>
-        <p:nvSpPr>
-          <p:cNvPr id="15" name="Text 13"/>
-          <p:cNvSpPr/>
-          <p:nvPr/>
-        </p:nvSpPr>
-        <p:spPr>
-          <a:xfrm>
-            <a:off x="1554480" y="2084832"/>
-            <a:ext cx="731520" cy="640080"/>
-          </a:xfrm>
-          <a:prstGeom prst="rect">
-            <a:avLst/>
-          </a:prstGeom>
-          <a:noFill/>
-          <a:ln/>
-        </p:spPr>
-        <p:txBody>
-          <a:bodyPr wrap="square" lIns="0" tIns="0" rIns="0" bIns="0" rtlCol="0" anchor="ctr"/>
-          <a:lstStyle/>
-          <a:p>
-            <a:pPr indent="0" marL="0">
-              <a:buNone/>
-            </a:pPr>
-            <a:r>
-              <a:rPr lang="en-US" sz="1000" b="1" dirty="0">
+              <a:t>Unified social posting API.</a:t>
+            </a:r>
+            <a:endParaRPr lang="en-US" sz="750" dirty="0"/>
+          </a:p>
+          <a:p>
+            <a:pPr indent="0" marL="0">
+              <a:buNone/>
+            </a:pPr>
+            <a:r>
+              <a:rPr lang="en-US" sz="750" dirty="0">
+                <a:solidFill>
+                  <a:srgbClr val="64748B"/>
+                </a:solidFill>
+                <a:latin typeface="Calibri" pitchFamily="34" charset="0"/>
+                <a:ea typeface="Calibri" pitchFamily="34" charset="-122"/>
+                <a:cs typeface="Calibri" pitchFamily="34" charset="-120"/>
+              </a:rPr>
+              <a:t>Starter ~$10/mo. Connect all</a:t>
+            </a:r>
+            <a:endParaRPr lang="en-US" sz="750" dirty="0"/>
+          </a:p>
+          <a:p>
+            <a:pPr indent="0" marL="0">
+              <a:buNone/>
+            </a:pPr>
+            <a:r>
+              <a:rPr lang="en-US" sz="750" dirty="0">
+                <a:solidFill>
+                  <a:srgbClr val="64748B"/>
+                </a:solidFill>
+                <a:latin typeface="Calibri" pitchFamily="34" charset="0"/>
+                <a:ea typeface="Calibri" pitchFamily="34" charset="-122"/>
+                <a:cs typeface="Calibri" pitchFamily="34" charset="-120"/>
+              </a:rPr>
+              <a:t>platform accounts via OAuth.</a:t>
+            </a:r>
+            <a:endParaRPr lang="en-US" sz="750" dirty="0"/>
+          </a:p>
+        </p:txBody>
+      </p:sp>
+      <p:sp>
+        <p:nvSpPr>
+          <p:cNvPr id="22" name="Text 20"/>
+          <p:cNvSpPr/>
+          <p:nvPr/>
+        </p:nvSpPr>
+        <p:spPr>
+          <a:xfrm>
+            <a:off x="3429000" y="2267712"/>
+            <a:ext cx="2377440" cy="182880"/>
+          </a:xfrm>
+          <a:prstGeom prst="rect">
+            <a:avLst/>
+          </a:prstGeom>
+          <a:noFill/>
+          <a:ln/>
+        </p:spPr>
+        <p:txBody>
+          <a:bodyPr wrap="square" lIns="0" tIns="0" rIns="0" bIns="0" rtlCol="0" anchor="ctr"/>
+          <a:lstStyle/>
+          <a:p>
+            <a:pPr indent="0" marL="0">
+              <a:buNone/>
+            </a:pPr>
+            <a:r>
+              <a:rPr lang="en-US" sz="900" b="1" dirty="0">
                 <a:solidFill>
                   <a:srgbClr val="1A1F36"/>
                 </a:solidFill>
-                <a:latin typeface="Georgia" pitchFamily="34" charset="0"/>
-                <a:ea typeface="Georgia" pitchFamily="34" charset="-122"/>
-                <a:cs typeface="Georgia" pitchFamily="34" charset="-120"/>
-              </a:rPr>
-              <a:t>5-7 days</a:t>
-            </a:r>
-            <a:endParaRPr lang="en-US" sz="1000" dirty="0"/>
-          </a:p>
-        </p:txBody>
-      </p:sp>
-      <p:sp>
-        <p:nvSpPr>
-          <p:cNvPr id="16" name="Text 14"/>
-          <p:cNvSpPr/>
-          <p:nvPr/>
-        </p:nvSpPr>
-        <p:spPr>
-          <a:xfrm>
-            <a:off x="2377440" y="2130552"/>
-            <a:ext cx="3657600" cy="548640"/>
-          </a:xfrm>
-          <a:prstGeom prst="rect">
-            <a:avLst/>
-          </a:prstGeom>
-          <a:noFill/>
-          <a:ln/>
-        </p:spPr>
-        <p:txBody>
-          <a:bodyPr wrap="square" lIns="0" tIns="0" rIns="0" bIns="0" rtlCol="0" anchor="ctr"/>
-          <a:lstStyle/>
-          <a:p>
-            <a:pPr indent="0" marL="0">
-              <a:buNone/>
-            </a:pPr>
-            <a:r>
-              <a:rPr lang="en-US" sz="800" dirty="0">
-                <a:solidFill>
-                  <a:srgbClr val="334155"/>
-                </a:solidFill>
-                <a:latin typeface="Calibri" pitchFamily="34" charset="0"/>
-                <a:ea typeface="Calibri" pitchFamily="34" charset="-122"/>
-                <a:cs typeface="Calibri" pitchFamily="34" charset="-120"/>
-              </a:rPr>
-              <a:t>Editorial engine core</a:t>
-            </a:r>
-            <a:endParaRPr lang="en-US" sz="800" dirty="0"/>
-          </a:p>
-          <a:p>
-            <a:pPr indent="0" marL="0">
-              <a:buNone/>
-            </a:pPr>
-            <a:r>
-              <a:rPr lang="en-US" sz="800" dirty="0">
-                <a:solidFill>
-                  <a:srgbClr val="334155"/>
-                </a:solidFill>
-                <a:latin typeface="Calibri" pitchFamily="34" charset="0"/>
-                <a:ea typeface="Calibri" pitchFamily="34" charset="-122"/>
-                <a:cs typeface="Calibri" pitchFamily="34" charset="-120"/>
-              </a:rPr>
-              <a:t>Anomaly detection Edge Function</a:t>
-            </a:r>
-            <a:endParaRPr lang="en-US" sz="800" dirty="0"/>
-          </a:p>
-          <a:p>
-            <a:pPr indent="0" marL="0">
-              <a:buNone/>
-            </a:pPr>
-            <a:r>
-              <a:rPr lang="en-US" sz="800" dirty="0">
-                <a:solidFill>
-                  <a:srgbClr val="334155"/>
-                </a:solidFill>
-                <a:latin typeface="Calibri" pitchFamily="34" charset="0"/>
-                <a:ea typeface="Calibri" pitchFamily="34" charset="-122"/>
-                <a:cs typeface="Calibri" pitchFamily="34" charset="-120"/>
-              </a:rPr>
-              <a:t>Claude story generation (all variants)</a:t>
-            </a:r>
-            <a:endParaRPr lang="en-US" sz="800" dirty="0"/>
-          </a:p>
-          <a:p>
-            <a:pPr indent="0" marL="0">
-              <a:buNone/>
-            </a:pPr>
-            <a:r>
-              <a:rPr lang="en-US" sz="800" dirty="0">
-                <a:solidFill>
-                  <a:srgbClr val="334155"/>
-                </a:solidFill>
-                <a:latin typeface="Calibri" pitchFamily="34" charset="0"/>
-                <a:ea typeface="Calibri" pitchFamily="34" charset="-122"/>
-                <a:cs typeface="Calibri" pitchFamily="34" charset="-120"/>
-              </a:rPr>
-              <a:t>Admin Content tab + approval queue</a:t>
-            </a:r>
-            <a:endParaRPr lang="en-US" sz="800" dirty="0"/>
-          </a:p>
-          <a:p>
-            <a:pPr indent="0" marL="0">
-              <a:buNone/>
-            </a:pPr>
-            <a:r>
-              <a:rPr lang="en-US" sz="800" dirty="0">
-                <a:solidFill>
-                  <a:srgbClr val="334155"/>
-                </a:solidFill>
-                <a:latin typeface="Calibri" pitchFamily="34" charset="0"/>
-                <a:ea typeface="Calibri" pitchFamily="34" charset="-122"/>
-                <a:cs typeface="Calibri" pitchFamily="34" charset="-120"/>
-              </a:rPr>
-              <a:t>Brilliant Jobs LinkedIn company page</a:t>
-            </a:r>
-            <a:endParaRPr lang="en-US" sz="800" dirty="0"/>
-          </a:p>
-        </p:txBody>
-      </p:sp>
-      <p:sp>
-        <p:nvSpPr>
-          <p:cNvPr id="17" name="Text 15"/>
-          <p:cNvSpPr/>
-          <p:nvPr/>
-        </p:nvSpPr>
-        <p:spPr>
-          <a:xfrm>
-            <a:off x="6400800" y="2130552"/>
-            <a:ext cx="2011680" cy="548640"/>
-          </a:xfrm>
-          <a:prstGeom prst="rect">
-            <a:avLst/>
-          </a:prstGeom>
-          <a:noFill/>
-          <a:ln/>
-        </p:spPr>
-        <p:txBody>
-          <a:bodyPr wrap="square" lIns="0" tIns="0" rIns="0" bIns="0" rtlCol="0" anchor="ctr"/>
-          <a:lstStyle/>
-          <a:p>
-            <a:pPr indent="0" marL="0">
-              <a:buNone/>
-            </a:pPr>
-            <a:r>
-              <a:rPr lang="en-US" sz="800" dirty="0">
+                <a:latin typeface="Calibri" pitchFamily="34" charset="0"/>
+                <a:ea typeface="Calibri" pitchFamily="34" charset="-122"/>
+                <a:cs typeface="Calibri" pitchFamily="34" charset="-120"/>
+              </a:rPr>
+              <a:t>ElevenLabs / Play.ht</a:t>
+            </a:r>
+            <a:endParaRPr lang="en-US" sz="900" dirty="0"/>
+          </a:p>
+        </p:txBody>
+      </p:sp>
+      <p:sp>
+        <p:nvSpPr>
+          <p:cNvPr id="23" name="Text 21"/>
+          <p:cNvSpPr/>
+          <p:nvPr/>
+        </p:nvSpPr>
+        <p:spPr>
+          <a:xfrm>
+            <a:off x="3429000" y="2450592"/>
+            <a:ext cx="2377440" cy="320040"/>
+          </a:xfrm>
+          <a:prstGeom prst="rect">
+            <a:avLst/>
+          </a:prstGeom>
+          <a:noFill/>
+          <a:ln/>
+        </p:spPr>
+        <p:txBody>
+          <a:bodyPr wrap="square" lIns="0" tIns="0" rIns="0" bIns="0" rtlCol="0" anchor="ctr"/>
+          <a:lstStyle/>
+          <a:p>
+            <a:pPr indent="0" marL="0">
+              <a:buNone/>
+            </a:pPr>
+            <a:r>
+              <a:rPr lang="en-US" sz="750" dirty="0">
                 <a:solidFill>
                   <a:srgbClr val="64748B"/>
                 </a:solidFill>
@@ -4895,16 +5184,16 @@
                 <a:ea typeface="Calibri" pitchFamily="34" charset="-122"/>
                 <a:cs typeface="Calibri" pitchFamily="34" charset="-120"/>
               </a:rPr>
-              <a:t>Pod 1 rules</a:t>
-            </a:r>
-            <a:endParaRPr lang="en-US" sz="800" dirty="0"/>
-          </a:p>
-          <a:p>
-            <a:pPr indent="0" marL="0">
-              <a:buNone/>
-            </a:pPr>
-            <a:r>
-              <a:rPr lang="en-US" sz="800" dirty="0">
+              <a:t>AI voiceover generation.</a:t>
+            </a:r>
+            <a:endParaRPr lang="en-US" sz="750" dirty="0"/>
+          </a:p>
+          <a:p>
+            <a:pPr indent="0" marL="0">
+              <a:buNone/>
+            </a:pPr>
+            <a:r>
+              <a:rPr lang="en-US" sz="750" dirty="0">
                 <a:solidFill>
                   <a:srgbClr val="64748B"/>
                 </a:solidFill>
@@ -4912,22 +5201,375 @@
                 <a:ea typeface="Calibri" pitchFamily="34" charset="-122"/>
                 <a:cs typeface="Calibri" pitchFamily="34" charset="-120"/>
               </a:rPr>
-              <a:t>Pod 2 engine</a:t>
-            </a:r>
-            <a:endParaRPr lang="en-US" sz="800" dirty="0"/>
-          </a:p>
-        </p:txBody>
-      </p:sp>
-      <p:sp>
-        <p:nvSpPr>
-          <p:cNvPr id="18" name="Shape 16"/>
-          <p:cNvSpPr/>
-          <p:nvPr/>
-        </p:nvSpPr>
-        <p:spPr>
-          <a:xfrm>
-            <a:off x="548640" y="2798064"/>
-            <a:ext cx="8046720" cy="640080"/>
+              <a:t>Select BJ brand voice.</a:t>
+            </a:r>
+            <a:endParaRPr lang="en-US" sz="750" dirty="0"/>
+          </a:p>
+          <a:p>
+            <a:pPr indent="0" marL="0">
+              <a:buNone/>
+            </a:pPr>
+            <a:r>
+              <a:rPr lang="en-US" sz="750" dirty="0">
+                <a:solidFill>
+                  <a:srgbClr val="64748B"/>
+                </a:solidFill>
+                <a:latin typeface="Calibri" pitchFamily="34" charset="0"/>
+                <a:ea typeface="Calibri" pitchFamily="34" charset="-122"/>
+                <a:cs typeface="Calibri" pitchFamily="34" charset="-120"/>
+              </a:rPr>
+              <a:t>API key for Edge Function.</a:t>
+            </a:r>
+            <a:endParaRPr lang="en-US" sz="750" dirty="0"/>
+          </a:p>
+        </p:txBody>
+      </p:sp>
+      <p:sp>
+        <p:nvSpPr>
+          <p:cNvPr id="24" name="Text 22"/>
+          <p:cNvSpPr/>
+          <p:nvPr/>
+        </p:nvSpPr>
+        <p:spPr>
+          <a:xfrm>
+            <a:off x="3429000" y="2798064"/>
+            <a:ext cx="2377440" cy="182880"/>
+          </a:xfrm>
+          <a:prstGeom prst="rect">
+            <a:avLst/>
+          </a:prstGeom>
+          <a:noFill/>
+          <a:ln/>
+        </p:spPr>
+        <p:txBody>
+          <a:bodyPr wrap="square" lIns="0" tIns="0" rIns="0" bIns="0" rtlCol="0" anchor="ctr"/>
+          <a:lstStyle/>
+          <a:p>
+            <a:pPr indent="0" marL="0">
+              <a:buNone/>
+            </a:pPr>
+            <a:r>
+              <a:rPr lang="en-US" sz="900" b="1" dirty="0">
+                <a:solidFill>
+                  <a:srgbClr val="1A1F36"/>
+                </a:solidFill>
+                <a:latin typeface="Calibri" pitchFamily="34" charset="0"/>
+                <a:ea typeface="Calibri" pitchFamily="34" charset="-122"/>
+                <a:cs typeface="Calibri" pitchFamily="34" charset="-120"/>
+              </a:rPr>
+              <a:t>YouTube Data API v3</a:t>
+            </a:r>
+            <a:endParaRPr lang="en-US" sz="900" dirty="0"/>
+          </a:p>
+        </p:txBody>
+      </p:sp>
+      <p:sp>
+        <p:nvSpPr>
+          <p:cNvPr id="25" name="Text 23"/>
+          <p:cNvSpPr/>
+          <p:nvPr/>
+        </p:nvSpPr>
+        <p:spPr>
+          <a:xfrm>
+            <a:off x="3429000" y="2980944"/>
+            <a:ext cx="2377440" cy="320040"/>
+          </a:xfrm>
+          <a:prstGeom prst="rect">
+            <a:avLst/>
+          </a:prstGeom>
+          <a:noFill/>
+          <a:ln/>
+        </p:spPr>
+        <p:txBody>
+          <a:bodyPr wrap="square" lIns="0" tIns="0" rIns="0" bIns="0" rtlCol="0" anchor="ctr"/>
+          <a:lstStyle/>
+          <a:p>
+            <a:pPr indent="0" marL="0">
+              <a:buNone/>
+            </a:pPr>
+            <a:r>
+              <a:rPr lang="en-US" sz="750" dirty="0">
+                <a:solidFill>
+                  <a:srgbClr val="64748B"/>
+                </a:solidFill>
+                <a:latin typeface="Calibri" pitchFamily="34" charset="0"/>
+                <a:ea typeface="Calibri" pitchFamily="34" charset="-122"/>
+                <a:cs typeface="Calibri" pitchFamily="34" charset="-120"/>
+              </a:rPr>
+              <a:t>Google Cloud Console project.</a:t>
+            </a:r>
+            <a:endParaRPr lang="en-US" sz="750" dirty="0"/>
+          </a:p>
+          <a:p>
+            <a:pPr indent="0" marL="0">
+              <a:buNone/>
+            </a:pPr>
+            <a:r>
+              <a:rPr lang="en-US" sz="750" dirty="0">
+                <a:solidFill>
+                  <a:srgbClr val="64748B"/>
+                </a:solidFill>
+                <a:latin typeface="Calibri" pitchFamily="34" charset="0"/>
+                <a:ea typeface="Calibri" pitchFamily="34" charset="-122"/>
+                <a:cs typeface="Calibri" pitchFamily="34" charset="-120"/>
+              </a:rPr>
+              <a:t>Enable YouTube Data API.</a:t>
+            </a:r>
+            <a:endParaRPr lang="en-US" sz="750" dirty="0"/>
+          </a:p>
+          <a:p>
+            <a:pPr indent="0" marL="0">
+              <a:buNone/>
+            </a:pPr>
+            <a:r>
+              <a:rPr lang="en-US" sz="750" dirty="0">
+                <a:solidFill>
+                  <a:srgbClr val="64748B"/>
+                </a:solidFill>
+                <a:latin typeface="Calibri" pitchFamily="34" charset="0"/>
+                <a:ea typeface="Calibri" pitchFamily="34" charset="-122"/>
+                <a:cs typeface="Calibri" pitchFamily="34" charset="-120"/>
+              </a:rPr>
+              <a:t>OAuth for upload permissions.</a:t>
+            </a:r>
+            <a:endParaRPr lang="en-US" sz="750" dirty="0"/>
+          </a:p>
+        </p:txBody>
+      </p:sp>
+      <p:sp>
+        <p:nvSpPr>
+          <p:cNvPr id="26" name="Text 24"/>
+          <p:cNvSpPr/>
+          <p:nvPr/>
+        </p:nvSpPr>
+        <p:spPr>
+          <a:xfrm>
+            <a:off x="3429000" y="3328416"/>
+            <a:ext cx="2377440" cy="182880"/>
+          </a:xfrm>
+          <a:prstGeom prst="rect">
+            <a:avLst/>
+          </a:prstGeom>
+          <a:noFill/>
+          <a:ln/>
+        </p:spPr>
+        <p:txBody>
+          <a:bodyPr wrap="square" lIns="0" tIns="0" rIns="0" bIns="0" rtlCol="0" anchor="ctr"/>
+          <a:lstStyle/>
+          <a:p>
+            <a:pPr indent="0" marL="0">
+              <a:buNone/>
+            </a:pPr>
+            <a:r>
+              <a:rPr lang="en-US" sz="900" b="1" dirty="0">
+                <a:solidFill>
+                  <a:srgbClr val="1A1F36"/>
+                </a:solidFill>
+                <a:latin typeface="Calibri" pitchFamily="34" charset="0"/>
+                <a:ea typeface="Calibri" pitchFamily="34" charset="-122"/>
+                <a:cs typeface="Calibri" pitchFamily="34" charset="-120"/>
+              </a:rPr>
+              <a:t>BLS / FRED / Census / BEA</a:t>
+            </a:r>
+            <a:endParaRPr lang="en-US" sz="900" dirty="0"/>
+          </a:p>
+        </p:txBody>
+      </p:sp>
+      <p:sp>
+        <p:nvSpPr>
+          <p:cNvPr id="27" name="Text 25"/>
+          <p:cNvSpPr/>
+          <p:nvPr/>
+        </p:nvSpPr>
+        <p:spPr>
+          <a:xfrm>
+            <a:off x="3429000" y="3511296"/>
+            <a:ext cx="2377440" cy="320040"/>
+          </a:xfrm>
+          <a:prstGeom prst="rect">
+            <a:avLst/>
+          </a:prstGeom>
+          <a:noFill/>
+          <a:ln/>
+        </p:spPr>
+        <p:txBody>
+          <a:bodyPr wrap="square" lIns="0" tIns="0" rIns="0" bIns="0" rtlCol="0" anchor="ctr"/>
+          <a:lstStyle/>
+          <a:p>
+            <a:pPr indent="0" marL="0">
+              <a:buNone/>
+            </a:pPr>
+            <a:r>
+              <a:rPr lang="en-US" sz="750" dirty="0">
+                <a:solidFill>
+                  <a:srgbClr val="64748B"/>
+                </a:solidFill>
+                <a:latin typeface="Calibri" pitchFamily="34" charset="0"/>
+                <a:ea typeface="Calibri" pitchFamily="34" charset="-122"/>
+                <a:cs typeface="Calibri" pitchFamily="34" charset="-120"/>
+              </a:rPr>
+              <a:t>Free API keys. Registration</a:t>
+            </a:r>
+            <a:endParaRPr lang="en-US" sz="750" dirty="0"/>
+          </a:p>
+          <a:p>
+            <a:pPr indent="0" marL="0">
+              <a:buNone/>
+            </a:pPr>
+            <a:r>
+              <a:rPr lang="en-US" sz="750" dirty="0">
+                <a:solidFill>
+                  <a:srgbClr val="64748B"/>
+                </a:solidFill>
+                <a:latin typeface="Calibri" pitchFamily="34" charset="0"/>
+                <a:ea typeface="Calibri" pitchFamily="34" charset="-122"/>
+                <a:cs typeface="Calibri" pitchFamily="34" charset="-120"/>
+              </a:rPr>
+              <a:t>required at each agency.</a:t>
+            </a:r>
+            <a:endParaRPr lang="en-US" sz="750" dirty="0"/>
+          </a:p>
+          <a:p>
+            <a:pPr indent="0" marL="0">
+              <a:buNone/>
+            </a:pPr>
+            <a:r>
+              <a:rPr lang="en-US" sz="750" dirty="0">
+                <a:solidFill>
+                  <a:srgbClr val="64748B"/>
+                </a:solidFill>
+                <a:latin typeface="Calibri" pitchFamily="34" charset="0"/>
+                <a:ea typeface="Calibri" pitchFamily="34" charset="-122"/>
+                <a:cs typeface="Calibri" pitchFamily="34" charset="-120"/>
+              </a:rPr>
+              <a:t>bls.gov, fred.stlouisfed.org, etc.</a:t>
+            </a:r>
+            <a:endParaRPr lang="en-US" sz="750" dirty="0"/>
+          </a:p>
+        </p:txBody>
+      </p:sp>
+      <p:sp>
+        <p:nvSpPr>
+          <p:cNvPr id="28" name="Text 26"/>
+          <p:cNvSpPr/>
+          <p:nvPr/>
+        </p:nvSpPr>
+        <p:spPr>
+          <a:xfrm>
+            <a:off x="3429000" y="3858768"/>
+            <a:ext cx="2377440" cy="182880"/>
+          </a:xfrm>
+          <a:prstGeom prst="rect">
+            <a:avLst/>
+          </a:prstGeom>
+          <a:noFill/>
+          <a:ln/>
+        </p:spPr>
+        <p:txBody>
+          <a:bodyPr wrap="square" lIns="0" tIns="0" rIns="0" bIns="0" rtlCol="0" anchor="ctr"/>
+          <a:lstStyle/>
+          <a:p>
+            <a:pPr indent="0" marL="0">
+              <a:buNone/>
+            </a:pPr>
+            <a:r>
+              <a:rPr lang="en-US" sz="900" b="1" dirty="0">
+                <a:solidFill>
+                  <a:srgbClr val="1A1F36"/>
+                </a:solidFill>
+                <a:latin typeface="Calibri" pitchFamily="34" charset="0"/>
+                <a:ea typeface="Calibri" pitchFamily="34" charset="-122"/>
+                <a:cs typeface="Calibri" pitchFamily="34" charset="-120"/>
+              </a:rPr>
+              <a:t>Resend (already integrated)</a:t>
+            </a:r>
+            <a:endParaRPr lang="en-US" sz="900" dirty="0"/>
+          </a:p>
+        </p:txBody>
+      </p:sp>
+      <p:sp>
+        <p:nvSpPr>
+          <p:cNvPr id="29" name="Text 27"/>
+          <p:cNvSpPr/>
+          <p:nvPr/>
+        </p:nvSpPr>
+        <p:spPr>
+          <a:xfrm>
+            <a:off x="3429000" y="4041648"/>
+            <a:ext cx="2377440" cy="320040"/>
+          </a:xfrm>
+          <a:prstGeom prst="rect">
+            <a:avLst/>
+          </a:prstGeom>
+          <a:noFill/>
+          <a:ln/>
+        </p:spPr>
+        <p:txBody>
+          <a:bodyPr wrap="square" lIns="0" tIns="0" rIns="0" bIns="0" rtlCol="0" anchor="ctr"/>
+          <a:lstStyle/>
+          <a:p>
+            <a:pPr indent="0" marL="0">
+              <a:buNone/>
+            </a:pPr>
+            <a:r>
+              <a:rPr lang="en-US" sz="750" dirty="0">
+                <a:solidFill>
+                  <a:srgbClr val="64748B"/>
+                </a:solidFill>
+                <a:latin typeface="Calibri" pitchFamily="34" charset="0"/>
+                <a:ea typeface="Calibri" pitchFamily="34" charset="-122"/>
+                <a:cs typeface="Calibri" pitchFamily="34" charset="-120"/>
+              </a:rPr>
+              <a:t>Newsletter sending.</a:t>
+            </a:r>
+            <a:endParaRPr lang="en-US" sz="750" dirty="0"/>
+          </a:p>
+          <a:p>
+            <a:pPr indent="0" marL="0">
+              <a:buNone/>
+            </a:pPr>
+            <a:r>
+              <a:rPr lang="en-US" sz="750" dirty="0">
+                <a:solidFill>
+                  <a:srgbClr val="64748B"/>
+                </a:solidFill>
+                <a:latin typeface="Calibri" pitchFamily="34" charset="0"/>
+                <a:ea typeface="Calibri" pitchFamily="34" charset="-122"/>
+                <a:cs typeface="Calibri" pitchFamily="34" charset="-120"/>
+              </a:rPr>
+              <a:t>Existing integration — add</a:t>
+            </a:r>
+            <a:endParaRPr lang="en-US" sz="750" dirty="0"/>
+          </a:p>
+          <a:p>
+            <a:pPr indent="0" marL="0">
+              <a:buNone/>
+            </a:pPr>
+            <a:r>
+              <a:rPr lang="en-US" sz="750" dirty="0">
+                <a:solidFill>
+                  <a:srgbClr val="64748B"/>
+                </a:solidFill>
+                <a:latin typeface="Calibri" pitchFamily="34" charset="0"/>
+                <a:ea typeface="Calibri" pitchFamily="34" charset="-122"/>
+                <a:cs typeface="Calibri" pitchFamily="34" charset="-120"/>
+              </a:rPr>
+              <a:t>weekly digest template.</a:t>
+            </a:r>
+            <a:endParaRPr lang="en-US" sz="750" dirty="0"/>
+          </a:p>
+        </p:txBody>
+      </p:sp>
+      <p:sp>
+        <p:nvSpPr>
+          <p:cNvPr id="30" name="Shape 28"/>
+          <p:cNvSpPr/>
+          <p:nvPr/>
+        </p:nvSpPr>
+        <p:spPr>
+          <a:xfrm>
+            <a:off x="6126480" y="1234440"/>
+            <a:ext cx="2743200" cy="3291840"/>
           </a:xfrm>
           <a:prstGeom prst="rect">
             <a:avLst/>
@@ -4947,34 +5589,34 @@
       </p:sp>
       <p:sp>
         <p:nvSpPr>
-          <p:cNvPr id="19" name="Shape 17"/>
-          <p:cNvSpPr/>
-          <p:nvPr/>
-        </p:nvSpPr>
-        <p:spPr>
-          <a:xfrm>
-            <a:off x="548640" y="2798064"/>
-            <a:ext cx="54864" cy="640080"/>
+          <p:cNvPr id="31" name="Shape 29"/>
+          <p:cNvSpPr/>
+          <p:nvPr/>
+        </p:nvSpPr>
+        <p:spPr>
+          <a:xfrm>
+            <a:off x="6126480" y="1234440"/>
+            <a:ext cx="2743200" cy="365760"/>
           </a:xfrm>
           <a:prstGeom prst="rect">
             <a:avLst/>
           </a:prstGeom>
           <a:solidFill>
-            <a:srgbClr val="0D9488"/>
+            <a:srgbClr val="8B5CF6"/>
           </a:solidFill>
           <a:ln/>
         </p:spPr>
       </p:sp>
       <p:sp>
         <p:nvSpPr>
-          <p:cNvPr id="20" name="Text 18"/>
-          <p:cNvSpPr/>
-          <p:nvPr/>
-        </p:nvSpPr>
-        <p:spPr>
-          <a:xfrm>
-            <a:off x="731520" y="2798064"/>
-            <a:ext cx="731520" cy="320040"/>
+          <p:cNvPr id="32" name="Text 30"/>
+          <p:cNvSpPr/>
+          <p:nvPr/>
+        </p:nvSpPr>
+        <p:spPr>
+          <a:xfrm>
+            <a:off x="6263640" y="1261872"/>
+            <a:ext cx="2468880" cy="320040"/>
           </a:xfrm>
           <a:prstGeom prst="rect">
             <a:avLst/>
@@ -4992,13 +5634,13 @@
             <a:r>
               <a:rPr lang="en-US" sz="900" b="1" dirty="0">
                 <a:solidFill>
-                  <a:srgbClr val="0D9488"/>
+                  <a:srgbClr val="FFFFFF"/>
                 </a:solidFill>
                 <a:latin typeface="Arial" pitchFamily="34" charset="0"/>
                 <a:ea typeface="Arial" pitchFamily="34" charset="-122"/>
                 <a:cs typeface="Arial" pitchFamily="34" charset="-120"/>
               </a:rPr>
-              <a:t>PHASE 3</a:t>
+              <a:t>INTERNAL INFRASTRUCTURE</a:t>
             </a:r>
             <a:endParaRPr lang="en-US" sz="900" dirty="0"/>
           </a:p>
@@ -5006,30 +5648,69 @@
       </p:sp>
       <p:sp>
         <p:nvSpPr>
-          <p:cNvPr id="21" name="Text 19"/>
-          <p:cNvSpPr/>
-          <p:nvPr/>
-        </p:nvSpPr>
-        <p:spPr>
-          <a:xfrm>
-            <a:off x="731520" y="3090672"/>
-            <a:ext cx="731520" cy="274320"/>
-          </a:xfrm>
-          <a:prstGeom prst="rect">
-            <a:avLst/>
-          </a:prstGeom>
-          <a:noFill/>
-          <a:ln/>
-        </p:spPr>
-        <p:txBody>
-          <a:bodyPr wrap="square" lIns="0" tIns="0" rIns="0" bIns="0" rtlCol="0" anchor="ctr"/>
-          <a:lstStyle/>
-          <a:p>
-            <a:pPr indent="0" marL="0">
-              <a:buNone/>
-            </a:pPr>
-            <a:r>
-              <a:rPr lang="en-US" sz="800" dirty="0">
+          <p:cNvPr id="33" name="Text 31"/>
+          <p:cNvSpPr/>
+          <p:nvPr/>
+        </p:nvSpPr>
+        <p:spPr>
+          <a:xfrm>
+            <a:off x="6309360" y="1737360"/>
+            <a:ext cx="2377440" cy="182880"/>
+          </a:xfrm>
+          <a:prstGeom prst="rect">
+            <a:avLst/>
+          </a:prstGeom>
+          <a:noFill/>
+          <a:ln/>
+        </p:spPr>
+        <p:txBody>
+          <a:bodyPr wrap="square" lIns="0" tIns="0" rIns="0" bIns="0" rtlCol="0" anchor="ctr"/>
+          <a:lstStyle/>
+          <a:p>
+            <a:pPr indent="0" marL="0">
+              <a:buNone/>
+            </a:pPr>
+            <a:r>
+              <a:rPr lang="en-US" sz="900" b="1" dirty="0">
+                <a:solidFill>
+                  <a:srgbClr val="1A1F36"/>
+                </a:solidFill>
+                <a:latin typeface="Calibri" pitchFamily="34" charset="0"/>
+                <a:ea typeface="Calibri" pitchFamily="34" charset="-122"/>
+                <a:cs typeface="Calibri" pitchFamily="34" charset="-120"/>
+              </a:rPr>
+              <a:t>content_stories table</a:t>
+            </a:r>
+            <a:endParaRPr lang="en-US" sz="900" dirty="0"/>
+          </a:p>
+        </p:txBody>
+      </p:sp>
+      <p:sp>
+        <p:nvSpPr>
+          <p:cNvPr id="34" name="Text 32"/>
+          <p:cNvSpPr/>
+          <p:nvPr/>
+        </p:nvSpPr>
+        <p:spPr>
+          <a:xfrm>
+            <a:off x="6309360" y="1920240"/>
+            <a:ext cx="2377440" cy="320040"/>
+          </a:xfrm>
+          <a:prstGeom prst="rect">
+            <a:avLst/>
+          </a:prstGeom>
+          <a:noFill/>
+          <a:ln/>
+        </p:spPr>
+        <p:txBody>
+          <a:bodyPr wrap="square" lIns="0" tIns="0" rIns="0" bIns="0" rtlCol="0" anchor="ctr"/>
+          <a:lstStyle/>
+          <a:p>
+            <a:pPr indent="0" marL="0">
+              <a:buNone/>
+            </a:pPr>
+            <a:r>
+              <a:rPr lang="en-US" sz="750" dirty="0">
                 <a:solidFill>
                   <a:srgbClr val="64748B"/>
                 </a:solidFill>
@@ -5037,184 +5718,111 @@
                 <a:ea typeface="Calibri" pitchFamily="34" charset="-122"/>
                 <a:cs typeface="Calibri" pitchFamily="34" charset="-120"/>
               </a:rPr>
-              <a:t>Month 1-2</a:t>
-            </a:r>
-            <a:endParaRPr lang="en-US" sz="800" dirty="0"/>
-          </a:p>
-        </p:txBody>
-      </p:sp>
-      <p:sp>
-        <p:nvSpPr>
-          <p:cNvPr id="22" name="Text 20"/>
-          <p:cNvSpPr/>
-          <p:nvPr/>
-        </p:nvSpPr>
-        <p:spPr>
-          <a:xfrm>
-            <a:off x="1554480" y="2798064"/>
-            <a:ext cx="731520" cy="640080"/>
-          </a:xfrm>
-          <a:prstGeom prst="rect">
-            <a:avLst/>
-          </a:prstGeom>
-          <a:noFill/>
-          <a:ln/>
-        </p:spPr>
-        <p:txBody>
-          <a:bodyPr wrap="square" lIns="0" tIns="0" rIns="0" bIns="0" rtlCol="0" anchor="ctr"/>
-          <a:lstStyle/>
-          <a:p>
-            <a:pPr indent="0" marL="0">
-              <a:buNone/>
-            </a:pPr>
-            <a:r>
-              <a:rPr lang="en-US" sz="1000" b="1" dirty="0">
+              <a:t>Story queue, scoring, status,</a:t>
+            </a:r>
+            <a:endParaRPr lang="en-US" sz="750" dirty="0"/>
+          </a:p>
+          <a:p>
+            <a:pPr indent="0" marL="0">
+              <a:buNone/>
+            </a:pPr>
+            <a:r>
+              <a:rPr lang="en-US" sz="750" dirty="0">
+                <a:solidFill>
+                  <a:srgbClr val="64748B"/>
+                </a:solidFill>
+                <a:latin typeface="Calibri" pitchFamily="34" charset="0"/>
+                <a:ea typeface="Calibri" pitchFamily="34" charset="-122"/>
+                <a:cs typeface="Calibri" pitchFamily="34" charset="-120"/>
+              </a:rPr>
+              <a:t>social_metrics JSONB, platform</a:t>
+            </a:r>
+            <a:endParaRPr lang="en-US" sz="750" dirty="0"/>
+          </a:p>
+          <a:p>
+            <a:pPr indent="0" marL="0">
+              <a:buNone/>
+            </a:pPr>
+            <a:r>
+              <a:rPr lang="en-US" sz="750" dirty="0">
+                <a:solidFill>
+                  <a:srgbClr val="64748B"/>
+                </a:solidFill>
+                <a:latin typeface="Calibri" pitchFamily="34" charset="0"/>
+                <a:ea typeface="Calibri" pitchFamily="34" charset="-122"/>
+                <a:cs typeface="Calibri" pitchFamily="34" charset="-120"/>
+              </a:rPr>
+              <a:t>variants, publication timestamps.</a:t>
+            </a:r>
+            <a:endParaRPr lang="en-US" sz="750" dirty="0"/>
+          </a:p>
+        </p:txBody>
+      </p:sp>
+      <p:sp>
+        <p:nvSpPr>
+          <p:cNvPr id="35" name="Text 33"/>
+          <p:cNvSpPr/>
+          <p:nvPr/>
+        </p:nvSpPr>
+        <p:spPr>
+          <a:xfrm>
+            <a:off x="6309360" y="2267712"/>
+            <a:ext cx="2377440" cy="182880"/>
+          </a:xfrm>
+          <a:prstGeom prst="rect">
+            <a:avLst/>
+          </a:prstGeom>
+          <a:noFill/>
+          <a:ln/>
+        </p:spPr>
+        <p:txBody>
+          <a:bodyPr wrap="square" lIns="0" tIns="0" rIns="0" bIns="0" rtlCol="0" anchor="ctr"/>
+          <a:lstStyle/>
+          <a:p>
+            <a:pPr indent="0" marL="0">
+              <a:buNone/>
+            </a:pPr>
+            <a:r>
+              <a:rPr lang="en-US" sz="900" b="1" dirty="0">
                 <a:solidFill>
                   <a:srgbClr val="1A1F36"/>
                 </a:solidFill>
-                <a:latin typeface="Georgia" pitchFamily="34" charset="0"/>
-                <a:ea typeface="Georgia" pitchFamily="34" charset="-122"/>
-                <a:cs typeface="Georgia" pitchFamily="34" charset="-120"/>
-              </a:rPr>
-              <a:t>4-5 days</a:t>
-            </a:r>
-            <a:endParaRPr lang="en-US" sz="1000" dirty="0"/>
-          </a:p>
-        </p:txBody>
-      </p:sp>
-      <p:sp>
-        <p:nvSpPr>
-          <p:cNvPr id="23" name="Text 21"/>
-          <p:cNvSpPr/>
-          <p:nvPr/>
-        </p:nvSpPr>
-        <p:spPr>
-          <a:xfrm>
-            <a:off x="2377440" y="2843784"/>
-            <a:ext cx="3657600" cy="548640"/>
-          </a:xfrm>
-          <a:prstGeom prst="rect">
-            <a:avLst/>
-          </a:prstGeom>
-          <a:noFill/>
-          <a:ln/>
-        </p:spPr>
-        <p:txBody>
-          <a:bodyPr wrap="square" lIns="0" tIns="0" rIns="0" bIns="0" rtlCol="0" anchor="ctr"/>
-          <a:lstStyle/>
-          <a:p>
-            <a:pPr indent="0" marL="0">
-              <a:buNone/>
-            </a:pPr>
-            <a:r>
-              <a:rPr lang="en-US" sz="800" dirty="0">
-                <a:solidFill>
-                  <a:srgbClr val="334155"/>
-                </a:solidFill>
-                <a:latin typeface="Calibri" pitchFamily="34" charset="0"/>
-                <a:ea typeface="Calibri" pitchFamily="34" charset="-122"/>
-                <a:cs typeface="Calibri" pitchFamily="34" charset="-120"/>
-              </a:rPr>
-              <a:t>Blog page template (/blog/{slug})</a:t>
-            </a:r>
-            <a:endParaRPr lang="en-US" sz="800" dirty="0"/>
-          </a:p>
-          <a:p>
-            <a:pPr indent="0" marL="0">
-              <a:buNone/>
-            </a:pPr>
-            <a:r>
-              <a:rPr lang="en-US" sz="800" dirty="0">
-                <a:solidFill>
-                  <a:srgbClr val="334155"/>
-                </a:solidFill>
-                <a:latin typeface="Calibri" pitchFamily="34" charset="0"/>
-                <a:ea typeface="Calibri" pitchFamily="34" charset="-122"/>
-                <a:cs typeface="Calibri" pitchFamily="34" charset="-120"/>
-              </a:rPr>
-              <a:t>Internal merchandising (5 surfaces)</a:t>
-            </a:r>
-            <a:endParaRPr lang="en-US" sz="800" dirty="0"/>
-          </a:p>
-          <a:p>
-            <a:pPr indent="0" marL="0">
-              <a:buNone/>
-            </a:pPr>
-            <a:r>
-              <a:rPr lang="en-US" sz="800" dirty="0">
-                <a:solidFill>
-                  <a:srgbClr val="334155"/>
-                </a:solidFill>
-                <a:latin typeface="Calibri" pitchFamily="34" charset="0"/>
-                <a:ea typeface="Calibri" pitchFamily="34" charset="-122"/>
-                <a:cs typeface="Calibri" pitchFamily="34" charset="-120"/>
-              </a:rPr>
-              <a:t>Unified social API integration (Late)</a:t>
-            </a:r>
-            <a:endParaRPr lang="en-US" sz="800" dirty="0"/>
-          </a:p>
-          <a:p>
-            <a:pPr indent="0" marL="0">
-              <a:buNone/>
-            </a:pPr>
-            <a:r>
-              <a:rPr lang="en-US" sz="800" dirty="0">
-                <a:solidFill>
-                  <a:srgbClr val="334155"/>
-                </a:solidFill>
-                <a:latin typeface="Calibri" pitchFamily="34" charset="0"/>
-                <a:ea typeface="Calibri" pitchFamily="34" charset="-122"/>
-                <a:cs typeface="Calibri" pitchFamily="34" charset="-120"/>
-              </a:rPr>
-              <a:t>Social metrics webhook ingestion</a:t>
-            </a:r>
-            <a:endParaRPr lang="en-US" sz="800" dirty="0"/>
-          </a:p>
-          <a:p>
-            <a:pPr indent="0" marL="0">
-              <a:buNone/>
-            </a:pPr>
-            <a:r>
-              <a:rPr lang="en-US" sz="800" dirty="0">
-                <a:solidFill>
-                  <a:srgbClr val="334155"/>
-                </a:solidFill>
-                <a:latin typeface="Calibri" pitchFamily="34" charset="0"/>
-                <a:ea typeface="Calibri" pitchFamily="34" charset="-122"/>
-                <a:cs typeface="Calibri" pitchFamily="34" charset="-120"/>
-              </a:rPr>
-              <a:t>Newsletter integration via Resend</a:t>
-            </a:r>
-            <a:endParaRPr lang="en-US" sz="800" dirty="0"/>
-          </a:p>
-        </p:txBody>
-      </p:sp>
-      <p:sp>
-        <p:nvSpPr>
-          <p:cNvPr id="24" name="Text 22"/>
-          <p:cNvSpPr/>
-          <p:nvPr/>
-        </p:nvSpPr>
-        <p:spPr>
-          <a:xfrm>
-            <a:off x="6400800" y="2843784"/>
-            <a:ext cx="2011680" cy="548640"/>
-          </a:xfrm>
-          <a:prstGeom prst="rect">
-            <a:avLst/>
-          </a:prstGeom>
-          <a:noFill/>
-          <a:ln/>
-        </p:spPr>
-        <p:txBody>
-          <a:bodyPr wrap="square" lIns="0" tIns="0" rIns="0" bIns="0" rtlCol="0" anchor="ctr"/>
-          <a:lstStyle/>
-          <a:p>
-            <a:pPr indent="0" marL="0">
-              <a:buNone/>
-            </a:pPr>
-            <a:r>
-              <a:rPr lang="en-US" sz="800" dirty="0">
+                <a:latin typeface="Calibri" pitchFamily="34" charset="0"/>
+                <a:ea typeface="Calibri" pitchFamily="34" charset="-122"/>
+                <a:cs typeface="Calibri" pitchFamily="34" charset="-120"/>
+              </a:rPr>
+              <a:t>Admin Content tab</a:t>
+            </a:r>
+            <a:endParaRPr lang="en-US" sz="900" dirty="0"/>
+          </a:p>
+        </p:txBody>
+      </p:sp>
+      <p:sp>
+        <p:nvSpPr>
+          <p:cNvPr id="36" name="Text 34"/>
+          <p:cNvSpPr/>
+          <p:nvPr/>
+        </p:nvSpPr>
+        <p:spPr>
+          <a:xfrm>
+            <a:off x="6309360" y="2450592"/>
+            <a:ext cx="2377440" cy="320040"/>
+          </a:xfrm>
+          <a:prstGeom prst="rect">
+            <a:avLst/>
+          </a:prstGeom>
+          <a:noFill/>
+          <a:ln/>
+        </p:spPr>
+        <p:txBody>
+          <a:bodyPr wrap="square" lIns="0" tIns="0" rIns="0" bIns="0" rtlCol="0" anchor="ctr"/>
+          <a:lstStyle/>
+          <a:p>
+            <a:pPr indent="0" marL="0">
+              <a:buNone/>
+            </a:pPr>
+            <a:r>
+              <a:rPr lang="en-US" sz="750" dirty="0">
                 <a:solidFill>
                   <a:srgbClr val="64748B"/>
                 </a:solidFill>
@@ -5222,16 +5830,16 @@
                 <a:ea typeface="Calibri" pitchFamily="34" charset="-122"/>
                 <a:cs typeface="Calibri" pitchFamily="34" charset="-120"/>
               </a:rPr>
-              <a:t>Pod 2 builds</a:t>
-            </a:r>
-            <a:endParaRPr lang="en-US" sz="800" dirty="0"/>
-          </a:p>
-          <a:p>
-            <a:pPr indent="0" marL="0">
-              <a:buNone/>
-            </a:pPr>
-            <a:r>
-              <a:rPr lang="en-US" sz="800" dirty="0">
+              <a:t>Queue view, preview, approve/reject,</a:t>
+            </a:r>
+            <a:endParaRPr lang="en-US" sz="750" dirty="0"/>
+          </a:p>
+          <a:p>
+            <a:pPr indent="0" marL="0">
+              <a:buNone/>
+            </a:pPr>
+            <a:r>
+              <a:rPr lang="en-US" sz="750" dirty="0">
                 <a:solidFill>
                   <a:srgbClr val="64748B"/>
                 </a:solidFill>
@@ -5239,22 +5847,375 @@
                 <a:ea typeface="Calibri" pitchFamily="34" charset="-122"/>
                 <a:cs typeface="Calibri" pitchFamily="34" charset="-120"/>
               </a:rPr>
-              <a:t>Pod 1 placement</a:t>
-            </a:r>
-            <a:endParaRPr lang="en-US" sz="800" dirty="0"/>
-          </a:p>
-        </p:txBody>
-      </p:sp>
-      <p:sp>
-        <p:nvSpPr>
-          <p:cNvPr id="25" name="Shape 23"/>
-          <p:cNvSpPr/>
-          <p:nvPr/>
-        </p:nvSpPr>
-        <p:spPr>
-          <a:xfrm>
-            <a:off x="548640" y="3511296"/>
-            <a:ext cx="8046720" cy="640080"/>
+              <a:t>calendar view, per-platform</a:t>
+            </a:r>
+            <a:endParaRPr lang="en-US" sz="750" dirty="0"/>
+          </a:p>
+          <a:p>
+            <a:pPr indent="0" marL="0">
+              <a:buNone/>
+            </a:pPr>
+            <a:r>
+              <a:rPr lang="en-US" sz="750" dirty="0">
+                <a:solidFill>
+                  <a:srgbClr val="64748B"/>
+                </a:solidFill>
+                <a:latin typeface="Calibri" pitchFamily="34" charset="0"/>
+                <a:ea typeface="Calibri" pitchFamily="34" charset="-122"/>
+                <a:cs typeface="Calibri" pitchFamily="34" charset="-120"/>
+              </a:rPr>
+              <a:t>variant approval controls.</a:t>
+            </a:r>
+            <a:endParaRPr lang="en-US" sz="750" dirty="0"/>
+          </a:p>
+        </p:txBody>
+      </p:sp>
+      <p:sp>
+        <p:nvSpPr>
+          <p:cNvPr id="37" name="Text 35"/>
+          <p:cNvSpPr/>
+          <p:nvPr/>
+        </p:nvSpPr>
+        <p:spPr>
+          <a:xfrm>
+            <a:off x="6309360" y="2798064"/>
+            <a:ext cx="2377440" cy="182880"/>
+          </a:xfrm>
+          <a:prstGeom prst="rect">
+            <a:avLst/>
+          </a:prstGeom>
+          <a:noFill/>
+          <a:ln/>
+        </p:spPr>
+        <p:txBody>
+          <a:bodyPr wrap="square" lIns="0" tIns="0" rIns="0" bIns="0" rtlCol="0" anchor="ctr"/>
+          <a:lstStyle/>
+          <a:p>
+            <a:pPr indent="0" marL="0">
+              <a:buNone/>
+            </a:pPr>
+            <a:r>
+              <a:rPr lang="en-US" sz="900" b="1" dirty="0">
+                <a:solidFill>
+                  <a:srgbClr val="1A1F36"/>
+                </a:solidFill>
+                <a:latin typeface="Calibri" pitchFamily="34" charset="0"/>
+                <a:ea typeface="Calibri" pitchFamily="34" charset="-122"/>
+                <a:cs typeface="Calibri" pitchFamily="34" charset="-120"/>
+              </a:rPr>
+              <a:t>Blog template (/blog)</a:t>
+            </a:r>
+            <a:endParaRPr lang="en-US" sz="900" dirty="0"/>
+          </a:p>
+        </p:txBody>
+      </p:sp>
+      <p:sp>
+        <p:nvSpPr>
+          <p:cNvPr id="38" name="Text 36"/>
+          <p:cNvSpPr/>
+          <p:nvPr/>
+        </p:nvSpPr>
+        <p:spPr>
+          <a:xfrm>
+            <a:off x="6309360" y="2980944"/>
+            <a:ext cx="2377440" cy="320040"/>
+          </a:xfrm>
+          <a:prstGeom prst="rect">
+            <a:avLst/>
+          </a:prstGeom>
+          <a:noFill/>
+          <a:ln/>
+        </p:spPr>
+        <p:txBody>
+          <a:bodyPr wrap="square" lIns="0" tIns="0" rIns="0" bIns="0" rtlCol="0" anchor="ctr"/>
+          <a:lstStyle/>
+          <a:p>
+            <a:pPr indent="0" marL="0">
+              <a:buNone/>
+            </a:pPr>
+            <a:r>
+              <a:rPr lang="en-US" sz="750" dirty="0">
+                <a:solidFill>
+                  <a:srgbClr val="64748B"/>
+                </a:solidFill>
+                <a:latin typeface="Calibri" pitchFamily="34" charset="0"/>
+                <a:ea typeface="Calibri" pitchFamily="34" charset="-122"/>
+                <a:cs typeface="Calibri" pitchFamily="34" charset="-120"/>
+              </a:rPr>
+              <a:t>/blog index + /blog/{slug} pages.</a:t>
+            </a:r>
+            <a:endParaRPr lang="en-US" sz="750" dirty="0"/>
+          </a:p>
+          <a:p>
+            <a:pPr indent="0" marL="0">
+              <a:buNone/>
+            </a:pPr>
+            <a:r>
+              <a:rPr lang="en-US" sz="750" dirty="0">
+                <a:solidFill>
+                  <a:srgbClr val="64748B"/>
+                </a:solidFill>
+                <a:latin typeface="Calibri" pitchFamily="34" charset="0"/>
+                <a:ea typeface="Calibri" pitchFamily="34" charset="-122"/>
+                <a:cs typeface="Calibri" pitchFamily="34" charset="-120"/>
+              </a:rPr>
+              <a:t>Dark theme, inline ECharts,</a:t>
+            </a:r>
+            <a:endParaRPr lang="en-US" sz="750" dirty="0"/>
+          </a:p>
+          <a:p>
+            <a:pPr indent="0" marL="0">
+              <a:buNone/>
+            </a:pPr>
+            <a:r>
+              <a:rPr lang="en-US" sz="750" dirty="0">
+                <a:solidFill>
+                  <a:srgbClr val="64748B"/>
+                </a:solidFill>
+                <a:latin typeface="Calibri" pitchFamily="34" charset="0"/>
+                <a:ea typeface="Calibri" pitchFamily="34" charset="-122"/>
+                <a:cs typeface="Calibri" pitchFamily="34" charset="-120"/>
+              </a:rPr>
+              <a:t>schema markup, CTA sections.</a:t>
+            </a:r>
+            <a:endParaRPr lang="en-US" sz="750" dirty="0"/>
+          </a:p>
+        </p:txBody>
+      </p:sp>
+      <p:sp>
+        <p:nvSpPr>
+          <p:cNvPr id="39" name="Text 37"/>
+          <p:cNvSpPr/>
+          <p:nvPr/>
+        </p:nvSpPr>
+        <p:spPr>
+          <a:xfrm>
+            <a:off x="6309360" y="3328416"/>
+            <a:ext cx="2377440" cy="182880"/>
+          </a:xfrm>
+          <a:prstGeom prst="rect">
+            <a:avLst/>
+          </a:prstGeom>
+          <a:noFill/>
+          <a:ln/>
+        </p:spPr>
+        <p:txBody>
+          <a:bodyPr wrap="square" lIns="0" tIns="0" rIns="0" bIns="0" rtlCol="0" anchor="ctr"/>
+          <a:lstStyle/>
+          <a:p>
+            <a:pPr indent="0" marL="0">
+              <a:buNone/>
+            </a:pPr>
+            <a:r>
+              <a:rPr lang="en-US" sz="900" b="1" dirty="0">
+                <a:solidFill>
+                  <a:srgbClr val="1A1F36"/>
+                </a:solidFill>
+                <a:latin typeface="Calibri" pitchFamily="34" charset="0"/>
+                <a:ea typeface="Calibri" pitchFamily="34" charset="-122"/>
+                <a:cs typeface="Calibri" pitchFamily="34" charset="-120"/>
+              </a:rPr>
+              <a:t>economic_indicators tables</a:t>
+            </a:r>
+            <a:endParaRPr lang="en-US" sz="900" dirty="0"/>
+          </a:p>
+        </p:txBody>
+      </p:sp>
+      <p:sp>
+        <p:nvSpPr>
+          <p:cNvPr id="40" name="Text 38"/>
+          <p:cNvSpPr/>
+          <p:nvPr/>
+        </p:nvSpPr>
+        <p:spPr>
+          <a:xfrm>
+            <a:off x="6309360" y="3511296"/>
+            <a:ext cx="2377440" cy="320040"/>
+          </a:xfrm>
+          <a:prstGeom prst="rect">
+            <a:avLst/>
+          </a:prstGeom>
+          <a:noFill/>
+          <a:ln/>
+        </p:spPr>
+        <p:txBody>
+          <a:bodyPr wrap="square" lIns="0" tIns="0" rIns="0" bIns="0" rtlCol="0" anchor="ctr"/>
+          <a:lstStyle/>
+          <a:p>
+            <a:pPr indent="0" marL="0">
+              <a:buNone/>
+            </a:pPr>
+            <a:r>
+              <a:rPr lang="en-US" sz="750" dirty="0">
+                <a:solidFill>
+                  <a:srgbClr val="64748B"/>
+                </a:solidFill>
+                <a:latin typeface="Calibri" pitchFamily="34" charset="0"/>
+                <a:ea typeface="Calibri" pitchFamily="34" charset="-122"/>
+                <a:cs typeface="Calibri" pitchFamily="34" charset="-120"/>
+              </a:rPr>
+              <a:t>3 tables: indicators, context,</a:t>
+            </a:r>
+            <a:endParaRPr lang="en-US" sz="750" dirty="0"/>
+          </a:p>
+          <a:p>
+            <a:pPr indent="0" marL="0">
+              <a:buNone/>
+            </a:pPr>
+            <a:r>
+              <a:rPr lang="en-US" sz="750" dirty="0">
+                <a:solidFill>
+                  <a:srgbClr val="64748B"/>
+                </a:solidFill>
+                <a:latin typeface="Calibri" pitchFamily="34" charset="0"/>
+                <a:ea typeface="Calibri" pitchFamily="34" charset="-122"/>
+                <a:cs typeface="Calibri" pitchFamily="34" charset="-120"/>
+              </a:rPr>
+              <a:t>correlations. Schema in content</a:t>
+            </a:r>
+            <a:endParaRPr lang="en-US" sz="750" dirty="0"/>
+          </a:p>
+          <a:p>
+            <a:pPr indent="0" marL="0">
+              <a:buNone/>
+            </a:pPr>
+            <a:r>
+              <a:rPr lang="en-US" sz="750" dirty="0">
+                <a:solidFill>
+                  <a:srgbClr val="64748B"/>
+                </a:solidFill>
+                <a:latin typeface="Calibri" pitchFamily="34" charset="0"/>
+                <a:ea typeface="Calibri" pitchFamily="34" charset="-122"/>
+                <a:cs typeface="Calibri" pitchFamily="34" charset="-120"/>
+              </a:rPr>
+              <a:t>engine spec.</a:t>
+            </a:r>
+            <a:endParaRPr lang="en-US" sz="750" dirty="0"/>
+          </a:p>
+        </p:txBody>
+      </p:sp>
+      <p:sp>
+        <p:nvSpPr>
+          <p:cNvPr id="41" name="Text 39"/>
+          <p:cNvSpPr/>
+          <p:nvPr/>
+        </p:nvSpPr>
+        <p:spPr>
+          <a:xfrm>
+            <a:off x="6309360" y="3858768"/>
+            <a:ext cx="2377440" cy="182880"/>
+          </a:xfrm>
+          <a:prstGeom prst="rect">
+            <a:avLst/>
+          </a:prstGeom>
+          <a:noFill/>
+          <a:ln/>
+        </p:spPr>
+        <p:txBody>
+          <a:bodyPr wrap="square" lIns="0" tIns="0" rIns="0" bIns="0" rtlCol="0" anchor="ctr"/>
+          <a:lstStyle/>
+          <a:p>
+            <a:pPr indent="0" marL="0">
+              <a:buNone/>
+            </a:pPr>
+            <a:r>
+              <a:rPr lang="en-US" sz="900" b="1" dirty="0">
+                <a:solidFill>
+                  <a:srgbClr val="1A1F36"/>
+                </a:solidFill>
+                <a:latin typeface="Calibri" pitchFamily="34" charset="0"/>
+                <a:ea typeface="Calibri" pitchFamily="34" charset="-122"/>
+                <a:cs typeface="Calibri" pitchFamily="34" charset="-120"/>
+              </a:rPr>
+              <a:t>feature_readiness table</a:t>
+            </a:r>
+            <a:endParaRPr lang="en-US" sz="900" dirty="0"/>
+          </a:p>
+        </p:txBody>
+      </p:sp>
+      <p:sp>
+        <p:nvSpPr>
+          <p:cNvPr id="42" name="Text 40"/>
+          <p:cNvSpPr/>
+          <p:nvPr/>
+        </p:nvSpPr>
+        <p:spPr>
+          <a:xfrm>
+            <a:off x="6309360" y="4041648"/>
+            <a:ext cx="2377440" cy="320040"/>
+          </a:xfrm>
+          <a:prstGeom prst="rect">
+            <a:avLst/>
+          </a:prstGeom>
+          <a:noFill/>
+          <a:ln/>
+        </p:spPr>
+        <p:txBody>
+          <a:bodyPr wrap="square" lIns="0" tIns="0" rIns="0" bIns="0" rtlCol="0" anchor="ctr"/>
+          <a:lstStyle/>
+          <a:p>
+            <a:pPr indent="0" marL="0">
+              <a:buNone/>
+            </a:pPr>
+            <a:r>
+              <a:rPr lang="en-US" sz="750" dirty="0">
+                <a:solidFill>
+                  <a:srgbClr val="64748B"/>
+                </a:solidFill>
+                <a:latin typeface="Calibri" pitchFamily="34" charset="0"/>
+                <a:ea typeface="Calibri" pitchFamily="34" charset="-122"/>
+                <a:cs typeface="Calibri" pitchFamily="34" charset="-120"/>
+              </a:rPr>
+              <a:t>Threshold tracking for deferred</a:t>
+            </a:r>
+            <a:endParaRPr lang="en-US" sz="750" dirty="0"/>
+          </a:p>
+          <a:p>
+            <a:pPr indent="0" marL="0">
+              <a:buNone/>
+            </a:pPr>
+            <a:r>
+              <a:rPr lang="en-US" sz="750" dirty="0">
+                <a:solidFill>
+                  <a:srgbClr val="64748B"/>
+                </a:solidFill>
+                <a:latin typeface="Calibri" pitchFamily="34" charset="0"/>
+                <a:ea typeface="Calibri" pitchFamily="34" charset="-122"/>
+                <a:cs typeface="Calibri" pitchFamily="34" charset="-120"/>
+              </a:rPr>
+              <a:t>features. Cron auto-enables</a:t>
+            </a:r>
+            <a:endParaRPr lang="en-US" sz="750" dirty="0"/>
+          </a:p>
+          <a:p>
+            <a:pPr indent="0" marL="0">
+              <a:buNone/>
+            </a:pPr>
+            <a:r>
+              <a:rPr lang="en-US" sz="750" dirty="0">
+                <a:solidFill>
+                  <a:srgbClr val="64748B"/>
+                </a:solidFill>
+                <a:latin typeface="Calibri" pitchFamily="34" charset="0"/>
+                <a:ea typeface="Calibri" pitchFamily="34" charset="-122"/>
+                <a:cs typeface="Calibri" pitchFamily="34" charset="-120"/>
+              </a:rPr>
+              <a:t>when data thresholds met.</a:t>
+            </a:r>
+            <a:endParaRPr lang="en-US" sz="750" dirty="0"/>
+          </a:p>
+        </p:txBody>
+      </p:sp>
+      <p:sp>
+        <p:nvSpPr>
+          <p:cNvPr id="43" name="Shape 41"/>
+          <p:cNvSpPr/>
+          <p:nvPr/>
+        </p:nvSpPr>
+        <p:spPr>
+          <a:xfrm>
+            <a:off x="365760" y="4572000"/>
+            <a:ext cx="8412480" cy="411480"/>
           </a:xfrm>
           <a:prstGeom prst="rect">
             <a:avLst/>
@@ -5274,667 +6235,40 @@
       </p:sp>
       <p:sp>
         <p:nvSpPr>
-          <p:cNvPr id="26" name="Shape 24"/>
-          <p:cNvSpPr/>
-          <p:nvPr/>
-        </p:nvSpPr>
-        <p:spPr>
-          <a:xfrm>
-            <a:off x="548640" y="3511296"/>
-            <a:ext cx="54864" cy="640080"/>
-          </a:xfrm>
-          <a:prstGeom prst="rect">
-            <a:avLst/>
-          </a:prstGeom>
-          <a:solidFill>
-            <a:srgbClr val="8B5CF6"/>
-          </a:solidFill>
-          <a:ln/>
-        </p:spPr>
-      </p:sp>
-      <p:sp>
-        <p:nvSpPr>
-          <p:cNvPr id="27" name="Text 25"/>
-          <p:cNvSpPr/>
-          <p:nvPr/>
-        </p:nvSpPr>
-        <p:spPr>
-          <a:xfrm>
-            <a:off x="731520" y="3511296"/>
-            <a:ext cx="731520" cy="320040"/>
-          </a:xfrm>
-          <a:prstGeom prst="rect">
-            <a:avLst/>
-          </a:prstGeom>
-          <a:noFill/>
-          <a:ln/>
-        </p:spPr>
-        <p:txBody>
-          <a:bodyPr wrap="square" lIns="0" tIns="0" rIns="0" bIns="0" rtlCol="0" anchor="ctr"/>
-          <a:lstStyle/>
-          <a:p>
-            <a:pPr indent="0" marL="0">
-              <a:buNone/>
-            </a:pPr>
-            <a:r>
-              <a:rPr lang="en-US" sz="900" b="1" dirty="0">
-                <a:solidFill>
-                  <a:srgbClr val="8B5CF6"/>
-                </a:solidFill>
-                <a:latin typeface="Arial" pitchFamily="34" charset="0"/>
-                <a:ea typeface="Arial" pitchFamily="34" charset="-122"/>
-                <a:cs typeface="Arial" pitchFamily="34" charset="-120"/>
-              </a:rPr>
-              <a:t>PHASE 4</a:t>
+          <p:cNvPr id="44" name="Text 42"/>
+          <p:cNvSpPr/>
+          <p:nvPr/>
+        </p:nvSpPr>
+        <p:spPr>
+          <a:xfrm>
+            <a:off x="548640" y="4572000"/>
+            <a:ext cx="8046720" cy="411480"/>
+          </a:xfrm>
+          <a:prstGeom prst="rect">
+            <a:avLst/>
+          </a:prstGeom>
+          <a:noFill/>
+          <a:ln/>
+        </p:spPr>
+        <p:txBody>
+          <a:bodyPr wrap="square" lIns="0" tIns="0" rIns="0" bIns="0" rtlCol="0" anchor="ctr"/>
+          <a:lstStyle/>
+          <a:p>
+            <a:pPr indent="0" marL="0">
+              <a:buNone/>
+            </a:pPr>
+            <a:r>
+              <a:rPr lang="en-US" sz="900" dirty="0">
+                <a:solidFill>
+                  <a:srgbClr val="334155"/>
+                </a:solidFill>
+                <a:latin typeface="Calibri" pitchFamily="34" charset="0"/>
+                <a:ea typeface="Calibri" pitchFamily="34" charset="-122"/>
+                <a:cs typeface="Calibri" pitchFamily="34" charset="-120"/>
+              </a:rPr>
+              <a:t>Estimated monthly cost:  Late ~$10-49  ·  ElevenLabs ~$5-22  ·  BLS/FRED/Census/BEA: free  ·  YouTube API: free  ·  Resend: existing  ·  Total: ~$15-71/mo</a:t>
             </a:r>
             <a:endParaRPr lang="en-US" sz="900" dirty="0"/>
-          </a:p>
-        </p:txBody>
-      </p:sp>
-      <p:sp>
-        <p:nvSpPr>
-          <p:cNvPr id="28" name="Text 26"/>
-          <p:cNvSpPr/>
-          <p:nvPr/>
-        </p:nvSpPr>
-        <p:spPr>
-          <a:xfrm>
-            <a:off x="731520" y="3803904"/>
-            <a:ext cx="731520" cy="274320"/>
-          </a:xfrm>
-          <a:prstGeom prst="rect">
-            <a:avLst/>
-          </a:prstGeom>
-          <a:noFill/>
-          <a:ln/>
-        </p:spPr>
-        <p:txBody>
-          <a:bodyPr wrap="square" lIns="0" tIns="0" rIns="0" bIns="0" rtlCol="0" anchor="ctr"/>
-          <a:lstStyle/>
-          <a:p>
-            <a:pPr indent="0" marL="0">
-              <a:buNone/>
-            </a:pPr>
-            <a:r>
-              <a:rPr lang="en-US" sz="800" dirty="0">
-                <a:solidFill>
-                  <a:srgbClr val="64748B"/>
-                </a:solidFill>
-                <a:latin typeface="Calibri" pitchFamily="34" charset="0"/>
-                <a:ea typeface="Calibri" pitchFamily="34" charset="-122"/>
-                <a:cs typeface="Calibri" pitchFamily="34" charset="-120"/>
-              </a:rPr>
-              <a:t>Month 2-3</a:t>
-            </a:r>
-            <a:endParaRPr lang="en-US" sz="800" dirty="0"/>
-          </a:p>
-        </p:txBody>
-      </p:sp>
-      <p:sp>
-        <p:nvSpPr>
-          <p:cNvPr id="29" name="Text 27"/>
-          <p:cNvSpPr/>
-          <p:nvPr/>
-        </p:nvSpPr>
-        <p:spPr>
-          <a:xfrm>
-            <a:off x="1554480" y="3511296"/>
-            <a:ext cx="731520" cy="640080"/>
-          </a:xfrm>
-          <a:prstGeom prst="rect">
-            <a:avLst/>
-          </a:prstGeom>
-          <a:noFill/>
-          <a:ln/>
-        </p:spPr>
-        <p:txBody>
-          <a:bodyPr wrap="square" lIns="0" tIns="0" rIns="0" bIns="0" rtlCol="0" anchor="ctr"/>
-          <a:lstStyle/>
-          <a:p>
-            <a:pPr indent="0" marL="0">
-              <a:buNone/>
-            </a:pPr>
-            <a:r>
-              <a:rPr lang="en-US" sz="1000" b="1" dirty="0">
-                <a:solidFill>
-                  <a:srgbClr val="1A1F36"/>
-                </a:solidFill>
-                <a:latin typeface="Georgia" pitchFamily="34" charset="0"/>
-                <a:ea typeface="Georgia" pitchFamily="34" charset="-122"/>
-                <a:cs typeface="Georgia" pitchFamily="34" charset="-120"/>
-              </a:rPr>
-              <a:t>6-8 days</a:t>
-            </a:r>
-            <a:endParaRPr lang="en-US" sz="1000" dirty="0"/>
-          </a:p>
-        </p:txBody>
-      </p:sp>
-      <p:sp>
-        <p:nvSpPr>
-          <p:cNvPr id="30" name="Text 28"/>
-          <p:cNvSpPr/>
-          <p:nvPr/>
-        </p:nvSpPr>
-        <p:spPr>
-          <a:xfrm>
-            <a:off x="2377440" y="3557016"/>
-            <a:ext cx="3657600" cy="548640"/>
-          </a:xfrm>
-          <a:prstGeom prst="rect">
-            <a:avLst/>
-          </a:prstGeom>
-          <a:noFill/>
-          <a:ln/>
-        </p:spPr>
-        <p:txBody>
-          <a:bodyPr wrap="square" lIns="0" tIns="0" rIns="0" bIns="0" rtlCol="0" anchor="ctr"/>
-          <a:lstStyle/>
-          <a:p>
-            <a:pPr indent="0" marL="0">
-              <a:buNone/>
-            </a:pPr>
-            <a:r>
-              <a:rPr lang="en-US" sz="800" dirty="0">
-                <a:solidFill>
-                  <a:srgbClr val="334155"/>
-                </a:solidFill>
-                <a:latin typeface="Calibri" pitchFamily="34" charset="0"/>
-                <a:ea typeface="Calibri" pitchFamily="34" charset="-122"/>
-                <a:cs typeface="Calibri" pitchFamily="34" charset="-120"/>
-              </a:rPr>
-              <a:t>Video rendering pipeline</a:t>
-            </a:r>
-            <a:endParaRPr lang="en-US" sz="800" dirty="0"/>
-          </a:p>
-          <a:p>
-            <a:pPr indent="0" marL="0">
-              <a:buNone/>
-            </a:pPr>
-            <a:r>
-              <a:rPr lang="en-US" sz="800" dirty="0">
-                <a:solidFill>
-                  <a:srgbClr val="334155"/>
-                </a:solidFill>
-                <a:latin typeface="Calibri" pitchFamily="34" charset="0"/>
-                <a:ea typeface="Calibri" pitchFamily="34" charset="-122"/>
-                <a:cs typeface="Calibri" pitchFamily="34" charset="-120"/>
-              </a:rPr>
-              <a:t>AI voiceover + animated charts</a:t>
-            </a:r>
-            <a:endParaRPr lang="en-US" sz="800" dirty="0"/>
-          </a:p>
-          <a:p>
-            <a:pPr indent="0" marL="0">
-              <a:buNone/>
-            </a:pPr>
-            <a:r>
-              <a:rPr lang="en-US" sz="800" dirty="0">
-                <a:solidFill>
-                  <a:srgbClr val="334155"/>
-                </a:solidFill>
-                <a:latin typeface="Calibri" pitchFamily="34" charset="0"/>
-                <a:ea typeface="Calibri" pitchFamily="34" charset="-122"/>
-                <a:cs typeface="Calibri" pitchFamily="34" charset="-120"/>
-              </a:rPr>
-              <a:t>YouTube / Shorts / Reels publishing</a:t>
-            </a:r>
-            <a:endParaRPr lang="en-US" sz="800" dirty="0"/>
-          </a:p>
-          <a:p>
-            <a:pPr indent="0" marL="0">
-              <a:buNone/>
-            </a:pPr>
-            <a:r>
-              <a:rPr lang="en-US" sz="800" dirty="0">
-                <a:solidFill>
-                  <a:srgbClr val="334155"/>
-                </a:solidFill>
-                <a:latin typeface="Calibri" pitchFamily="34" charset="0"/>
-                <a:ea typeface="Calibri" pitchFamily="34" charset="-122"/>
-                <a:cs typeface="Calibri" pitchFamily="34" charset="-120"/>
-              </a:rPr>
-              <a:t>Survey research program (pop-ups)</a:t>
-            </a:r>
-            <a:endParaRPr lang="en-US" sz="800" dirty="0"/>
-          </a:p>
-          <a:p>
-            <a:pPr indent="0" marL="0">
-              <a:buNone/>
-            </a:pPr>
-            <a:r>
-              <a:rPr lang="en-US" sz="800" dirty="0">
-                <a:solidFill>
-                  <a:srgbClr val="334155"/>
-                </a:solidFill>
-                <a:latin typeface="Calibri" pitchFamily="34" charset="0"/>
-                <a:ea typeface="Calibri" pitchFamily="34" charset="-122"/>
-                <a:cs typeface="Calibri" pitchFamily="34" charset="-120"/>
-              </a:rPr>
-              <a:t>Personal journey opt-in system</a:t>
-            </a:r>
-            <a:endParaRPr lang="en-US" sz="800" dirty="0"/>
-          </a:p>
-        </p:txBody>
-      </p:sp>
-      <p:sp>
-        <p:nvSpPr>
-          <p:cNvPr id="31" name="Text 29"/>
-          <p:cNvSpPr/>
-          <p:nvPr/>
-        </p:nvSpPr>
-        <p:spPr>
-          <a:xfrm>
-            <a:off x="6400800" y="3557016"/>
-            <a:ext cx="2011680" cy="548640"/>
-          </a:xfrm>
-          <a:prstGeom prst="rect">
-            <a:avLst/>
-          </a:prstGeom>
-          <a:noFill/>
-          <a:ln/>
-        </p:spPr>
-        <p:txBody>
-          <a:bodyPr wrap="square" lIns="0" tIns="0" rIns="0" bIns="0" rtlCol="0" anchor="ctr"/>
-          <a:lstStyle/>
-          <a:p>
-            <a:pPr indent="0" marL="0">
-              <a:buNone/>
-            </a:pPr>
-            <a:r>
-              <a:rPr lang="en-US" sz="800" dirty="0">
-                <a:solidFill>
-                  <a:srgbClr val="64748B"/>
-                </a:solidFill>
-                <a:latin typeface="Calibri" pitchFamily="34" charset="0"/>
-                <a:ea typeface="Calibri" pitchFamily="34" charset="-122"/>
-                <a:cs typeface="Calibri" pitchFamily="34" charset="-120"/>
-              </a:rPr>
-              <a:t>Pod 2 builds</a:t>
-            </a:r>
-            <a:endParaRPr lang="en-US" sz="800" dirty="0"/>
-          </a:p>
-          <a:p>
-            <a:pPr indent="0" marL="0">
-              <a:buNone/>
-            </a:pPr>
-            <a:r>
-              <a:rPr lang="en-US" sz="800" dirty="0">
-                <a:solidFill>
-                  <a:srgbClr val="64748B"/>
-                </a:solidFill>
-                <a:latin typeface="Calibri" pitchFamily="34" charset="0"/>
-                <a:ea typeface="Calibri" pitchFamily="34" charset="-122"/>
-                <a:cs typeface="Calibri" pitchFamily="34" charset="-120"/>
-              </a:rPr>
-              <a:t>Pod 1 templates</a:t>
-            </a:r>
-            <a:endParaRPr lang="en-US" sz="800" dirty="0"/>
-          </a:p>
-        </p:txBody>
-      </p:sp>
-      <p:sp>
-        <p:nvSpPr>
-          <p:cNvPr id="32" name="Shape 30"/>
-          <p:cNvSpPr/>
-          <p:nvPr/>
-        </p:nvSpPr>
-        <p:spPr>
-          <a:xfrm>
-            <a:off x="548640" y="4224528"/>
-            <a:ext cx="8046720" cy="640080"/>
-          </a:xfrm>
-          <a:prstGeom prst="rect">
-            <a:avLst/>
-          </a:prstGeom>
-          <a:solidFill>
-            <a:srgbClr val="FFFFFF"/>
-          </a:solidFill>
-          <a:ln/>
-          <a:effectLst>
-            <a:outerShdw sx="100000" sy="100000" kx="0" ky="0" algn="bl" rotWithShape="0" blurRad="76200" dist="25400" dir="8100000">
-              <a:srgbClr val="000000">
-                <a:alpha val="10000"/>
-              </a:srgbClr>
-            </a:outerShdw>
-          </a:effectLst>
-        </p:spPr>
-      </p:sp>
-      <p:sp>
-        <p:nvSpPr>
-          <p:cNvPr id="33" name="Shape 31"/>
-          <p:cNvSpPr/>
-          <p:nvPr/>
-        </p:nvSpPr>
-        <p:spPr>
-          <a:xfrm>
-            <a:off x="548640" y="4224528"/>
-            <a:ext cx="54864" cy="640080"/>
-          </a:xfrm>
-          <a:prstGeom prst="rect">
-            <a:avLst/>
-          </a:prstGeom>
-          <a:solidFill>
-            <a:srgbClr val="F59E0B"/>
-          </a:solidFill>
-          <a:ln/>
-        </p:spPr>
-      </p:sp>
-      <p:sp>
-        <p:nvSpPr>
-          <p:cNvPr id="34" name="Text 32"/>
-          <p:cNvSpPr/>
-          <p:nvPr/>
-        </p:nvSpPr>
-        <p:spPr>
-          <a:xfrm>
-            <a:off x="731520" y="4224528"/>
-            <a:ext cx="731520" cy="320040"/>
-          </a:xfrm>
-          <a:prstGeom prst="rect">
-            <a:avLst/>
-          </a:prstGeom>
-          <a:noFill/>
-          <a:ln/>
-        </p:spPr>
-        <p:txBody>
-          <a:bodyPr wrap="square" lIns="0" tIns="0" rIns="0" bIns="0" rtlCol="0" anchor="ctr"/>
-          <a:lstStyle/>
-          <a:p>
-            <a:pPr indent="0" marL="0">
-              <a:buNone/>
-            </a:pPr>
-            <a:r>
-              <a:rPr lang="en-US" sz="900" b="1" dirty="0">
-                <a:solidFill>
-                  <a:srgbClr val="F59E0B"/>
-                </a:solidFill>
-                <a:latin typeface="Arial" pitchFamily="34" charset="0"/>
-                <a:ea typeface="Arial" pitchFamily="34" charset="-122"/>
-                <a:cs typeface="Arial" pitchFamily="34" charset="-120"/>
-              </a:rPr>
-              <a:t>PHASE 5</a:t>
-            </a:r>
-            <a:endParaRPr lang="en-US" sz="900" dirty="0"/>
-          </a:p>
-        </p:txBody>
-      </p:sp>
-      <p:sp>
-        <p:nvSpPr>
-          <p:cNvPr id="35" name="Text 33"/>
-          <p:cNvSpPr/>
-          <p:nvPr/>
-        </p:nvSpPr>
-        <p:spPr>
-          <a:xfrm>
-            <a:off x="731520" y="4517136"/>
-            <a:ext cx="731520" cy="274320"/>
-          </a:xfrm>
-          <a:prstGeom prst="rect">
-            <a:avLst/>
-          </a:prstGeom>
-          <a:noFill/>
-          <a:ln/>
-        </p:spPr>
-        <p:txBody>
-          <a:bodyPr wrap="square" lIns="0" tIns="0" rIns="0" bIns="0" rtlCol="0" anchor="ctr"/>
-          <a:lstStyle/>
-          <a:p>
-            <a:pPr indent="0" marL="0">
-              <a:buNone/>
-            </a:pPr>
-            <a:r>
-              <a:rPr lang="en-US" sz="800" dirty="0">
-                <a:solidFill>
-                  <a:srgbClr val="64748B"/>
-                </a:solidFill>
-                <a:latin typeface="Calibri" pitchFamily="34" charset="0"/>
-                <a:ea typeface="Calibri" pitchFamily="34" charset="-122"/>
-                <a:cs typeface="Calibri" pitchFamily="34" charset="-120"/>
-              </a:rPr>
-              <a:t>Month 3+</a:t>
-            </a:r>
-            <a:endParaRPr lang="en-US" sz="800" dirty="0"/>
-          </a:p>
-        </p:txBody>
-      </p:sp>
-      <p:sp>
-        <p:nvSpPr>
-          <p:cNvPr id="36" name="Text 34"/>
-          <p:cNvSpPr/>
-          <p:nvPr/>
-        </p:nvSpPr>
-        <p:spPr>
-          <a:xfrm>
-            <a:off x="1554480" y="4224528"/>
-            <a:ext cx="731520" cy="640080"/>
-          </a:xfrm>
-          <a:prstGeom prst="rect">
-            <a:avLst/>
-          </a:prstGeom>
-          <a:noFill/>
-          <a:ln/>
-        </p:spPr>
-        <p:txBody>
-          <a:bodyPr wrap="square" lIns="0" tIns="0" rIns="0" bIns="0" rtlCol="0" anchor="ctr"/>
-          <a:lstStyle/>
-          <a:p>
-            <a:pPr indent="0" marL="0">
-              <a:buNone/>
-            </a:pPr>
-            <a:r>
-              <a:rPr lang="en-US" sz="1000" b="1" dirty="0">
-                <a:solidFill>
-                  <a:srgbClr val="1A1F36"/>
-                </a:solidFill>
-                <a:latin typeface="Georgia" pitchFamily="34" charset="0"/>
-                <a:ea typeface="Georgia" pitchFamily="34" charset="-122"/>
-                <a:cs typeface="Georgia" pitchFamily="34" charset="-120"/>
-              </a:rPr>
-              <a:t>8-11 days</a:t>
-            </a:r>
-            <a:endParaRPr lang="en-US" sz="1000" dirty="0"/>
-          </a:p>
-        </p:txBody>
-      </p:sp>
-      <p:sp>
-        <p:nvSpPr>
-          <p:cNvPr id="37" name="Text 35"/>
-          <p:cNvSpPr/>
-          <p:nvPr/>
-        </p:nvSpPr>
-        <p:spPr>
-          <a:xfrm>
-            <a:off x="2377440" y="4270248"/>
-            <a:ext cx="3657600" cy="548640"/>
-          </a:xfrm>
-          <a:prstGeom prst="rect">
-            <a:avLst/>
-          </a:prstGeom>
-          <a:noFill/>
-          <a:ln/>
-        </p:spPr>
-        <p:txBody>
-          <a:bodyPr wrap="square" lIns="0" tIns="0" rIns="0" bIns="0" rtlCol="0" anchor="ctr"/>
-          <a:lstStyle/>
-          <a:p>
-            <a:pPr indent="0" marL="0">
-              <a:buNone/>
-            </a:pPr>
-            <a:r>
-              <a:rPr lang="en-US" sz="800" dirty="0">
-                <a:solidFill>
-                  <a:srgbClr val="334155"/>
-                </a:solidFill>
-                <a:latin typeface="Calibri" pitchFamily="34" charset="0"/>
-                <a:ea typeface="Calibri" pitchFamily="34" charset="-122"/>
-                <a:cs typeface="Calibri" pitchFamily="34" charset="-120"/>
-              </a:rPr>
-              <a:t>Economic data ingestion (BLS/FRED)</a:t>
-            </a:r>
-            <a:endParaRPr lang="en-US" sz="800" dirty="0"/>
-          </a:p>
-          <a:p>
-            <a:pPr indent="0" marL="0">
-              <a:buNone/>
-            </a:pPr>
-            <a:r>
-              <a:rPr lang="en-US" sz="800" dirty="0">
-                <a:solidFill>
-                  <a:srgbClr val="334155"/>
-                </a:solidFill>
-                <a:latin typeface="Calibri" pitchFamily="34" charset="0"/>
-                <a:ea typeface="Calibri" pitchFamily="34" charset="-122"/>
-                <a:cs typeface="Calibri" pitchFamily="34" charset="-120"/>
-              </a:rPr>
-              <a:t>Correlation engine</a:t>
-            </a:r>
-            <a:endParaRPr lang="en-US" sz="800" dirty="0"/>
-          </a:p>
-          <a:p>
-            <a:pPr indent="0" marL="0">
-              <a:buNone/>
-            </a:pPr>
-            <a:r>
-              <a:rPr lang="en-US" sz="800" dirty="0">
-                <a:solidFill>
-                  <a:srgbClr val="334155"/>
-                </a:solidFill>
-                <a:latin typeface="Calibri" pitchFamily="34" charset="0"/>
-                <a:ea typeface="Calibri" pitchFamily="34" charset="-122"/>
-                <a:cs typeface="Calibri" pitchFamily="34" charset="-120"/>
-              </a:rPr>
-              <a:t>Social → internal feedback loop</a:t>
-            </a:r>
-            <a:endParaRPr lang="en-US" sz="800" dirty="0"/>
-          </a:p>
-          <a:p>
-            <a:pPr indent="0" marL="0">
-              <a:buNone/>
-            </a:pPr>
-            <a:r>
-              <a:rPr lang="en-US" sz="800" dirty="0">
-                <a:solidFill>
-                  <a:srgbClr val="334155"/>
-                </a:solidFill>
-                <a:latin typeface="Calibri" pitchFamily="34" charset="0"/>
-                <a:ea typeface="Calibri" pitchFamily="34" charset="-122"/>
-                <a:cs typeface="Calibri" pitchFamily="34" charset="-120"/>
-              </a:rPr>
-              <a:t>Press citation tracking</a:t>
-            </a:r>
-            <a:endParaRPr lang="en-US" sz="800" dirty="0"/>
-          </a:p>
-          <a:p>
-            <a:pPr indent="0" marL="0">
-              <a:buNone/>
-            </a:pPr>
-            <a:r>
-              <a:rPr lang="en-US" sz="800" dirty="0">
-                <a:solidFill>
-                  <a:srgbClr val="334155"/>
-                </a:solidFill>
-                <a:latin typeface="Calibri" pitchFamily="34" charset="0"/>
-                <a:ea typeface="Calibri" pitchFamily="34" charset="-122"/>
-                <a:cs typeface="Calibri" pitchFamily="34" charset="-120"/>
-              </a:rPr>
-              <a:t>Auto-approve for high-score stories</a:t>
-            </a:r>
-            <a:endParaRPr lang="en-US" sz="800" dirty="0"/>
-          </a:p>
-        </p:txBody>
-      </p:sp>
-      <p:sp>
-        <p:nvSpPr>
-          <p:cNvPr id="38" name="Text 36"/>
-          <p:cNvSpPr/>
-          <p:nvPr/>
-        </p:nvSpPr>
-        <p:spPr>
-          <a:xfrm>
-            <a:off x="6400800" y="4270248"/>
-            <a:ext cx="2011680" cy="548640"/>
-          </a:xfrm>
-          <a:prstGeom prst="rect">
-            <a:avLst/>
-          </a:prstGeom>
-          <a:noFill/>
-          <a:ln/>
-        </p:spPr>
-        <p:txBody>
-          <a:bodyPr wrap="square" lIns="0" tIns="0" rIns="0" bIns="0" rtlCol="0" anchor="ctr"/>
-          <a:lstStyle/>
-          <a:p>
-            <a:pPr indent="0" marL="0">
-              <a:buNone/>
-            </a:pPr>
-            <a:r>
-              <a:rPr lang="en-US" sz="800" dirty="0">
-                <a:solidFill>
-                  <a:srgbClr val="64748B"/>
-                </a:solidFill>
-                <a:latin typeface="Calibri" pitchFamily="34" charset="0"/>
-                <a:ea typeface="Calibri" pitchFamily="34" charset="-122"/>
-                <a:cs typeface="Calibri" pitchFamily="34" charset="-120"/>
-              </a:rPr>
-              <a:t>Pod 2 builds</a:t>
-            </a:r>
-            <a:endParaRPr lang="en-US" sz="800" dirty="0"/>
-          </a:p>
-          <a:p>
-            <a:pPr indent="0" marL="0">
-              <a:buNone/>
-            </a:pPr>
-            <a:r>
-              <a:rPr lang="en-US" sz="800" dirty="0">
-                <a:solidFill>
-                  <a:srgbClr val="64748B"/>
-                </a:solidFill>
-                <a:latin typeface="Calibri" pitchFamily="34" charset="0"/>
-                <a:ea typeface="Calibri" pitchFamily="34" charset="-122"/>
-                <a:cs typeface="Calibri" pitchFamily="34" charset="-120"/>
-              </a:rPr>
-              <a:t>Pod 1 tuning</a:t>
-            </a:r>
-            <a:endParaRPr lang="en-US" sz="800" dirty="0"/>
-          </a:p>
-        </p:txBody>
-      </p:sp>
-      <p:sp>
-        <p:nvSpPr>
-          <p:cNvPr id="39" name="Text 37"/>
-          <p:cNvSpPr/>
-          <p:nvPr/>
-        </p:nvSpPr>
-        <p:spPr>
-          <a:xfrm>
-            <a:off x="731520" y="4709160"/>
-            <a:ext cx="7680960" cy="274320"/>
-          </a:xfrm>
-          <a:prstGeom prst="rect">
-            <a:avLst/>
-          </a:prstGeom>
-          <a:noFill/>
-          <a:ln/>
-        </p:spPr>
-        <p:txBody>
-          <a:bodyPr wrap="square" lIns="0" tIns="0" rIns="0" bIns="0" rtlCol="0" anchor="ctr"/>
-          <a:lstStyle/>
-          <a:p>
-            <a:pPr indent="0" marL="0">
-              <a:buNone/>
-            </a:pPr>
-            <a:r>
-              <a:rPr lang="en-US" sz="1000" b="1" dirty="0">
-                <a:solidFill>
-                  <a:srgbClr val="1A1F36"/>
-                </a:solidFill>
-                <a:latin typeface="Calibri" pitchFamily="34" charset="0"/>
-                <a:ea typeface="Calibri" pitchFamily="34" charset="-122"/>
-                <a:cs typeface="Calibri" pitchFamily="34" charset="-120"/>
-              </a:rPr>
-              <a:t>Total: 28-38 engineering days across all phases  ·  Phase 1 is launch-critical  ·  Phases 2-3 ship month 1-2  ·  Phases 4-5 are month 2-3+</a:t>
-            </a:r>
-            <a:endParaRPr lang="en-US" sz="1000" dirty="0"/>
           </a:p>
         </p:txBody>
       </p:sp>
@@ -5949,6 +6283,1790 @@
 <file path=ppt/slides/slide13.xml><?xml version="1.0" encoding="utf-8"?>
 <p:sld xmlns:a="http://schemas.openxmlformats.org/drawingml/2006/main" xmlns:r="http://schemas.openxmlformats.org/officeDocument/2006/relationships" xmlns:p="http://schemas.openxmlformats.org/presentationml/2006/main">
   <p:cSld name="Slide 13">
+    <p:bg>
+      <p:bgPr>
+        <a:solidFill>
+          <a:srgbClr val="F8FAFC"/>
+        </a:solidFill>
+      </p:bgPr>
+    </p:bg>
+    <p:spTree>
+      <p:nvGrpSpPr>
+        <p:cNvPr id="1" name=""/>
+        <p:cNvGrpSpPr/>
+        <p:nvPr/>
+      </p:nvGrpSpPr>
+      <p:grpSpPr>
+        <a:xfrm>
+          <a:off x="0" y="0"/>
+          <a:ext cx="0" cy="0"/>
+          <a:chOff x="0" y="0"/>
+          <a:chExt cx="0" cy="0"/>
+        </a:xfrm>
+      </p:grpSpPr>
+      <p:sp>
+        <p:nvSpPr>
+          <p:cNvPr id="2" name="Text 0"/>
+          <p:cNvSpPr/>
+          <p:nvPr/>
+        </p:nvSpPr>
+        <p:spPr>
+          <a:xfrm>
+            <a:off x="731520" y="365760"/>
+            <a:ext cx="7315200" cy="365760"/>
+          </a:xfrm>
+          <a:prstGeom prst="rect">
+            <a:avLst/>
+          </a:prstGeom>
+          <a:noFill/>
+          <a:ln/>
+        </p:spPr>
+        <p:txBody>
+          <a:bodyPr wrap="square" lIns="0" tIns="0" rIns="0" bIns="0" rtlCol="0" anchor="ctr"/>
+          <a:lstStyle/>
+          <a:p>
+            <a:pPr indent="0" marL="0">
+              <a:buNone/>
+            </a:pPr>
+            <a:r>
+              <a:rPr lang="en-US" sz="1100" b="1" spc="400" kern="0" dirty="0">
+                <a:solidFill>
+                  <a:srgbClr val="2563EB"/>
+                </a:solidFill>
+                <a:latin typeface="Arial" pitchFamily="34" charset="0"/>
+                <a:ea typeface="Arial" pitchFamily="34" charset="-122"/>
+                <a:cs typeface="Arial" pitchFamily="34" charset="-120"/>
+              </a:rPr>
+              <a:t>BUILD SEQUENCE</a:t>
+            </a:r>
+            <a:endParaRPr lang="en-US" sz="1100" dirty="0"/>
+          </a:p>
+        </p:txBody>
+      </p:sp>
+      <p:sp>
+        <p:nvSpPr>
+          <p:cNvPr id="3" name="Text 1"/>
+          <p:cNvSpPr/>
+          <p:nvPr/>
+        </p:nvSpPr>
+        <p:spPr>
+          <a:xfrm>
+            <a:off x="731520" y="731520"/>
+            <a:ext cx="7315200" cy="457200"/>
+          </a:xfrm>
+          <a:prstGeom prst="rect">
+            <a:avLst/>
+          </a:prstGeom>
+          <a:noFill/>
+          <a:ln/>
+        </p:spPr>
+        <p:txBody>
+          <a:bodyPr wrap="square" lIns="0" tIns="0" rIns="0" bIns="0" rtlCol="0" anchor="ctr"/>
+          <a:lstStyle/>
+          <a:p>
+            <a:pPr indent="0" marL="0">
+              <a:buNone/>
+            </a:pPr>
+            <a:r>
+              <a:rPr lang="en-US" sz="2600" dirty="0">
+                <a:solidFill>
+                  <a:srgbClr val="1A1F36"/>
+                </a:solidFill>
+                <a:latin typeface="Georgia" pitchFamily="34" charset="0"/>
+                <a:ea typeface="Georgia" pitchFamily="34" charset="-122"/>
+                <a:cs typeface="Georgia" pitchFamily="34" charset="-120"/>
+              </a:rPr>
+              <a:t>Phased Rollout — Content Engine + Distribution</a:t>
+            </a:r>
+            <a:endParaRPr lang="en-US" sz="2600" dirty="0"/>
+          </a:p>
+        </p:txBody>
+      </p:sp>
+      <p:sp>
+        <p:nvSpPr>
+          <p:cNvPr id="4" name="Shape 2"/>
+          <p:cNvSpPr/>
+          <p:nvPr/>
+        </p:nvSpPr>
+        <p:spPr>
+          <a:xfrm>
+            <a:off x="548640" y="1371600"/>
+            <a:ext cx="8046720" cy="640080"/>
+          </a:xfrm>
+          <a:prstGeom prst="rect">
+            <a:avLst/>
+          </a:prstGeom>
+          <a:solidFill>
+            <a:srgbClr val="FFFFFF"/>
+          </a:solidFill>
+          <a:ln/>
+          <a:effectLst>
+            <a:outerShdw sx="100000" sy="100000" kx="0" ky="0" algn="bl" rotWithShape="0" blurRad="76200" dist="25400" dir="8100000">
+              <a:srgbClr val="000000">
+                <a:alpha val="10000"/>
+              </a:srgbClr>
+            </a:outerShdw>
+          </a:effectLst>
+        </p:spPr>
+      </p:sp>
+      <p:sp>
+        <p:nvSpPr>
+          <p:cNvPr id="5" name="Shape 3"/>
+          <p:cNvSpPr/>
+          <p:nvPr/>
+        </p:nvSpPr>
+        <p:spPr>
+          <a:xfrm>
+            <a:off x="548640" y="1371600"/>
+            <a:ext cx="54864" cy="640080"/>
+          </a:xfrm>
+          <a:prstGeom prst="rect">
+            <a:avLst/>
+          </a:prstGeom>
+          <a:solidFill>
+            <a:srgbClr val="10B981"/>
+          </a:solidFill>
+          <a:ln/>
+        </p:spPr>
+      </p:sp>
+      <p:sp>
+        <p:nvSpPr>
+          <p:cNvPr id="6" name="Text 4"/>
+          <p:cNvSpPr/>
+          <p:nvPr/>
+        </p:nvSpPr>
+        <p:spPr>
+          <a:xfrm>
+            <a:off x="731520" y="1371600"/>
+            <a:ext cx="731520" cy="320040"/>
+          </a:xfrm>
+          <a:prstGeom prst="rect">
+            <a:avLst/>
+          </a:prstGeom>
+          <a:noFill/>
+          <a:ln/>
+        </p:spPr>
+        <p:txBody>
+          <a:bodyPr wrap="square" lIns="0" tIns="0" rIns="0" bIns="0" rtlCol="0" anchor="ctr"/>
+          <a:lstStyle/>
+          <a:p>
+            <a:pPr indent="0" marL="0">
+              <a:buNone/>
+            </a:pPr>
+            <a:r>
+              <a:rPr lang="en-US" sz="900" b="1" dirty="0">
+                <a:solidFill>
+                  <a:srgbClr val="10B981"/>
+                </a:solidFill>
+                <a:latin typeface="Arial" pitchFamily="34" charset="0"/>
+                <a:ea typeface="Arial" pitchFamily="34" charset="-122"/>
+                <a:cs typeface="Arial" pitchFamily="34" charset="-120"/>
+              </a:rPr>
+              <a:t>PHASE 1</a:t>
+            </a:r>
+            <a:endParaRPr lang="en-US" sz="900" dirty="0"/>
+          </a:p>
+        </p:txBody>
+      </p:sp>
+      <p:sp>
+        <p:nvSpPr>
+          <p:cNvPr id="7" name="Text 5"/>
+          <p:cNvSpPr/>
+          <p:nvPr/>
+        </p:nvSpPr>
+        <p:spPr>
+          <a:xfrm>
+            <a:off x="731520" y="1664208"/>
+            <a:ext cx="731520" cy="274320"/>
+          </a:xfrm>
+          <a:prstGeom prst="rect">
+            <a:avLst/>
+          </a:prstGeom>
+          <a:noFill/>
+          <a:ln/>
+        </p:spPr>
+        <p:txBody>
+          <a:bodyPr wrap="square" lIns="0" tIns="0" rIns="0" bIns="0" rtlCol="0" anchor="ctr"/>
+          <a:lstStyle/>
+          <a:p>
+            <a:pPr indent="0" marL="0">
+              <a:buNone/>
+            </a:pPr>
+            <a:r>
+              <a:rPr lang="en-US" sz="800" dirty="0">
+                <a:solidFill>
+                  <a:srgbClr val="64748B"/>
+                </a:solidFill>
+                <a:latin typeface="Calibri" pitchFamily="34" charset="0"/>
+                <a:ea typeface="Calibri" pitchFamily="34" charset="-122"/>
+                <a:cs typeface="Calibri" pitchFamily="34" charset="-120"/>
+              </a:rPr>
+              <a:t>Pre-Launch</a:t>
+            </a:r>
+            <a:endParaRPr lang="en-US" sz="800" dirty="0"/>
+          </a:p>
+        </p:txBody>
+      </p:sp>
+      <p:sp>
+        <p:nvSpPr>
+          <p:cNvPr id="8" name="Text 6"/>
+          <p:cNvSpPr/>
+          <p:nvPr/>
+        </p:nvSpPr>
+        <p:spPr>
+          <a:xfrm>
+            <a:off x="1554480" y="1371600"/>
+            <a:ext cx="731520" cy="640080"/>
+          </a:xfrm>
+          <a:prstGeom prst="rect">
+            <a:avLst/>
+          </a:prstGeom>
+          <a:noFill/>
+          <a:ln/>
+        </p:spPr>
+        <p:txBody>
+          <a:bodyPr wrap="square" lIns="0" tIns="0" rIns="0" bIns="0" rtlCol="0" anchor="ctr"/>
+          <a:lstStyle/>
+          <a:p>
+            <a:pPr indent="0" marL="0">
+              <a:buNone/>
+            </a:pPr>
+            <a:r>
+              <a:rPr lang="en-US" sz="1000" b="1" dirty="0">
+                <a:solidFill>
+                  <a:srgbClr val="1A1F36"/>
+                </a:solidFill>
+                <a:latin typeface="Georgia" pitchFamily="34" charset="0"/>
+                <a:ea typeface="Georgia" pitchFamily="34" charset="-122"/>
+                <a:cs typeface="Georgia" pitchFamily="34" charset="-120"/>
+              </a:rPr>
+              <a:t>5-7 days</a:t>
+            </a:r>
+            <a:endParaRPr lang="en-US" sz="1000" dirty="0"/>
+          </a:p>
+        </p:txBody>
+      </p:sp>
+      <p:sp>
+        <p:nvSpPr>
+          <p:cNvPr id="9" name="Text 7"/>
+          <p:cNvSpPr/>
+          <p:nvPr/>
+        </p:nvSpPr>
+        <p:spPr>
+          <a:xfrm>
+            <a:off x="2377440" y="1417320"/>
+            <a:ext cx="3657600" cy="548640"/>
+          </a:xfrm>
+          <a:prstGeom prst="rect">
+            <a:avLst/>
+          </a:prstGeom>
+          <a:noFill/>
+          <a:ln/>
+        </p:spPr>
+        <p:txBody>
+          <a:bodyPr wrap="square" lIns="0" tIns="0" rIns="0" bIns="0" rtlCol="0" anchor="ctr"/>
+          <a:lstStyle/>
+          <a:p>
+            <a:pPr indent="0" marL="0">
+              <a:buNone/>
+            </a:pPr>
+            <a:r>
+              <a:rPr lang="en-US" sz="800" dirty="0">
+                <a:solidFill>
+                  <a:srgbClr val="334155"/>
+                </a:solidFill>
+                <a:latin typeface="Calibri" pitchFamily="34" charset="0"/>
+                <a:ea typeface="Calibri" pitchFamily="34" charset="-122"/>
+                <a:cs typeface="Calibri" pitchFamily="34" charset="-120"/>
+              </a:rPr>
+              <a:t>Evergreen SEO infrastructure</a:t>
+            </a:r>
+            <a:endParaRPr lang="en-US" sz="800" dirty="0"/>
+          </a:p>
+          <a:p>
+            <a:pPr indent="0" marL="0">
+              <a:buNone/>
+            </a:pPr>
+            <a:r>
+              <a:rPr lang="en-US" sz="800" dirty="0">
+                <a:solidFill>
+                  <a:srgbClr val="334155"/>
+                </a:solidFill>
+                <a:latin typeface="Calibri" pitchFamily="34" charset="0"/>
+                <a:ea typeface="Calibri" pitchFamily="34" charset="-122"/>
+                <a:cs typeface="Calibri" pitchFamily="34" charset="-120"/>
+              </a:rPr>
+              <a:t>Trend page template engine</a:t>
+            </a:r>
+            <a:endParaRPr lang="en-US" sz="800" dirty="0"/>
+          </a:p>
+          <a:p>
+            <a:pPr indent="0" marL="0">
+              <a:buNone/>
+            </a:pPr>
+            <a:r>
+              <a:rPr lang="en-US" sz="800" dirty="0">
+                <a:solidFill>
+                  <a:srgbClr val="334155"/>
+                </a:solidFill>
+                <a:latin typeface="Calibri" pitchFamily="34" charset="0"/>
+                <a:ea typeface="Calibri" pitchFamily="34" charset="-122"/>
+                <a:cs typeface="Calibri" pitchFamily="34" charset="-120"/>
+              </a:rPr>
+              <a:t>Jobs by Location page</a:t>
+            </a:r>
+            <a:endParaRPr lang="en-US" sz="800" dirty="0"/>
+          </a:p>
+          <a:p>
+            <a:pPr indent="0" marL="0">
+              <a:buNone/>
+            </a:pPr>
+            <a:r>
+              <a:rPr lang="en-US" sz="800" dirty="0">
+                <a:solidFill>
+                  <a:srgbClr val="334155"/>
+                </a:solidFill>
+                <a:latin typeface="Calibri" pitchFamily="34" charset="0"/>
+                <a:ea typeface="Calibri" pitchFamily="34" charset="-122"/>
+                <a:cs typeface="Calibri" pitchFamily="34" charset="-120"/>
+              </a:rPr>
+              <a:t>First 10 metro comparison pages</a:t>
+            </a:r>
+            <a:endParaRPr lang="en-US" sz="800" dirty="0"/>
+          </a:p>
+          <a:p>
+            <a:pPr indent="0" marL="0">
+              <a:buNone/>
+            </a:pPr>
+            <a:r>
+              <a:rPr lang="en-US" sz="800" dirty="0">
+                <a:solidFill>
+                  <a:srgbClr val="334155"/>
+                </a:solidFill>
+                <a:latin typeface="Calibri" pitchFamily="34" charset="0"/>
+                <a:ea typeface="Calibri" pitchFamily="34" charset="-122"/>
+                <a:cs typeface="Calibri" pitchFamily="34" charset="-120"/>
+              </a:rPr>
+              <a:t>DataForSEO keyword validation</a:t>
+            </a:r>
+            <a:endParaRPr lang="en-US" sz="800" dirty="0"/>
+          </a:p>
+        </p:txBody>
+      </p:sp>
+      <p:sp>
+        <p:nvSpPr>
+          <p:cNvPr id="10" name="Text 8"/>
+          <p:cNvSpPr/>
+          <p:nvPr/>
+        </p:nvSpPr>
+        <p:spPr>
+          <a:xfrm>
+            <a:off x="6400800" y="1417320"/>
+            <a:ext cx="2011680" cy="548640"/>
+          </a:xfrm>
+          <a:prstGeom prst="rect">
+            <a:avLst/>
+          </a:prstGeom>
+          <a:noFill/>
+          <a:ln/>
+        </p:spPr>
+        <p:txBody>
+          <a:bodyPr wrap="square" lIns="0" tIns="0" rIns="0" bIns="0" rtlCol="0" anchor="ctr"/>
+          <a:lstStyle/>
+          <a:p>
+            <a:pPr indent="0" marL="0">
+              <a:buNone/>
+            </a:pPr>
+            <a:r>
+              <a:rPr lang="en-US" sz="800" dirty="0">
+                <a:solidFill>
+                  <a:srgbClr val="64748B"/>
+                </a:solidFill>
+                <a:latin typeface="Calibri" pitchFamily="34" charset="0"/>
+                <a:ea typeface="Calibri" pitchFamily="34" charset="-122"/>
+                <a:cs typeface="Calibri" pitchFamily="34" charset="-120"/>
+              </a:rPr>
+              <a:t>Pod 1 specs</a:t>
+            </a:r>
+            <a:endParaRPr lang="en-US" sz="800" dirty="0"/>
+          </a:p>
+          <a:p>
+            <a:pPr indent="0" marL="0">
+              <a:buNone/>
+            </a:pPr>
+            <a:r>
+              <a:rPr lang="en-US" sz="800" dirty="0">
+                <a:solidFill>
+                  <a:srgbClr val="64748B"/>
+                </a:solidFill>
+                <a:latin typeface="Calibri" pitchFamily="34" charset="0"/>
+                <a:ea typeface="Calibri" pitchFamily="34" charset="-122"/>
+                <a:cs typeface="Calibri" pitchFamily="34" charset="-120"/>
+              </a:rPr>
+              <a:t>Pod 2 builds</a:t>
+            </a:r>
+            <a:endParaRPr lang="en-US" sz="800" dirty="0"/>
+          </a:p>
+        </p:txBody>
+      </p:sp>
+      <p:sp>
+        <p:nvSpPr>
+          <p:cNvPr id="11" name="Shape 9"/>
+          <p:cNvSpPr/>
+          <p:nvPr/>
+        </p:nvSpPr>
+        <p:spPr>
+          <a:xfrm>
+            <a:off x="548640" y="2084832"/>
+            <a:ext cx="8046720" cy="640080"/>
+          </a:xfrm>
+          <a:prstGeom prst="rect">
+            <a:avLst/>
+          </a:prstGeom>
+          <a:solidFill>
+            <a:srgbClr val="FFFFFF"/>
+          </a:solidFill>
+          <a:ln/>
+          <a:effectLst>
+            <a:outerShdw sx="100000" sy="100000" kx="0" ky="0" algn="bl" rotWithShape="0" blurRad="76200" dist="25400" dir="8100000">
+              <a:srgbClr val="000000">
+                <a:alpha val="10000"/>
+              </a:srgbClr>
+            </a:outerShdw>
+          </a:effectLst>
+        </p:spPr>
+      </p:sp>
+      <p:sp>
+        <p:nvSpPr>
+          <p:cNvPr id="12" name="Shape 10"/>
+          <p:cNvSpPr/>
+          <p:nvPr/>
+        </p:nvSpPr>
+        <p:spPr>
+          <a:xfrm>
+            <a:off x="548640" y="2084832"/>
+            <a:ext cx="54864" cy="640080"/>
+          </a:xfrm>
+          <a:prstGeom prst="rect">
+            <a:avLst/>
+          </a:prstGeom>
+          <a:solidFill>
+            <a:srgbClr val="2563EB"/>
+          </a:solidFill>
+          <a:ln/>
+        </p:spPr>
+      </p:sp>
+      <p:sp>
+        <p:nvSpPr>
+          <p:cNvPr id="13" name="Text 11"/>
+          <p:cNvSpPr/>
+          <p:nvPr/>
+        </p:nvSpPr>
+        <p:spPr>
+          <a:xfrm>
+            <a:off x="731520" y="2084832"/>
+            <a:ext cx="731520" cy="320040"/>
+          </a:xfrm>
+          <a:prstGeom prst="rect">
+            <a:avLst/>
+          </a:prstGeom>
+          <a:noFill/>
+          <a:ln/>
+        </p:spPr>
+        <p:txBody>
+          <a:bodyPr wrap="square" lIns="0" tIns="0" rIns="0" bIns="0" rtlCol="0" anchor="ctr"/>
+          <a:lstStyle/>
+          <a:p>
+            <a:pPr indent="0" marL="0">
+              <a:buNone/>
+            </a:pPr>
+            <a:r>
+              <a:rPr lang="en-US" sz="900" b="1" dirty="0">
+                <a:solidFill>
+                  <a:srgbClr val="2563EB"/>
+                </a:solidFill>
+                <a:latin typeface="Arial" pitchFamily="34" charset="0"/>
+                <a:ea typeface="Arial" pitchFamily="34" charset="-122"/>
+                <a:cs typeface="Arial" pitchFamily="34" charset="-120"/>
+              </a:rPr>
+              <a:t>PHASE 2</a:t>
+            </a:r>
+            <a:endParaRPr lang="en-US" sz="900" dirty="0"/>
+          </a:p>
+        </p:txBody>
+      </p:sp>
+      <p:sp>
+        <p:nvSpPr>
+          <p:cNvPr id="14" name="Text 12"/>
+          <p:cNvSpPr/>
+          <p:nvPr/>
+        </p:nvSpPr>
+        <p:spPr>
+          <a:xfrm>
+            <a:off x="731520" y="2377440"/>
+            <a:ext cx="731520" cy="274320"/>
+          </a:xfrm>
+          <a:prstGeom prst="rect">
+            <a:avLst/>
+          </a:prstGeom>
+          <a:noFill/>
+          <a:ln/>
+        </p:spPr>
+        <p:txBody>
+          <a:bodyPr wrap="square" lIns="0" tIns="0" rIns="0" bIns="0" rtlCol="0" anchor="ctr"/>
+          <a:lstStyle/>
+          <a:p>
+            <a:pPr indent="0" marL="0">
+              <a:buNone/>
+            </a:pPr>
+            <a:r>
+              <a:rPr lang="en-US" sz="800" dirty="0">
+                <a:solidFill>
+                  <a:srgbClr val="64748B"/>
+                </a:solidFill>
+                <a:latin typeface="Calibri" pitchFamily="34" charset="0"/>
+                <a:ea typeface="Calibri" pitchFamily="34" charset="-122"/>
+                <a:cs typeface="Calibri" pitchFamily="34" charset="-120"/>
+              </a:rPr>
+              <a:t>Month 1</a:t>
+            </a:r>
+            <a:endParaRPr lang="en-US" sz="800" dirty="0"/>
+          </a:p>
+        </p:txBody>
+      </p:sp>
+      <p:sp>
+        <p:nvSpPr>
+          <p:cNvPr id="15" name="Text 13"/>
+          <p:cNvSpPr/>
+          <p:nvPr/>
+        </p:nvSpPr>
+        <p:spPr>
+          <a:xfrm>
+            <a:off x="1554480" y="2084832"/>
+            <a:ext cx="731520" cy="640080"/>
+          </a:xfrm>
+          <a:prstGeom prst="rect">
+            <a:avLst/>
+          </a:prstGeom>
+          <a:noFill/>
+          <a:ln/>
+        </p:spPr>
+        <p:txBody>
+          <a:bodyPr wrap="square" lIns="0" tIns="0" rIns="0" bIns="0" rtlCol="0" anchor="ctr"/>
+          <a:lstStyle/>
+          <a:p>
+            <a:pPr indent="0" marL="0">
+              <a:buNone/>
+            </a:pPr>
+            <a:r>
+              <a:rPr lang="en-US" sz="1000" b="1" dirty="0">
+                <a:solidFill>
+                  <a:srgbClr val="1A1F36"/>
+                </a:solidFill>
+                <a:latin typeface="Georgia" pitchFamily="34" charset="0"/>
+                <a:ea typeface="Georgia" pitchFamily="34" charset="-122"/>
+                <a:cs typeface="Georgia" pitchFamily="34" charset="-120"/>
+              </a:rPr>
+              <a:t>5-7 days</a:t>
+            </a:r>
+            <a:endParaRPr lang="en-US" sz="1000" dirty="0"/>
+          </a:p>
+        </p:txBody>
+      </p:sp>
+      <p:sp>
+        <p:nvSpPr>
+          <p:cNvPr id="16" name="Text 14"/>
+          <p:cNvSpPr/>
+          <p:nvPr/>
+        </p:nvSpPr>
+        <p:spPr>
+          <a:xfrm>
+            <a:off x="2377440" y="2130552"/>
+            <a:ext cx="3657600" cy="548640"/>
+          </a:xfrm>
+          <a:prstGeom prst="rect">
+            <a:avLst/>
+          </a:prstGeom>
+          <a:noFill/>
+          <a:ln/>
+        </p:spPr>
+        <p:txBody>
+          <a:bodyPr wrap="square" lIns="0" tIns="0" rIns="0" bIns="0" rtlCol="0" anchor="ctr"/>
+          <a:lstStyle/>
+          <a:p>
+            <a:pPr indent="0" marL="0">
+              <a:buNone/>
+            </a:pPr>
+            <a:r>
+              <a:rPr lang="en-US" sz="800" dirty="0">
+                <a:solidFill>
+                  <a:srgbClr val="334155"/>
+                </a:solidFill>
+                <a:latin typeface="Calibri" pitchFamily="34" charset="0"/>
+                <a:ea typeface="Calibri" pitchFamily="34" charset="-122"/>
+                <a:cs typeface="Calibri" pitchFamily="34" charset="-120"/>
+              </a:rPr>
+              <a:t>Editorial engine core</a:t>
+            </a:r>
+            <a:endParaRPr lang="en-US" sz="800" dirty="0"/>
+          </a:p>
+          <a:p>
+            <a:pPr indent="0" marL="0">
+              <a:buNone/>
+            </a:pPr>
+            <a:r>
+              <a:rPr lang="en-US" sz="800" dirty="0">
+                <a:solidFill>
+                  <a:srgbClr val="334155"/>
+                </a:solidFill>
+                <a:latin typeface="Calibri" pitchFamily="34" charset="0"/>
+                <a:ea typeface="Calibri" pitchFamily="34" charset="-122"/>
+                <a:cs typeface="Calibri" pitchFamily="34" charset="-120"/>
+              </a:rPr>
+              <a:t>Anomaly detection Edge Function</a:t>
+            </a:r>
+            <a:endParaRPr lang="en-US" sz="800" dirty="0"/>
+          </a:p>
+          <a:p>
+            <a:pPr indent="0" marL="0">
+              <a:buNone/>
+            </a:pPr>
+            <a:r>
+              <a:rPr lang="en-US" sz="800" dirty="0">
+                <a:solidFill>
+                  <a:srgbClr val="334155"/>
+                </a:solidFill>
+                <a:latin typeface="Calibri" pitchFamily="34" charset="0"/>
+                <a:ea typeface="Calibri" pitchFamily="34" charset="-122"/>
+                <a:cs typeface="Calibri" pitchFamily="34" charset="-120"/>
+              </a:rPr>
+              <a:t>Claude story generation (all variants)</a:t>
+            </a:r>
+            <a:endParaRPr lang="en-US" sz="800" dirty="0"/>
+          </a:p>
+          <a:p>
+            <a:pPr indent="0" marL="0">
+              <a:buNone/>
+            </a:pPr>
+            <a:r>
+              <a:rPr lang="en-US" sz="800" dirty="0">
+                <a:solidFill>
+                  <a:srgbClr val="334155"/>
+                </a:solidFill>
+                <a:latin typeface="Calibri" pitchFamily="34" charset="0"/>
+                <a:ea typeface="Calibri" pitchFamily="34" charset="-122"/>
+                <a:cs typeface="Calibri" pitchFamily="34" charset="-120"/>
+              </a:rPr>
+              <a:t>Admin Content tab + approval queue</a:t>
+            </a:r>
+            <a:endParaRPr lang="en-US" sz="800" dirty="0"/>
+          </a:p>
+          <a:p>
+            <a:pPr indent="0" marL="0">
+              <a:buNone/>
+            </a:pPr>
+            <a:r>
+              <a:rPr lang="en-US" sz="800" dirty="0">
+                <a:solidFill>
+                  <a:srgbClr val="334155"/>
+                </a:solidFill>
+                <a:latin typeface="Calibri" pitchFamily="34" charset="0"/>
+                <a:ea typeface="Calibri" pitchFamily="34" charset="-122"/>
+                <a:cs typeface="Calibri" pitchFamily="34" charset="-120"/>
+              </a:rPr>
+              <a:t>Brilliant Jobs LinkedIn company page</a:t>
+            </a:r>
+            <a:endParaRPr lang="en-US" sz="800" dirty="0"/>
+          </a:p>
+        </p:txBody>
+      </p:sp>
+      <p:sp>
+        <p:nvSpPr>
+          <p:cNvPr id="17" name="Text 15"/>
+          <p:cNvSpPr/>
+          <p:nvPr/>
+        </p:nvSpPr>
+        <p:spPr>
+          <a:xfrm>
+            <a:off x="6400800" y="2130552"/>
+            <a:ext cx="2011680" cy="548640"/>
+          </a:xfrm>
+          <a:prstGeom prst="rect">
+            <a:avLst/>
+          </a:prstGeom>
+          <a:noFill/>
+          <a:ln/>
+        </p:spPr>
+        <p:txBody>
+          <a:bodyPr wrap="square" lIns="0" tIns="0" rIns="0" bIns="0" rtlCol="0" anchor="ctr"/>
+          <a:lstStyle/>
+          <a:p>
+            <a:pPr indent="0" marL="0">
+              <a:buNone/>
+            </a:pPr>
+            <a:r>
+              <a:rPr lang="en-US" sz="800" dirty="0">
+                <a:solidFill>
+                  <a:srgbClr val="64748B"/>
+                </a:solidFill>
+                <a:latin typeface="Calibri" pitchFamily="34" charset="0"/>
+                <a:ea typeface="Calibri" pitchFamily="34" charset="-122"/>
+                <a:cs typeface="Calibri" pitchFamily="34" charset="-120"/>
+              </a:rPr>
+              <a:t>Pod 1 rules</a:t>
+            </a:r>
+            <a:endParaRPr lang="en-US" sz="800" dirty="0"/>
+          </a:p>
+          <a:p>
+            <a:pPr indent="0" marL="0">
+              <a:buNone/>
+            </a:pPr>
+            <a:r>
+              <a:rPr lang="en-US" sz="800" dirty="0">
+                <a:solidFill>
+                  <a:srgbClr val="64748B"/>
+                </a:solidFill>
+                <a:latin typeface="Calibri" pitchFamily="34" charset="0"/>
+                <a:ea typeface="Calibri" pitchFamily="34" charset="-122"/>
+                <a:cs typeface="Calibri" pitchFamily="34" charset="-120"/>
+              </a:rPr>
+              <a:t>Pod 2 engine</a:t>
+            </a:r>
+            <a:endParaRPr lang="en-US" sz="800" dirty="0"/>
+          </a:p>
+        </p:txBody>
+      </p:sp>
+      <p:sp>
+        <p:nvSpPr>
+          <p:cNvPr id="18" name="Shape 16"/>
+          <p:cNvSpPr/>
+          <p:nvPr/>
+        </p:nvSpPr>
+        <p:spPr>
+          <a:xfrm>
+            <a:off x="548640" y="2798064"/>
+            <a:ext cx="8046720" cy="640080"/>
+          </a:xfrm>
+          <a:prstGeom prst="rect">
+            <a:avLst/>
+          </a:prstGeom>
+          <a:solidFill>
+            <a:srgbClr val="FFFFFF"/>
+          </a:solidFill>
+          <a:ln/>
+          <a:effectLst>
+            <a:outerShdw sx="100000" sy="100000" kx="0" ky="0" algn="bl" rotWithShape="0" blurRad="76200" dist="25400" dir="8100000">
+              <a:srgbClr val="000000">
+                <a:alpha val="10000"/>
+              </a:srgbClr>
+            </a:outerShdw>
+          </a:effectLst>
+        </p:spPr>
+      </p:sp>
+      <p:sp>
+        <p:nvSpPr>
+          <p:cNvPr id="19" name="Shape 17"/>
+          <p:cNvSpPr/>
+          <p:nvPr/>
+        </p:nvSpPr>
+        <p:spPr>
+          <a:xfrm>
+            <a:off x="548640" y="2798064"/>
+            <a:ext cx="54864" cy="640080"/>
+          </a:xfrm>
+          <a:prstGeom prst="rect">
+            <a:avLst/>
+          </a:prstGeom>
+          <a:solidFill>
+            <a:srgbClr val="0D9488"/>
+          </a:solidFill>
+          <a:ln/>
+        </p:spPr>
+      </p:sp>
+      <p:sp>
+        <p:nvSpPr>
+          <p:cNvPr id="20" name="Text 18"/>
+          <p:cNvSpPr/>
+          <p:nvPr/>
+        </p:nvSpPr>
+        <p:spPr>
+          <a:xfrm>
+            <a:off x="731520" y="2798064"/>
+            <a:ext cx="731520" cy="320040"/>
+          </a:xfrm>
+          <a:prstGeom prst="rect">
+            <a:avLst/>
+          </a:prstGeom>
+          <a:noFill/>
+          <a:ln/>
+        </p:spPr>
+        <p:txBody>
+          <a:bodyPr wrap="square" lIns="0" tIns="0" rIns="0" bIns="0" rtlCol="0" anchor="ctr"/>
+          <a:lstStyle/>
+          <a:p>
+            <a:pPr indent="0" marL="0">
+              <a:buNone/>
+            </a:pPr>
+            <a:r>
+              <a:rPr lang="en-US" sz="900" b="1" dirty="0">
+                <a:solidFill>
+                  <a:srgbClr val="0D9488"/>
+                </a:solidFill>
+                <a:latin typeface="Arial" pitchFamily="34" charset="0"/>
+                <a:ea typeface="Arial" pitchFamily="34" charset="-122"/>
+                <a:cs typeface="Arial" pitchFamily="34" charset="-120"/>
+              </a:rPr>
+              <a:t>PHASE 3</a:t>
+            </a:r>
+            <a:endParaRPr lang="en-US" sz="900" dirty="0"/>
+          </a:p>
+        </p:txBody>
+      </p:sp>
+      <p:sp>
+        <p:nvSpPr>
+          <p:cNvPr id="21" name="Text 19"/>
+          <p:cNvSpPr/>
+          <p:nvPr/>
+        </p:nvSpPr>
+        <p:spPr>
+          <a:xfrm>
+            <a:off x="731520" y="3090672"/>
+            <a:ext cx="731520" cy="274320"/>
+          </a:xfrm>
+          <a:prstGeom prst="rect">
+            <a:avLst/>
+          </a:prstGeom>
+          <a:noFill/>
+          <a:ln/>
+        </p:spPr>
+        <p:txBody>
+          <a:bodyPr wrap="square" lIns="0" tIns="0" rIns="0" bIns="0" rtlCol="0" anchor="ctr"/>
+          <a:lstStyle/>
+          <a:p>
+            <a:pPr indent="0" marL="0">
+              <a:buNone/>
+            </a:pPr>
+            <a:r>
+              <a:rPr lang="en-US" sz="800" dirty="0">
+                <a:solidFill>
+                  <a:srgbClr val="64748B"/>
+                </a:solidFill>
+                <a:latin typeface="Calibri" pitchFamily="34" charset="0"/>
+                <a:ea typeface="Calibri" pitchFamily="34" charset="-122"/>
+                <a:cs typeface="Calibri" pitchFamily="34" charset="-120"/>
+              </a:rPr>
+              <a:t>Month 1-2</a:t>
+            </a:r>
+            <a:endParaRPr lang="en-US" sz="800" dirty="0"/>
+          </a:p>
+        </p:txBody>
+      </p:sp>
+      <p:sp>
+        <p:nvSpPr>
+          <p:cNvPr id="22" name="Text 20"/>
+          <p:cNvSpPr/>
+          <p:nvPr/>
+        </p:nvSpPr>
+        <p:spPr>
+          <a:xfrm>
+            <a:off x="1554480" y="2798064"/>
+            <a:ext cx="731520" cy="640080"/>
+          </a:xfrm>
+          <a:prstGeom prst="rect">
+            <a:avLst/>
+          </a:prstGeom>
+          <a:noFill/>
+          <a:ln/>
+        </p:spPr>
+        <p:txBody>
+          <a:bodyPr wrap="square" lIns="0" tIns="0" rIns="0" bIns="0" rtlCol="0" anchor="ctr"/>
+          <a:lstStyle/>
+          <a:p>
+            <a:pPr indent="0" marL="0">
+              <a:buNone/>
+            </a:pPr>
+            <a:r>
+              <a:rPr lang="en-US" sz="1000" b="1" dirty="0">
+                <a:solidFill>
+                  <a:srgbClr val="1A1F36"/>
+                </a:solidFill>
+                <a:latin typeface="Georgia" pitchFamily="34" charset="0"/>
+                <a:ea typeface="Georgia" pitchFamily="34" charset="-122"/>
+                <a:cs typeface="Georgia" pitchFamily="34" charset="-120"/>
+              </a:rPr>
+              <a:t>4-5 days</a:t>
+            </a:r>
+            <a:endParaRPr lang="en-US" sz="1000" dirty="0"/>
+          </a:p>
+        </p:txBody>
+      </p:sp>
+      <p:sp>
+        <p:nvSpPr>
+          <p:cNvPr id="23" name="Text 21"/>
+          <p:cNvSpPr/>
+          <p:nvPr/>
+        </p:nvSpPr>
+        <p:spPr>
+          <a:xfrm>
+            <a:off x="2377440" y="2843784"/>
+            <a:ext cx="3657600" cy="548640"/>
+          </a:xfrm>
+          <a:prstGeom prst="rect">
+            <a:avLst/>
+          </a:prstGeom>
+          <a:noFill/>
+          <a:ln/>
+        </p:spPr>
+        <p:txBody>
+          <a:bodyPr wrap="square" lIns="0" tIns="0" rIns="0" bIns="0" rtlCol="0" anchor="ctr"/>
+          <a:lstStyle/>
+          <a:p>
+            <a:pPr indent="0" marL="0">
+              <a:buNone/>
+            </a:pPr>
+            <a:r>
+              <a:rPr lang="en-US" sz="800" dirty="0">
+                <a:solidFill>
+                  <a:srgbClr val="334155"/>
+                </a:solidFill>
+                <a:latin typeface="Calibri" pitchFamily="34" charset="0"/>
+                <a:ea typeface="Calibri" pitchFamily="34" charset="-122"/>
+                <a:cs typeface="Calibri" pitchFamily="34" charset="-120"/>
+              </a:rPr>
+              <a:t>Blog page template (/blog/{slug})</a:t>
+            </a:r>
+            <a:endParaRPr lang="en-US" sz="800" dirty="0"/>
+          </a:p>
+          <a:p>
+            <a:pPr indent="0" marL="0">
+              <a:buNone/>
+            </a:pPr>
+            <a:r>
+              <a:rPr lang="en-US" sz="800" dirty="0">
+                <a:solidFill>
+                  <a:srgbClr val="334155"/>
+                </a:solidFill>
+                <a:latin typeface="Calibri" pitchFamily="34" charset="0"/>
+                <a:ea typeface="Calibri" pitchFamily="34" charset="-122"/>
+                <a:cs typeface="Calibri" pitchFamily="34" charset="-120"/>
+              </a:rPr>
+              <a:t>Internal merchandising (5 surfaces)</a:t>
+            </a:r>
+            <a:endParaRPr lang="en-US" sz="800" dirty="0"/>
+          </a:p>
+          <a:p>
+            <a:pPr indent="0" marL="0">
+              <a:buNone/>
+            </a:pPr>
+            <a:r>
+              <a:rPr lang="en-US" sz="800" dirty="0">
+                <a:solidFill>
+                  <a:srgbClr val="334155"/>
+                </a:solidFill>
+                <a:latin typeface="Calibri" pitchFamily="34" charset="0"/>
+                <a:ea typeface="Calibri" pitchFamily="34" charset="-122"/>
+                <a:cs typeface="Calibri" pitchFamily="34" charset="-120"/>
+              </a:rPr>
+              <a:t>Unified social API integration (Late)</a:t>
+            </a:r>
+            <a:endParaRPr lang="en-US" sz="800" dirty="0"/>
+          </a:p>
+          <a:p>
+            <a:pPr indent="0" marL="0">
+              <a:buNone/>
+            </a:pPr>
+            <a:r>
+              <a:rPr lang="en-US" sz="800" dirty="0">
+                <a:solidFill>
+                  <a:srgbClr val="334155"/>
+                </a:solidFill>
+                <a:latin typeface="Calibri" pitchFamily="34" charset="0"/>
+                <a:ea typeface="Calibri" pitchFamily="34" charset="-122"/>
+                <a:cs typeface="Calibri" pitchFamily="34" charset="-120"/>
+              </a:rPr>
+              <a:t>Social metrics webhook ingestion</a:t>
+            </a:r>
+            <a:endParaRPr lang="en-US" sz="800" dirty="0"/>
+          </a:p>
+          <a:p>
+            <a:pPr indent="0" marL="0">
+              <a:buNone/>
+            </a:pPr>
+            <a:r>
+              <a:rPr lang="en-US" sz="800" dirty="0">
+                <a:solidFill>
+                  <a:srgbClr val="334155"/>
+                </a:solidFill>
+                <a:latin typeface="Calibri" pitchFamily="34" charset="0"/>
+                <a:ea typeface="Calibri" pitchFamily="34" charset="-122"/>
+                <a:cs typeface="Calibri" pitchFamily="34" charset="-120"/>
+              </a:rPr>
+              <a:t>Newsletter integration via Resend</a:t>
+            </a:r>
+            <a:endParaRPr lang="en-US" sz="800" dirty="0"/>
+          </a:p>
+        </p:txBody>
+      </p:sp>
+      <p:sp>
+        <p:nvSpPr>
+          <p:cNvPr id="24" name="Text 22"/>
+          <p:cNvSpPr/>
+          <p:nvPr/>
+        </p:nvSpPr>
+        <p:spPr>
+          <a:xfrm>
+            <a:off x="6400800" y="2843784"/>
+            <a:ext cx="2011680" cy="548640"/>
+          </a:xfrm>
+          <a:prstGeom prst="rect">
+            <a:avLst/>
+          </a:prstGeom>
+          <a:noFill/>
+          <a:ln/>
+        </p:spPr>
+        <p:txBody>
+          <a:bodyPr wrap="square" lIns="0" tIns="0" rIns="0" bIns="0" rtlCol="0" anchor="ctr"/>
+          <a:lstStyle/>
+          <a:p>
+            <a:pPr indent="0" marL="0">
+              <a:buNone/>
+            </a:pPr>
+            <a:r>
+              <a:rPr lang="en-US" sz="800" dirty="0">
+                <a:solidFill>
+                  <a:srgbClr val="64748B"/>
+                </a:solidFill>
+                <a:latin typeface="Calibri" pitchFamily="34" charset="0"/>
+                <a:ea typeface="Calibri" pitchFamily="34" charset="-122"/>
+                <a:cs typeface="Calibri" pitchFamily="34" charset="-120"/>
+              </a:rPr>
+              <a:t>Pod 2 builds</a:t>
+            </a:r>
+            <a:endParaRPr lang="en-US" sz="800" dirty="0"/>
+          </a:p>
+          <a:p>
+            <a:pPr indent="0" marL="0">
+              <a:buNone/>
+            </a:pPr>
+            <a:r>
+              <a:rPr lang="en-US" sz="800" dirty="0">
+                <a:solidFill>
+                  <a:srgbClr val="64748B"/>
+                </a:solidFill>
+                <a:latin typeface="Calibri" pitchFamily="34" charset="0"/>
+                <a:ea typeface="Calibri" pitchFamily="34" charset="-122"/>
+                <a:cs typeface="Calibri" pitchFamily="34" charset="-120"/>
+              </a:rPr>
+              <a:t>Pod 1 placement</a:t>
+            </a:r>
+            <a:endParaRPr lang="en-US" sz="800" dirty="0"/>
+          </a:p>
+        </p:txBody>
+      </p:sp>
+      <p:sp>
+        <p:nvSpPr>
+          <p:cNvPr id="25" name="Shape 23"/>
+          <p:cNvSpPr/>
+          <p:nvPr/>
+        </p:nvSpPr>
+        <p:spPr>
+          <a:xfrm>
+            <a:off x="548640" y="3511296"/>
+            <a:ext cx="8046720" cy="640080"/>
+          </a:xfrm>
+          <a:prstGeom prst="rect">
+            <a:avLst/>
+          </a:prstGeom>
+          <a:solidFill>
+            <a:srgbClr val="FFFFFF"/>
+          </a:solidFill>
+          <a:ln/>
+          <a:effectLst>
+            <a:outerShdw sx="100000" sy="100000" kx="0" ky="0" algn="bl" rotWithShape="0" blurRad="76200" dist="25400" dir="8100000">
+              <a:srgbClr val="000000">
+                <a:alpha val="10000"/>
+              </a:srgbClr>
+            </a:outerShdw>
+          </a:effectLst>
+        </p:spPr>
+      </p:sp>
+      <p:sp>
+        <p:nvSpPr>
+          <p:cNvPr id="26" name="Shape 24"/>
+          <p:cNvSpPr/>
+          <p:nvPr/>
+        </p:nvSpPr>
+        <p:spPr>
+          <a:xfrm>
+            <a:off x="548640" y="3511296"/>
+            <a:ext cx="54864" cy="640080"/>
+          </a:xfrm>
+          <a:prstGeom prst="rect">
+            <a:avLst/>
+          </a:prstGeom>
+          <a:solidFill>
+            <a:srgbClr val="8B5CF6"/>
+          </a:solidFill>
+          <a:ln/>
+        </p:spPr>
+      </p:sp>
+      <p:sp>
+        <p:nvSpPr>
+          <p:cNvPr id="27" name="Text 25"/>
+          <p:cNvSpPr/>
+          <p:nvPr/>
+        </p:nvSpPr>
+        <p:spPr>
+          <a:xfrm>
+            <a:off x="731520" y="3511296"/>
+            <a:ext cx="731520" cy="320040"/>
+          </a:xfrm>
+          <a:prstGeom prst="rect">
+            <a:avLst/>
+          </a:prstGeom>
+          <a:noFill/>
+          <a:ln/>
+        </p:spPr>
+        <p:txBody>
+          <a:bodyPr wrap="square" lIns="0" tIns="0" rIns="0" bIns="0" rtlCol="0" anchor="ctr"/>
+          <a:lstStyle/>
+          <a:p>
+            <a:pPr indent="0" marL="0">
+              <a:buNone/>
+            </a:pPr>
+            <a:r>
+              <a:rPr lang="en-US" sz="900" b="1" dirty="0">
+                <a:solidFill>
+                  <a:srgbClr val="8B5CF6"/>
+                </a:solidFill>
+                <a:latin typeface="Arial" pitchFamily="34" charset="0"/>
+                <a:ea typeface="Arial" pitchFamily="34" charset="-122"/>
+                <a:cs typeface="Arial" pitchFamily="34" charset="-120"/>
+              </a:rPr>
+              <a:t>PHASE 4</a:t>
+            </a:r>
+            <a:endParaRPr lang="en-US" sz="900" dirty="0"/>
+          </a:p>
+        </p:txBody>
+      </p:sp>
+      <p:sp>
+        <p:nvSpPr>
+          <p:cNvPr id="28" name="Text 26"/>
+          <p:cNvSpPr/>
+          <p:nvPr/>
+        </p:nvSpPr>
+        <p:spPr>
+          <a:xfrm>
+            <a:off x="731520" y="3803904"/>
+            <a:ext cx="731520" cy="274320"/>
+          </a:xfrm>
+          <a:prstGeom prst="rect">
+            <a:avLst/>
+          </a:prstGeom>
+          <a:noFill/>
+          <a:ln/>
+        </p:spPr>
+        <p:txBody>
+          <a:bodyPr wrap="square" lIns="0" tIns="0" rIns="0" bIns="0" rtlCol="0" anchor="ctr"/>
+          <a:lstStyle/>
+          <a:p>
+            <a:pPr indent="0" marL="0">
+              <a:buNone/>
+            </a:pPr>
+            <a:r>
+              <a:rPr lang="en-US" sz="800" dirty="0">
+                <a:solidFill>
+                  <a:srgbClr val="64748B"/>
+                </a:solidFill>
+                <a:latin typeface="Calibri" pitchFamily="34" charset="0"/>
+                <a:ea typeface="Calibri" pitchFamily="34" charset="-122"/>
+                <a:cs typeface="Calibri" pitchFamily="34" charset="-120"/>
+              </a:rPr>
+              <a:t>Month 2-3</a:t>
+            </a:r>
+            <a:endParaRPr lang="en-US" sz="800" dirty="0"/>
+          </a:p>
+        </p:txBody>
+      </p:sp>
+      <p:sp>
+        <p:nvSpPr>
+          <p:cNvPr id="29" name="Text 27"/>
+          <p:cNvSpPr/>
+          <p:nvPr/>
+        </p:nvSpPr>
+        <p:spPr>
+          <a:xfrm>
+            <a:off x="1554480" y="3511296"/>
+            <a:ext cx="731520" cy="640080"/>
+          </a:xfrm>
+          <a:prstGeom prst="rect">
+            <a:avLst/>
+          </a:prstGeom>
+          <a:noFill/>
+          <a:ln/>
+        </p:spPr>
+        <p:txBody>
+          <a:bodyPr wrap="square" lIns="0" tIns="0" rIns="0" bIns="0" rtlCol="0" anchor="ctr"/>
+          <a:lstStyle/>
+          <a:p>
+            <a:pPr indent="0" marL="0">
+              <a:buNone/>
+            </a:pPr>
+            <a:r>
+              <a:rPr lang="en-US" sz="1000" b="1" dirty="0">
+                <a:solidFill>
+                  <a:srgbClr val="1A1F36"/>
+                </a:solidFill>
+                <a:latin typeface="Georgia" pitchFamily="34" charset="0"/>
+                <a:ea typeface="Georgia" pitchFamily="34" charset="-122"/>
+                <a:cs typeface="Georgia" pitchFamily="34" charset="-120"/>
+              </a:rPr>
+              <a:t>6-8 days</a:t>
+            </a:r>
+            <a:endParaRPr lang="en-US" sz="1000" dirty="0"/>
+          </a:p>
+        </p:txBody>
+      </p:sp>
+      <p:sp>
+        <p:nvSpPr>
+          <p:cNvPr id="30" name="Text 28"/>
+          <p:cNvSpPr/>
+          <p:nvPr/>
+        </p:nvSpPr>
+        <p:spPr>
+          <a:xfrm>
+            <a:off x="2377440" y="3557016"/>
+            <a:ext cx="3657600" cy="548640"/>
+          </a:xfrm>
+          <a:prstGeom prst="rect">
+            <a:avLst/>
+          </a:prstGeom>
+          <a:noFill/>
+          <a:ln/>
+        </p:spPr>
+        <p:txBody>
+          <a:bodyPr wrap="square" lIns="0" tIns="0" rIns="0" bIns="0" rtlCol="0" anchor="ctr"/>
+          <a:lstStyle/>
+          <a:p>
+            <a:pPr indent="0" marL="0">
+              <a:buNone/>
+            </a:pPr>
+            <a:r>
+              <a:rPr lang="en-US" sz="800" dirty="0">
+                <a:solidFill>
+                  <a:srgbClr val="334155"/>
+                </a:solidFill>
+                <a:latin typeface="Calibri" pitchFamily="34" charset="0"/>
+                <a:ea typeface="Calibri" pitchFamily="34" charset="-122"/>
+                <a:cs typeface="Calibri" pitchFamily="34" charset="-120"/>
+              </a:rPr>
+              <a:t>Video rendering pipeline</a:t>
+            </a:r>
+            <a:endParaRPr lang="en-US" sz="800" dirty="0"/>
+          </a:p>
+          <a:p>
+            <a:pPr indent="0" marL="0">
+              <a:buNone/>
+            </a:pPr>
+            <a:r>
+              <a:rPr lang="en-US" sz="800" dirty="0">
+                <a:solidFill>
+                  <a:srgbClr val="334155"/>
+                </a:solidFill>
+                <a:latin typeface="Calibri" pitchFamily="34" charset="0"/>
+                <a:ea typeface="Calibri" pitchFamily="34" charset="-122"/>
+                <a:cs typeface="Calibri" pitchFamily="34" charset="-120"/>
+              </a:rPr>
+              <a:t>AI voiceover + animated charts</a:t>
+            </a:r>
+            <a:endParaRPr lang="en-US" sz="800" dirty="0"/>
+          </a:p>
+          <a:p>
+            <a:pPr indent="0" marL="0">
+              <a:buNone/>
+            </a:pPr>
+            <a:r>
+              <a:rPr lang="en-US" sz="800" dirty="0">
+                <a:solidFill>
+                  <a:srgbClr val="334155"/>
+                </a:solidFill>
+                <a:latin typeface="Calibri" pitchFamily="34" charset="0"/>
+                <a:ea typeface="Calibri" pitchFamily="34" charset="-122"/>
+                <a:cs typeface="Calibri" pitchFamily="34" charset="-120"/>
+              </a:rPr>
+              <a:t>YouTube / Shorts / Reels publishing</a:t>
+            </a:r>
+            <a:endParaRPr lang="en-US" sz="800" dirty="0"/>
+          </a:p>
+          <a:p>
+            <a:pPr indent="0" marL="0">
+              <a:buNone/>
+            </a:pPr>
+            <a:r>
+              <a:rPr lang="en-US" sz="800" dirty="0">
+                <a:solidFill>
+                  <a:srgbClr val="334155"/>
+                </a:solidFill>
+                <a:latin typeface="Calibri" pitchFamily="34" charset="0"/>
+                <a:ea typeface="Calibri" pitchFamily="34" charset="-122"/>
+                <a:cs typeface="Calibri" pitchFamily="34" charset="-120"/>
+              </a:rPr>
+              <a:t>Survey research program (pop-ups)</a:t>
+            </a:r>
+            <a:endParaRPr lang="en-US" sz="800" dirty="0"/>
+          </a:p>
+          <a:p>
+            <a:pPr indent="0" marL="0">
+              <a:buNone/>
+            </a:pPr>
+            <a:r>
+              <a:rPr lang="en-US" sz="800" dirty="0">
+                <a:solidFill>
+                  <a:srgbClr val="334155"/>
+                </a:solidFill>
+                <a:latin typeface="Calibri" pitchFamily="34" charset="0"/>
+                <a:ea typeface="Calibri" pitchFamily="34" charset="-122"/>
+                <a:cs typeface="Calibri" pitchFamily="34" charset="-120"/>
+              </a:rPr>
+              <a:t>Personal journey opt-in system</a:t>
+            </a:r>
+            <a:endParaRPr lang="en-US" sz="800" dirty="0"/>
+          </a:p>
+        </p:txBody>
+      </p:sp>
+      <p:sp>
+        <p:nvSpPr>
+          <p:cNvPr id="31" name="Text 29"/>
+          <p:cNvSpPr/>
+          <p:nvPr/>
+        </p:nvSpPr>
+        <p:spPr>
+          <a:xfrm>
+            <a:off x="6400800" y="3557016"/>
+            <a:ext cx="2011680" cy="548640"/>
+          </a:xfrm>
+          <a:prstGeom prst="rect">
+            <a:avLst/>
+          </a:prstGeom>
+          <a:noFill/>
+          <a:ln/>
+        </p:spPr>
+        <p:txBody>
+          <a:bodyPr wrap="square" lIns="0" tIns="0" rIns="0" bIns="0" rtlCol="0" anchor="ctr"/>
+          <a:lstStyle/>
+          <a:p>
+            <a:pPr indent="0" marL="0">
+              <a:buNone/>
+            </a:pPr>
+            <a:r>
+              <a:rPr lang="en-US" sz="800" dirty="0">
+                <a:solidFill>
+                  <a:srgbClr val="64748B"/>
+                </a:solidFill>
+                <a:latin typeface="Calibri" pitchFamily="34" charset="0"/>
+                <a:ea typeface="Calibri" pitchFamily="34" charset="-122"/>
+                <a:cs typeface="Calibri" pitchFamily="34" charset="-120"/>
+              </a:rPr>
+              <a:t>Pod 2 builds</a:t>
+            </a:r>
+            <a:endParaRPr lang="en-US" sz="800" dirty="0"/>
+          </a:p>
+          <a:p>
+            <a:pPr indent="0" marL="0">
+              <a:buNone/>
+            </a:pPr>
+            <a:r>
+              <a:rPr lang="en-US" sz="800" dirty="0">
+                <a:solidFill>
+                  <a:srgbClr val="64748B"/>
+                </a:solidFill>
+                <a:latin typeface="Calibri" pitchFamily="34" charset="0"/>
+                <a:ea typeface="Calibri" pitchFamily="34" charset="-122"/>
+                <a:cs typeface="Calibri" pitchFamily="34" charset="-120"/>
+              </a:rPr>
+              <a:t>Pod 1 templates</a:t>
+            </a:r>
+            <a:endParaRPr lang="en-US" sz="800" dirty="0"/>
+          </a:p>
+        </p:txBody>
+      </p:sp>
+      <p:sp>
+        <p:nvSpPr>
+          <p:cNvPr id="32" name="Shape 30"/>
+          <p:cNvSpPr/>
+          <p:nvPr/>
+        </p:nvSpPr>
+        <p:spPr>
+          <a:xfrm>
+            <a:off x="548640" y="4224528"/>
+            <a:ext cx="8046720" cy="640080"/>
+          </a:xfrm>
+          <a:prstGeom prst="rect">
+            <a:avLst/>
+          </a:prstGeom>
+          <a:solidFill>
+            <a:srgbClr val="FFFFFF"/>
+          </a:solidFill>
+          <a:ln/>
+          <a:effectLst>
+            <a:outerShdw sx="100000" sy="100000" kx="0" ky="0" algn="bl" rotWithShape="0" blurRad="76200" dist="25400" dir="8100000">
+              <a:srgbClr val="000000">
+                <a:alpha val="10000"/>
+              </a:srgbClr>
+            </a:outerShdw>
+          </a:effectLst>
+        </p:spPr>
+      </p:sp>
+      <p:sp>
+        <p:nvSpPr>
+          <p:cNvPr id="33" name="Shape 31"/>
+          <p:cNvSpPr/>
+          <p:nvPr/>
+        </p:nvSpPr>
+        <p:spPr>
+          <a:xfrm>
+            <a:off x="548640" y="4224528"/>
+            <a:ext cx="54864" cy="640080"/>
+          </a:xfrm>
+          <a:prstGeom prst="rect">
+            <a:avLst/>
+          </a:prstGeom>
+          <a:solidFill>
+            <a:srgbClr val="F59E0B"/>
+          </a:solidFill>
+          <a:ln/>
+        </p:spPr>
+      </p:sp>
+      <p:sp>
+        <p:nvSpPr>
+          <p:cNvPr id="34" name="Text 32"/>
+          <p:cNvSpPr/>
+          <p:nvPr/>
+        </p:nvSpPr>
+        <p:spPr>
+          <a:xfrm>
+            <a:off x="731520" y="4224528"/>
+            <a:ext cx="731520" cy="320040"/>
+          </a:xfrm>
+          <a:prstGeom prst="rect">
+            <a:avLst/>
+          </a:prstGeom>
+          <a:noFill/>
+          <a:ln/>
+        </p:spPr>
+        <p:txBody>
+          <a:bodyPr wrap="square" lIns="0" tIns="0" rIns="0" bIns="0" rtlCol="0" anchor="ctr"/>
+          <a:lstStyle/>
+          <a:p>
+            <a:pPr indent="0" marL="0">
+              <a:buNone/>
+            </a:pPr>
+            <a:r>
+              <a:rPr lang="en-US" sz="900" b="1" dirty="0">
+                <a:solidFill>
+                  <a:srgbClr val="F59E0B"/>
+                </a:solidFill>
+                <a:latin typeface="Arial" pitchFamily="34" charset="0"/>
+                <a:ea typeface="Arial" pitchFamily="34" charset="-122"/>
+                <a:cs typeface="Arial" pitchFamily="34" charset="-120"/>
+              </a:rPr>
+              <a:t>PHASE 5</a:t>
+            </a:r>
+            <a:endParaRPr lang="en-US" sz="900" dirty="0"/>
+          </a:p>
+        </p:txBody>
+      </p:sp>
+      <p:sp>
+        <p:nvSpPr>
+          <p:cNvPr id="35" name="Text 33"/>
+          <p:cNvSpPr/>
+          <p:nvPr/>
+        </p:nvSpPr>
+        <p:spPr>
+          <a:xfrm>
+            <a:off x="731520" y="4517136"/>
+            <a:ext cx="731520" cy="274320"/>
+          </a:xfrm>
+          <a:prstGeom prst="rect">
+            <a:avLst/>
+          </a:prstGeom>
+          <a:noFill/>
+          <a:ln/>
+        </p:spPr>
+        <p:txBody>
+          <a:bodyPr wrap="square" lIns="0" tIns="0" rIns="0" bIns="0" rtlCol="0" anchor="ctr"/>
+          <a:lstStyle/>
+          <a:p>
+            <a:pPr indent="0" marL="0">
+              <a:buNone/>
+            </a:pPr>
+            <a:r>
+              <a:rPr lang="en-US" sz="800" dirty="0">
+                <a:solidFill>
+                  <a:srgbClr val="64748B"/>
+                </a:solidFill>
+                <a:latin typeface="Calibri" pitchFamily="34" charset="0"/>
+                <a:ea typeface="Calibri" pitchFamily="34" charset="-122"/>
+                <a:cs typeface="Calibri" pitchFamily="34" charset="-120"/>
+              </a:rPr>
+              <a:t>Month 3+</a:t>
+            </a:r>
+            <a:endParaRPr lang="en-US" sz="800" dirty="0"/>
+          </a:p>
+        </p:txBody>
+      </p:sp>
+      <p:sp>
+        <p:nvSpPr>
+          <p:cNvPr id="36" name="Text 34"/>
+          <p:cNvSpPr/>
+          <p:nvPr/>
+        </p:nvSpPr>
+        <p:spPr>
+          <a:xfrm>
+            <a:off x="1554480" y="4224528"/>
+            <a:ext cx="731520" cy="640080"/>
+          </a:xfrm>
+          <a:prstGeom prst="rect">
+            <a:avLst/>
+          </a:prstGeom>
+          <a:noFill/>
+          <a:ln/>
+        </p:spPr>
+        <p:txBody>
+          <a:bodyPr wrap="square" lIns="0" tIns="0" rIns="0" bIns="0" rtlCol="0" anchor="ctr"/>
+          <a:lstStyle/>
+          <a:p>
+            <a:pPr indent="0" marL="0">
+              <a:buNone/>
+            </a:pPr>
+            <a:r>
+              <a:rPr lang="en-US" sz="1000" b="1" dirty="0">
+                <a:solidFill>
+                  <a:srgbClr val="1A1F36"/>
+                </a:solidFill>
+                <a:latin typeface="Georgia" pitchFamily="34" charset="0"/>
+                <a:ea typeface="Georgia" pitchFamily="34" charset="-122"/>
+                <a:cs typeface="Georgia" pitchFamily="34" charset="-120"/>
+              </a:rPr>
+              <a:t>8-11 days</a:t>
+            </a:r>
+            <a:endParaRPr lang="en-US" sz="1000" dirty="0"/>
+          </a:p>
+        </p:txBody>
+      </p:sp>
+      <p:sp>
+        <p:nvSpPr>
+          <p:cNvPr id="37" name="Text 35"/>
+          <p:cNvSpPr/>
+          <p:nvPr/>
+        </p:nvSpPr>
+        <p:spPr>
+          <a:xfrm>
+            <a:off x="2377440" y="4270248"/>
+            <a:ext cx="3657600" cy="548640"/>
+          </a:xfrm>
+          <a:prstGeom prst="rect">
+            <a:avLst/>
+          </a:prstGeom>
+          <a:noFill/>
+          <a:ln/>
+        </p:spPr>
+        <p:txBody>
+          <a:bodyPr wrap="square" lIns="0" tIns="0" rIns="0" bIns="0" rtlCol="0" anchor="ctr"/>
+          <a:lstStyle/>
+          <a:p>
+            <a:pPr indent="0" marL="0">
+              <a:buNone/>
+            </a:pPr>
+            <a:r>
+              <a:rPr lang="en-US" sz="800" dirty="0">
+                <a:solidFill>
+                  <a:srgbClr val="334155"/>
+                </a:solidFill>
+                <a:latin typeface="Calibri" pitchFamily="34" charset="0"/>
+                <a:ea typeface="Calibri" pitchFamily="34" charset="-122"/>
+                <a:cs typeface="Calibri" pitchFamily="34" charset="-120"/>
+              </a:rPr>
+              <a:t>Economic data ingestion (BLS/FRED)</a:t>
+            </a:r>
+            <a:endParaRPr lang="en-US" sz="800" dirty="0"/>
+          </a:p>
+          <a:p>
+            <a:pPr indent="0" marL="0">
+              <a:buNone/>
+            </a:pPr>
+            <a:r>
+              <a:rPr lang="en-US" sz="800" dirty="0">
+                <a:solidFill>
+                  <a:srgbClr val="334155"/>
+                </a:solidFill>
+                <a:latin typeface="Calibri" pitchFamily="34" charset="0"/>
+                <a:ea typeface="Calibri" pitchFamily="34" charset="-122"/>
+                <a:cs typeface="Calibri" pitchFamily="34" charset="-120"/>
+              </a:rPr>
+              <a:t>Correlation engine</a:t>
+            </a:r>
+            <a:endParaRPr lang="en-US" sz="800" dirty="0"/>
+          </a:p>
+          <a:p>
+            <a:pPr indent="0" marL="0">
+              <a:buNone/>
+            </a:pPr>
+            <a:r>
+              <a:rPr lang="en-US" sz="800" dirty="0">
+                <a:solidFill>
+                  <a:srgbClr val="334155"/>
+                </a:solidFill>
+                <a:latin typeface="Calibri" pitchFamily="34" charset="0"/>
+                <a:ea typeface="Calibri" pitchFamily="34" charset="-122"/>
+                <a:cs typeface="Calibri" pitchFamily="34" charset="-120"/>
+              </a:rPr>
+              <a:t>Social → internal feedback loop</a:t>
+            </a:r>
+            <a:endParaRPr lang="en-US" sz="800" dirty="0"/>
+          </a:p>
+          <a:p>
+            <a:pPr indent="0" marL="0">
+              <a:buNone/>
+            </a:pPr>
+            <a:r>
+              <a:rPr lang="en-US" sz="800" dirty="0">
+                <a:solidFill>
+                  <a:srgbClr val="334155"/>
+                </a:solidFill>
+                <a:latin typeface="Calibri" pitchFamily="34" charset="0"/>
+                <a:ea typeface="Calibri" pitchFamily="34" charset="-122"/>
+                <a:cs typeface="Calibri" pitchFamily="34" charset="-120"/>
+              </a:rPr>
+              <a:t>Press citation tracking</a:t>
+            </a:r>
+            <a:endParaRPr lang="en-US" sz="800" dirty="0"/>
+          </a:p>
+          <a:p>
+            <a:pPr indent="0" marL="0">
+              <a:buNone/>
+            </a:pPr>
+            <a:r>
+              <a:rPr lang="en-US" sz="800" dirty="0">
+                <a:solidFill>
+                  <a:srgbClr val="334155"/>
+                </a:solidFill>
+                <a:latin typeface="Calibri" pitchFamily="34" charset="0"/>
+                <a:ea typeface="Calibri" pitchFamily="34" charset="-122"/>
+                <a:cs typeface="Calibri" pitchFamily="34" charset="-120"/>
+              </a:rPr>
+              <a:t>Auto-approve for high-score stories</a:t>
+            </a:r>
+            <a:endParaRPr lang="en-US" sz="800" dirty="0"/>
+          </a:p>
+        </p:txBody>
+      </p:sp>
+      <p:sp>
+        <p:nvSpPr>
+          <p:cNvPr id="38" name="Text 36"/>
+          <p:cNvSpPr/>
+          <p:nvPr/>
+        </p:nvSpPr>
+        <p:spPr>
+          <a:xfrm>
+            <a:off x="6400800" y="4270248"/>
+            <a:ext cx="2011680" cy="548640"/>
+          </a:xfrm>
+          <a:prstGeom prst="rect">
+            <a:avLst/>
+          </a:prstGeom>
+          <a:noFill/>
+          <a:ln/>
+        </p:spPr>
+        <p:txBody>
+          <a:bodyPr wrap="square" lIns="0" tIns="0" rIns="0" bIns="0" rtlCol="0" anchor="ctr"/>
+          <a:lstStyle/>
+          <a:p>
+            <a:pPr indent="0" marL="0">
+              <a:buNone/>
+            </a:pPr>
+            <a:r>
+              <a:rPr lang="en-US" sz="800" dirty="0">
+                <a:solidFill>
+                  <a:srgbClr val="64748B"/>
+                </a:solidFill>
+                <a:latin typeface="Calibri" pitchFamily="34" charset="0"/>
+                <a:ea typeface="Calibri" pitchFamily="34" charset="-122"/>
+                <a:cs typeface="Calibri" pitchFamily="34" charset="-120"/>
+              </a:rPr>
+              <a:t>Pod 2 builds</a:t>
+            </a:r>
+            <a:endParaRPr lang="en-US" sz="800" dirty="0"/>
+          </a:p>
+          <a:p>
+            <a:pPr indent="0" marL="0">
+              <a:buNone/>
+            </a:pPr>
+            <a:r>
+              <a:rPr lang="en-US" sz="800" dirty="0">
+                <a:solidFill>
+                  <a:srgbClr val="64748B"/>
+                </a:solidFill>
+                <a:latin typeface="Calibri" pitchFamily="34" charset="0"/>
+                <a:ea typeface="Calibri" pitchFamily="34" charset="-122"/>
+                <a:cs typeface="Calibri" pitchFamily="34" charset="-120"/>
+              </a:rPr>
+              <a:t>Pod 1 tuning</a:t>
+            </a:r>
+            <a:endParaRPr lang="en-US" sz="800" dirty="0"/>
+          </a:p>
+        </p:txBody>
+      </p:sp>
+      <p:sp>
+        <p:nvSpPr>
+          <p:cNvPr id="39" name="Text 37"/>
+          <p:cNvSpPr/>
+          <p:nvPr/>
+        </p:nvSpPr>
+        <p:spPr>
+          <a:xfrm>
+            <a:off x="731520" y="4709160"/>
+            <a:ext cx="7680960" cy="274320"/>
+          </a:xfrm>
+          <a:prstGeom prst="rect">
+            <a:avLst/>
+          </a:prstGeom>
+          <a:noFill/>
+          <a:ln/>
+        </p:spPr>
+        <p:txBody>
+          <a:bodyPr wrap="square" lIns="0" tIns="0" rIns="0" bIns="0" rtlCol="0" anchor="ctr"/>
+          <a:lstStyle/>
+          <a:p>
+            <a:pPr indent="0" marL="0">
+              <a:buNone/>
+            </a:pPr>
+            <a:r>
+              <a:rPr lang="en-US" sz="1000" b="1" dirty="0">
+                <a:solidFill>
+                  <a:srgbClr val="1A1F36"/>
+                </a:solidFill>
+                <a:latin typeface="Calibri" pitchFamily="34" charset="0"/>
+                <a:ea typeface="Calibri" pitchFamily="34" charset="-122"/>
+                <a:cs typeface="Calibri" pitchFamily="34" charset="-120"/>
+              </a:rPr>
+              <a:t>Total: 28-38 engineering days across all phases  ·  Phase 1 is launch-critical  ·  Phases 2-3 ship month 1-2  ·  Phases 4-5 are month 2-3+</a:t>
+            </a:r>
+            <a:endParaRPr lang="en-US" sz="1000" dirty="0"/>
+          </a:p>
+        </p:txBody>
+      </p:sp>
+    </p:spTree>
+  </p:cSld>
+  <p:clrMapOvr>
+    <a:masterClrMapping/>
+  </p:clrMapOvr>
+</p:sld>
+</file>
+
+<file path=ppt/slides/slide14.xml><?xml version="1.0" encoding="utf-8"?>
+<p:sld xmlns:a="http://schemas.openxmlformats.org/drawingml/2006/main" xmlns:r="http://schemas.openxmlformats.org/officeDocument/2006/relationships" xmlns:p="http://schemas.openxmlformats.org/presentationml/2006/main">
+  <p:cSld name="Slide 14">
     <p:bg>
       <p:bgPr>
         <a:solidFill>

--- a/docs/CONTENT_DISTRIBUTION_STRATEGY.pptx
+++ b/docs/CONTENT_DISTRIBUTION_STRATEGY.pptx
@@ -19,9 +19,12 @@
     <p:sldId id="267" r:id="rId13"/>
     <p:sldId id="268" r:id="rId14"/>
     <p:sldId id="269" r:id="rId15"/>
+    <p:sldId id="270" r:id="rId16"/>
+    <p:sldId id="271" r:id="rId17"/>
+    <p:sldId id="272" r:id="rId18"/>
   </p:sldIdLst>
   <p:notesMasterIdLst>
-    <p:notesMasterId r:id="rId16"/>
+    <p:notesMasterId r:id="rId19"/>
   </p:notesMasterIdLst>
   <p:sldSz cx="9144000" cy="5143500"/>
   <p:notesSz cx="5143500" cy="9144000"/>
@@ -979,6 +982,270 @@
             <a:fld id="{F7021451-1387-4CA6-816F-3879F97B5CBC}" type="slidenum">
               <a:rPr lang="en-US"/>
               <a:t>14</a:t>
+            </a:fld>
+            <a:endParaRPr lang="en-US"/>
+          </a:p>
+        </p:txBody>
+      </p:sp>
+    </p:spTree>
+    <p:extLst>
+      <p:ext uri="{BB962C8B-B14F-4D97-AF65-F5344CB8AC3E}">
+        <p14:creationId xmlns:p14="http://schemas.microsoft.com/office/powerpoint/2010/main" val="1024086991"/>
+      </p:ext>
+    </p:extLst>
+  </p:cSld>
+  <p:clrMapOvr>
+    <a:masterClrMapping/>
+  </p:clrMapOvr>
+</p:notes>
+</file>
+
+<file path=ppt/notesSlides/notesSlide15.xml><?xml version="1.0" encoding="utf-8"?>
+<p:notes xmlns:a="http://schemas.openxmlformats.org/drawingml/2006/main" xmlns:r="http://schemas.openxmlformats.org/officeDocument/2006/relationships" xmlns:p="http://schemas.openxmlformats.org/presentationml/2006/main">
+  <p:cSld>
+    <p:spTree>
+      <p:nvGrpSpPr>
+        <p:cNvPr id="1" name=""/>
+        <p:cNvGrpSpPr/>
+        <p:nvPr/>
+      </p:nvGrpSpPr>
+      <p:grpSpPr>
+        <a:xfrm>
+          <a:off x="0" y="0"/>
+          <a:ext cx="0" cy="0"/>
+          <a:chOff x="0" y="0"/>
+          <a:chExt cx="0" cy="0"/>
+        </a:xfrm>
+      </p:grpSpPr>
+      <p:sp>
+        <p:nvSpPr>
+          <p:cNvPr id="2" name="Slide Image Placeholder 1"/>
+          <p:cNvSpPr>
+            <a:spLocks noGrp="1" noRot="1" noChangeAspect="1"/>
+          </p:cNvSpPr>
+          <p:nvPr>
+            <p:ph type="sldImg"/>
+          </p:nvPr>
+        </p:nvSpPr>
+        <p:spPr/>
+      </p:sp>
+      <p:sp>
+        <p:nvSpPr>
+          <p:cNvPr id="3" name="Notes Placeholder 2"/>
+          <p:cNvSpPr>
+            <a:spLocks noGrp="1"/>
+          </p:cNvSpPr>
+          <p:nvPr>
+            <p:ph type="body" idx="1"/>
+          </p:nvPr>
+        </p:nvSpPr>
+        <p:spPr/>
+        <p:txBody>
+          <a:bodyPr/>
+          <a:lstStyle/>
+          <a:p>
+            <a:r>
+              <a:rPr lang="en-US" dirty="0"/>
+              <a:t/>
+            </a:r>
+            <a:endParaRPr lang="en-US" dirty="0"/>
+          </a:p>
+        </p:txBody>
+      </p:sp>
+      <p:sp>
+        <p:nvSpPr>
+          <p:cNvPr id="4" name="Slide Number Placeholder 3"/>
+          <p:cNvSpPr>
+            <a:spLocks noGrp="1"/>
+          </p:cNvSpPr>
+          <p:nvPr>
+            <p:ph type="sldNum" sz="quarter" idx="10"/>
+          </p:nvPr>
+        </p:nvSpPr>
+        <p:spPr/>
+        <p:txBody>
+          <a:bodyPr/>
+          <a:lstStyle/>
+          <a:p>
+            <a:fld id="{F7021451-1387-4CA6-816F-3879F97B5CBC}" type="slidenum">
+              <a:rPr lang="en-US"/>
+              <a:t>15</a:t>
+            </a:fld>
+            <a:endParaRPr lang="en-US"/>
+          </a:p>
+        </p:txBody>
+      </p:sp>
+    </p:spTree>
+    <p:extLst>
+      <p:ext uri="{BB962C8B-B14F-4D97-AF65-F5344CB8AC3E}">
+        <p14:creationId xmlns:p14="http://schemas.microsoft.com/office/powerpoint/2010/main" val="1024086991"/>
+      </p:ext>
+    </p:extLst>
+  </p:cSld>
+  <p:clrMapOvr>
+    <a:masterClrMapping/>
+  </p:clrMapOvr>
+</p:notes>
+</file>
+
+<file path=ppt/notesSlides/notesSlide16.xml><?xml version="1.0" encoding="utf-8"?>
+<p:notes xmlns:a="http://schemas.openxmlformats.org/drawingml/2006/main" xmlns:r="http://schemas.openxmlformats.org/officeDocument/2006/relationships" xmlns:p="http://schemas.openxmlformats.org/presentationml/2006/main">
+  <p:cSld>
+    <p:spTree>
+      <p:nvGrpSpPr>
+        <p:cNvPr id="1" name=""/>
+        <p:cNvGrpSpPr/>
+        <p:nvPr/>
+      </p:nvGrpSpPr>
+      <p:grpSpPr>
+        <a:xfrm>
+          <a:off x="0" y="0"/>
+          <a:ext cx="0" cy="0"/>
+          <a:chOff x="0" y="0"/>
+          <a:chExt cx="0" cy="0"/>
+        </a:xfrm>
+      </p:grpSpPr>
+      <p:sp>
+        <p:nvSpPr>
+          <p:cNvPr id="2" name="Slide Image Placeholder 1"/>
+          <p:cNvSpPr>
+            <a:spLocks noGrp="1" noRot="1" noChangeAspect="1"/>
+          </p:cNvSpPr>
+          <p:nvPr>
+            <p:ph type="sldImg"/>
+          </p:nvPr>
+        </p:nvSpPr>
+        <p:spPr/>
+      </p:sp>
+      <p:sp>
+        <p:nvSpPr>
+          <p:cNvPr id="3" name="Notes Placeholder 2"/>
+          <p:cNvSpPr>
+            <a:spLocks noGrp="1"/>
+          </p:cNvSpPr>
+          <p:nvPr>
+            <p:ph type="body" idx="1"/>
+          </p:nvPr>
+        </p:nvSpPr>
+        <p:spPr/>
+        <p:txBody>
+          <a:bodyPr/>
+          <a:lstStyle/>
+          <a:p>
+            <a:r>
+              <a:rPr lang="en-US" dirty="0"/>
+              <a:t/>
+            </a:r>
+            <a:endParaRPr lang="en-US" dirty="0"/>
+          </a:p>
+        </p:txBody>
+      </p:sp>
+      <p:sp>
+        <p:nvSpPr>
+          <p:cNvPr id="4" name="Slide Number Placeholder 3"/>
+          <p:cNvSpPr>
+            <a:spLocks noGrp="1"/>
+          </p:cNvSpPr>
+          <p:nvPr>
+            <p:ph type="sldNum" sz="quarter" idx="10"/>
+          </p:nvPr>
+        </p:nvSpPr>
+        <p:spPr/>
+        <p:txBody>
+          <a:bodyPr/>
+          <a:lstStyle/>
+          <a:p>
+            <a:fld id="{F7021451-1387-4CA6-816F-3879F97B5CBC}" type="slidenum">
+              <a:rPr lang="en-US"/>
+              <a:t>16</a:t>
+            </a:fld>
+            <a:endParaRPr lang="en-US"/>
+          </a:p>
+        </p:txBody>
+      </p:sp>
+    </p:spTree>
+    <p:extLst>
+      <p:ext uri="{BB962C8B-B14F-4D97-AF65-F5344CB8AC3E}">
+        <p14:creationId xmlns:p14="http://schemas.microsoft.com/office/powerpoint/2010/main" val="1024086991"/>
+      </p:ext>
+    </p:extLst>
+  </p:cSld>
+  <p:clrMapOvr>
+    <a:masterClrMapping/>
+  </p:clrMapOvr>
+</p:notes>
+</file>
+
+<file path=ppt/notesSlides/notesSlide17.xml><?xml version="1.0" encoding="utf-8"?>
+<p:notes xmlns:a="http://schemas.openxmlformats.org/drawingml/2006/main" xmlns:r="http://schemas.openxmlformats.org/officeDocument/2006/relationships" xmlns:p="http://schemas.openxmlformats.org/presentationml/2006/main">
+  <p:cSld>
+    <p:spTree>
+      <p:nvGrpSpPr>
+        <p:cNvPr id="1" name=""/>
+        <p:cNvGrpSpPr/>
+        <p:nvPr/>
+      </p:nvGrpSpPr>
+      <p:grpSpPr>
+        <a:xfrm>
+          <a:off x="0" y="0"/>
+          <a:ext cx="0" cy="0"/>
+          <a:chOff x="0" y="0"/>
+          <a:chExt cx="0" cy="0"/>
+        </a:xfrm>
+      </p:grpSpPr>
+      <p:sp>
+        <p:nvSpPr>
+          <p:cNvPr id="2" name="Slide Image Placeholder 1"/>
+          <p:cNvSpPr>
+            <a:spLocks noGrp="1" noRot="1" noChangeAspect="1"/>
+          </p:cNvSpPr>
+          <p:nvPr>
+            <p:ph type="sldImg"/>
+          </p:nvPr>
+        </p:nvSpPr>
+        <p:spPr/>
+      </p:sp>
+      <p:sp>
+        <p:nvSpPr>
+          <p:cNvPr id="3" name="Notes Placeholder 2"/>
+          <p:cNvSpPr>
+            <a:spLocks noGrp="1"/>
+          </p:cNvSpPr>
+          <p:nvPr>
+            <p:ph type="body" idx="1"/>
+          </p:nvPr>
+        </p:nvSpPr>
+        <p:spPr/>
+        <p:txBody>
+          <a:bodyPr/>
+          <a:lstStyle/>
+          <a:p>
+            <a:r>
+              <a:rPr lang="en-US" dirty="0"/>
+              <a:t/>
+            </a:r>
+            <a:endParaRPr lang="en-US" dirty="0"/>
+          </a:p>
+        </p:txBody>
+      </p:sp>
+      <p:sp>
+        <p:nvSpPr>
+          <p:cNvPr id="4" name="Slide Number Placeholder 3"/>
+          <p:cNvSpPr>
+            <a:spLocks noGrp="1"/>
+          </p:cNvSpPr>
+          <p:nvPr>
+            <p:ph type="sldNum" sz="quarter" idx="10"/>
+          </p:nvPr>
+        </p:nvSpPr>
+        <p:spPr/>
+        <p:txBody>
+          <a:bodyPr/>
+          <a:lstStyle/>
+          <a:p>
+            <a:fld id="{F7021451-1387-4CA6-816F-3879F97B5CBC}" type="slidenum">
+              <a:rPr lang="en-US"/>
+              <a:t>17</a:t>
             </a:fld>
             <a:endParaRPr lang="en-US"/>
           </a:p>
@@ -6312,8 +6579,8 @@
         </p:nvSpPr>
         <p:spPr>
           <a:xfrm>
-            <a:off x="731520" y="365760"/>
-            <a:ext cx="7315200" cy="365760"/>
+            <a:off x="731520" y="274320"/>
+            <a:ext cx="7315200" cy="274320"/>
           </a:xfrm>
           <a:prstGeom prst="rect">
             <a:avLst/>
@@ -6337,7 +6604,7 @@
                 <a:ea typeface="Arial" pitchFamily="34" charset="-122"/>
                 <a:cs typeface="Arial" pitchFamily="34" charset="-120"/>
               </a:rPr>
-              <a:t>BUILD SEQUENCE</a:t>
+              <a:t>EDITORIAL CALENDAR</a:t>
             </a:r>
             <a:endParaRPr lang="en-US" sz="1100" dirty="0"/>
           </a:p>
@@ -6351,7 +6618,7 @@
         </p:nvSpPr>
         <p:spPr>
           <a:xfrm>
-            <a:off x="731520" y="731520"/>
+            <a:off x="731520" y="594360"/>
             <a:ext cx="7315200" cy="457200"/>
           </a:xfrm>
           <a:prstGeom prst="rect">
@@ -6376,7 +6643,7 @@
                 <a:ea typeface="Georgia" pitchFamily="34" charset="-122"/>
                 <a:cs typeface="Georgia" pitchFamily="34" charset="-120"/>
               </a:rPr>
-              <a:t>Phased Rollout — Content Engine + Distribution</a:t>
+              <a:t>Scheduled Reporting + The Job Seeker Take</a:t>
             </a:r>
             <a:endParaRPr lang="en-US" sz="2600" dirty="0"/>
           </a:p>
@@ -6390,8 +6657,8 @@
         </p:nvSpPr>
         <p:spPr>
           <a:xfrm>
-            <a:off x="548640" y="1371600"/>
-            <a:ext cx="8046720" cy="640080"/>
+            <a:off x="365760" y="1188720"/>
+            <a:ext cx="8412480" cy="594360"/>
           </a:xfrm>
           <a:prstGeom prst="rect">
             <a:avLst/>
@@ -6417,14 +6684,14 @@
         </p:nvSpPr>
         <p:spPr>
           <a:xfrm>
-            <a:off x="548640" y="1371600"/>
-            <a:ext cx="54864" cy="640080"/>
+            <a:off x="365760" y="1188720"/>
+            <a:ext cx="54864" cy="594360"/>
           </a:xfrm>
           <a:prstGeom prst="rect">
             <a:avLst/>
           </a:prstGeom>
           <a:solidFill>
-            <a:srgbClr val="10B981"/>
+            <a:srgbClr val="8B5CF6"/>
           </a:solidFill>
           <a:ln/>
         </p:spPr>
@@ -6437,8 +6704,8 @@
         </p:nvSpPr>
         <p:spPr>
           <a:xfrm>
-            <a:off x="731520" y="1371600"/>
-            <a:ext cx="731520" cy="320040"/>
+            <a:off x="548640" y="1188720"/>
+            <a:ext cx="8046720" cy="228600"/>
           </a:xfrm>
           <a:prstGeom prst="rect">
             <a:avLst/>
@@ -6456,13 +6723,13 @@
             <a:r>
               <a:rPr lang="en-US" sz="900" b="1" dirty="0">
                 <a:solidFill>
-                  <a:srgbClr val="10B981"/>
+                  <a:srgbClr val="8B5CF6"/>
                 </a:solidFill>
                 <a:latin typeface="Arial" pitchFamily="34" charset="0"/>
                 <a:ea typeface="Arial" pitchFamily="34" charset="-122"/>
                 <a:cs typeface="Arial" pitchFamily="34" charset="-120"/>
               </a:rPr>
-              <a:t>PHASE 1</a:t>
+              <a:t>Every story answers three questions nobody else answers:</a:t>
             </a:r>
             <a:endParaRPr lang="en-US" sz="900" dirty="0"/>
           </a:p>
@@ -6476,102 +6743,24 @@
         </p:nvSpPr>
         <p:spPr>
           <a:xfrm>
-            <a:off x="731520" y="1664208"/>
-            <a:ext cx="731520" cy="274320"/>
-          </a:xfrm>
-          <a:prstGeom prst="rect">
-            <a:avLst/>
-          </a:prstGeom>
-          <a:noFill/>
-          <a:ln/>
-        </p:spPr>
-        <p:txBody>
-          <a:bodyPr wrap="square" lIns="0" tIns="0" rIns="0" bIns="0" rtlCol="0" anchor="ctr"/>
-          <a:lstStyle/>
-          <a:p>
-            <a:pPr indent="0" marL="0">
-              <a:buNone/>
-            </a:pPr>
-            <a:r>
-              <a:rPr lang="en-US" sz="800" dirty="0">
-                <a:solidFill>
-                  <a:srgbClr val="64748B"/>
-                </a:solidFill>
-                <a:latin typeface="Calibri" pitchFamily="34" charset="0"/>
-                <a:ea typeface="Calibri" pitchFamily="34" charset="-122"/>
-                <a:cs typeface="Calibri" pitchFamily="34" charset="-120"/>
-              </a:rPr>
-              <a:t>Pre-Launch</a:t>
-            </a:r>
-            <a:endParaRPr lang="en-US" sz="800" dirty="0"/>
-          </a:p>
-        </p:txBody>
-      </p:sp>
-      <p:sp>
-        <p:nvSpPr>
-          <p:cNvPr id="8" name="Text 6"/>
-          <p:cNvSpPr/>
-          <p:nvPr/>
-        </p:nvSpPr>
-        <p:spPr>
-          <a:xfrm>
-            <a:off x="1554480" y="1371600"/>
-            <a:ext cx="731520" cy="640080"/>
-          </a:xfrm>
-          <a:prstGeom prst="rect">
-            <a:avLst/>
-          </a:prstGeom>
-          <a:noFill/>
-          <a:ln/>
-        </p:spPr>
-        <p:txBody>
-          <a:bodyPr wrap="square" lIns="0" tIns="0" rIns="0" bIns="0" rtlCol="0" anchor="ctr"/>
-          <a:lstStyle/>
-          <a:p>
-            <a:pPr indent="0" marL="0">
-              <a:buNone/>
-            </a:pPr>
-            <a:r>
-              <a:rPr lang="en-US" sz="1000" b="1" dirty="0">
-                <a:solidFill>
-                  <a:srgbClr val="1A1F36"/>
-                </a:solidFill>
-                <a:latin typeface="Georgia" pitchFamily="34" charset="0"/>
-                <a:ea typeface="Georgia" pitchFamily="34" charset="-122"/>
-                <a:cs typeface="Georgia" pitchFamily="34" charset="-120"/>
-              </a:rPr>
-              <a:t>5-7 days</a:t>
-            </a:r>
-            <a:endParaRPr lang="en-US" sz="1000" dirty="0"/>
-          </a:p>
-        </p:txBody>
-      </p:sp>
-      <p:sp>
-        <p:nvSpPr>
-          <p:cNvPr id="9" name="Text 7"/>
-          <p:cNvSpPr/>
-          <p:nvPr/>
-        </p:nvSpPr>
-        <p:spPr>
-          <a:xfrm>
-            <a:off x="2377440" y="1417320"/>
-            <a:ext cx="3657600" cy="548640"/>
-          </a:xfrm>
-          <a:prstGeom prst="rect">
-            <a:avLst/>
-          </a:prstGeom>
-          <a:noFill/>
-          <a:ln/>
-        </p:spPr>
-        <p:txBody>
-          <a:bodyPr wrap="square" lIns="0" tIns="0" rIns="0" bIns="0" rtlCol="0" anchor="ctr"/>
-          <a:lstStyle/>
-          <a:p>
-            <a:pPr indent="0" marL="0">
-              <a:buNone/>
-            </a:pPr>
-            <a:r>
-              <a:rPr lang="en-US" sz="800" dirty="0">
+            <a:off x="548640" y="1417320"/>
+            <a:ext cx="8046720" cy="320040"/>
+          </a:xfrm>
+          <a:prstGeom prst="rect">
+            <a:avLst/>
+          </a:prstGeom>
+          <a:noFill/>
+          <a:ln/>
+        </p:spPr>
+        <p:txBody>
+          <a:bodyPr wrap="square" lIns="0" tIns="0" rIns="0" bIns="0" rtlCol="0" anchor="ctr"/>
+          <a:lstStyle/>
+          <a:p>
+            <a:pPr indent="0" marL="0">
+              <a:buNone/>
+            </a:pPr>
+            <a:r>
+              <a:rPr lang="en-US" sz="900" dirty="0">
                 <a:solidFill>
                   <a:srgbClr val="334155"/>
                 </a:solidFill>
@@ -6579,146 +6768,22 @@
                 <a:ea typeface="Calibri" pitchFamily="34" charset="-122"/>
                 <a:cs typeface="Calibri" pitchFamily="34" charset="-120"/>
               </a:rPr>
-              <a:t>Evergreen SEO infrastructure</a:t>
-            </a:r>
-            <a:endParaRPr lang="en-US" sz="800" dirty="0"/>
-          </a:p>
-          <a:p>
-            <a:pPr indent="0" marL="0">
-              <a:buNone/>
-            </a:pPr>
-            <a:r>
-              <a:rPr lang="en-US" sz="800" dirty="0">
-                <a:solidFill>
-                  <a:srgbClr val="334155"/>
-                </a:solidFill>
-                <a:latin typeface="Calibri" pitchFamily="34" charset="0"/>
-                <a:ea typeface="Calibri" pitchFamily="34" charset="-122"/>
-                <a:cs typeface="Calibri" pitchFamily="34" charset="-120"/>
-              </a:rPr>
-              <a:t>Trend page template engine</a:t>
-            </a:r>
-            <a:endParaRPr lang="en-US" sz="800" dirty="0"/>
-          </a:p>
-          <a:p>
-            <a:pPr indent="0" marL="0">
-              <a:buNone/>
-            </a:pPr>
-            <a:r>
-              <a:rPr lang="en-US" sz="800" dirty="0">
-                <a:solidFill>
-                  <a:srgbClr val="334155"/>
-                </a:solidFill>
-                <a:latin typeface="Calibri" pitchFamily="34" charset="0"/>
-                <a:ea typeface="Calibri" pitchFamily="34" charset="-122"/>
-                <a:cs typeface="Calibri" pitchFamily="34" charset="-120"/>
-              </a:rPr>
-              <a:t>Jobs by Location page</a:t>
-            </a:r>
-            <a:endParaRPr lang="en-US" sz="800" dirty="0"/>
-          </a:p>
-          <a:p>
-            <a:pPr indent="0" marL="0">
-              <a:buNone/>
-            </a:pPr>
-            <a:r>
-              <a:rPr lang="en-US" sz="800" dirty="0">
-                <a:solidFill>
-                  <a:srgbClr val="334155"/>
-                </a:solidFill>
-                <a:latin typeface="Calibri" pitchFamily="34" charset="0"/>
-                <a:ea typeface="Calibri" pitchFamily="34" charset="-122"/>
-                <a:cs typeface="Calibri" pitchFamily="34" charset="-120"/>
-              </a:rPr>
-              <a:t>First 10 metro comparison pages</a:t>
-            </a:r>
-            <a:endParaRPr lang="en-US" sz="800" dirty="0"/>
-          </a:p>
-          <a:p>
-            <a:pPr indent="0" marL="0">
-              <a:buNone/>
-            </a:pPr>
-            <a:r>
-              <a:rPr lang="en-US" sz="800" dirty="0">
-                <a:solidFill>
-                  <a:srgbClr val="334155"/>
-                </a:solidFill>
-                <a:latin typeface="Calibri" pitchFamily="34" charset="0"/>
-                <a:ea typeface="Calibri" pitchFamily="34" charset="-122"/>
-                <a:cs typeface="Calibri" pitchFamily="34" charset="-120"/>
-              </a:rPr>
-              <a:t>DataForSEO keyword validation</a:t>
-            </a:r>
-            <a:endParaRPr lang="en-US" sz="800" dirty="0"/>
-          </a:p>
-        </p:txBody>
-      </p:sp>
-      <p:sp>
-        <p:nvSpPr>
-          <p:cNvPr id="10" name="Text 8"/>
-          <p:cNvSpPr/>
-          <p:nvPr/>
-        </p:nvSpPr>
-        <p:spPr>
-          <a:xfrm>
-            <a:off x="6400800" y="1417320"/>
-            <a:ext cx="2011680" cy="548640"/>
-          </a:xfrm>
-          <a:prstGeom prst="rect">
-            <a:avLst/>
-          </a:prstGeom>
-          <a:noFill/>
-          <a:ln/>
-        </p:spPr>
-        <p:txBody>
-          <a:bodyPr wrap="square" lIns="0" tIns="0" rIns="0" bIns="0" rtlCol="0" anchor="ctr"/>
-          <a:lstStyle/>
-          <a:p>
-            <a:pPr indent="0" marL="0">
-              <a:buNone/>
-            </a:pPr>
-            <a:r>
-              <a:rPr lang="en-US" sz="800" dirty="0">
-                <a:solidFill>
-                  <a:srgbClr val="64748B"/>
-                </a:solidFill>
-                <a:latin typeface="Calibri" pitchFamily="34" charset="0"/>
-                <a:ea typeface="Calibri" pitchFamily="34" charset="-122"/>
-                <a:cs typeface="Calibri" pitchFamily="34" charset="-120"/>
-              </a:rPr>
-              <a:t>Pod 1 specs</a:t>
-            </a:r>
-            <a:endParaRPr lang="en-US" sz="800" dirty="0"/>
-          </a:p>
-          <a:p>
-            <a:pPr indent="0" marL="0">
-              <a:buNone/>
-            </a:pPr>
-            <a:r>
-              <a:rPr lang="en-US" sz="800" dirty="0">
-                <a:solidFill>
-                  <a:srgbClr val="64748B"/>
-                </a:solidFill>
-                <a:latin typeface="Calibri" pitchFamily="34" charset="0"/>
-                <a:ea typeface="Calibri" pitchFamily="34" charset="-122"/>
-                <a:cs typeface="Calibri" pitchFamily="34" charset="-120"/>
-              </a:rPr>
-              <a:t>Pod 2 builds</a:t>
-            </a:r>
-            <a:endParaRPr lang="en-US" sz="800" dirty="0"/>
-          </a:p>
-        </p:txBody>
-      </p:sp>
-      <p:sp>
-        <p:nvSpPr>
-          <p:cNvPr id="11" name="Shape 9"/>
-          <p:cNvSpPr/>
-          <p:nvPr/>
-        </p:nvSpPr>
-        <p:spPr>
-          <a:xfrm>
-            <a:off x="548640" y="2084832"/>
-            <a:ext cx="8046720" cy="640080"/>
+              <a:t>1. "What does this mean for my job search?"   2. "Does this match what people are experiencing?"   3. "Where's the opportunity hiding?"</a:t>
+            </a:r>
+            <a:endParaRPr lang="en-US" sz="900" dirty="0"/>
+          </a:p>
+        </p:txBody>
+      </p:sp>
+      <p:sp>
+        <p:nvSpPr>
+          <p:cNvPr id="8" name="Shape 6"/>
+          <p:cNvSpPr/>
+          <p:nvPr/>
+        </p:nvSpPr>
+        <p:spPr>
+          <a:xfrm>
+            <a:off x="365760" y="1965960"/>
+            <a:ext cx="4754880" cy="2926080"/>
           </a:xfrm>
           <a:prstGeom prst="rect">
             <a:avLst/>
@@ -6738,14 +6803,14 @@
       </p:sp>
       <p:sp>
         <p:nvSpPr>
-          <p:cNvPr id="12" name="Shape 10"/>
-          <p:cNvSpPr/>
-          <p:nvPr/>
-        </p:nvSpPr>
-        <p:spPr>
-          <a:xfrm>
-            <a:off x="548640" y="2084832"/>
-            <a:ext cx="54864" cy="640080"/>
+          <p:cNvPr id="9" name="Shape 7"/>
+          <p:cNvSpPr/>
+          <p:nvPr/>
+        </p:nvSpPr>
+        <p:spPr>
+          <a:xfrm>
+            <a:off x="365760" y="1965960"/>
+            <a:ext cx="4754880" cy="365760"/>
           </a:xfrm>
           <a:prstGeom prst="rect">
             <a:avLst/>
@@ -6758,14 +6823,14 @@
       </p:sp>
       <p:sp>
         <p:nvSpPr>
-          <p:cNvPr id="13" name="Text 11"/>
-          <p:cNvSpPr/>
-          <p:nvPr/>
-        </p:nvSpPr>
-        <p:spPr>
-          <a:xfrm>
-            <a:off x="731520" y="2084832"/>
-            <a:ext cx="731520" cy="320040"/>
+          <p:cNvPr id="10" name="Text 8"/>
+          <p:cNvSpPr/>
+          <p:nvPr/>
+        </p:nvSpPr>
+        <p:spPr>
+          <a:xfrm>
+            <a:off x="502920" y="1993392"/>
+            <a:ext cx="4480560" cy="320040"/>
           </a:xfrm>
           <a:prstGeom prst="rect">
             <a:avLst/>
@@ -6783,13 +6848,13 @@
             <a:r>
               <a:rPr lang="en-US" sz="900" b="1" dirty="0">
                 <a:solidFill>
-                  <a:srgbClr val="2563EB"/>
+                  <a:srgbClr val="FFFFFF"/>
                 </a:solidFill>
                 <a:latin typeface="Arial" pitchFamily="34" charset="0"/>
                 <a:ea typeface="Arial" pitchFamily="34" charset="-122"/>
                 <a:cs typeface="Arial" pitchFamily="34" charset="-120"/>
               </a:rPr>
-              <a:t>PHASE 2</a:t>
+              <a:t>SCHEDULED GOVERNMENT DATA HOOKS</a:t>
             </a:r>
             <a:endParaRPr lang="en-US" sz="900" dirty="0"/>
           </a:p>
@@ -6797,30 +6862,203 @@
       </p:sp>
       <p:sp>
         <p:nvSpPr>
+          <p:cNvPr id="11" name="Text 9"/>
+          <p:cNvSpPr/>
+          <p:nvPr/>
+        </p:nvSpPr>
+        <p:spPr>
+          <a:xfrm>
+            <a:off x="548640" y="2468880"/>
+            <a:ext cx="1097280" cy="164592"/>
+          </a:xfrm>
+          <a:prstGeom prst="rect">
+            <a:avLst/>
+          </a:prstGeom>
+          <a:noFill/>
+          <a:ln/>
+        </p:spPr>
+        <p:txBody>
+          <a:bodyPr wrap="square" lIns="0" tIns="0" rIns="0" bIns="0" rtlCol="0" anchor="ctr"/>
+          <a:lstStyle/>
+          <a:p>
+            <a:pPr indent="0" marL="0">
+              <a:buNone/>
+            </a:pPr>
+            <a:r>
+              <a:rPr lang="en-US" sz="850" b="1" dirty="0">
+                <a:solidFill>
+                  <a:srgbClr val="1A1F36"/>
+                </a:solidFill>
+                <a:latin typeface="Calibri" pitchFamily="34" charset="0"/>
+                <a:ea typeface="Calibri" pitchFamily="34" charset="-122"/>
+                <a:cs typeface="Calibri" pitchFamily="34" charset="-120"/>
+              </a:rPr>
+              <a:t>BLS Jobs Friday</a:t>
+            </a:r>
+            <a:endParaRPr lang="en-US" sz="850" dirty="0"/>
+          </a:p>
+        </p:txBody>
+      </p:sp>
+      <p:sp>
+        <p:nvSpPr>
+          <p:cNvPr id="12" name="Text 10"/>
+          <p:cNvSpPr/>
+          <p:nvPr/>
+        </p:nvSpPr>
+        <p:spPr>
+          <a:xfrm>
+            <a:off x="1691640" y="2468880"/>
+            <a:ext cx="822960" cy="164592"/>
+          </a:xfrm>
+          <a:prstGeom prst="rect">
+            <a:avLst/>
+          </a:prstGeom>
+          <a:noFill/>
+          <a:ln/>
+        </p:spPr>
+        <p:txBody>
+          <a:bodyPr wrap="square" lIns="0" tIns="0" rIns="0" bIns="0" rtlCol="0" anchor="ctr"/>
+          <a:lstStyle/>
+          <a:p>
+            <a:pPr indent="0" marL="0">
+              <a:buNone/>
+            </a:pPr>
+            <a:r>
+              <a:rPr lang="en-US" sz="750" dirty="0">
+                <a:solidFill>
+                  <a:srgbClr val="64748B"/>
+                </a:solidFill>
+                <a:latin typeface="Calibri" pitchFamily="34" charset="0"/>
+                <a:ea typeface="Calibri" pitchFamily="34" charset="-122"/>
+                <a:cs typeface="Calibri" pitchFamily="34" charset="-120"/>
+              </a:rPr>
+              <a:t>1st Fri/month</a:t>
+            </a:r>
+            <a:endParaRPr lang="en-US" sz="750" dirty="0"/>
+          </a:p>
+        </p:txBody>
+      </p:sp>
+      <p:sp>
+        <p:nvSpPr>
+          <p:cNvPr id="13" name="Text 11"/>
+          <p:cNvSpPr/>
+          <p:nvPr/>
+        </p:nvSpPr>
+        <p:spPr>
+          <a:xfrm>
+            <a:off x="548640" y="2633472"/>
+            <a:ext cx="4389120" cy="274320"/>
+          </a:xfrm>
+          <a:prstGeom prst="rect">
+            <a:avLst/>
+          </a:prstGeom>
+          <a:noFill/>
+          <a:ln/>
+        </p:spPr>
+        <p:txBody>
+          <a:bodyPr wrap="square" lIns="0" tIns="0" rIns="0" bIns="0" rtlCol="0" anchor="ctr"/>
+          <a:lstStyle/>
+          <a:p>
+            <a:pPr indent="0" marL="0">
+              <a:buNone/>
+            </a:pPr>
+            <a:r>
+              <a:rPr lang="en-US" sz="700" dirty="0">
+                <a:solidFill>
+                  <a:srgbClr val="334155"/>
+                </a:solidFill>
+                <a:latin typeface="Calibri" pitchFamily="34" charset="0"/>
+                <a:ea typeface="Calibri" pitchFamily="34" charset="-122"/>
+                <a:cs typeface="Calibri" pitchFamily="34" charset="-120"/>
+              </a:rPr>
+              <a:t>"What the jobs number means for your search this month."</a:t>
+            </a:r>
+            <a:endParaRPr lang="en-US" sz="700" dirty="0"/>
+          </a:p>
+          <a:p>
+            <a:pPr indent="0" marL="0">
+              <a:buNone/>
+            </a:pPr>
+            <a:r>
+              <a:rPr lang="en-US" sz="700" dirty="0">
+                <a:solidFill>
+                  <a:srgbClr val="334155"/>
+                </a:solidFill>
+                <a:latin typeface="Calibri" pitchFamily="34" charset="0"/>
+                <a:ea typeface="Calibri" pitchFamily="34" charset="-122"/>
+                <a:cs typeface="Calibri" pitchFamily="34" charset="-120"/>
+              </a:rPr>
+              <a:t>Cross-ref ATS hiring velocity. Publish within 2-3 hours.</a:t>
+            </a:r>
+            <a:endParaRPr lang="en-US" sz="700" dirty="0"/>
+          </a:p>
+        </p:txBody>
+      </p:sp>
+      <p:sp>
+        <p:nvSpPr>
           <p:cNvPr id="14" name="Text 12"/>
           <p:cNvSpPr/>
           <p:nvPr/>
         </p:nvSpPr>
         <p:spPr>
           <a:xfrm>
-            <a:off x="731520" y="2377440"/>
-            <a:ext cx="731520" cy="274320"/>
-          </a:xfrm>
-          <a:prstGeom prst="rect">
-            <a:avLst/>
-          </a:prstGeom>
-          <a:noFill/>
-          <a:ln/>
-        </p:spPr>
-        <p:txBody>
-          <a:bodyPr wrap="square" lIns="0" tIns="0" rIns="0" bIns="0" rtlCol="0" anchor="ctr"/>
-          <a:lstStyle/>
-          <a:p>
-            <a:pPr indent="0" marL="0">
-              <a:buNone/>
-            </a:pPr>
-            <a:r>
-              <a:rPr lang="en-US" sz="800" dirty="0">
+            <a:off x="548640" y="2926080"/>
+            <a:ext cx="1097280" cy="164592"/>
+          </a:xfrm>
+          <a:prstGeom prst="rect">
+            <a:avLst/>
+          </a:prstGeom>
+          <a:noFill/>
+          <a:ln/>
+        </p:spPr>
+        <p:txBody>
+          <a:bodyPr wrap="square" lIns="0" tIns="0" rIns="0" bIns="0" rtlCol="0" anchor="ctr"/>
+          <a:lstStyle/>
+          <a:p>
+            <a:pPr indent="0" marL="0">
+              <a:buNone/>
+            </a:pPr>
+            <a:r>
+              <a:rPr lang="en-US" sz="850" b="1" dirty="0">
+                <a:solidFill>
+                  <a:srgbClr val="1A1F36"/>
+                </a:solidFill>
+                <a:latin typeface="Calibri" pitchFamily="34" charset="0"/>
+                <a:ea typeface="Calibri" pitchFamily="34" charset="-122"/>
+                <a:cs typeface="Calibri" pitchFamily="34" charset="-120"/>
+              </a:rPr>
+              <a:t>CPI Report</a:t>
+            </a:r>
+            <a:endParaRPr lang="en-US" sz="850" dirty="0"/>
+          </a:p>
+        </p:txBody>
+      </p:sp>
+      <p:sp>
+        <p:nvSpPr>
+          <p:cNvPr id="15" name="Text 13"/>
+          <p:cNvSpPr/>
+          <p:nvPr/>
+        </p:nvSpPr>
+        <p:spPr>
+          <a:xfrm>
+            <a:off x="1691640" y="2926080"/>
+            <a:ext cx="822960" cy="164592"/>
+          </a:xfrm>
+          <a:prstGeom prst="rect">
+            <a:avLst/>
+          </a:prstGeom>
+          <a:noFill/>
+          <a:ln/>
+        </p:spPr>
+        <p:txBody>
+          <a:bodyPr wrap="square" lIns="0" tIns="0" rIns="0" bIns="0" rtlCol="0" anchor="ctr"/>
+          <a:lstStyle/>
+          <a:p>
+            <a:pPr indent="0" marL="0">
+              <a:buNone/>
+            </a:pPr>
+            <a:r>
+              <a:rPr lang="en-US" sz="750" dirty="0">
                 <a:solidFill>
                   <a:srgbClr val="64748B"/>
                 </a:solidFill>
@@ -6828,77 +7066,172 @@
                 <a:ea typeface="Calibri" pitchFamily="34" charset="-122"/>
                 <a:cs typeface="Calibri" pitchFamily="34" charset="-120"/>
               </a:rPr>
-              <a:t>Month 1</a:t>
-            </a:r>
-            <a:endParaRPr lang="en-US" sz="800" dirty="0"/>
-          </a:p>
-        </p:txBody>
-      </p:sp>
-      <p:sp>
-        <p:nvSpPr>
-          <p:cNvPr id="15" name="Text 13"/>
-          <p:cNvSpPr/>
-          <p:nvPr/>
-        </p:nvSpPr>
-        <p:spPr>
-          <a:xfrm>
-            <a:off x="1554480" y="2084832"/>
-            <a:ext cx="731520" cy="640080"/>
-          </a:xfrm>
-          <a:prstGeom prst="rect">
-            <a:avLst/>
-          </a:prstGeom>
-          <a:noFill/>
-          <a:ln/>
-        </p:spPr>
-        <p:txBody>
-          <a:bodyPr wrap="square" lIns="0" tIns="0" rIns="0" bIns="0" rtlCol="0" anchor="ctr"/>
-          <a:lstStyle/>
-          <a:p>
-            <a:pPr indent="0" marL="0">
-              <a:buNone/>
-            </a:pPr>
-            <a:r>
-              <a:rPr lang="en-US" sz="1000" b="1" dirty="0">
+              <a:t>Mid-month</a:t>
+            </a:r>
+            <a:endParaRPr lang="en-US" sz="750" dirty="0"/>
+          </a:p>
+        </p:txBody>
+      </p:sp>
+      <p:sp>
+        <p:nvSpPr>
+          <p:cNvPr id="16" name="Text 14"/>
+          <p:cNvSpPr/>
+          <p:nvPr/>
+        </p:nvSpPr>
+        <p:spPr>
+          <a:xfrm>
+            <a:off x="548640" y="3090672"/>
+            <a:ext cx="4389120" cy="274320"/>
+          </a:xfrm>
+          <a:prstGeom prst="rect">
+            <a:avLst/>
+          </a:prstGeom>
+          <a:noFill/>
+          <a:ln/>
+        </p:spPr>
+        <p:txBody>
+          <a:bodyPr wrap="square" lIns="0" tIns="0" rIns="0" bIns="0" rtlCol="0" anchor="ctr"/>
+          <a:lstStyle/>
+          <a:p>
+            <a:pPr indent="0" marL="0">
+              <a:buNone/>
+            </a:pPr>
+            <a:r>
+              <a:rPr lang="en-US" sz="700" dirty="0">
+                <a:solidFill>
+                  <a:srgbClr val="334155"/>
+                </a:solidFill>
+                <a:latin typeface="Calibri" pitchFamily="34" charset="0"/>
+                <a:ea typeface="Calibri" pitchFamily="34" charset="-122"/>
+                <a:cs typeface="Calibri" pitchFamily="34" charset="-120"/>
+              </a:rPr>
+              <a:t>"Inflation cooled to 2.8% — but tech salaries on our platform rose 4.2%."</a:t>
+            </a:r>
+            <a:endParaRPr lang="en-US" sz="700" dirty="0"/>
+          </a:p>
+          <a:p>
+            <a:pPr indent="0" marL="0">
+              <a:buNone/>
+            </a:pPr>
+            <a:r>
+              <a:rPr lang="en-US" sz="700" dirty="0">
+                <a:solidFill>
+                  <a:srgbClr val="334155"/>
+                </a:solidFill>
+                <a:latin typeface="Calibri" pitchFamily="34" charset="0"/>
+                <a:ea typeface="Calibri" pitchFamily="34" charset="-122"/>
+                <a:cs typeface="Calibri" pitchFamily="34" charset="-120"/>
+              </a:rPr>
+              <a:t>Salary-inflation angle. Should you negotiate harder?</a:t>
+            </a:r>
+            <a:endParaRPr lang="en-US" sz="700" dirty="0"/>
+          </a:p>
+        </p:txBody>
+      </p:sp>
+      <p:sp>
+        <p:nvSpPr>
+          <p:cNvPr id="17" name="Text 15"/>
+          <p:cNvSpPr/>
+          <p:nvPr/>
+        </p:nvSpPr>
+        <p:spPr>
+          <a:xfrm>
+            <a:off x="548640" y="3383280"/>
+            <a:ext cx="1097280" cy="164592"/>
+          </a:xfrm>
+          <a:prstGeom prst="rect">
+            <a:avLst/>
+          </a:prstGeom>
+          <a:noFill/>
+          <a:ln/>
+        </p:spPr>
+        <p:txBody>
+          <a:bodyPr wrap="square" lIns="0" tIns="0" rIns="0" bIns="0" rtlCol="0" anchor="ctr"/>
+          <a:lstStyle/>
+          <a:p>
+            <a:pPr indent="0" marL="0">
+              <a:buNone/>
+            </a:pPr>
+            <a:r>
+              <a:rPr lang="en-US" sz="850" b="1" dirty="0">
                 <a:solidFill>
                   <a:srgbClr val="1A1F36"/>
                 </a:solidFill>
-                <a:latin typeface="Georgia" pitchFamily="34" charset="0"/>
-                <a:ea typeface="Georgia" pitchFamily="34" charset="-122"/>
-                <a:cs typeface="Georgia" pitchFamily="34" charset="-120"/>
-              </a:rPr>
-              <a:t>5-7 days</a:t>
-            </a:r>
-            <a:endParaRPr lang="en-US" sz="1000" dirty="0"/>
-          </a:p>
-        </p:txBody>
-      </p:sp>
-      <p:sp>
-        <p:nvSpPr>
-          <p:cNvPr id="16" name="Text 14"/>
-          <p:cNvSpPr/>
-          <p:nvPr/>
-        </p:nvSpPr>
-        <p:spPr>
-          <a:xfrm>
-            <a:off x="2377440" y="2130552"/>
-            <a:ext cx="3657600" cy="548640"/>
-          </a:xfrm>
-          <a:prstGeom prst="rect">
-            <a:avLst/>
-          </a:prstGeom>
-          <a:noFill/>
-          <a:ln/>
-        </p:spPr>
-        <p:txBody>
-          <a:bodyPr wrap="square" lIns="0" tIns="0" rIns="0" bIns="0" rtlCol="0" anchor="ctr"/>
-          <a:lstStyle/>
-          <a:p>
-            <a:pPr indent="0" marL="0">
-              <a:buNone/>
-            </a:pPr>
-            <a:r>
-              <a:rPr lang="en-US" sz="800" dirty="0">
+                <a:latin typeface="Calibri" pitchFamily="34" charset="0"/>
+                <a:ea typeface="Calibri" pitchFamily="34" charset="-122"/>
+                <a:cs typeface="Calibri" pitchFamily="34" charset="-120"/>
+              </a:rPr>
+              <a:t>JOLTS</a:t>
+            </a:r>
+            <a:endParaRPr lang="en-US" sz="850" dirty="0"/>
+          </a:p>
+        </p:txBody>
+      </p:sp>
+      <p:sp>
+        <p:nvSpPr>
+          <p:cNvPr id="18" name="Text 16"/>
+          <p:cNvSpPr/>
+          <p:nvPr/>
+        </p:nvSpPr>
+        <p:spPr>
+          <a:xfrm>
+            <a:off x="1691640" y="3383280"/>
+            <a:ext cx="822960" cy="164592"/>
+          </a:xfrm>
+          <a:prstGeom prst="rect">
+            <a:avLst/>
+          </a:prstGeom>
+          <a:noFill/>
+          <a:ln/>
+        </p:spPr>
+        <p:txBody>
+          <a:bodyPr wrap="square" lIns="0" tIns="0" rIns="0" bIns="0" rtlCol="0" anchor="ctr"/>
+          <a:lstStyle/>
+          <a:p>
+            <a:pPr indent="0" marL="0">
+              <a:buNone/>
+            </a:pPr>
+            <a:r>
+              <a:rPr lang="en-US" sz="750" dirty="0">
+                <a:solidFill>
+                  <a:srgbClr val="64748B"/>
+                </a:solidFill>
+                <a:latin typeface="Calibri" pitchFamily="34" charset="0"/>
+                <a:ea typeface="Calibri" pitchFamily="34" charset="-122"/>
+                <a:cs typeface="Calibri" pitchFamily="34" charset="-120"/>
+              </a:rPr>
+              <a:t>Monthly</a:t>
+            </a:r>
+            <a:endParaRPr lang="en-US" sz="750" dirty="0"/>
+          </a:p>
+        </p:txBody>
+      </p:sp>
+      <p:sp>
+        <p:nvSpPr>
+          <p:cNvPr id="19" name="Text 17"/>
+          <p:cNvSpPr/>
+          <p:nvPr/>
+        </p:nvSpPr>
+        <p:spPr>
+          <a:xfrm>
+            <a:off x="548640" y="3547872"/>
+            <a:ext cx="4389120" cy="274320"/>
+          </a:xfrm>
+          <a:prstGeom prst="rect">
+            <a:avLst/>
+          </a:prstGeom>
+          <a:noFill/>
+          <a:ln/>
+        </p:spPr>
+        <p:txBody>
+          <a:bodyPr wrap="square" lIns="0" tIns="0" rIns="0" bIns="0" rtlCol="0" anchor="ctr"/>
+          <a:lstStyle/>
+          <a:p>
+            <a:pPr indent="0" marL="0">
+              <a:buNone/>
+            </a:pPr>
+            <a:r>
+              <a:rPr lang="en-US" sz="700" dirty="0">
                 <a:solidFill>
                   <a:srgbClr val="334155"/>
                 </a:solidFill>
@@ -6906,16 +7239,16 @@
                 <a:ea typeface="Calibri" pitchFamily="34" charset="-122"/>
                 <a:cs typeface="Calibri" pitchFamily="34" charset="-120"/>
               </a:rPr>
-              <a:t>Editorial engine core</a:t>
-            </a:r>
-            <a:endParaRPr lang="en-US" sz="800" dirty="0"/>
-          </a:p>
-          <a:p>
-            <a:pPr indent="0" marL="0">
-              <a:buNone/>
-            </a:pPr>
-            <a:r>
-              <a:rPr lang="en-US" sz="800" dirty="0">
+              <a:t>"JOLTS says 8.1M openings. Our data shows 34% open 60+ days."</a:t>
+            </a:r>
+            <a:endParaRPr lang="en-US" sz="700" dirty="0"/>
+          </a:p>
+          <a:p>
+            <a:pPr indent="0" marL="0">
+              <a:buNone/>
+            </a:pPr>
+            <a:r>
+              <a:rPr lang="en-US" sz="700" dirty="0">
                 <a:solidFill>
                   <a:srgbClr val="334155"/>
                 </a:solidFill>
@@ -6923,16 +7256,116 @@
                 <a:ea typeface="Calibri" pitchFamily="34" charset="-122"/>
                 <a:cs typeface="Calibri" pitchFamily="34" charset="-120"/>
               </a:rPr>
-              <a:t>Anomaly detection Edge Function</a:t>
-            </a:r>
-            <a:endParaRPr lang="en-US" sz="800" dirty="0"/>
-          </a:p>
-          <a:p>
-            <a:pPr indent="0" marL="0">
-              <a:buNone/>
-            </a:pPr>
-            <a:r>
-              <a:rPr lang="en-US" sz="800" dirty="0">
+              <a:t>Real openings vs ghosts. Actionable intelligence.</a:t>
+            </a:r>
+            <a:endParaRPr lang="en-US" sz="700" dirty="0"/>
+          </a:p>
+        </p:txBody>
+      </p:sp>
+      <p:sp>
+        <p:nvSpPr>
+          <p:cNvPr id="20" name="Text 18"/>
+          <p:cNvSpPr/>
+          <p:nvPr/>
+        </p:nvSpPr>
+        <p:spPr>
+          <a:xfrm>
+            <a:off x="548640" y="3840480"/>
+            <a:ext cx="1097280" cy="164592"/>
+          </a:xfrm>
+          <a:prstGeom prst="rect">
+            <a:avLst/>
+          </a:prstGeom>
+          <a:noFill/>
+          <a:ln/>
+        </p:spPr>
+        <p:txBody>
+          <a:bodyPr wrap="square" lIns="0" tIns="0" rIns="0" bIns="0" rtlCol="0" anchor="ctr"/>
+          <a:lstStyle/>
+          <a:p>
+            <a:pPr indent="0" marL="0">
+              <a:buNone/>
+            </a:pPr>
+            <a:r>
+              <a:rPr lang="en-US" sz="850" b="1" dirty="0">
+                <a:solidFill>
+                  <a:srgbClr val="1A1F36"/>
+                </a:solidFill>
+                <a:latin typeface="Calibri" pitchFamily="34" charset="0"/>
+                <a:ea typeface="Calibri" pitchFamily="34" charset="-122"/>
+                <a:cs typeface="Calibri" pitchFamily="34" charset="-120"/>
+              </a:rPr>
+              <a:t>ADP Payrolls</a:t>
+            </a:r>
+            <a:endParaRPr lang="en-US" sz="850" dirty="0"/>
+          </a:p>
+        </p:txBody>
+      </p:sp>
+      <p:sp>
+        <p:nvSpPr>
+          <p:cNvPr id="21" name="Text 19"/>
+          <p:cNvSpPr/>
+          <p:nvPr/>
+        </p:nvSpPr>
+        <p:spPr>
+          <a:xfrm>
+            <a:off x="1691640" y="3840480"/>
+            <a:ext cx="822960" cy="164592"/>
+          </a:xfrm>
+          <a:prstGeom prst="rect">
+            <a:avLst/>
+          </a:prstGeom>
+          <a:noFill/>
+          <a:ln/>
+        </p:spPr>
+        <p:txBody>
+          <a:bodyPr wrap="square" lIns="0" tIns="0" rIns="0" bIns="0" rtlCol="0" anchor="ctr"/>
+          <a:lstStyle/>
+          <a:p>
+            <a:pPr indent="0" marL="0">
+              <a:buNone/>
+            </a:pPr>
+            <a:r>
+              <a:rPr lang="en-US" sz="750" dirty="0">
+                <a:solidFill>
+                  <a:srgbClr val="64748B"/>
+                </a:solidFill>
+                <a:latin typeface="Calibri" pitchFamily="34" charset="0"/>
+                <a:ea typeface="Calibri" pitchFamily="34" charset="-122"/>
+                <a:cs typeface="Calibri" pitchFamily="34" charset="-120"/>
+              </a:rPr>
+              <a:t>2 days pre-BLS</a:t>
+            </a:r>
+            <a:endParaRPr lang="en-US" sz="750" dirty="0"/>
+          </a:p>
+        </p:txBody>
+      </p:sp>
+      <p:sp>
+        <p:nvSpPr>
+          <p:cNvPr id="22" name="Text 20"/>
+          <p:cNvSpPr/>
+          <p:nvPr/>
+        </p:nvSpPr>
+        <p:spPr>
+          <a:xfrm>
+            <a:off x="548640" y="4005072"/>
+            <a:ext cx="4389120" cy="274320"/>
+          </a:xfrm>
+          <a:prstGeom prst="rect">
+            <a:avLst/>
+          </a:prstGeom>
+          <a:noFill/>
+          <a:ln/>
+        </p:spPr>
+        <p:txBody>
+          <a:bodyPr wrap="square" lIns="0" tIns="0" rIns="0" bIns="0" rtlCol="0" anchor="ctr"/>
+          <a:lstStyle/>
+          <a:p>
+            <a:pPr indent="0" marL="0">
+              <a:buNone/>
+            </a:pPr>
+            <a:r>
+              <a:rPr lang="en-US" sz="700" dirty="0">
                 <a:solidFill>
                   <a:srgbClr val="334155"/>
                 </a:solidFill>
@@ -6940,16 +7373,16 @@
                 <a:ea typeface="Calibri" pitchFamily="34" charset="-122"/>
                 <a:cs typeface="Calibri" pitchFamily="34" charset="-120"/>
               </a:rPr>
-              <a:t>Claude story generation (all variants)</a:t>
-            </a:r>
-            <a:endParaRPr lang="en-US" sz="800" dirty="0"/>
-          </a:p>
-          <a:p>
-            <a:pPr indent="0" marL="0">
-              <a:buNone/>
-            </a:pPr>
-            <a:r>
-              <a:rPr lang="en-US" sz="800" dirty="0">
+              <a:t>Quick preview: "ADP says X — here's what our 285K jobs show</a:t>
+            </a:r>
+            <a:endParaRPr lang="en-US" sz="700" dirty="0"/>
+          </a:p>
+          <a:p>
+            <a:pPr indent="0" marL="0">
+              <a:buNone/>
+            </a:pPr>
+            <a:r>
+              <a:rPr lang="en-US" sz="700" dirty="0">
                 <a:solidFill>
                   <a:srgbClr val="334155"/>
                 </a:solidFill>
@@ -6957,16 +7390,116 @@
                 <a:ea typeface="Calibri" pitchFamily="34" charset="-122"/>
                 <a:cs typeface="Calibri" pitchFamily="34" charset="-120"/>
               </a:rPr>
-              <a:t>Admin Content tab + approval queue</a:t>
-            </a:r>
-            <a:endParaRPr lang="en-US" sz="800" dirty="0"/>
-          </a:p>
-          <a:p>
-            <a:pPr indent="0" marL="0">
-              <a:buNone/>
-            </a:pPr>
-            <a:r>
-              <a:rPr lang="en-US" sz="800" dirty="0">
+              <a:t>ahead of Friday's number."</a:t>
+            </a:r>
+            <a:endParaRPr lang="en-US" sz="700" dirty="0"/>
+          </a:p>
+        </p:txBody>
+      </p:sp>
+      <p:sp>
+        <p:nvSpPr>
+          <p:cNvPr id="23" name="Text 21"/>
+          <p:cNvSpPr/>
+          <p:nvPr/>
+        </p:nvSpPr>
+        <p:spPr>
+          <a:xfrm>
+            <a:off x="548640" y="4297680"/>
+            <a:ext cx="1097280" cy="164592"/>
+          </a:xfrm>
+          <a:prstGeom prst="rect">
+            <a:avLst/>
+          </a:prstGeom>
+          <a:noFill/>
+          <a:ln/>
+        </p:spPr>
+        <p:txBody>
+          <a:bodyPr wrap="square" lIns="0" tIns="0" rIns="0" bIns="0" rtlCol="0" anchor="ctr"/>
+          <a:lstStyle/>
+          <a:p>
+            <a:pPr indent="0" marL="0">
+              <a:buNone/>
+            </a:pPr>
+            <a:r>
+              <a:rPr lang="en-US" sz="850" b="1" dirty="0">
+                <a:solidFill>
+                  <a:srgbClr val="1A1F36"/>
+                </a:solidFill>
+                <a:latin typeface="Calibri" pitchFamily="34" charset="0"/>
+                <a:ea typeface="Calibri" pitchFamily="34" charset="-122"/>
+                <a:cs typeface="Calibri" pitchFamily="34" charset="-120"/>
+              </a:rPr>
+              <a:t>WARN Notices</a:t>
+            </a:r>
+            <a:endParaRPr lang="en-US" sz="850" dirty="0"/>
+          </a:p>
+        </p:txBody>
+      </p:sp>
+      <p:sp>
+        <p:nvSpPr>
+          <p:cNvPr id="24" name="Text 22"/>
+          <p:cNvSpPr/>
+          <p:nvPr/>
+        </p:nvSpPr>
+        <p:spPr>
+          <a:xfrm>
+            <a:off x="1691640" y="4297680"/>
+            <a:ext cx="822960" cy="164592"/>
+          </a:xfrm>
+          <a:prstGeom prst="rect">
+            <a:avLst/>
+          </a:prstGeom>
+          <a:noFill/>
+          <a:ln/>
+        </p:spPr>
+        <p:txBody>
+          <a:bodyPr wrap="square" lIns="0" tIns="0" rIns="0" bIns="0" rtlCol="0" anchor="ctr"/>
+          <a:lstStyle/>
+          <a:p>
+            <a:pPr indent="0" marL="0">
+              <a:buNone/>
+            </a:pPr>
+            <a:r>
+              <a:rPr lang="en-US" sz="750" dirty="0">
+                <a:solidFill>
+                  <a:srgbClr val="64748B"/>
+                </a:solidFill>
+                <a:latin typeface="Calibri" pitchFamily="34" charset="0"/>
+                <a:ea typeface="Calibri" pitchFamily="34" charset="-122"/>
+                <a:cs typeface="Calibri" pitchFamily="34" charset="-120"/>
+              </a:rPr>
+              <a:t>State-level, rolling</a:t>
+            </a:r>
+            <a:endParaRPr lang="en-US" sz="750" dirty="0"/>
+          </a:p>
+        </p:txBody>
+      </p:sp>
+      <p:sp>
+        <p:nvSpPr>
+          <p:cNvPr id="25" name="Text 23"/>
+          <p:cNvSpPr/>
+          <p:nvPr/>
+        </p:nvSpPr>
+        <p:spPr>
+          <a:xfrm>
+            <a:off x="548640" y="4462272"/>
+            <a:ext cx="4389120" cy="274320"/>
+          </a:xfrm>
+          <a:prstGeom prst="rect">
+            <a:avLst/>
+          </a:prstGeom>
+          <a:noFill/>
+          <a:ln/>
+        </p:spPr>
+        <p:txBody>
+          <a:bodyPr wrap="square" lIns="0" tIns="0" rIns="0" bIns="0" rtlCol="0" anchor="ctr"/>
+          <a:lstStyle/>
+          <a:p>
+            <a:pPr indent="0" marL="0">
+              <a:buNone/>
+            </a:pPr>
+            <a:r>
+              <a:rPr lang="en-US" sz="700" dirty="0">
                 <a:solidFill>
                   <a:srgbClr val="334155"/>
                 </a:solidFill>
@@ -6974,78 +7507,39 @@
                 <a:ea typeface="Calibri" pitchFamily="34" charset="-122"/>
                 <a:cs typeface="Calibri" pitchFamily="34" charset="-120"/>
               </a:rPr>
-              <a:t>Brilliant Jobs LinkedIn company page</a:t>
-            </a:r>
-            <a:endParaRPr lang="en-US" sz="800" dirty="0"/>
-          </a:p>
-        </p:txBody>
-      </p:sp>
-      <p:sp>
-        <p:nvSpPr>
-          <p:cNvPr id="17" name="Text 15"/>
-          <p:cNvSpPr/>
-          <p:nvPr/>
-        </p:nvSpPr>
-        <p:spPr>
-          <a:xfrm>
-            <a:off x="6400800" y="2130552"/>
-            <a:ext cx="2011680" cy="548640"/>
-          </a:xfrm>
-          <a:prstGeom prst="rect">
-            <a:avLst/>
-          </a:prstGeom>
-          <a:noFill/>
-          <a:ln/>
-        </p:spPr>
-        <p:txBody>
-          <a:bodyPr wrap="square" lIns="0" tIns="0" rIns="0" bIns="0" rtlCol="0" anchor="ctr"/>
-          <a:lstStyle/>
-          <a:p>
-            <a:pPr indent="0" marL="0">
-              <a:buNone/>
-            </a:pPr>
-            <a:r>
-              <a:rPr lang="en-US" sz="800" dirty="0">
-                <a:solidFill>
-                  <a:srgbClr val="64748B"/>
-                </a:solidFill>
-                <a:latin typeface="Calibri" pitchFamily="34" charset="0"/>
-                <a:ea typeface="Calibri" pitchFamily="34" charset="-122"/>
-                <a:cs typeface="Calibri" pitchFamily="34" charset="-120"/>
-              </a:rPr>
-              <a:t>Pod 1 rules</a:t>
-            </a:r>
-            <a:endParaRPr lang="en-US" sz="800" dirty="0"/>
-          </a:p>
-          <a:p>
-            <a:pPr indent="0" marL="0">
-              <a:buNone/>
-            </a:pPr>
-            <a:r>
-              <a:rPr lang="en-US" sz="800" dirty="0">
-                <a:solidFill>
-                  <a:srgbClr val="64748B"/>
-                </a:solidFill>
-                <a:latin typeface="Calibri" pitchFamily="34" charset="0"/>
-                <a:ea typeface="Calibri" pitchFamily="34" charset="-122"/>
-                <a:cs typeface="Calibri" pitchFamily="34" charset="-120"/>
-              </a:rPr>
-              <a:t>Pod 2 engine</a:t>
-            </a:r>
-            <a:endParaRPr lang="en-US" sz="800" dirty="0"/>
-          </a:p>
-        </p:txBody>
-      </p:sp>
-      <p:sp>
-        <p:nvSpPr>
-          <p:cNvPr id="18" name="Shape 16"/>
-          <p:cNvSpPr/>
-          <p:nvPr/>
-        </p:nvSpPr>
-        <p:spPr>
-          <a:xfrm>
-            <a:off x="548640" y="2798064"/>
-            <a:ext cx="8046720" cy="640080"/>
+              <a:t>Geographic stories: "CA filed 12 WARNs this week — but Austin</a:t>
+            </a:r>
+            <a:endParaRPr lang="en-US" sz="700" dirty="0"/>
+          </a:p>
+          <a:p>
+            <a:pPr indent="0" marL="0">
+              <a:buNone/>
+            </a:pPr>
+            <a:r>
+              <a:rPr lang="en-US" sz="700" dirty="0">
+                <a:solidFill>
+                  <a:srgbClr val="334155"/>
+                </a:solidFill>
+                <a:latin typeface="Calibri" pitchFamily="34" charset="0"/>
+                <a:ea typeface="Calibri" pitchFamily="34" charset="-122"/>
+                <a:cs typeface="Calibri" pitchFamily="34" charset="-120"/>
+              </a:rPr>
+              <a:t>boards show 23% spike in same roles. Talent is moving."</a:t>
+            </a:r>
+            <a:endParaRPr lang="en-US" sz="700" dirty="0"/>
+          </a:p>
+        </p:txBody>
+      </p:sp>
+      <p:sp>
+        <p:nvSpPr>
+          <p:cNvPr id="26" name="Shape 24"/>
+          <p:cNvSpPr/>
+          <p:nvPr/>
+        </p:nvSpPr>
+        <p:spPr>
+          <a:xfrm>
+            <a:off x="5303520" y="1965960"/>
+            <a:ext cx="3474720" cy="2926080"/>
           </a:xfrm>
           <a:prstGeom prst="rect">
             <a:avLst/>
@@ -7065,14 +7559,14 @@
       </p:sp>
       <p:sp>
         <p:nvSpPr>
-          <p:cNvPr id="19" name="Shape 17"/>
-          <p:cNvSpPr/>
-          <p:nvPr/>
-        </p:nvSpPr>
-        <p:spPr>
-          <a:xfrm>
-            <a:off x="548640" y="2798064"/>
-            <a:ext cx="54864" cy="640080"/>
+          <p:cNvPr id="27" name="Shape 25"/>
+          <p:cNvSpPr/>
+          <p:nvPr/>
+        </p:nvSpPr>
+        <p:spPr>
+          <a:xfrm>
+            <a:off x="5303520" y="1965960"/>
+            <a:ext cx="3474720" cy="365760"/>
           </a:xfrm>
           <a:prstGeom prst="rect">
             <a:avLst/>
@@ -7085,14 +7579,14 @@
       </p:sp>
       <p:sp>
         <p:nvSpPr>
-          <p:cNvPr id="20" name="Text 18"/>
-          <p:cNvSpPr/>
-          <p:nvPr/>
-        </p:nvSpPr>
-        <p:spPr>
-          <a:xfrm>
-            <a:off x="731520" y="2798064"/>
-            <a:ext cx="731520" cy="320040"/>
+          <p:cNvPr id="28" name="Text 26"/>
+          <p:cNvSpPr/>
+          <p:nvPr/>
+        </p:nvSpPr>
+        <p:spPr>
+          <a:xfrm>
+            <a:off x="5440680" y="1993392"/>
+            <a:ext cx="3200400" cy="320040"/>
           </a:xfrm>
           <a:prstGeom prst="rect">
             <a:avLst/>
@@ -7110,13 +7604,13 @@
             <a:r>
               <a:rPr lang="en-US" sz="900" b="1" dirty="0">
                 <a:solidFill>
-                  <a:srgbClr val="0D9488"/>
+                  <a:srgbClr val="FFFFFF"/>
                 </a:solidFill>
                 <a:latin typeface="Arial" pitchFamily="34" charset="0"/>
                 <a:ea typeface="Arial" pitchFamily="34" charset="-122"/>
                 <a:cs typeface="Arial" pitchFamily="34" charset="-120"/>
               </a:rPr>
-              <a:t>PHASE 3</a:t>
+              <a:t>WEEKLY CADENCE (OWN DATA)</a:t>
             </a:r>
             <a:endParaRPr lang="en-US" sz="900" dirty="0"/>
           </a:p>
@@ -7124,30 +7618,522 @@
       </p:sp>
       <p:sp>
         <p:nvSpPr>
-          <p:cNvPr id="21" name="Text 19"/>
-          <p:cNvSpPr/>
-          <p:nvPr/>
-        </p:nvSpPr>
-        <p:spPr>
-          <a:xfrm>
-            <a:off x="731520" y="3090672"/>
-            <a:ext cx="731520" cy="274320"/>
-          </a:xfrm>
-          <a:prstGeom prst="rect">
-            <a:avLst/>
-          </a:prstGeom>
-          <a:noFill/>
-          <a:ln/>
-        </p:spPr>
-        <p:txBody>
-          <a:bodyPr wrap="square" lIns="0" tIns="0" rIns="0" bIns="0" rtlCol="0" anchor="ctr"/>
-          <a:lstStyle/>
-          <a:p>
-            <a:pPr indent="0" marL="0">
-              <a:buNone/>
-            </a:pPr>
-            <a:r>
-              <a:rPr lang="en-US" sz="800" dirty="0">
+          <p:cNvPr id="29" name="Text 27"/>
+          <p:cNvSpPr/>
+          <p:nvPr/>
+        </p:nvSpPr>
+        <p:spPr>
+          <a:xfrm>
+            <a:off x="5486400" y="2468880"/>
+            <a:ext cx="914400" cy="164592"/>
+          </a:xfrm>
+          <a:prstGeom prst="rect">
+            <a:avLst/>
+          </a:prstGeom>
+          <a:noFill/>
+          <a:ln/>
+        </p:spPr>
+        <p:txBody>
+          <a:bodyPr wrap="square" lIns="0" tIns="0" rIns="0" bIns="0" rtlCol="0" anchor="ctr"/>
+          <a:lstStyle/>
+          <a:p>
+            <a:pPr indent="0" marL="0">
+              <a:buNone/>
+            </a:pPr>
+            <a:r>
+              <a:rPr lang="en-US" sz="850" b="1" dirty="0">
+                <a:solidFill>
+                  <a:srgbClr val="1A1F36"/>
+                </a:solidFill>
+                <a:latin typeface="Calibri" pitchFamily="34" charset="0"/>
+                <a:ea typeface="Calibri" pitchFamily="34" charset="-122"/>
+                <a:cs typeface="Calibri" pitchFamily="34" charset="-120"/>
+              </a:rPr>
+              <a:t>Monday</a:t>
+            </a:r>
+            <a:endParaRPr lang="en-US" sz="850" dirty="0"/>
+          </a:p>
+        </p:txBody>
+      </p:sp>
+      <p:sp>
+        <p:nvSpPr>
+          <p:cNvPr id="30" name="Text 28"/>
+          <p:cNvSpPr/>
+          <p:nvPr/>
+        </p:nvSpPr>
+        <p:spPr>
+          <a:xfrm>
+            <a:off x="5486400" y="2633472"/>
+            <a:ext cx="3108960" cy="320040"/>
+          </a:xfrm>
+          <a:prstGeom prst="rect">
+            <a:avLst/>
+          </a:prstGeom>
+          <a:noFill/>
+          <a:ln/>
+        </p:spPr>
+        <p:txBody>
+          <a:bodyPr wrap="square" lIns="0" tIns="0" rIns="0" bIns="0" rtlCol="0" anchor="ctr"/>
+          <a:lstStyle/>
+          <a:p>
+            <a:pPr indent="0" marL="0">
+              <a:buNone/>
+            </a:pPr>
+            <a:r>
+              <a:rPr lang="en-US" sz="700" dirty="0">
+                <a:solidFill>
+                  <a:srgbClr val="334155"/>
+                </a:solidFill>
+                <a:latin typeface="Calibri" pitchFamily="34" charset="0"/>
+                <a:ea typeface="Calibri" pitchFamily="34" charset="-122"/>
+                <a:cs typeface="Calibri" pitchFamily="34" charset="-120"/>
+              </a:rPr>
+              <a:t>Salary trends — weekly delta,</a:t>
+            </a:r>
+            <a:endParaRPr lang="en-US" sz="700" dirty="0"/>
+          </a:p>
+          <a:p>
+            <a:pPr indent="0" marL="0">
+              <a:buNone/>
+            </a:pPr>
+            <a:r>
+              <a:rPr lang="en-US" sz="700" dirty="0">
+                <a:solidFill>
+                  <a:srgbClr val="334155"/>
+                </a:solidFill>
+                <a:latin typeface="Calibri" pitchFamily="34" charset="0"/>
+                <a:ea typeface="Calibri" pitchFamily="34" charset="-122"/>
+                <a:cs typeface="Calibri" pitchFamily="34" charset="-120"/>
+              </a:rPr>
+              <a:t>top movers, negotiation signals</a:t>
+            </a:r>
+            <a:endParaRPr lang="en-US" sz="700" dirty="0"/>
+          </a:p>
+        </p:txBody>
+      </p:sp>
+      <p:sp>
+        <p:nvSpPr>
+          <p:cNvPr id="31" name="Text 29"/>
+          <p:cNvSpPr/>
+          <p:nvPr/>
+        </p:nvSpPr>
+        <p:spPr>
+          <a:xfrm>
+            <a:off x="5486400" y="2926080"/>
+            <a:ext cx="914400" cy="164592"/>
+          </a:xfrm>
+          <a:prstGeom prst="rect">
+            <a:avLst/>
+          </a:prstGeom>
+          <a:noFill/>
+          <a:ln/>
+        </p:spPr>
+        <p:txBody>
+          <a:bodyPr wrap="square" lIns="0" tIns="0" rIns="0" bIns="0" rtlCol="0" anchor="ctr"/>
+          <a:lstStyle/>
+          <a:p>
+            <a:pPr indent="0" marL="0">
+              <a:buNone/>
+            </a:pPr>
+            <a:r>
+              <a:rPr lang="en-US" sz="850" b="1" dirty="0">
+                <a:solidFill>
+                  <a:srgbClr val="1A1F36"/>
+                </a:solidFill>
+                <a:latin typeface="Calibri" pitchFamily="34" charset="0"/>
+                <a:ea typeface="Calibri" pitchFamily="34" charset="-122"/>
+                <a:cs typeface="Calibri" pitchFamily="34" charset="-120"/>
+              </a:rPr>
+              <a:t>Tuesday</a:t>
+            </a:r>
+            <a:endParaRPr lang="en-US" sz="850" dirty="0"/>
+          </a:p>
+        </p:txBody>
+      </p:sp>
+      <p:sp>
+        <p:nvSpPr>
+          <p:cNvPr id="32" name="Text 30"/>
+          <p:cNvSpPr/>
+          <p:nvPr/>
+        </p:nvSpPr>
+        <p:spPr>
+          <a:xfrm>
+            <a:off x="5486400" y="3090672"/>
+            <a:ext cx="3108960" cy="320040"/>
+          </a:xfrm>
+          <a:prstGeom prst="rect">
+            <a:avLst/>
+          </a:prstGeom>
+          <a:noFill/>
+          <a:ln/>
+        </p:spPr>
+        <p:txBody>
+          <a:bodyPr wrap="square" lIns="0" tIns="0" rIns="0" bIns="0" rtlCol="0" anchor="ctr"/>
+          <a:lstStyle/>
+          <a:p>
+            <a:pPr indent="0" marL="0">
+              <a:buNone/>
+            </a:pPr>
+            <a:r>
+              <a:rPr lang="en-US" sz="700" dirty="0">
+                <a:solidFill>
+                  <a:srgbClr val="334155"/>
+                </a:solidFill>
+                <a:latin typeface="Calibri" pitchFamily="34" charset="0"/>
+                <a:ea typeface="Calibri" pitchFamily="34" charset="-122"/>
+                <a:cs typeface="Calibri" pitchFamily="34" charset="-120"/>
+              </a:rPr>
+              <a:t>Location comparisons — metro</a:t>
+            </a:r>
+            <a:endParaRPr lang="en-US" sz="700" dirty="0"/>
+          </a:p>
+          <a:p>
+            <a:pPr indent="0" marL="0">
+              <a:buNone/>
+            </a:pPr>
+            <a:r>
+              <a:rPr lang="en-US" sz="700" dirty="0">
+                <a:solidFill>
+                  <a:srgbClr val="334155"/>
+                </a:solidFill>
+                <a:latin typeface="Calibri" pitchFamily="34" charset="0"/>
+                <a:ea typeface="Calibri" pitchFamily="34" charset="-122"/>
+                <a:cs typeface="Calibri" pitchFamily="34" charset="-120"/>
+              </a:rPr>
+              <a:t>shifts, remote vs in-office</a:t>
+            </a:r>
+            <a:endParaRPr lang="en-US" sz="700" dirty="0"/>
+          </a:p>
+        </p:txBody>
+      </p:sp>
+      <p:sp>
+        <p:nvSpPr>
+          <p:cNvPr id="33" name="Text 31"/>
+          <p:cNvSpPr/>
+          <p:nvPr/>
+        </p:nvSpPr>
+        <p:spPr>
+          <a:xfrm>
+            <a:off x="5486400" y="3383280"/>
+            <a:ext cx="914400" cy="164592"/>
+          </a:xfrm>
+          <a:prstGeom prst="rect">
+            <a:avLst/>
+          </a:prstGeom>
+          <a:noFill/>
+          <a:ln/>
+        </p:spPr>
+        <p:txBody>
+          <a:bodyPr wrap="square" lIns="0" tIns="0" rIns="0" bIns="0" rtlCol="0" anchor="ctr"/>
+          <a:lstStyle/>
+          <a:p>
+            <a:pPr indent="0" marL="0">
+              <a:buNone/>
+            </a:pPr>
+            <a:r>
+              <a:rPr lang="en-US" sz="850" b="1" dirty="0">
+                <a:solidFill>
+                  <a:srgbClr val="1A1F36"/>
+                </a:solidFill>
+                <a:latin typeface="Calibri" pitchFamily="34" charset="0"/>
+                <a:ea typeface="Calibri" pitchFamily="34" charset="-122"/>
+                <a:cs typeface="Calibri" pitchFamily="34" charset="-120"/>
+              </a:rPr>
+              <a:t>Wednesday</a:t>
+            </a:r>
+            <a:endParaRPr lang="en-US" sz="850" dirty="0"/>
+          </a:p>
+        </p:txBody>
+      </p:sp>
+      <p:sp>
+        <p:nvSpPr>
+          <p:cNvPr id="34" name="Text 32"/>
+          <p:cNvSpPr/>
+          <p:nvPr/>
+        </p:nvSpPr>
+        <p:spPr>
+          <a:xfrm>
+            <a:off x="5486400" y="3547872"/>
+            <a:ext cx="3108960" cy="320040"/>
+          </a:xfrm>
+          <a:prstGeom prst="rect">
+            <a:avLst/>
+          </a:prstGeom>
+          <a:noFill/>
+          <a:ln/>
+        </p:spPr>
+        <p:txBody>
+          <a:bodyPr wrap="square" lIns="0" tIns="0" rIns="0" bIns="0" rtlCol="0" anchor="ctr"/>
+          <a:lstStyle/>
+          <a:p>
+            <a:pPr indent="0" marL="0">
+              <a:buNone/>
+            </a:pPr>
+            <a:r>
+              <a:rPr lang="en-US" sz="700" dirty="0">
+                <a:solidFill>
+                  <a:srgbClr val="334155"/>
+                </a:solidFill>
+                <a:latin typeface="Calibri" pitchFamily="34" charset="0"/>
+                <a:ea typeface="Calibri" pitchFamily="34" charset="-122"/>
+                <a:cs typeface="Calibri" pitchFamily="34" charset="-120"/>
+              </a:rPr>
+              <a:t>Industry velocity — who's hiring,</a:t>
+            </a:r>
+            <a:endParaRPr lang="en-US" sz="700" dirty="0"/>
+          </a:p>
+          <a:p>
+            <a:pPr indent="0" marL="0">
+              <a:buNone/>
+            </a:pPr>
+            <a:r>
+              <a:rPr lang="en-US" sz="700" dirty="0">
+                <a:solidFill>
+                  <a:srgbClr val="334155"/>
+                </a:solidFill>
+                <a:latin typeface="Calibri" pitchFamily="34" charset="0"/>
+                <a:ea typeface="Calibri" pitchFamily="34" charset="-122"/>
+                <a:cs typeface="Calibri" pitchFamily="34" charset="-120"/>
+              </a:rPr>
+              <a:t>who's pulling back, sector rotation</a:t>
+            </a:r>
+            <a:endParaRPr lang="en-US" sz="700" dirty="0"/>
+          </a:p>
+        </p:txBody>
+      </p:sp>
+      <p:sp>
+        <p:nvSpPr>
+          <p:cNvPr id="35" name="Text 33"/>
+          <p:cNvSpPr/>
+          <p:nvPr/>
+        </p:nvSpPr>
+        <p:spPr>
+          <a:xfrm>
+            <a:off x="5486400" y="3840480"/>
+            <a:ext cx="914400" cy="164592"/>
+          </a:xfrm>
+          <a:prstGeom prst="rect">
+            <a:avLst/>
+          </a:prstGeom>
+          <a:noFill/>
+          <a:ln/>
+        </p:spPr>
+        <p:txBody>
+          <a:bodyPr wrap="square" lIns="0" tIns="0" rIns="0" bIns="0" rtlCol="0" anchor="ctr"/>
+          <a:lstStyle/>
+          <a:p>
+            <a:pPr indent="0" marL="0">
+              <a:buNone/>
+            </a:pPr>
+            <a:r>
+              <a:rPr lang="en-US" sz="850" b="1" dirty="0">
+                <a:solidFill>
+                  <a:srgbClr val="1A1F36"/>
+                </a:solidFill>
+                <a:latin typeface="Calibri" pitchFamily="34" charset="0"/>
+                <a:ea typeface="Calibri" pitchFamily="34" charset="-122"/>
+                <a:cs typeface="Calibri" pitchFamily="34" charset="-120"/>
+              </a:rPr>
+              <a:t>Thursday</a:t>
+            </a:r>
+            <a:endParaRPr lang="en-US" sz="850" dirty="0"/>
+          </a:p>
+        </p:txBody>
+      </p:sp>
+      <p:sp>
+        <p:nvSpPr>
+          <p:cNvPr id="36" name="Text 34"/>
+          <p:cNvSpPr/>
+          <p:nvPr/>
+        </p:nvSpPr>
+        <p:spPr>
+          <a:xfrm>
+            <a:off x="5486400" y="4005072"/>
+            <a:ext cx="3108960" cy="320040"/>
+          </a:xfrm>
+          <a:prstGeom prst="rect">
+            <a:avLst/>
+          </a:prstGeom>
+          <a:noFill/>
+          <a:ln/>
+        </p:spPr>
+        <p:txBody>
+          <a:bodyPr wrap="square" lIns="0" tIns="0" rIns="0" bIns="0" rtlCol="0" anchor="ctr"/>
+          <a:lstStyle/>
+          <a:p>
+            <a:pPr indent="0" marL="0">
+              <a:buNone/>
+            </a:pPr>
+            <a:r>
+              <a:rPr lang="en-US" sz="700" dirty="0">
+                <a:solidFill>
+                  <a:srgbClr val="334155"/>
+                </a:solidFill>
+                <a:latin typeface="Calibri" pitchFamily="34" charset="0"/>
+                <a:ea typeface="Calibri" pitchFamily="34" charset="-122"/>
+                <a:cs typeface="Calibri" pitchFamily="34" charset="-120"/>
+              </a:rPr>
+              <a:t>Company spotlight — fastest-</a:t>
+            </a:r>
+            <a:endParaRPr lang="en-US" sz="700" dirty="0"/>
+          </a:p>
+          <a:p>
+            <a:pPr indent="0" marL="0">
+              <a:buNone/>
+            </a:pPr>
+            <a:r>
+              <a:rPr lang="en-US" sz="700" dirty="0">
+                <a:solidFill>
+                  <a:srgbClr val="334155"/>
+                </a:solidFill>
+                <a:latin typeface="Calibri" pitchFamily="34" charset="0"/>
+                <a:ea typeface="Calibri" pitchFamily="34" charset="-122"/>
+                <a:cs typeface="Calibri" pitchFamily="34" charset="-120"/>
+              </a:rPr>
+              <a:t>growing boards, new entrants</a:t>
+            </a:r>
+            <a:endParaRPr lang="en-US" sz="700" dirty="0"/>
+          </a:p>
+        </p:txBody>
+      </p:sp>
+      <p:sp>
+        <p:nvSpPr>
+          <p:cNvPr id="37" name="Text 35"/>
+          <p:cNvSpPr/>
+          <p:nvPr/>
+        </p:nvSpPr>
+        <p:spPr>
+          <a:xfrm>
+            <a:off x="5486400" y="4297680"/>
+            <a:ext cx="914400" cy="164592"/>
+          </a:xfrm>
+          <a:prstGeom prst="rect">
+            <a:avLst/>
+          </a:prstGeom>
+          <a:noFill/>
+          <a:ln/>
+        </p:spPr>
+        <p:txBody>
+          <a:bodyPr wrap="square" lIns="0" tIns="0" rIns="0" bIns="0" rtlCol="0" anchor="ctr"/>
+          <a:lstStyle/>
+          <a:p>
+            <a:pPr indent="0" marL="0">
+              <a:buNone/>
+            </a:pPr>
+            <a:r>
+              <a:rPr lang="en-US" sz="850" b="1" dirty="0">
+                <a:solidFill>
+                  <a:srgbClr val="1A1F36"/>
+                </a:solidFill>
+                <a:latin typeface="Calibri" pitchFamily="34" charset="0"/>
+                <a:ea typeface="Calibri" pitchFamily="34" charset="-122"/>
+                <a:cs typeface="Calibri" pitchFamily="34" charset="-120"/>
+              </a:rPr>
+              <a:t>Friday</a:t>
+            </a:r>
+            <a:endParaRPr lang="en-US" sz="850" dirty="0"/>
+          </a:p>
+        </p:txBody>
+      </p:sp>
+      <p:sp>
+        <p:nvSpPr>
+          <p:cNvPr id="38" name="Text 36"/>
+          <p:cNvSpPr/>
+          <p:nvPr/>
+        </p:nvSpPr>
+        <p:spPr>
+          <a:xfrm>
+            <a:off x="5486400" y="4462272"/>
+            <a:ext cx="3108960" cy="320040"/>
+          </a:xfrm>
+          <a:prstGeom prst="rect">
+            <a:avLst/>
+          </a:prstGeom>
+          <a:noFill/>
+          <a:ln/>
+        </p:spPr>
+        <p:txBody>
+          <a:bodyPr wrap="square" lIns="0" tIns="0" rIns="0" bIns="0" rtlCol="0" anchor="ctr"/>
+          <a:lstStyle/>
+          <a:p>
+            <a:pPr indent="0" marL="0">
+              <a:buNone/>
+            </a:pPr>
+            <a:r>
+              <a:rPr lang="en-US" sz="700" dirty="0">
+                <a:solidFill>
+                  <a:srgbClr val="334155"/>
+                </a:solidFill>
+                <a:latin typeface="Calibri" pitchFamily="34" charset="0"/>
+                <a:ea typeface="Calibri" pitchFamily="34" charset="-122"/>
+                <a:cs typeface="Calibri" pitchFamily="34" charset="-120"/>
+              </a:rPr>
+              <a:t>Weekly wrap + GT API trending —</a:t>
+            </a:r>
+            <a:endParaRPr lang="en-US" sz="700" dirty="0"/>
+          </a:p>
+          <a:p>
+            <a:pPr indent="0" marL="0">
+              <a:buNone/>
+            </a:pPr>
+            <a:r>
+              <a:rPr lang="en-US" sz="700" dirty="0">
+                <a:solidFill>
+                  <a:srgbClr val="334155"/>
+                </a:solidFill>
+                <a:latin typeface="Calibri" pitchFamily="34" charset="0"/>
+                <a:ea typeface="Calibri" pitchFamily="34" charset="-122"/>
+                <a:cs typeface="Calibri" pitchFamily="34" charset="-120"/>
+              </a:rPr>
+              <a:t>"This week's hottest search terms</a:t>
+            </a:r>
+            <a:endParaRPr lang="en-US" sz="700" dirty="0"/>
+          </a:p>
+          <a:p>
+            <a:pPr indent="0" marL="0">
+              <a:buNone/>
+            </a:pPr>
+            <a:r>
+              <a:rPr lang="en-US" sz="700" dirty="0">
+                <a:solidFill>
+                  <a:srgbClr val="334155"/>
+                </a:solidFill>
+                <a:latin typeface="Calibri" pitchFamily="34" charset="0"/>
+                <a:ea typeface="Calibri" pitchFamily="34" charset="-122"/>
+                <a:cs typeface="Calibri" pitchFamily="34" charset="-120"/>
+              </a:rPr>
+              <a:t>vs what the data actually shows"</a:t>
+            </a:r>
+            <a:endParaRPr lang="en-US" sz="700" dirty="0"/>
+          </a:p>
+        </p:txBody>
+      </p:sp>
+      <p:sp>
+        <p:nvSpPr>
+          <p:cNvPr id="39" name="Text 37"/>
+          <p:cNvSpPr/>
+          <p:nvPr/>
+        </p:nvSpPr>
+        <p:spPr>
+          <a:xfrm>
+            <a:off x="548640" y="4709160"/>
+            <a:ext cx="8046720" cy="274320"/>
+          </a:xfrm>
+          <a:prstGeom prst="rect">
+            <a:avLst/>
+          </a:prstGeom>
+          <a:noFill/>
+          <a:ln/>
+        </p:spPr>
+        <p:txBody>
+          <a:bodyPr wrap="square" lIns="0" tIns="0" rIns="0" bIns="0" rtlCol="0" anchor="ctr"/>
+          <a:lstStyle/>
+          <a:p>
+            <a:pPr indent="0" marL="0">
+              <a:buNone/>
+            </a:pPr>
+            <a:r>
+              <a:rPr lang="en-US" sz="900" i="1" dirty="0">
                 <a:solidFill>
                   <a:srgbClr val="64748B"/>
                 </a:solidFill>
@@ -7155,904 +8141,9 @@
                 <a:ea typeface="Calibri" pitchFamily="34" charset="-122"/>
                 <a:cs typeface="Calibri" pitchFamily="34" charset="-120"/>
               </a:rPr>
-              <a:t>Month 1-2</a:t>
-            </a:r>
-            <a:endParaRPr lang="en-US" sz="800" dirty="0"/>
-          </a:p>
-        </p:txBody>
-      </p:sp>
-      <p:sp>
-        <p:nvSpPr>
-          <p:cNvPr id="22" name="Text 20"/>
-          <p:cNvSpPr/>
-          <p:nvPr/>
-        </p:nvSpPr>
-        <p:spPr>
-          <a:xfrm>
-            <a:off x="1554480" y="2798064"/>
-            <a:ext cx="731520" cy="640080"/>
-          </a:xfrm>
-          <a:prstGeom prst="rect">
-            <a:avLst/>
-          </a:prstGeom>
-          <a:noFill/>
-          <a:ln/>
-        </p:spPr>
-        <p:txBody>
-          <a:bodyPr wrap="square" lIns="0" tIns="0" rIns="0" bIns="0" rtlCol="0" anchor="ctr"/>
-          <a:lstStyle/>
-          <a:p>
-            <a:pPr indent="0" marL="0">
-              <a:buNone/>
-            </a:pPr>
-            <a:r>
-              <a:rPr lang="en-US" sz="1000" b="1" dirty="0">
-                <a:solidFill>
-                  <a:srgbClr val="1A1F36"/>
-                </a:solidFill>
-                <a:latin typeface="Georgia" pitchFamily="34" charset="0"/>
-                <a:ea typeface="Georgia" pitchFamily="34" charset="-122"/>
-                <a:cs typeface="Georgia" pitchFamily="34" charset="-120"/>
-              </a:rPr>
-              <a:t>4-5 days</a:t>
-            </a:r>
-            <a:endParaRPr lang="en-US" sz="1000" dirty="0"/>
-          </a:p>
-        </p:txBody>
-      </p:sp>
-      <p:sp>
-        <p:nvSpPr>
-          <p:cNvPr id="23" name="Text 21"/>
-          <p:cNvSpPr/>
-          <p:nvPr/>
-        </p:nvSpPr>
-        <p:spPr>
-          <a:xfrm>
-            <a:off x="2377440" y="2843784"/>
-            <a:ext cx="3657600" cy="548640"/>
-          </a:xfrm>
-          <a:prstGeom prst="rect">
-            <a:avLst/>
-          </a:prstGeom>
-          <a:noFill/>
-          <a:ln/>
-        </p:spPr>
-        <p:txBody>
-          <a:bodyPr wrap="square" lIns="0" tIns="0" rIns="0" bIns="0" rtlCol="0" anchor="ctr"/>
-          <a:lstStyle/>
-          <a:p>
-            <a:pPr indent="0" marL="0">
-              <a:buNone/>
-            </a:pPr>
-            <a:r>
-              <a:rPr lang="en-US" sz="800" dirty="0">
-                <a:solidFill>
-                  <a:srgbClr val="334155"/>
-                </a:solidFill>
-                <a:latin typeface="Calibri" pitchFamily="34" charset="0"/>
-                <a:ea typeface="Calibri" pitchFamily="34" charset="-122"/>
-                <a:cs typeface="Calibri" pitchFamily="34" charset="-120"/>
-              </a:rPr>
-              <a:t>Blog page template (/blog/{slug})</a:t>
-            </a:r>
-            <a:endParaRPr lang="en-US" sz="800" dirty="0"/>
-          </a:p>
-          <a:p>
-            <a:pPr indent="0" marL="0">
-              <a:buNone/>
-            </a:pPr>
-            <a:r>
-              <a:rPr lang="en-US" sz="800" dirty="0">
-                <a:solidFill>
-                  <a:srgbClr val="334155"/>
-                </a:solidFill>
-                <a:latin typeface="Calibri" pitchFamily="34" charset="0"/>
-                <a:ea typeface="Calibri" pitchFamily="34" charset="-122"/>
-                <a:cs typeface="Calibri" pitchFamily="34" charset="-120"/>
-              </a:rPr>
-              <a:t>Internal merchandising (5 surfaces)</a:t>
-            </a:r>
-            <a:endParaRPr lang="en-US" sz="800" dirty="0"/>
-          </a:p>
-          <a:p>
-            <a:pPr indent="0" marL="0">
-              <a:buNone/>
-            </a:pPr>
-            <a:r>
-              <a:rPr lang="en-US" sz="800" dirty="0">
-                <a:solidFill>
-                  <a:srgbClr val="334155"/>
-                </a:solidFill>
-                <a:latin typeface="Calibri" pitchFamily="34" charset="0"/>
-                <a:ea typeface="Calibri" pitchFamily="34" charset="-122"/>
-                <a:cs typeface="Calibri" pitchFamily="34" charset="-120"/>
-              </a:rPr>
-              <a:t>Unified social API integration (Late)</a:t>
-            </a:r>
-            <a:endParaRPr lang="en-US" sz="800" dirty="0"/>
-          </a:p>
-          <a:p>
-            <a:pPr indent="0" marL="0">
-              <a:buNone/>
-            </a:pPr>
-            <a:r>
-              <a:rPr lang="en-US" sz="800" dirty="0">
-                <a:solidFill>
-                  <a:srgbClr val="334155"/>
-                </a:solidFill>
-                <a:latin typeface="Calibri" pitchFamily="34" charset="0"/>
-                <a:ea typeface="Calibri" pitchFamily="34" charset="-122"/>
-                <a:cs typeface="Calibri" pitchFamily="34" charset="-120"/>
-              </a:rPr>
-              <a:t>Social metrics webhook ingestion</a:t>
-            </a:r>
-            <a:endParaRPr lang="en-US" sz="800" dirty="0"/>
-          </a:p>
-          <a:p>
-            <a:pPr indent="0" marL="0">
-              <a:buNone/>
-            </a:pPr>
-            <a:r>
-              <a:rPr lang="en-US" sz="800" dirty="0">
-                <a:solidFill>
-                  <a:srgbClr val="334155"/>
-                </a:solidFill>
-                <a:latin typeface="Calibri" pitchFamily="34" charset="0"/>
-                <a:ea typeface="Calibri" pitchFamily="34" charset="-122"/>
-                <a:cs typeface="Calibri" pitchFamily="34" charset="-120"/>
-              </a:rPr>
-              <a:t>Newsletter integration via Resend</a:t>
-            </a:r>
-            <a:endParaRPr lang="en-US" sz="800" dirty="0"/>
-          </a:p>
-        </p:txBody>
-      </p:sp>
-      <p:sp>
-        <p:nvSpPr>
-          <p:cNvPr id="24" name="Text 22"/>
-          <p:cNvSpPr/>
-          <p:nvPr/>
-        </p:nvSpPr>
-        <p:spPr>
-          <a:xfrm>
-            <a:off x="6400800" y="2843784"/>
-            <a:ext cx="2011680" cy="548640"/>
-          </a:xfrm>
-          <a:prstGeom prst="rect">
-            <a:avLst/>
-          </a:prstGeom>
-          <a:noFill/>
-          <a:ln/>
-        </p:spPr>
-        <p:txBody>
-          <a:bodyPr wrap="square" lIns="0" tIns="0" rIns="0" bIns="0" rtlCol="0" anchor="ctr"/>
-          <a:lstStyle/>
-          <a:p>
-            <a:pPr indent="0" marL="0">
-              <a:buNone/>
-            </a:pPr>
-            <a:r>
-              <a:rPr lang="en-US" sz="800" dirty="0">
-                <a:solidFill>
-                  <a:srgbClr val="64748B"/>
-                </a:solidFill>
-                <a:latin typeface="Calibri" pitchFamily="34" charset="0"/>
-                <a:ea typeface="Calibri" pitchFamily="34" charset="-122"/>
-                <a:cs typeface="Calibri" pitchFamily="34" charset="-120"/>
-              </a:rPr>
-              <a:t>Pod 2 builds</a:t>
-            </a:r>
-            <a:endParaRPr lang="en-US" sz="800" dirty="0"/>
-          </a:p>
-          <a:p>
-            <a:pPr indent="0" marL="0">
-              <a:buNone/>
-            </a:pPr>
-            <a:r>
-              <a:rPr lang="en-US" sz="800" dirty="0">
-                <a:solidFill>
-                  <a:srgbClr val="64748B"/>
-                </a:solidFill>
-                <a:latin typeface="Calibri" pitchFamily="34" charset="0"/>
-                <a:ea typeface="Calibri" pitchFamily="34" charset="-122"/>
-                <a:cs typeface="Calibri" pitchFamily="34" charset="-120"/>
-              </a:rPr>
-              <a:t>Pod 1 placement</a:t>
-            </a:r>
-            <a:endParaRPr lang="en-US" sz="800" dirty="0"/>
-          </a:p>
-        </p:txBody>
-      </p:sp>
-      <p:sp>
-        <p:nvSpPr>
-          <p:cNvPr id="25" name="Shape 23"/>
-          <p:cNvSpPr/>
-          <p:nvPr/>
-        </p:nvSpPr>
-        <p:spPr>
-          <a:xfrm>
-            <a:off x="548640" y="3511296"/>
-            <a:ext cx="8046720" cy="640080"/>
-          </a:xfrm>
-          <a:prstGeom prst="rect">
-            <a:avLst/>
-          </a:prstGeom>
-          <a:solidFill>
-            <a:srgbClr val="FFFFFF"/>
-          </a:solidFill>
-          <a:ln/>
-          <a:effectLst>
-            <a:outerShdw sx="100000" sy="100000" kx="0" ky="0" algn="bl" rotWithShape="0" blurRad="76200" dist="25400" dir="8100000">
-              <a:srgbClr val="000000">
-                <a:alpha val="10000"/>
-              </a:srgbClr>
-            </a:outerShdw>
-          </a:effectLst>
-        </p:spPr>
-      </p:sp>
-      <p:sp>
-        <p:nvSpPr>
-          <p:cNvPr id="26" name="Shape 24"/>
-          <p:cNvSpPr/>
-          <p:nvPr/>
-        </p:nvSpPr>
-        <p:spPr>
-          <a:xfrm>
-            <a:off x="548640" y="3511296"/>
-            <a:ext cx="54864" cy="640080"/>
-          </a:xfrm>
-          <a:prstGeom prst="rect">
-            <a:avLst/>
-          </a:prstGeom>
-          <a:solidFill>
-            <a:srgbClr val="8B5CF6"/>
-          </a:solidFill>
-          <a:ln/>
-        </p:spPr>
-      </p:sp>
-      <p:sp>
-        <p:nvSpPr>
-          <p:cNvPr id="27" name="Text 25"/>
-          <p:cNvSpPr/>
-          <p:nvPr/>
-        </p:nvSpPr>
-        <p:spPr>
-          <a:xfrm>
-            <a:off x="731520" y="3511296"/>
-            <a:ext cx="731520" cy="320040"/>
-          </a:xfrm>
-          <a:prstGeom prst="rect">
-            <a:avLst/>
-          </a:prstGeom>
-          <a:noFill/>
-          <a:ln/>
-        </p:spPr>
-        <p:txBody>
-          <a:bodyPr wrap="square" lIns="0" tIns="0" rIns="0" bIns="0" rtlCol="0" anchor="ctr"/>
-          <a:lstStyle/>
-          <a:p>
-            <a:pPr indent="0" marL="0">
-              <a:buNone/>
-            </a:pPr>
-            <a:r>
-              <a:rPr lang="en-US" sz="900" b="1" dirty="0">
-                <a:solidFill>
-                  <a:srgbClr val="8B5CF6"/>
-                </a:solidFill>
-                <a:latin typeface="Arial" pitchFamily="34" charset="0"/>
-                <a:ea typeface="Arial" pitchFamily="34" charset="-122"/>
-                <a:cs typeface="Arial" pitchFamily="34" charset="-120"/>
-              </a:rPr>
-              <a:t>PHASE 4</a:t>
+              <a:t>The government number is the hook. Your ATS data is the reality check. The job seeker perspective is the editorial voice. Three layers, every time.</a:t>
             </a:r>
             <a:endParaRPr lang="en-US" sz="900" dirty="0"/>
-          </a:p>
-        </p:txBody>
-      </p:sp>
-      <p:sp>
-        <p:nvSpPr>
-          <p:cNvPr id="28" name="Text 26"/>
-          <p:cNvSpPr/>
-          <p:nvPr/>
-        </p:nvSpPr>
-        <p:spPr>
-          <a:xfrm>
-            <a:off x="731520" y="3803904"/>
-            <a:ext cx="731520" cy="274320"/>
-          </a:xfrm>
-          <a:prstGeom prst="rect">
-            <a:avLst/>
-          </a:prstGeom>
-          <a:noFill/>
-          <a:ln/>
-        </p:spPr>
-        <p:txBody>
-          <a:bodyPr wrap="square" lIns="0" tIns="0" rIns="0" bIns="0" rtlCol="0" anchor="ctr"/>
-          <a:lstStyle/>
-          <a:p>
-            <a:pPr indent="0" marL="0">
-              <a:buNone/>
-            </a:pPr>
-            <a:r>
-              <a:rPr lang="en-US" sz="800" dirty="0">
-                <a:solidFill>
-                  <a:srgbClr val="64748B"/>
-                </a:solidFill>
-                <a:latin typeface="Calibri" pitchFamily="34" charset="0"/>
-                <a:ea typeface="Calibri" pitchFamily="34" charset="-122"/>
-                <a:cs typeface="Calibri" pitchFamily="34" charset="-120"/>
-              </a:rPr>
-              <a:t>Month 2-3</a:t>
-            </a:r>
-            <a:endParaRPr lang="en-US" sz="800" dirty="0"/>
-          </a:p>
-        </p:txBody>
-      </p:sp>
-      <p:sp>
-        <p:nvSpPr>
-          <p:cNvPr id="29" name="Text 27"/>
-          <p:cNvSpPr/>
-          <p:nvPr/>
-        </p:nvSpPr>
-        <p:spPr>
-          <a:xfrm>
-            <a:off x="1554480" y="3511296"/>
-            <a:ext cx="731520" cy="640080"/>
-          </a:xfrm>
-          <a:prstGeom prst="rect">
-            <a:avLst/>
-          </a:prstGeom>
-          <a:noFill/>
-          <a:ln/>
-        </p:spPr>
-        <p:txBody>
-          <a:bodyPr wrap="square" lIns="0" tIns="0" rIns="0" bIns="0" rtlCol="0" anchor="ctr"/>
-          <a:lstStyle/>
-          <a:p>
-            <a:pPr indent="0" marL="0">
-              <a:buNone/>
-            </a:pPr>
-            <a:r>
-              <a:rPr lang="en-US" sz="1000" b="1" dirty="0">
-                <a:solidFill>
-                  <a:srgbClr val="1A1F36"/>
-                </a:solidFill>
-                <a:latin typeface="Georgia" pitchFamily="34" charset="0"/>
-                <a:ea typeface="Georgia" pitchFamily="34" charset="-122"/>
-                <a:cs typeface="Georgia" pitchFamily="34" charset="-120"/>
-              </a:rPr>
-              <a:t>6-8 days</a:t>
-            </a:r>
-            <a:endParaRPr lang="en-US" sz="1000" dirty="0"/>
-          </a:p>
-        </p:txBody>
-      </p:sp>
-      <p:sp>
-        <p:nvSpPr>
-          <p:cNvPr id="30" name="Text 28"/>
-          <p:cNvSpPr/>
-          <p:nvPr/>
-        </p:nvSpPr>
-        <p:spPr>
-          <a:xfrm>
-            <a:off x="2377440" y="3557016"/>
-            <a:ext cx="3657600" cy="548640"/>
-          </a:xfrm>
-          <a:prstGeom prst="rect">
-            <a:avLst/>
-          </a:prstGeom>
-          <a:noFill/>
-          <a:ln/>
-        </p:spPr>
-        <p:txBody>
-          <a:bodyPr wrap="square" lIns="0" tIns="0" rIns="0" bIns="0" rtlCol="0" anchor="ctr"/>
-          <a:lstStyle/>
-          <a:p>
-            <a:pPr indent="0" marL="0">
-              <a:buNone/>
-            </a:pPr>
-            <a:r>
-              <a:rPr lang="en-US" sz="800" dirty="0">
-                <a:solidFill>
-                  <a:srgbClr val="334155"/>
-                </a:solidFill>
-                <a:latin typeface="Calibri" pitchFamily="34" charset="0"/>
-                <a:ea typeface="Calibri" pitchFamily="34" charset="-122"/>
-                <a:cs typeface="Calibri" pitchFamily="34" charset="-120"/>
-              </a:rPr>
-              <a:t>Video rendering pipeline</a:t>
-            </a:r>
-            <a:endParaRPr lang="en-US" sz="800" dirty="0"/>
-          </a:p>
-          <a:p>
-            <a:pPr indent="0" marL="0">
-              <a:buNone/>
-            </a:pPr>
-            <a:r>
-              <a:rPr lang="en-US" sz="800" dirty="0">
-                <a:solidFill>
-                  <a:srgbClr val="334155"/>
-                </a:solidFill>
-                <a:latin typeface="Calibri" pitchFamily="34" charset="0"/>
-                <a:ea typeface="Calibri" pitchFamily="34" charset="-122"/>
-                <a:cs typeface="Calibri" pitchFamily="34" charset="-120"/>
-              </a:rPr>
-              <a:t>AI voiceover + animated charts</a:t>
-            </a:r>
-            <a:endParaRPr lang="en-US" sz="800" dirty="0"/>
-          </a:p>
-          <a:p>
-            <a:pPr indent="0" marL="0">
-              <a:buNone/>
-            </a:pPr>
-            <a:r>
-              <a:rPr lang="en-US" sz="800" dirty="0">
-                <a:solidFill>
-                  <a:srgbClr val="334155"/>
-                </a:solidFill>
-                <a:latin typeface="Calibri" pitchFamily="34" charset="0"/>
-                <a:ea typeface="Calibri" pitchFamily="34" charset="-122"/>
-                <a:cs typeface="Calibri" pitchFamily="34" charset="-120"/>
-              </a:rPr>
-              <a:t>YouTube / Shorts / Reels publishing</a:t>
-            </a:r>
-            <a:endParaRPr lang="en-US" sz="800" dirty="0"/>
-          </a:p>
-          <a:p>
-            <a:pPr indent="0" marL="0">
-              <a:buNone/>
-            </a:pPr>
-            <a:r>
-              <a:rPr lang="en-US" sz="800" dirty="0">
-                <a:solidFill>
-                  <a:srgbClr val="334155"/>
-                </a:solidFill>
-                <a:latin typeface="Calibri" pitchFamily="34" charset="0"/>
-                <a:ea typeface="Calibri" pitchFamily="34" charset="-122"/>
-                <a:cs typeface="Calibri" pitchFamily="34" charset="-120"/>
-              </a:rPr>
-              <a:t>Survey research program (pop-ups)</a:t>
-            </a:r>
-            <a:endParaRPr lang="en-US" sz="800" dirty="0"/>
-          </a:p>
-          <a:p>
-            <a:pPr indent="0" marL="0">
-              <a:buNone/>
-            </a:pPr>
-            <a:r>
-              <a:rPr lang="en-US" sz="800" dirty="0">
-                <a:solidFill>
-                  <a:srgbClr val="334155"/>
-                </a:solidFill>
-                <a:latin typeface="Calibri" pitchFamily="34" charset="0"/>
-                <a:ea typeface="Calibri" pitchFamily="34" charset="-122"/>
-                <a:cs typeface="Calibri" pitchFamily="34" charset="-120"/>
-              </a:rPr>
-              <a:t>Personal journey opt-in system</a:t>
-            </a:r>
-            <a:endParaRPr lang="en-US" sz="800" dirty="0"/>
-          </a:p>
-        </p:txBody>
-      </p:sp>
-      <p:sp>
-        <p:nvSpPr>
-          <p:cNvPr id="31" name="Text 29"/>
-          <p:cNvSpPr/>
-          <p:nvPr/>
-        </p:nvSpPr>
-        <p:spPr>
-          <a:xfrm>
-            <a:off x="6400800" y="3557016"/>
-            <a:ext cx="2011680" cy="548640"/>
-          </a:xfrm>
-          <a:prstGeom prst="rect">
-            <a:avLst/>
-          </a:prstGeom>
-          <a:noFill/>
-          <a:ln/>
-        </p:spPr>
-        <p:txBody>
-          <a:bodyPr wrap="square" lIns="0" tIns="0" rIns="0" bIns="0" rtlCol="0" anchor="ctr"/>
-          <a:lstStyle/>
-          <a:p>
-            <a:pPr indent="0" marL="0">
-              <a:buNone/>
-            </a:pPr>
-            <a:r>
-              <a:rPr lang="en-US" sz="800" dirty="0">
-                <a:solidFill>
-                  <a:srgbClr val="64748B"/>
-                </a:solidFill>
-                <a:latin typeface="Calibri" pitchFamily="34" charset="0"/>
-                <a:ea typeface="Calibri" pitchFamily="34" charset="-122"/>
-                <a:cs typeface="Calibri" pitchFamily="34" charset="-120"/>
-              </a:rPr>
-              <a:t>Pod 2 builds</a:t>
-            </a:r>
-            <a:endParaRPr lang="en-US" sz="800" dirty="0"/>
-          </a:p>
-          <a:p>
-            <a:pPr indent="0" marL="0">
-              <a:buNone/>
-            </a:pPr>
-            <a:r>
-              <a:rPr lang="en-US" sz="800" dirty="0">
-                <a:solidFill>
-                  <a:srgbClr val="64748B"/>
-                </a:solidFill>
-                <a:latin typeface="Calibri" pitchFamily="34" charset="0"/>
-                <a:ea typeface="Calibri" pitchFamily="34" charset="-122"/>
-                <a:cs typeface="Calibri" pitchFamily="34" charset="-120"/>
-              </a:rPr>
-              <a:t>Pod 1 templates</a:t>
-            </a:r>
-            <a:endParaRPr lang="en-US" sz="800" dirty="0"/>
-          </a:p>
-        </p:txBody>
-      </p:sp>
-      <p:sp>
-        <p:nvSpPr>
-          <p:cNvPr id="32" name="Shape 30"/>
-          <p:cNvSpPr/>
-          <p:nvPr/>
-        </p:nvSpPr>
-        <p:spPr>
-          <a:xfrm>
-            <a:off x="548640" y="4224528"/>
-            <a:ext cx="8046720" cy="640080"/>
-          </a:xfrm>
-          <a:prstGeom prst="rect">
-            <a:avLst/>
-          </a:prstGeom>
-          <a:solidFill>
-            <a:srgbClr val="FFFFFF"/>
-          </a:solidFill>
-          <a:ln/>
-          <a:effectLst>
-            <a:outerShdw sx="100000" sy="100000" kx="0" ky="0" algn="bl" rotWithShape="0" blurRad="76200" dist="25400" dir="8100000">
-              <a:srgbClr val="000000">
-                <a:alpha val="10000"/>
-              </a:srgbClr>
-            </a:outerShdw>
-          </a:effectLst>
-        </p:spPr>
-      </p:sp>
-      <p:sp>
-        <p:nvSpPr>
-          <p:cNvPr id="33" name="Shape 31"/>
-          <p:cNvSpPr/>
-          <p:nvPr/>
-        </p:nvSpPr>
-        <p:spPr>
-          <a:xfrm>
-            <a:off x="548640" y="4224528"/>
-            <a:ext cx="54864" cy="640080"/>
-          </a:xfrm>
-          <a:prstGeom prst="rect">
-            <a:avLst/>
-          </a:prstGeom>
-          <a:solidFill>
-            <a:srgbClr val="F59E0B"/>
-          </a:solidFill>
-          <a:ln/>
-        </p:spPr>
-      </p:sp>
-      <p:sp>
-        <p:nvSpPr>
-          <p:cNvPr id="34" name="Text 32"/>
-          <p:cNvSpPr/>
-          <p:nvPr/>
-        </p:nvSpPr>
-        <p:spPr>
-          <a:xfrm>
-            <a:off x="731520" y="4224528"/>
-            <a:ext cx="731520" cy="320040"/>
-          </a:xfrm>
-          <a:prstGeom prst="rect">
-            <a:avLst/>
-          </a:prstGeom>
-          <a:noFill/>
-          <a:ln/>
-        </p:spPr>
-        <p:txBody>
-          <a:bodyPr wrap="square" lIns="0" tIns="0" rIns="0" bIns="0" rtlCol="0" anchor="ctr"/>
-          <a:lstStyle/>
-          <a:p>
-            <a:pPr indent="0" marL="0">
-              <a:buNone/>
-            </a:pPr>
-            <a:r>
-              <a:rPr lang="en-US" sz="900" b="1" dirty="0">
-                <a:solidFill>
-                  <a:srgbClr val="F59E0B"/>
-                </a:solidFill>
-                <a:latin typeface="Arial" pitchFamily="34" charset="0"/>
-                <a:ea typeface="Arial" pitchFamily="34" charset="-122"/>
-                <a:cs typeface="Arial" pitchFamily="34" charset="-120"/>
-              </a:rPr>
-              <a:t>PHASE 5</a:t>
-            </a:r>
-            <a:endParaRPr lang="en-US" sz="900" dirty="0"/>
-          </a:p>
-        </p:txBody>
-      </p:sp>
-      <p:sp>
-        <p:nvSpPr>
-          <p:cNvPr id="35" name="Text 33"/>
-          <p:cNvSpPr/>
-          <p:nvPr/>
-        </p:nvSpPr>
-        <p:spPr>
-          <a:xfrm>
-            <a:off x="731520" y="4517136"/>
-            <a:ext cx="731520" cy="274320"/>
-          </a:xfrm>
-          <a:prstGeom prst="rect">
-            <a:avLst/>
-          </a:prstGeom>
-          <a:noFill/>
-          <a:ln/>
-        </p:spPr>
-        <p:txBody>
-          <a:bodyPr wrap="square" lIns="0" tIns="0" rIns="0" bIns="0" rtlCol="0" anchor="ctr"/>
-          <a:lstStyle/>
-          <a:p>
-            <a:pPr indent="0" marL="0">
-              <a:buNone/>
-            </a:pPr>
-            <a:r>
-              <a:rPr lang="en-US" sz="800" dirty="0">
-                <a:solidFill>
-                  <a:srgbClr val="64748B"/>
-                </a:solidFill>
-                <a:latin typeface="Calibri" pitchFamily="34" charset="0"/>
-                <a:ea typeface="Calibri" pitchFamily="34" charset="-122"/>
-                <a:cs typeface="Calibri" pitchFamily="34" charset="-120"/>
-              </a:rPr>
-              <a:t>Month 3+</a:t>
-            </a:r>
-            <a:endParaRPr lang="en-US" sz="800" dirty="0"/>
-          </a:p>
-        </p:txBody>
-      </p:sp>
-      <p:sp>
-        <p:nvSpPr>
-          <p:cNvPr id="36" name="Text 34"/>
-          <p:cNvSpPr/>
-          <p:nvPr/>
-        </p:nvSpPr>
-        <p:spPr>
-          <a:xfrm>
-            <a:off x="1554480" y="4224528"/>
-            <a:ext cx="731520" cy="640080"/>
-          </a:xfrm>
-          <a:prstGeom prst="rect">
-            <a:avLst/>
-          </a:prstGeom>
-          <a:noFill/>
-          <a:ln/>
-        </p:spPr>
-        <p:txBody>
-          <a:bodyPr wrap="square" lIns="0" tIns="0" rIns="0" bIns="0" rtlCol="0" anchor="ctr"/>
-          <a:lstStyle/>
-          <a:p>
-            <a:pPr indent="0" marL="0">
-              <a:buNone/>
-            </a:pPr>
-            <a:r>
-              <a:rPr lang="en-US" sz="1000" b="1" dirty="0">
-                <a:solidFill>
-                  <a:srgbClr val="1A1F36"/>
-                </a:solidFill>
-                <a:latin typeface="Georgia" pitchFamily="34" charset="0"/>
-                <a:ea typeface="Georgia" pitchFamily="34" charset="-122"/>
-                <a:cs typeface="Georgia" pitchFamily="34" charset="-120"/>
-              </a:rPr>
-              <a:t>8-11 days</a:t>
-            </a:r>
-            <a:endParaRPr lang="en-US" sz="1000" dirty="0"/>
-          </a:p>
-        </p:txBody>
-      </p:sp>
-      <p:sp>
-        <p:nvSpPr>
-          <p:cNvPr id="37" name="Text 35"/>
-          <p:cNvSpPr/>
-          <p:nvPr/>
-        </p:nvSpPr>
-        <p:spPr>
-          <a:xfrm>
-            <a:off x="2377440" y="4270248"/>
-            <a:ext cx="3657600" cy="548640"/>
-          </a:xfrm>
-          <a:prstGeom prst="rect">
-            <a:avLst/>
-          </a:prstGeom>
-          <a:noFill/>
-          <a:ln/>
-        </p:spPr>
-        <p:txBody>
-          <a:bodyPr wrap="square" lIns="0" tIns="0" rIns="0" bIns="0" rtlCol="0" anchor="ctr"/>
-          <a:lstStyle/>
-          <a:p>
-            <a:pPr indent="0" marL="0">
-              <a:buNone/>
-            </a:pPr>
-            <a:r>
-              <a:rPr lang="en-US" sz="800" dirty="0">
-                <a:solidFill>
-                  <a:srgbClr val="334155"/>
-                </a:solidFill>
-                <a:latin typeface="Calibri" pitchFamily="34" charset="0"/>
-                <a:ea typeface="Calibri" pitchFamily="34" charset="-122"/>
-                <a:cs typeface="Calibri" pitchFamily="34" charset="-120"/>
-              </a:rPr>
-              <a:t>Economic data ingestion (BLS/FRED)</a:t>
-            </a:r>
-            <a:endParaRPr lang="en-US" sz="800" dirty="0"/>
-          </a:p>
-          <a:p>
-            <a:pPr indent="0" marL="0">
-              <a:buNone/>
-            </a:pPr>
-            <a:r>
-              <a:rPr lang="en-US" sz="800" dirty="0">
-                <a:solidFill>
-                  <a:srgbClr val="334155"/>
-                </a:solidFill>
-                <a:latin typeface="Calibri" pitchFamily="34" charset="0"/>
-                <a:ea typeface="Calibri" pitchFamily="34" charset="-122"/>
-                <a:cs typeface="Calibri" pitchFamily="34" charset="-120"/>
-              </a:rPr>
-              <a:t>Correlation engine</a:t>
-            </a:r>
-            <a:endParaRPr lang="en-US" sz="800" dirty="0"/>
-          </a:p>
-          <a:p>
-            <a:pPr indent="0" marL="0">
-              <a:buNone/>
-            </a:pPr>
-            <a:r>
-              <a:rPr lang="en-US" sz="800" dirty="0">
-                <a:solidFill>
-                  <a:srgbClr val="334155"/>
-                </a:solidFill>
-                <a:latin typeface="Calibri" pitchFamily="34" charset="0"/>
-                <a:ea typeface="Calibri" pitchFamily="34" charset="-122"/>
-                <a:cs typeface="Calibri" pitchFamily="34" charset="-120"/>
-              </a:rPr>
-              <a:t>Social → internal feedback loop</a:t>
-            </a:r>
-            <a:endParaRPr lang="en-US" sz="800" dirty="0"/>
-          </a:p>
-          <a:p>
-            <a:pPr indent="0" marL="0">
-              <a:buNone/>
-            </a:pPr>
-            <a:r>
-              <a:rPr lang="en-US" sz="800" dirty="0">
-                <a:solidFill>
-                  <a:srgbClr val="334155"/>
-                </a:solidFill>
-                <a:latin typeface="Calibri" pitchFamily="34" charset="0"/>
-                <a:ea typeface="Calibri" pitchFamily="34" charset="-122"/>
-                <a:cs typeface="Calibri" pitchFamily="34" charset="-120"/>
-              </a:rPr>
-              <a:t>Press citation tracking</a:t>
-            </a:r>
-            <a:endParaRPr lang="en-US" sz="800" dirty="0"/>
-          </a:p>
-          <a:p>
-            <a:pPr indent="0" marL="0">
-              <a:buNone/>
-            </a:pPr>
-            <a:r>
-              <a:rPr lang="en-US" sz="800" dirty="0">
-                <a:solidFill>
-                  <a:srgbClr val="334155"/>
-                </a:solidFill>
-                <a:latin typeface="Calibri" pitchFamily="34" charset="0"/>
-                <a:ea typeface="Calibri" pitchFamily="34" charset="-122"/>
-                <a:cs typeface="Calibri" pitchFamily="34" charset="-120"/>
-              </a:rPr>
-              <a:t>Auto-approve for high-score stories</a:t>
-            </a:r>
-            <a:endParaRPr lang="en-US" sz="800" dirty="0"/>
-          </a:p>
-        </p:txBody>
-      </p:sp>
-      <p:sp>
-        <p:nvSpPr>
-          <p:cNvPr id="38" name="Text 36"/>
-          <p:cNvSpPr/>
-          <p:nvPr/>
-        </p:nvSpPr>
-        <p:spPr>
-          <a:xfrm>
-            <a:off x="6400800" y="4270248"/>
-            <a:ext cx="2011680" cy="548640"/>
-          </a:xfrm>
-          <a:prstGeom prst="rect">
-            <a:avLst/>
-          </a:prstGeom>
-          <a:noFill/>
-          <a:ln/>
-        </p:spPr>
-        <p:txBody>
-          <a:bodyPr wrap="square" lIns="0" tIns="0" rIns="0" bIns="0" rtlCol="0" anchor="ctr"/>
-          <a:lstStyle/>
-          <a:p>
-            <a:pPr indent="0" marL="0">
-              <a:buNone/>
-            </a:pPr>
-            <a:r>
-              <a:rPr lang="en-US" sz="800" dirty="0">
-                <a:solidFill>
-                  <a:srgbClr val="64748B"/>
-                </a:solidFill>
-                <a:latin typeface="Calibri" pitchFamily="34" charset="0"/>
-                <a:ea typeface="Calibri" pitchFamily="34" charset="-122"/>
-                <a:cs typeface="Calibri" pitchFamily="34" charset="-120"/>
-              </a:rPr>
-              <a:t>Pod 2 builds</a:t>
-            </a:r>
-            <a:endParaRPr lang="en-US" sz="800" dirty="0"/>
-          </a:p>
-          <a:p>
-            <a:pPr indent="0" marL="0">
-              <a:buNone/>
-            </a:pPr>
-            <a:r>
-              <a:rPr lang="en-US" sz="800" dirty="0">
-                <a:solidFill>
-                  <a:srgbClr val="64748B"/>
-                </a:solidFill>
-                <a:latin typeface="Calibri" pitchFamily="34" charset="0"/>
-                <a:ea typeface="Calibri" pitchFamily="34" charset="-122"/>
-                <a:cs typeface="Calibri" pitchFamily="34" charset="-120"/>
-              </a:rPr>
-              <a:t>Pod 1 tuning</a:t>
-            </a:r>
-            <a:endParaRPr lang="en-US" sz="800" dirty="0"/>
-          </a:p>
-        </p:txBody>
-      </p:sp>
-      <p:sp>
-        <p:nvSpPr>
-          <p:cNvPr id="39" name="Text 37"/>
-          <p:cNvSpPr/>
-          <p:nvPr/>
-        </p:nvSpPr>
-        <p:spPr>
-          <a:xfrm>
-            <a:off x="731520" y="4709160"/>
-            <a:ext cx="7680960" cy="274320"/>
-          </a:xfrm>
-          <a:prstGeom prst="rect">
-            <a:avLst/>
-          </a:prstGeom>
-          <a:noFill/>
-          <a:ln/>
-        </p:spPr>
-        <p:txBody>
-          <a:bodyPr wrap="square" lIns="0" tIns="0" rIns="0" bIns="0" rtlCol="0" anchor="ctr"/>
-          <a:lstStyle/>
-          <a:p>
-            <a:pPr indent="0" marL="0">
-              <a:buNone/>
-            </a:pPr>
-            <a:r>
-              <a:rPr lang="en-US" sz="1000" b="1" dirty="0">
-                <a:solidFill>
-                  <a:srgbClr val="1A1F36"/>
-                </a:solidFill>
-                <a:latin typeface="Calibri" pitchFamily="34" charset="0"/>
-                <a:ea typeface="Calibri" pitchFamily="34" charset="-122"/>
-                <a:cs typeface="Calibri" pitchFamily="34" charset="-120"/>
-              </a:rPr>
-              <a:t>Total: 28-38 engineering days across all phases  ·  Phase 1 is launch-critical  ·  Phases 2-3 ship month 1-2  ·  Phases 4-5 are month 2-3+</a:t>
-            </a:r>
-            <a:endParaRPr lang="en-US" sz="1000" dirty="0"/>
           </a:p>
         </p:txBody>
       </p:sp>
@@ -8067,6 +8158,5365 @@
 <file path=ppt/slides/slide14.xml><?xml version="1.0" encoding="utf-8"?>
 <p:sld xmlns:a="http://schemas.openxmlformats.org/drawingml/2006/main" xmlns:r="http://schemas.openxmlformats.org/officeDocument/2006/relationships" xmlns:p="http://schemas.openxmlformats.org/presentationml/2006/main">
   <p:cSld name="Slide 14">
+    <p:bg>
+      <p:bgPr>
+        <a:solidFill>
+          <a:srgbClr val="F8FAFC"/>
+        </a:solidFill>
+      </p:bgPr>
+    </p:bg>
+    <p:spTree>
+      <p:nvGrpSpPr>
+        <p:cNvPr id="1" name=""/>
+        <p:cNvGrpSpPr/>
+        <p:nvPr/>
+      </p:nvGrpSpPr>
+      <p:grpSpPr>
+        <a:xfrm>
+          <a:off x="0" y="0"/>
+          <a:ext cx="0" cy="0"/>
+          <a:chOff x="0" y="0"/>
+          <a:chExt cx="0" cy="0"/>
+        </a:xfrm>
+      </p:grpSpPr>
+      <p:sp>
+        <p:nvSpPr>
+          <p:cNvPr id="2" name="Text 0"/>
+          <p:cNvSpPr/>
+          <p:nvPr/>
+        </p:nvSpPr>
+        <p:spPr>
+          <a:xfrm>
+            <a:off x="731520" y="274320"/>
+            <a:ext cx="7315200" cy="274320"/>
+          </a:xfrm>
+          <a:prstGeom prst="rect">
+            <a:avLst/>
+          </a:prstGeom>
+          <a:noFill/>
+          <a:ln/>
+        </p:spPr>
+        <p:txBody>
+          <a:bodyPr wrap="square" lIns="0" tIns="0" rIns="0" bIns="0" rtlCol="0" anchor="ctr"/>
+          <a:lstStyle/>
+          <a:p>
+            <a:pPr indent="0" marL="0">
+              <a:buNone/>
+            </a:pPr>
+            <a:r>
+              <a:rPr lang="en-US" sz="1100" b="1" spc="400" kern="0" dirty="0">
+                <a:solidFill>
+                  <a:srgbClr val="2563EB"/>
+                </a:solidFill>
+                <a:latin typeface="Arial" pitchFamily="34" charset="0"/>
+                <a:ea typeface="Arial" pitchFamily="34" charset="-122"/>
+                <a:cs typeface="Arial" pitchFamily="34" charset="-120"/>
+              </a:rPr>
+              <a:t>SOCIAL LISTENING &amp; TREND DETECTION</a:t>
+            </a:r>
+            <a:endParaRPr lang="en-US" sz="1100" dirty="0"/>
+          </a:p>
+        </p:txBody>
+      </p:sp>
+      <p:sp>
+        <p:nvSpPr>
+          <p:cNvPr id="3" name="Text 1"/>
+          <p:cNvSpPr/>
+          <p:nvPr/>
+        </p:nvSpPr>
+        <p:spPr>
+          <a:xfrm>
+            <a:off x="731520" y="594360"/>
+            <a:ext cx="7315200" cy="457200"/>
+          </a:xfrm>
+          <a:prstGeom prst="rect">
+            <a:avLst/>
+          </a:prstGeom>
+          <a:noFill/>
+          <a:ln/>
+        </p:spPr>
+        <p:txBody>
+          <a:bodyPr wrap="square" lIns="0" tIns="0" rIns="0" bIns="0" rtlCol="0" anchor="ctr"/>
+          <a:lstStyle/>
+          <a:p>
+            <a:pPr indent="0" marL="0">
+              <a:buNone/>
+            </a:pPr>
+            <a:r>
+              <a:rPr lang="en-US" sz="2600" dirty="0">
+                <a:solidFill>
+                  <a:srgbClr val="1A1F36"/>
+                </a:solidFill>
+                <a:latin typeface="Georgia" pitchFamily="34" charset="0"/>
+                <a:ea typeface="Georgia" pitchFamily="34" charset="-122"/>
+                <a:cs typeface="Georgia" pitchFamily="34" charset="-120"/>
+              </a:rPr>
+              <a:t>What to Write About — Three Signal Sources</a:t>
+            </a:r>
+            <a:endParaRPr lang="en-US" sz="2600" dirty="0"/>
+          </a:p>
+        </p:txBody>
+      </p:sp>
+      <p:sp>
+        <p:nvSpPr>
+          <p:cNvPr id="4" name="Shape 2"/>
+          <p:cNvSpPr/>
+          <p:nvPr/>
+        </p:nvSpPr>
+        <p:spPr>
+          <a:xfrm>
+            <a:off x="365760" y="1188720"/>
+            <a:ext cx="2743200" cy="2377440"/>
+          </a:xfrm>
+          <a:prstGeom prst="rect">
+            <a:avLst/>
+          </a:prstGeom>
+          <a:solidFill>
+            <a:srgbClr val="FFFFFF"/>
+          </a:solidFill>
+          <a:ln/>
+          <a:effectLst>
+            <a:outerShdw sx="100000" sy="100000" kx="0" ky="0" algn="bl" rotWithShape="0" blurRad="76200" dist="25400" dir="8100000">
+              <a:srgbClr val="000000">
+                <a:alpha val="10000"/>
+              </a:srgbClr>
+            </a:outerShdw>
+          </a:effectLst>
+        </p:spPr>
+      </p:sp>
+      <p:sp>
+        <p:nvSpPr>
+          <p:cNvPr id="5" name="Shape 3"/>
+          <p:cNvSpPr/>
+          <p:nvPr/>
+        </p:nvSpPr>
+        <p:spPr>
+          <a:xfrm>
+            <a:off x="365760" y="1188720"/>
+            <a:ext cx="2743200" cy="365760"/>
+          </a:xfrm>
+          <a:prstGeom prst="rect">
+            <a:avLst/>
+          </a:prstGeom>
+          <a:solidFill>
+            <a:srgbClr val="2563EB"/>
+          </a:solidFill>
+          <a:ln/>
+        </p:spPr>
+      </p:sp>
+      <p:sp>
+        <p:nvSpPr>
+          <p:cNvPr id="6" name="Text 4"/>
+          <p:cNvSpPr/>
+          <p:nvPr/>
+        </p:nvSpPr>
+        <p:spPr>
+          <a:xfrm>
+            <a:off x="502920" y="1216152"/>
+            <a:ext cx="2468880" cy="320040"/>
+          </a:xfrm>
+          <a:prstGeom prst="rect">
+            <a:avLst/>
+          </a:prstGeom>
+          <a:noFill/>
+          <a:ln/>
+        </p:spPr>
+        <p:txBody>
+          <a:bodyPr wrap="square" lIns="0" tIns="0" rIns="0" bIns="0" rtlCol="0" anchor="ctr"/>
+          <a:lstStyle/>
+          <a:p>
+            <a:pPr indent="0" marL="0">
+              <a:buNone/>
+            </a:pPr>
+            <a:r>
+              <a:rPr lang="en-US" sz="900" b="1" dirty="0">
+                <a:solidFill>
+                  <a:srgbClr val="FFFFFF"/>
+                </a:solidFill>
+                <a:latin typeface="Arial" pitchFamily="34" charset="0"/>
+                <a:ea typeface="Arial" pitchFamily="34" charset="-122"/>
+                <a:cs typeface="Arial" pitchFamily="34" charset="-120"/>
+              </a:rPr>
+              <a:t>SEARCH TREND SIGNALS</a:t>
+            </a:r>
+            <a:endParaRPr lang="en-US" sz="900" dirty="0"/>
+          </a:p>
+        </p:txBody>
+      </p:sp>
+      <p:sp>
+        <p:nvSpPr>
+          <p:cNvPr id="7" name="Text 5"/>
+          <p:cNvSpPr/>
+          <p:nvPr/>
+        </p:nvSpPr>
+        <p:spPr>
+          <a:xfrm>
+            <a:off x="548640" y="1691640"/>
+            <a:ext cx="2377440" cy="502920"/>
+          </a:xfrm>
+          <a:prstGeom prst="rect">
+            <a:avLst/>
+          </a:prstGeom>
+          <a:noFill/>
+          <a:ln/>
+        </p:spPr>
+        <p:txBody>
+          <a:bodyPr wrap="square" lIns="0" tIns="0" rIns="0" bIns="0" rtlCol="0" anchor="ctr"/>
+          <a:lstStyle/>
+          <a:p>
+            <a:pPr indent="0" marL="0">
+              <a:buNone/>
+            </a:pPr>
+            <a:r>
+              <a:rPr lang="en-US" sz="750" dirty="0">
+                <a:solidFill>
+                  <a:srgbClr val="334155"/>
+                </a:solidFill>
+                <a:latin typeface="Calibri" pitchFamily="34" charset="0"/>
+                <a:ea typeface="Calibri" pitchFamily="34" charset="-122"/>
+                <a:cs typeface="Calibri" pitchFamily="34" charset="-120"/>
+              </a:rPr>
+              <a:t>Google Trends API (beta access)</a:t>
+            </a:r>
+            <a:endParaRPr lang="en-US" sz="750" dirty="0"/>
+          </a:p>
+          <a:p>
+            <a:pPr indent="0" marL="0">
+              <a:buNone/>
+            </a:pPr>
+            <a:r>
+              <a:rPr lang="en-US" sz="750" dirty="0">
+                <a:solidFill>
+                  <a:srgbClr val="334155"/>
+                </a:solidFill>
+                <a:latin typeface="Calibri" pitchFamily="34" charset="0"/>
+                <a:ea typeface="Calibri" pitchFamily="34" charset="-122"/>
+                <a:cs typeface="Calibri" pitchFamily="34" charset="-120"/>
+              </a:rPr>
+              <a:t>Real-time search volume on 50-100</a:t>
+            </a:r>
+            <a:endParaRPr lang="en-US" sz="750" dirty="0"/>
+          </a:p>
+          <a:p>
+            <a:pPr indent="0" marL="0">
+              <a:buNone/>
+            </a:pPr>
+            <a:r>
+              <a:rPr lang="en-US" sz="750" dirty="0">
+                <a:solidFill>
+                  <a:srgbClr val="334155"/>
+                </a:solidFill>
+                <a:latin typeface="Calibri" pitchFamily="34" charset="0"/>
+                <a:ea typeface="Calibri" pitchFamily="34" charset="-122"/>
+                <a:cs typeface="Calibri" pitchFamily="34" charset="-120"/>
+              </a:rPr>
+              <a:t>core keyword clusters</a:t>
+            </a:r>
+            <a:endParaRPr lang="en-US" sz="750" dirty="0"/>
+          </a:p>
+        </p:txBody>
+      </p:sp>
+      <p:sp>
+        <p:nvSpPr>
+          <p:cNvPr id="8" name="Text 6"/>
+          <p:cNvSpPr/>
+          <p:nvPr/>
+        </p:nvSpPr>
+        <p:spPr>
+          <a:xfrm>
+            <a:off x="548640" y="2286000"/>
+            <a:ext cx="2377440" cy="502920"/>
+          </a:xfrm>
+          <a:prstGeom prst="rect">
+            <a:avLst/>
+          </a:prstGeom>
+          <a:noFill/>
+          <a:ln/>
+        </p:spPr>
+        <p:txBody>
+          <a:bodyPr wrap="square" lIns="0" tIns="0" rIns="0" bIns="0" rtlCol="0" anchor="ctr"/>
+          <a:lstStyle/>
+          <a:p>
+            <a:pPr indent="0" marL="0">
+              <a:buNone/>
+            </a:pPr>
+            <a:r>
+              <a:rPr lang="en-US" sz="750" dirty="0">
+                <a:solidFill>
+                  <a:srgbClr val="334155"/>
+                </a:solidFill>
+                <a:latin typeface="Calibri" pitchFamily="34" charset="0"/>
+                <a:ea typeface="Calibri" pitchFamily="34" charset="-122"/>
+                <a:cs typeface="Calibri" pitchFamily="34" charset="-120"/>
+              </a:rPr>
+              <a:t>DataForSEO keyword monitoring</a:t>
+            </a:r>
+            <a:endParaRPr lang="en-US" sz="750" dirty="0"/>
+          </a:p>
+          <a:p>
+            <a:pPr indent="0" marL="0">
+              <a:buNone/>
+            </a:pPr>
+            <a:r>
+              <a:rPr lang="en-US" sz="750" dirty="0">
+                <a:solidFill>
+                  <a:srgbClr val="334155"/>
+                </a:solidFill>
+                <a:latin typeface="Calibri" pitchFamily="34" charset="0"/>
+                <a:ea typeface="Calibri" pitchFamily="34" charset="-122"/>
+                <a:cs typeface="Calibri" pitchFamily="34" charset="-120"/>
+              </a:rPr>
+              <a:t>Weekly volume changes on tracked terms</a:t>
+            </a:r>
+            <a:endParaRPr lang="en-US" sz="750" dirty="0"/>
+          </a:p>
+          <a:p>
+            <a:pPr indent="0" marL="0">
+              <a:buNone/>
+            </a:pPr>
+            <a:r>
+              <a:rPr lang="en-US" sz="750" dirty="0">
+                <a:solidFill>
+                  <a:srgbClr val="334155"/>
+                </a:solidFill>
+                <a:latin typeface="Calibri" pitchFamily="34" charset="0"/>
+                <a:ea typeface="Calibri" pitchFamily="34" charset="-122"/>
+                <a:cs typeface="Calibri" pitchFamily="34" charset="-120"/>
+              </a:rPr>
+              <a:t>Spike detection (2-3x 30d average)</a:t>
+            </a:r>
+            <a:endParaRPr lang="en-US" sz="750" dirty="0"/>
+          </a:p>
+        </p:txBody>
+      </p:sp>
+      <p:sp>
+        <p:nvSpPr>
+          <p:cNvPr id="9" name="Text 7"/>
+          <p:cNvSpPr/>
+          <p:nvPr/>
+        </p:nvSpPr>
+        <p:spPr>
+          <a:xfrm>
+            <a:off x="548640" y="2880360"/>
+            <a:ext cx="2377440" cy="502920"/>
+          </a:xfrm>
+          <a:prstGeom prst="rect">
+            <a:avLst/>
+          </a:prstGeom>
+          <a:noFill/>
+          <a:ln/>
+        </p:spPr>
+        <p:txBody>
+          <a:bodyPr wrap="square" lIns="0" tIns="0" rIns="0" bIns="0" rtlCol="0" anchor="ctr"/>
+          <a:lstStyle/>
+          <a:p>
+            <a:pPr indent="0" marL="0">
+              <a:buNone/>
+            </a:pPr>
+            <a:r>
+              <a:rPr lang="en-US" sz="750" dirty="0">
+                <a:solidFill>
+                  <a:srgbClr val="334155"/>
+                </a:solidFill>
+                <a:latin typeface="Calibri" pitchFamily="34" charset="0"/>
+                <a:ea typeface="Calibri" pitchFamily="34" charset="-122"/>
+                <a:cs typeface="Calibri" pitchFamily="34" charset="-120"/>
+              </a:rPr>
+              <a:t>BLS/FRED release calendar</a:t>
+            </a:r>
+            <a:endParaRPr lang="en-US" sz="750" dirty="0"/>
+          </a:p>
+          <a:p>
+            <a:pPr indent="0" marL="0">
+              <a:buNone/>
+            </a:pPr>
+            <a:r>
+              <a:rPr lang="en-US" sz="750" dirty="0">
+                <a:solidFill>
+                  <a:srgbClr val="334155"/>
+                </a:solidFill>
+                <a:latin typeface="Calibri" pitchFamily="34" charset="0"/>
+                <a:ea typeface="Calibri" pitchFamily="34" charset="-122"/>
+                <a:cs typeface="Calibri" pitchFamily="34" charset="-120"/>
+              </a:rPr>
+              <a:t>Pre-scheduled editorial slots</a:t>
+            </a:r>
+            <a:endParaRPr lang="en-US" sz="750" dirty="0"/>
+          </a:p>
+          <a:p>
+            <a:pPr indent="0" marL="0">
+              <a:buNone/>
+            </a:pPr>
+            <a:r>
+              <a:rPr lang="en-US" sz="750" dirty="0">
+                <a:solidFill>
+                  <a:srgbClr val="334155"/>
+                </a:solidFill>
+                <a:latin typeface="Calibri" pitchFamily="34" charset="0"/>
+                <a:ea typeface="Calibri" pitchFamily="34" charset="-122"/>
+                <a:cs typeface="Calibri" pitchFamily="34" charset="-120"/>
+              </a:rPr>
+              <a:t>Same-day cross-reference stories</a:t>
+            </a:r>
+            <a:endParaRPr lang="en-US" sz="750" dirty="0"/>
+          </a:p>
+        </p:txBody>
+      </p:sp>
+      <p:sp>
+        <p:nvSpPr>
+          <p:cNvPr id="10" name="Shape 8"/>
+          <p:cNvSpPr/>
+          <p:nvPr/>
+        </p:nvSpPr>
+        <p:spPr>
+          <a:xfrm>
+            <a:off x="3246120" y="1188720"/>
+            <a:ext cx="2743200" cy="2377440"/>
+          </a:xfrm>
+          <a:prstGeom prst="rect">
+            <a:avLst/>
+          </a:prstGeom>
+          <a:solidFill>
+            <a:srgbClr val="FFFFFF"/>
+          </a:solidFill>
+          <a:ln/>
+          <a:effectLst>
+            <a:outerShdw sx="100000" sy="100000" kx="0" ky="0" algn="bl" rotWithShape="0" blurRad="76200" dist="25400" dir="8100000">
+              <a:srgbClr val="000000">
+                <a:alpha val="10000"/>
+              </a:srgbClr>
+            </a:outerShdw>
+          </a:effectLst>
+        </p:spPr>
+      </p:sp>
+      <p:sp>
+        <p:nvSpPr>
+          <p:cNvPr id="11" name="Shape 9"/>
+          <p:cNvSpPr/>
+          <p:nvPr/>
+        </p:nvSpPr>
+        <p:spPr>
+          <a:xfrm>
+            <a:off x="3246120" y="1188720"/>
+            <a:ext cx="2743200" cy="365760"/>
+          </a:xfrm>
+          <a:prstGeom prst="rect">
+            <a:avLst/>
+          </a:prstGeom>
+          <a:solidFill>
+            <a:srgbClr val="0D9488"/>
+          </a:solidFill>
+          <a:ln/>
+        </p:spPr>
+      </p:sp>
+      <p:sp>
+        <p:nvSpPr>
+          <p:cNvPr id="12" name="Text 10"/>
+          <p:cNvSpPr/>
+          <p:nvPr/>
+        </p:nvSpPr>
+        <p:spPr>
+          <a:xfrm>
+            <a:off x="3383280" y="1216152"/>
+            <a:ext cx="2468880" cy="320040"/>
+          </a:xfrm>
+          <a:prstGeom prst="rect">
+            <a:avLst/>
+          </a:prstGeom>
+          <a:noFill/>
+          <a:ln/>
+        </p:spPr>
+        <p:txBody>
+          <a:bodyPr wrap="square" lIns="0" tIns="0" rIns="0" bIns="0" rtlCol="0" anchor="ctr"/>
+          <a:lstStyle/>
+          <a:p>
+            <a:pPr indent="0" marL="0">
+              <a:buNone/>
+            </a:pPr>
+            <a:r>
+              <a:rPr lang="en-US" sz="900" b="1" dirty="0">
+                <a:solidFill>
+                  <a:srgbClr val="FFFFFF"/>
+                </a:solidFill>
+                <a:latin typeface="Arial" pitchFamily="34" charset="0"/>
+                <a:ea typeface="Arial" pitchFamily="34" charset="-122"/>
+                <a:cs typeface="Arial" pitchFamily="34" charset="-120"/>
+              </a:rPr>
+              <a:t>SOCIAL VELOCITY SIGNALS</a:t>
+            </a:r>
+            <a:endParaRPr lang="en-US" sz="900" dirty="0"/>
+          </a:p>
+        </p:txBody>
+      </p:sp>
+      <p:sp>
+        <p:nvSpPr>
+          <p:cNvPr id="13" name="Text 11"/>
+          <p:cNvSpPr/>
+          <p:nvPr/>
+        </p:nvSpPr>
+        <p:spPr>
+          <a:xfrm>
+            <a:off x="3429000" y="1691640"/>
+            <a:ext cx="2377440" cy="502920"/>
+          </a:xfrm>
+          <a:prstGeom prst="rect">
+            <a:avLst/>
+          </a:prstGeom>
+          <a:noFill/>
+          <a:ln/>
+        </p:spPr>
+        <p:txBody>
+          <a:bodyPr wrap="square" lIns="0" tIns="0" rIns="0" bIns="0" rtlCol="0" anchor="ctr"/>
+          <a:lstStyle/>
+          <a:p>
+            <a:pPr indent="0" marL="0">
+              <a:buNone/>
+            </a:pPr>
+            <a:r>
+              <a:rPr lang="en-US" sz="750" dirty="0">
+                <a:solidFill>
+                  <a:srgbClr val="334155"/>
+                </a:solidFill>
+                <a:latin typeface="Calibri" pitchFamily="34" charset="0"/>
+                <a:ea typeface="Calibri" pitchFamily="34" charset="-122"/>
+                <a:cs typeface="Calibri" pitchFamily="34" charset="-120"/>
+              </a:rPr>
+              <a:t>Reddit API (free, low-volume)</a:t>
+            </a:r>
+            <a:endParaRPr lang="en-US" sz="750" dirty="0"/>
+          </a:p>
+          <a:p>
+            <a:pPr indent="0" marL="0">
+              <a:buNone/>
+            </a:pPr>
+            <a:r>
+              <a:rPr lang="en-US" sz="750" dirty="0">
+                <a:solidFill>
+                  <a:srgbClr val="334155"/>
+                </a:solidFill>
+                <a:latin typeface="Calibri" pitchFamily="34" charset="0"/>
+                <a:ea typeface="Calibri" pitchFamily="34" charset="-122"/>
+                <a:cs typeface="Calibri" pitchFamily="34" charset="-120"/>
+              </a:rPr>
+              <a:t>r/jobs, r/cscareerquestions,</a:t>
+            </a:r>
+            <a:endParaRPr lang="en-US" sz="750" dirty="0"/>
+          </a:p>
+          <a:p>
+            <a:pPr indent="0" marL="0">
+              <a:buNone/>
+            </a:pPr>
+            <a:r>
+              <a:rPr lang="en-US" sz="750" dirty="0">
+                <a:solidFill>
+                  <a:srgbClr val="334155"/>
+                </a:solidFill>
+                <a:latin typeface="Calibri" pitchFamily="34" charset="0"/>
+                <a:ea typeface="Calibri" pitchFamily="34" charset="-122"/>
+                <a:cs typeface="Calibri" pitchFamily="34" charset="-120"/>
+              </a:rPr>
+              <a:t>r/recruitinghell, r/layoffs</a:t>
+            </a:r>
+            <a:endParaRPr lang="en-US" sz="750" dirty="0"/>
+          </a:p>
+          <a:p>
+            <a:pPr indent="0" marL="0">
+              <a:buNone/>
+            </a:pPr>
+            <a:r>
+              <a:rPr lang="en-US" sz="750" dirty="0">
+                <a:solidFill>
+                  <a:srgbClr val="334155"/>
+                </a:solidFill>
+                <a:latin typeface="Calibri" pitchFamily="34" charset="0"/>
+                <a:ea typeface="Calibri" pitchFamily="34" charset="-122"/>
+                <a:cs typeface="Calibri" pitchFamily="34" charset="-120"/>
+              </a:rPr>
+              <a:t>→ upvote acceleration = trending topic</a:t>
+            </a:r>
+            <a:endParaRPr lang="en-US" sz="750" dirty="0"/>
+          </a:p>
+        </p:txBody>
+      </p:sp>
+      <p:sp>
+        <p:nvSpPr>
+          <p:cNvPr id="14" name="Text 12"/>
+          <p:cNvSpPr/>
+          <p:nvPr/>
+        </p:nvSpPr>
+        <p:spPr>
+          <a:xfrm>
+            <a:off x="3429000" y="2286000"/>
+            <a:ext cx="2377440" cy="502920"/>
+          </a:xfrm>
+          <a:prstGeom prst="rect">
+            <a:avLst/>
+          </a:prstGeom>
+          <a:noFill/>
+          <a:ln/>
+        </p:spPr>
+        <p:txBody>
+          <a:bodyPr wrap="square" lIns="0" tIns="0" rIns="0" bIns="0" rtlCol="0" anchor="ctr"/>
+          <a:lstStyle/>
+          <a:p>
+            <a:pPr indent="0" marL="0">
+              <a:buNone/>
+            </a:pPr>
+            <a:r>
+              <a:rPr lang="en-US" sz="750" dirty="0">
+                <a:solidFill>
+                  <a:srgbClr val="334155"/>
+                </a:solidFill>
+                <a:latin typeface="Calibri" pitchFamily="34" charset="0"/>
+                <a:ea typeface="Calibri" pitchFamily="34" charset="-122"/>
+                <a:cs typeface="Calibri" pitchFamily="34" charset="-120"/>
+              </a:rPr>
+              <a:t>Hacker News API</a:t>
+            </a:r>
+            <a:endParaRPr lang="en-US" sz="750" dirty="0"/>
+          </a:p>
+          <a:p>
+            <a:pPr indent="0" marL="0">
+              <a:buNone/>
+            </a:pPr>
+            <a:r>
+              <a:rPr lang="en-US" sz="750" dirty="0">
+                <a:solidFill>
+                  <a:srgbClr val="334155"/>
+                </a:solidFill>
+                <a:latin typeface="Calibri" pitchFamily="34" charset="0"/>
+                <a:ea typeface="Calibri" pitchFamily="34" charset="-122"/>
+                <a:cs typeface="Calibri" pitchFamily="34" charset="-120"/>
+              </a:rPr>
+              <a:t>Front-page job-market keywords</a:t>
+            </a:r>
+            <a:endParaRPr lang="en-US" sz="750" dirty="0"/>
+          </a:p>
+          <a:p>
+            <a:pPr indent="0" marL="0">
+              <a:buNone/>
+            </a:pPr>
+            <a:r>
+              <a:rPr lang="en-US" sz="750" dirty="0">
+                <a:solidFill>
+                  <a:srgbClr val="334155"/>
+                </a:solidFill>
+                <a:latin typeface="Calibri" pitchFamily="34" charset="0"/>
+                <a:ea typeface="Calibri" pitchFamily="34" charset="-122"/>
+                <a:cs typeface="Calibri" pitchFamily="34" charset="-120"/>
+              </a:rPr>
+              <a:t>HN Monday → TechCrunch Wednesday</a:t>
+            </a:r>
+            <a:endParaRPr lang="en-US" sz="750" dirty="0"/>
+          </a:p>
+          <a:p>
+            <a:pPr indent="0" marL="0">
+              <a:buNone/>
+            </a:pPr>
+            <a:r>
+              <a:rPr lang="en-US" sz="750" dirty="0">
+                <a:solidFill>
+                  <a:srgbClr val="334155"/>
+                </a:solidFill>
+                <a:latin typeface="Calibri" pitchFamily="34" charset="0"/>
+                <a:ea typeface="Calibri" pitchFamily="34" charset="-122"/>
+                <a:cs typeface="Calibri" pitchFamily="34" charset="-120"/>
+              </a:rPr>
+              <a:t>→ be in that window</a:t>
+            </a:r>
+            <a:endParaRPr lang="en-US" sz="750" dirty="0"/>
+          </a:p>
+        </p:txBody>
+      </p:sp>
+      <p:sp>
+        <p:nvSpPr>
+          <p:cNvPr id="15" name="Text 13"/>
+          <p:cNvSpPr/>
+          <p:nvPr/>
+        </p:nvSpPr>
+        <p:spPr>
+          <a:xfrm>
+            <a:off x="3429000" y="2880360"/>
+            <a:ext cx="2377440" cy="502920"/>
+          </a:xfrm>
+          <a:prstGeom prst="rect">
+            <a:avLst/>
+          </a:prstGeom>
+          <a:noFill/>
+          <a:ln/>
+        </p:spPr>
+        <p:txBody>
+          <a:bodyPr wrap="square" lIns="0" tIns="0" rIns="0" bIns="0" rtlCol="0" anchor="ctr"/>
+          <a:lstStyle/>
+          <a:p>
+            <a:pPr indent="0" marL="0">
+              <a:buNone/>
+            </a:pPr>
+            <a:r>
+              <a:rPr lang="en-US" sz="750" dirty="0">
+                <a:solidFill>
+                  <a:srgbClr val="334155"/>
+                </a:solidFill>
+                <a:latin typeface="Calibri" pitchFamily="34" charset="0"/>
+                <a:ea typeface="Calibri" pitchFamily="34" charset="-122"/>
+                <a:cs typeface="Calibri" pitchFamily="34" charset="-120"/>
+              </a:rPr>
+              <a:t>X/Twitter via Late API</a:t>
+            </a:r>
+            <a:endParaRPr lang="en-US" sz="750" dirty="0"/>
+          </a:p>
+          <a:p>
+            <a:pPr indent="0" marL="0">
+              <a:buNone/>
+            </a:pPr>
+            <a:r>
+              <a:rPr lang="en-US" sz="750" dirty="0">
+                <a:solidFill>
+                  <a:srgbClr val="334155"/>
+                </a:solidFill>
+                <a:latin typeface="Calibri" pitchFamily="34" charset="0"/>
+                <a:ea typeface="Calibri" pitchFamily="34" charset="-122"/>
+                <a:cs typeface="Calibri" pitchFamily="34" charset="-120"/>
+              </a:rPr>
+              <a:t>Hashtag volume on job-market terms</a:t>
+            </a:r>
+            <a:endParaRPr lang="en-US" sz="750" dirty="0"/>
+          </a:p>
+          <a:p>
+            <a:pPr indent="0" marL="0">
+              <a:buNone/>
+            </a:pPr>
+            <a:r>
+              <a:rPr lang="en-US" sz="750" dirty="0">
+                <a:solidFill>
+                  <a:srgbClr val="334155"/>
+                </a:solidFill>
+                <a:latin typeface="Calibri" pitchFamily="34" charset="0"/>
+                <a:ea typeface="Calibri" pitchFamily="34" charset="-122"/>
+                <a:cs typeface="Calibri" pitchFamily="34" charset="-120"/>
+              </a:rPr>
+              <a:t>Journalist pickup signals</a:t>
+            </a:r>
+            <a:endParaRPr lang="en-US" sz="750" dirty="0"/>
+          </a:p>
+        </p:txBody>
+      </p:sp>
+      <p:sp>
+        <p:nvSpPr>
+          <p:cNvPr id="16" name="Shape 14"/>
+          <p:cNvSpPr/>
+          <p:nvPr/>
+        </p:nvSpPr>
+        <p:spPr>
+          <a:xfrm>
+            <a:off x="6126480" y="1188720"/>
+            <a:ext cx="2743200" cy="2377440"/>
+          </a:xfrm>
+          <a:prstGeom prst="rect">
+            <a:avLst/>
+          </a:prstGeom>
+          <a:solidFill>
+            <a:srgbClr val="FFFFFF"/>
+          </a:solidFill>
+          <a:ln/>
+          <a:effectLst>
+            <a:outerShdw sx="100000" sy="100000" kx="0" ky="0" algn="bl" rotWithShape="0" blurRad="76200" dist="25400" dir="8100000">
+              <a:srgbClr val="000000">
+                <a:alpha val="10000"/>
+              </a:srgbClr>
+            </a:outerShdw>
+          </a:effectLst>
+        </p:spPr>
+      </p:sp>
+      <p:sp>
+        <p:nvSpPr>
+          <p:cNvPr id="17" name="Shape 15"/>
+          <p:cNvSpPr/>
+          <p:nvPr/>
+        </p:nvSpPr>
+        <p:spPr>
+          <a:xfrm>
+            <a:off x="6126480" y="1188720"/>
+            <a:ext cx="2743200" cy="365760"/>
+          </a:xfrm>
+          <a:prstGeom prst="rect">
+            <a:avLst/>
+          </a:prstGeom>
+          <a:solidFill>
+            <a:srgbClr val="8B5CF6"/>
+          </a:solidFill>
+          <a:ln/>
+        </p:spPr>
+      </p:sp>
+      <p:sp>
+        <p:nvSpPr>
+          <p:cNvPr id="18" name="Text 16"/>
+          <p:cNvSpPr/>
+          <p:nvPr/>
+        </p:nvSpPr>
+        <p:spPr>
+          <a:xfrm>
+            <a:off x="6263640" y="1216152"/>
+            <a:ext cx="2468880" cy="320040"/>
+          </a:xfrm>
+          <a:prstGeom prst="rect">
+            <a:avLst/>
+          </a:prstGeom>
+          <a:noFill/>
+          <a:ln/>
+        </p:spPr>
+        <p:txBody>
+          <a:bodyPr wrap="square" lIns="0" tIns="0" rIns="0" bIns="0" rtlCol="0" anchor="ctr"/>
+          <a:lstStyle/>
+          <a:p>
+            <a:pPr indent="0" marL="0">
+              <a:buNone/>
+            </a:pPr>
+            <a:r>
+              <a:rPr lang="en-US" sz="900" b="1" dirty="0">
+                <a:solidFill>
+                  <a:srgbClr val="FFFFFF"/>
+                </a:solidFill>
+                <a:latin typeface="Arial" pitchFamily="34" charset="0"/>
+                <a:ea typeface="Arial" pitchFamily="34" charset="-122"/>
+                <a:cs typeface="Arial" pitchFamily="34" charset="-120"/>
+              </a:rPr>
+              <a:t>YOUR DATA = LEADING INDICATOR</a:t>
+            </a:r>
+            <a:endParaRPr lang="en-US" sz="900" dirty="0"/>
+          </a:p>
+        </p:txBody>
+      </p:sp>
+      <p:sp>
+        <p:nvSpPr>
+          <p:cNvPr id="19" name="Text 17"/>
+          <p:cNvSpPr/>
+          <p:nvPr/>
+        </p:nvSpPr>
+        <p:spPr>
+          <a:xfrm>
+            <a:off x="6309360" y="1691640"/>
+            <a:ext cx="2377440" cy="502920"/>
+          </a:xfrm>
+          <a:prstGeom prst="rect">
+            <a:avLst/>
+          </a:prstGeom>
+          <a:noFill/>
+          <a:ln/>
+        </p:spPr>
+        <p:txBody>
+          <a:bodyPr wrap="square" lIns="0" tIns="0" rIns="0" bIns="0" rtlCol="0" anchor="ctr"/>
+          <a:lstStyle/>
+          <a:p>
+            <a:pPr indent="0" marL="0">
+              <a:buNone/>
+            </a:pPr>
+            <a:r>
+              <a:rPr lang="en-US" sz="750" dirty="0">
+                <a:solidFill>
+                  <a:srgbClr val="334155"/>
+                </a:solidFill>
+                <a:latin typeface="Calibri" pitchFamily="34" charset="0"/>
+                <a:ea typeface="Calibri" pitchFamily="34" charset="-122"/>
+                <a:cs typeface="Calibri" pitchFamily="34" charset="-120"/>
+              </a:rPr>
+              <a:t>ATS anomaly detection (built-in)</a:t>
+            </a:r>
+            <a:endParaRPr lang="en-US" sz="750" dirty="0"/>
+          </a:p>
+          <a:p>
+            <a:pPr indent="0" marL="0">
+              <a:buNone/>
+            </a:pPr>
+            <a:r>
+              <a:rPr lang="en-US" sz="750" dirty="0">
+                <a:solidFill>
+                  <a:srgbClr val="334155"/>
+                </a:solidFill>
+                <a:latin typeface="Calibri" pitchFamily="34" charset="0"/>
+                <a:ea typeface="Calibri" pitchFamily="34" charset="-122"/>
+                <a:cs typeface="Calibri" pitchFamily="34" charset="-120"/>
+              </a:rPr>
+              <a:t>Hiring velocity spikes, salary drift,</a:t>
+            </a:r>
+            <a:endParaRPr lang="en-US" sz="750" dirty="0"/>
+          </a:p>
+          <a:p>
+            <a:pPr indent="0" marL="0">
+              <a:buNone/>
+            </a:pPr>
+            <a:r>
+              <a:rPr lang="en-US" sz="750" dirty="0">
+                <a:solidFill>
+                  <a:srgbClr val="334155"/>
+                </a:solidFill>
+                <a:latin typeface="Calibri" pitchFamily="34" charset="0"/>
+                <a:ea typeface="Calibri" pitchFamily="34" charset="-122"/>
+                <a:cs typeface="Calibri" pitchFamily="34" charset="-120"/>
+              </a:rPr>
+              <a:t>new company surges, geographic shifts</a:t>
+            </a:r>
+            <a:endParaRPr lang="en-US" sz="750" dirty="0"/>
+          </a:p>
+          <a:p>
+            <a:pPr indent="0" marL="0">
+              <a:buNone/>
+            </a:pPr>
+            <a:r>
+              <a:rPr lang="en-US" sz="750" dirty="0">
+                <a:solidFill>
+                  <a:srgbClr val="334155"/>
+                </a:solidFill>
+                <a:latin typeface="Calibri" pitchFamily="34" charset="0"/>
+                <a:ea typeface="Calibri" pitchFamily="34" charset="-122"/>
+                <a:cs typeface="Calibri" pitchFamily="34" charset="-120"/>
+              </a:rPr>
+              <a:t>→ you see it before BLS confirms</a:t>
+            </a:r>
+            <a:endParaRPr lang="en-US" sz="750" dirty="0"/>
+          </a:p>
+        </p:txBody>
+      </p:sp>
+      <p:sp>
+        <p:nvSpPr>
+          <p:cNvPr id="20" name="Text 18"/>
+          <p:cNvSpPr/>
+          <p:nvPr/>
+        </p:nvSpPr>
+        <p:spPr>
+          <a:xfrm>
+            <a:off x="6309360" y="2286000"/>
+            <a:ext cx="2377440" cy="502920"/>
+          </a:xfrm>
+          <a:prstGeom prst="rect">
+            <a:avLst/>
+          </a:prstGeom>
+          <a:noFill/>
+          <a:ln/>
+        </p:spPr>
+        <p:txBody>
+          <a:bodyPr wrap="square" lIns="0" tIns="0" rIns="0" bIns="0" rtlCol="0" anchor="ctr"/>
+          <a:lstStyle/>
+          <a:p>
+            <a:pPr indent="0" marL="0">
+              <a:buNone/>
+            </a:pPr>
+            <a:r>
+              <a:rPr lang="en-US" sz="750" dirty="0">
+                <a:solidFill>
+                  <a:srgbClr val="334155"/>
+                </a:solidFill>
+                <a:latin typeface="Calibri" pitchFamily="34" charset="0"/>
+                <a:ea typeface="Calibri" pitchFamily="34" charset="-122"/>
+                <a:cs typeface="Calibri" pitchFamily="34" charset="-120"/>
+              </a:rPr>
+              <a:t>Survey sentiment shifts</a:t>
+            </a:r>
+            <a:endParaRPr lang="en-US" sz="750" dirty="0"/>
+          </a:p>
+          <a:p>
+            <a:pPr indent="0" marL="0">
+              <a:buNone/>
+            </a:pPr>
+            <a:r>
+              <a:rPr lang="en-US" sz="750" dirty="0">
+                <a:solidFill>
+                  <a:srgbClr val="334155"/>
+                </a:solidFill>
+                <a:latin typeface="Calibri" pitchFamily="34" charset="0"/>
+                <a:ea typeface="Calibri" pitchFamily="34" charset="-122"/>
+                <a:cs typeface="Calibri" pitchFamily="34" charset="-120"/>
+              </a:rPr>
+              <a:t>Job seeker frustration/optimism</a:t>
+            </a:r>
+            <a:endParaRPr lang="en-US" sz="750" dirty="0"/>
+          </a:p>
+          <a:p>
+            <a:pPr indent="0" marL="0">
+              <a:buNone/>
+            </a:pPr>
+            <a:r>
+              <a:rPr lang="en-US" sz="750" dirty="0">
+                <a:solidFill>
+                  <a:srgbClr val="334155"/>
+                </a:solidFill>
+                <a:latin typeface="Calibri" pitchFamily="34" charset="0"/>
+                <a:ea typeface="Calibri" pitchFamily="34" charset="-122"/>
+                <a:cs typeface="Calibri" pitchFamily="34" charset="-120"/>
+              </a:rPr>
+              <a:t>changes before macro data moves</a:t>
+            </a:r>
+            <a:endParaRPr lang="en-US" sz="750" dirty="0"/>
+          </a:p>
+          <a:p>
+            <a:pPr indent="0" marL="0">
+              <a:buNone/>
+            </a:pPr>
+            <a:r>
+              <a:rPr lang="en-US" sz="750" dirty="0">
+                <a:solidFill>
+                  <a:srgbClr val="334155"/>
+                </a:solidFill>
+                <a:latin typeface="Calibri" pitchFamily="34" charset="0"/>
+                <a:ea typeface="Calibri" pitchFamily="34" charset="-122"/>
+                <a:cs typeface="Calibri" pitchFamily="34" charset="-120"/>
+              </a:rPr>
+              <a:t>→ leading indicator for press</a:t>
+            </a:r>
+            <a:endParaRPr lang="en-US" sz="750" dirty="0"/>
+          </a:p>
+        </p:txBody>
+      </p:sp>
+      <p:sp>
+        <p:nvSpPr>
+          <p:cNvPr id="21" name="Text 19"/>
+          <p:cNvSpPr/>
+          <p:nvPr/>
+        </p:nvSpPr>
+        <p:spPr>
+          <a:xfrm>
+            <a:off x="6309360" y="2880360"/>
+            <a:ext cx="2377440" cy="502920"/>
+          </a:xfrm>
+          <a:prstGeom prst="rect">
+            <a:avLst/>
+          </a:prstGeom>
+          <a:noFill/>
+          <a:ln/>
+        </p:spPr>
+        <p:txBody>
+          <a:bodyPr wrap="square" lIns="0" tIns="0" rIns="0" bIns="0" rtlCol="0" anchor="ctr"/>
+          <a:lstStyle/>
+          <a:p>
+            <a:pPr indent="0" marL="0">
+              <a:buNone/>
+            </a:pPr>
+            <a:r>
+              <a:rPr lang="en-US" sz="750" dirty="0">
+                <a:solidFill>
+                  <a:srgbClr val="334155"/>
+                </a:solidFill>
+                <a:latin typeface="Calibri" pitchFamily="34" charset="0"/>
+                <a:ea typeface="Calibri" pitchFamily="34" charset="-122"/>
+                <a:cs typeface="Calibri" pitchFamily="34" charset="-120"/>
+              </a:rPr>
+              <a:t>GT API × ATS cross-reference</a:t>
+            </a:r>
+            <a:endParaRPr lang="en-US" sz="750" dirty="0"/>
+          </a:p>
+          <a:p>
+            <a:pPr indent="0" marL="0">
+              <a:buNone/>
+            </a:pPr>
+            <a:r>
+              <a:rPr lang="en-US" sz="750" dirty="0">
+                <a:solidFill>
+                  <a:srgbClr val="334155"/>
+                </a:solidFill>
+                <a:latin typeface="Calibri" pitchFamily="34" charset="0"/>
+                <a:ea typeface="Calibri" pitchFamily="34" charset="-122"/>
+                <a:cs typeface="Calibri" pitchFamily="34" charset="-120"/>
+              </a:rPr>
+              <a:t>"AI engineer" searches spike but</a:t>
+            </a:r>
+            <a:endParaRPr lang="en-US" sz="750" dirty="0"/>
+          </a:p>
+          <a:p>
+            <a:pPr indent="0" marL="0">
+              <a:buNone/>
+            </a:pPr>
+            <a:r>
+              <a:rPr lang="en-US" sz="750" dirty="0">
+                <a:solidFill>
+                  <a:srgbClr val="334155"/>
+                </a:solidFill>
+                <a:latin typeface="Calibri" pitchFamily="34" charset="0"/>
+                <a:ea typeface="Calibri" pitchFamily="34" charset="-122"/>
+                <a:cs typeface="Calibri" pitchFamily="34" charset="-120"/>
+              </a:rPr>
+              <a:t>postings flat → supply-demand</a:t>
+            </a:r>
+            <a:endParaRPr lang="en-US" sz="750" dirty="0"/>
+          </a:p>
+          <a:p>
+            <a:pPr indent="0" marL="0">
+              <a:buNone/>
+            </a:pPr>
+            <a:r>
+              <a:rPr lang="en-US" sz="750" dirty="0">
+                <a:solidFill>
+                  <a:srgbClr val="334155"/>
+                </a:solidFill>
+                <a:latin typeface="Calibri" pitchFamily="34" charset="0"/>
+                <a:ea typeface="Calibri" pitchFamily="34" charset="-122"/>
+                <a:cs typeface="Calibri" pitchFamily="34" charset="-120"/>
+              </a:rPr>
+              <a:t>mismatch story that helps people</a:t>
+            </a:r>
+            <a:endParaRPr lang="en-US" sz="750" dirty="0"/>
+          </a:p>
+        </p:txBody>
+      </p:sp>
+      <p:sp>
+        <p:nvSpPr>
+          <p:cNvPr id="22" name="Shape 20"/>
+          <p:cNvSpPr/>
+          <p:nvPr/>
+        </p:nvSpPr>
+        <p:spPr>
+          <a:xfrm>
+            <a:off x="365760" y="3749040"/>
+            <a:ext cx="8412480" cy="1234440"/>
+          </a:xfrm>
+          <a:prstGeom prst="rect">
+            <a:avLst/>
+          </a:prstGeom>
+          <a:solidFill>
+            <a:srgbClr val="FFFFFF"/>
+          </a:solidFill>
+          <a:ln/>
+          <a:effectLst>
+            <a:outerShdw sx="100000" sy="100000" kx="0" ky="0" algn="bl" rotWithShape="0" blurRad="76200" dist="25400" dir="8100000">
+              <a:srgbClr val="000000">
+                <a:alpha val="10000"/>
+              </a:srgbClr>
+            </a:outerShdw>
+          </a:effectLst>
+        </p:spPr>
+      </p:sp>
+      <p:sp>
+        <p:nvSpPr>
+          <p:cNvPr id="23" name="Shape 21"/>
+          <p:cNvSpPr/>
+          <p:nvPr/>
+        </p:nvSpPr>
+        <p:spPr>
+          <a:xfrm>
+            <a:off x="365760" y="3749040"/>
+            <a:ext cx="8412480" cy="320040"/>
+          </a:xfrm>
+          <a:prstGeom prst="rect">
+            <a:avLst/>
+          </a:prstGeom>
+          <a:solidFill>
+            <a:srgbClr val="1A1F36"/>
+          </a:solidFill>
+          <a:ln/>
+        </p:spPr>
+      </p:sp>
+      <p:sp>
+        <p:nvSpPr>
+          <p:cNvPr id="24" name="Text 22"/>
+          <p:cNvSpPr/>
+          <p:nvPr/>
+        </p:nvSpPr>
+        <p:spPr>
+          <a:xfrm>
+            <a:off x="502920" y="3767328"/>
+            <a:ext cx="8138160" cy="274320"/>
+          </a:xfrm>
+          <a:prstGeom prst="rect">
+            <a:avLst/>
+          </a:prstGeom>
+          <a:noFill/>
+          <a:ln/>
+        </p:spPr>
+        <p:txBody>
+          <a:bodyPr wrap="square" lIns="0" tIns="0" rIns="0" bIns="0" rtlCol="0" anchor="ctr"/>
+          <a:lstStyle/>
+          <a:p>
+            <a:pPr indent="0" marL="0">
+              <a:buNone/>
+            </a:pPr>
+            <a:r>
+              <a:rPr lang="en-US" sz="900" b="1" dirty="0">
+                <a:solidFill>
+                  <a:srgbClr val="FFFFFF"/>
+                </a:solidFill>
+                <a:latin typeface="Arial" pitchFamily="34" charset="0"/>
+                <a:ea typeface="Arial" pitchFamily="34" charset="-122"/>
+                <a:cs typeface="Arial" pitchFamily="34" charset="-120"/>
+              </a:rPr>
+              <a:t>PUBLISH DECISION MATRIX</a:t>
+            </a:r>
+            <a:endParaRPr lang="en-US" sz="900" dirty="0"/>
+          </a:p>
+        </p:txBody>
+      </p:sp>
+      <p:sp>
+        <p:nvSpPr>
+          <p:cNvPr id="25" name="Text 23"/>
+          <p:cNvSpPr/>
+          <p:nvPr/>
+        </p:nvSpPr>
+        <p:spPr>
+          <a:xfrm>
+            <a:off x="548640" y="4133088"/>
+            <a:ext cx="1920240" cy="182880"/>
+          </a:xfrm>
+          <a:prstGeom prst="rect">
+            <a:avLst/>
+          </a:prstGeom>
+          <a:noFill/>
+          <a:ln/>
+        </p:spPr>
+        <p:txBody>
+          <a:bodyPr wrap="square" lIns="0" tIns="0" rIns="0" bIns="0" rtlCol="0" anchor="ctr"/>
+          <a:lstStyle/>
+          <a:p>
+            <a:pPr indent="0" marL="0">
+              <a:buNone/>
+            </a:pPr>
+            <a:r>
+              <a:rPr lang="en-US" sz="800" b="1" dirty="0">
+                <a:solidFill>
+                  <a:srgbClr val="10B981"/>
+                </a:solidFill>
+                <a:latin typeface="Arial" pitchFamily="34" charset="0"/>
+                <a:ea typeface="Arial" pitchFamily="34" charset="-122"/>
+                <a:cs typeface="Arial" pitchFamily="34" charset="-120"/>
+              </a:rPr>
+              <a:t>PUBLISH NOW</a:t>
+            </a:r>
+            <a:endParaRPr lang="en-US" sz="800" dirty="0"/>
+          </a:p>
+        </p:txBody>
+      </p:sp>
+      <p:sp>
+        <p:nvSpPr>
+          <p:cNvPr id="26" name="Text 24"/>
+          <p:cNvSpPr/>
+          <p:nvPr/>
+        </p:nvSpPr>
+        <p:spPr>
+          <a:xfrm>
+            <a:off x="548640" y="4315968"/>
+            <a:ext cx="1920240" cy="548640"/>
+          </a:xfrm>
+          <a:prstGeom prst="rect">
+            <a:avLst/>
+          </a:prstGeom>
+          <a:noFill/>
+          <a:ln/>
+        </p:spPr>
+        <p:txBody>
+          <a:bodyPr wrap="square" lIns="0" tIns="0" rIns="0" bIns="0" rtlCol="0" anchor="ctr"/>
+          <a:lstStyle/>
+          <a:p>
+            <a:pPr indent="0" marL="0">
+              <a:buNone/>
+            </a:pPr>
+            <a:r>
+              <a:rPr lang="en-US" sz="700" dirty="0">
+                <a:solidFill>
+                  <a:srgbClr val="334155"/>
+                </a:solidFill>
+                <a:latin typeface="Calibri" pitchFamily="34" charset="0"/>
+                <a:ea typeface="Calibri" pitchFamily="34" charset="-122"/>
+                <a:cs typeface="Calibri" pitchFamily="34" charset="-120"/>
+              </a:rPr>
+              <a:t>Your data + topic trending</a:t>
+            </a:r>
+            <a:endParaRPr lang="en-US" sz="700" dirty="0"/>
+          </a:p>
+          <a:p>
+            <a:pPr indent="0" marL="0">
+              <a:buNone/>
+            </a:pPr>
+            <a:r>
+              <a:rPr lang="en-US" sz="700" dirty="0">
+                <a:solidFill>
+                  <a:srgbClr val="334155"/>
+                </a:solidFill>
+                <a:latin typeface="Calibri" pitchFamily="34" charset="0"/>
+                <a:ea typeface="Calibri" pitchFamily="34" charset="-122"/>
+                <a:cs typeface="Calibri" pitchFamily="34" charset="-120"/>
+              </a:rPr>
+              <a:t>Ride the wave. Highest engagement.</a:t>
+            </a:r>
+            <a:endParaRPr lang="en-US" sz="700" dirty="0"/>
+          </a:p>
+        </p:txBody>
+      </p:sp>
+      <p:sp>
+        <p:nvSpPr>
+          <p:cNvPr id="27" name="Text 25"/>
+          <p:cNvSpPr/>
+          <p:nvPr/>
+        </p:nvSpPr>
+        <p:spPr>
+          <a:xfrm>
+            <a:off x="2651760" y="4133088"/>
+            <a:ext cx="1920240" cy="182880"/>
+          </a:xfrm>
+          <a:prstGeom prst="rect">
+            <a:avLst/>
+          </a:prstGeom>
+          <a:noFill/>
+          <a:ln/>
+        </p:spPr>
+        <p:txBody>
+          <a:bodyPr wrap="square" lIns="0" tIns="0" rIns="0" bIns="0" rtlCol="0" anchor="ctr"/>
+          <a:lstStyle/>
+          <a:p>
+            <a:pPr indent="0" marL="0">
+              <a:buNone/>
+            </a:pPr>
+            <a:r>
+              <a:rPr lang="en-US" sz="800" b="1" dirty="0">
+                <a:solidFill>
+                  <a:srgbClr val="2563EB"/>
+                </a:solidFill>
+                <a:latin typeface="Arial" pitchFamily="34" charset="0"/>
+                <a:ea typeface="Arial" pitchFamily="34" charset="-122"/>
+                <a:cs typeface="Arial" pitchFamily="34" charset="-120"/>
+              </a:rPr>
+              <a:t>QUEUE AS LEADING INDICATOR</a:t>
+            </a:r>
+            <a:endParaRPr lang="en-US" sz="800" dirty="0"/>
+          </a:p>
+        </p:txBody>
+      </p:sp>
+      <p:sp>
+        <p:nvSpPr>
+          <p:cNvPr id="28" name="Text 26"/>
+          <p:cNvSpPr/>
+          <p:nvPr/>
+        </p:nvSpPr>
+        <p:spPr>
+          <a:xfrm>
+            <a:off x="2651760" y="4315968"/>
+            <a:ext cx="1920240" cy="548640"/>
+          </a:xfrm>
+          <a:prstGeom prst="rect">
+            <a:avLst/>
+          </a:prstGeom>
+          <a:noFill/>
+          <a:ln/>
+        </p:spPr>
+        <p:txBody>
+          <a:bodyPr wrap="square" lIns="0" tIns="0" rIns="0" bIns="0" rtlCol="0" anchor="ctr"/>
+          <a:lstStyle/>
+          <a:p>
+            <a:pPr indent="0" marL="0">
+              <a:buNone/>
+            </a:pPr>
+            <a:r>
+              <a:rPr lang="en-US" sz="700" dirty="0">
+                <a:solidFill>
+                  <a:srgbClr val="334155"/>
+                </a:solidFill>
+                <a:latin typeface="Calibri" pitchFamily="34" charset="0"/>
+                <a:ea typeface="Calibri" pitchFamily="34" charset="-122"/>
+                <a:cs typeface="Calibri" pitchFamily="34" charset="-120"/>
+              </a:rPr>
+              <a:t>Your data + nobody talking yet</a:t>
+            </a:r>
+            <a:endParaRPr lang="en-US" sz="700" dirty="0"/>
+          </a:p>
+          <a:p>
+            <a:pPr indent="0" marL="0">
+              <a:buNone/>
+            </a:pPr>
+            <a:r>
+              <a:rPr lang="en-US" sz="700" dirty="0">
+                <a:solidFill>
+                  <a:srgbClr val="334155"/>
+                </a:solidFill>
+                <a:latin typeface="Calibri" pitchFamily="34" charset="0"/>
+                <a:ea typeface="Calibri" pitchFamily="34" charset="-122"/>
+                <a:cs typeface="Calibri" pitchFamily="34" charset="-120"/>
+              </a:rPr>
+              <a:t>Builds credibility when trend confirms.</a:t>
+            </a:r>
+            <a:endParaRPr lang="en-US" sz="700" dirty="0"/>
+          </a:p>
+        </p:txBody>
+      </p:sp>
+      <p:sp>
+        <p:nvSpPr>
+          <p:cNvPr id="29" name="Text 27"/>
+          <p:cNvSpPr/>
+          <p:nvPr/>
+        </p:nvSpPr>
+        <p:spPr>
+          <a:xfrm>
+            <a:off x="4754880" y="4133088"/>
+            <a:ext cx="1920240" cy="182880"/>
+          </a:xfrm>
+          <a:prstGeom prst="rect">
+            <a:avLst/>
+          </a:prstGeom>
+          <a:noFill/>
+          <a:ln/>
+        </p:spPr>
+        <p:txBody>
+          <a:bodyPr wrap="square" lIns="0" tIns="0" rIns="0" bIns="0" rtlCol="0" anchor="ctr"/>
+          <a:lstStyle/>
+          <a:p>
+            <a:pPr indent="0" marL="0">
+              <a:buNone/>
+            </a:pPr>
+            <a:r>
+              <a:rPr lang="en-US" sz="800" b="1" dirty="0">
+                <a:solidFill>
+                  <a:srgbClr val="F59E0B"/>
+                </a:solidFill>
+                <a:latin typeface="Arial" pitchFamily="34" charset="0"/>
+                <a:ea typeface="Arial" pitchFamily="34" charset="-122"/>
+                <a:cs typeface="Arial" pitchFamily="34" charset="-120"/>
+              </a:rPr>
+              <a:t>FAST-FOLLOW</a:t>
+            </a:r>
+            <a:endParaRPr lang="en-US" sz="800" dirty="0"/>
+          </a:p>
+        </p:txBody>
+      </p:sp>
+      <p:sp>
+        <p:nvSpPr>
+          <p:cNvPr id="30" name="Text 28"/>
+          <p:cNvSpPr/>
+          <p:nvPr/>
+        </p:nvSpPr>
+        <p:spPr>
+          <a:xfrm>
+            <a:off x="4754880" y="4315968"/>
+            <a:ext cx="1920240" cy="548640"/>
+          </a:xfrm>
+          <a:prstGeom prst="rect">
+            <a:avLst/>
+          </a:prstGeom>
+          <a:noFill/>
+          <a:ln/>
+        </p:spPr>
+        <p:txBody>
+          <a:bodyPr wrap="square" lIns="0" tIns="0" rIns="0" bIns="0" rtlCol="0" anchor="ctr"/>
+          <a:lstStyle/>
+          <a:p>
+            <a:pPr indent="0" marL="0">
+              <a:buNone/>
+            </a:pPr>
+            <a:r>
+              <a:rPr lang="en-US" sz="700" dirty="0">
+                <a:solidFill>
+                  <a:srgbClr val="334155"/>
+                </a:solidFill>
+                <a:latin typeface="Calibri" pitchFamily="34" charset="0"/>
+                <a:ea typeface="Calibri" pitchFamily="34" charset="-122"/>
+                <a:cs typeface="Calibri" pitchFamily="34" charset="-120"/>
+              </a:rPr>
+              <a:t>Topic trending + you have an angle</a:t>
+            </a:r>
+            <a:endParaRPr lang="en-US" sz="700" dirty="0"/>
+          </a:p>
+          <a:p>
+            <a:pPr indent="0" marL="0">
+              <a:buNone/>
+            </a:pPr>
+            <a:r>
+              <a:rPr lang="en-US" sz="700" dirty="0">
+                <a:solidFill>
+                  <a:srgbClr val="334155"/>
+                </a:solidFill>
+                <a:latin typeface="Calibri" pitchFamily="34" charset="0"/>
+                <a:ea typeface="Calibri" pitchFamily="34" charset="-122"/>
+                <a:cs typeface="Calibri" pitchFamily="34" charset="-120"/>
+              </a:rPr>
+              <a:t>"Everyone's talking about X — here's</a:t>
+            </a:r>
+            <a:endParaRPr lang="en-US" sz="700" dirty="0"/>
+          </a:p>
+          <a:p>
+            <a:pPr indent="0" marL="0">
+              <a:buNone/>
+            </a:pPr>
+            <a:r>
+              <a:rPr lang="en-US" sz="700" dirty="0">
+                <a:solidFill>
+                  <a:srgbClr val="334155"/>
+                </a:solidFill>
+                <a:latin typeface="Calibri" pitchFamily="34" charset="0"/>
+                <a:ea typeface="Calibri" pitchFamily="34" charset="-122"/>
+                <a:cs typeface="Calibri" pitchFamily="34" charset="-120"/>
+              </a:rPr>
+              <a:t>what 285K jobs actually show."</a:t>
+            </a:r>
+            <a:endParaRPr lang="en-US" sz="700" dirty="0"/>
+          </a:p>
+        </p:txBody>
+      </p:sp>
+      <p:sp>
+        <p:nvSpPr>
+          <p:cNvPr id="31" name="Text 29"/>
+          <p:cNvSpPr/>
+          <p:nvPr/>
+        </p:nvSpPr>
+        <p:spPr>
+          <a:xfrm>
+            <a:off x="6858000" y="4133088"/>
+            <a:ext cx="1920240" cy="182880"/>
+          </a:xfrm>
+          <a:prstGeom prst="rect">
+            <a:avLst/>
+          </a:prstGeom>
+          <a:noFill/>
+          <a:ln/>
+        </p:spPr>
+        <p:txBody>
+          <a:bodyPr wrap="square" lIns="0" tIns="0" rIns="0" bIns="0" rtlCol="0" anchor="ctr"/>
+          <a:lstStyle/>
+          <a:p>
+            <a:pPr indent="0" marL="0">
+              <a:buNone/>
+            </a:pPr>
+            <a:r>
+              <a:rPr lang="en-US" sz="800" b="1" dirty="0">
+                <a:solidFill>
+                  <a:srgbClr val="EF4444"/>
+                </a:solidFill>
+                <a:latin typeface="Arial" pitchFamily="34" charset="0"/>
+                <a:ea typeface="Arial" pitchFamily="34" charset="-122"/>
+                <a:cs typeface="Arial" pitchFamily="34" charset="-120"/>
+              </a:rPr>
+              <a:t>SKIP</a:t>
+            </a:r>
+            <a:endParaRPr lang="en-US" sz="800" dirty="0"/>
+          </a:p>
+        </p:txBody>
+      </p:sp>
+      <p:sp>
+        <p:nvSpPr>
+          <p:cNvPr id="32" name="Text 30"/>
+          <p:cNvSpPr/>
+          <p:nvPr/>
+        </p:nvSpPr>
+        <p:spPr>
+          <a:xfrm>
+            <a:off x="6858000" y="4315968"/>
+            <a:ext cx="1920240" cy="548640"/>
+          </a:xfrm>
+          <a:prstGeom prst="rect">
+            <a:avLst/>
+          </a:prstGeom>
+          <a:noFill/>
+          <a:ln/>
+        </p:spPr>
+        <p:txBody>
+          <a:bodyPr wrap="square" lIns="0" tIns="0" rIns="0" bIns="0" rtlCol="0" anchor="ctr"/>
+          <a:lstStyle/>
+          <a:p>
+            <a:pPr indent="0" marL="0">
+              <a:buNone/>
+            </a:pPr>
+            <a:r>
+              <a:rPr lang="en-US" sz="700" dirty="0">
+                <a:solidFill>
+                  <a:srgbClr val="334155"/>
+                </a:solidFill>
+                <a:latin typeface="Calibri" pitchFamily="34" charset="0"/>
+                <a:ea typeface="Calibri" pitchFamily="34" charset="-122"/>
+                <a:cs typeface="Calibri" pitchFamily="34" charset="-120"/>
+              </a:rPr>
+              <a:t>Topic trending + nothing unique to add</a:t>
+            </a:r>
+            <a:endParaRPr lang="en-US" sz="700" dirty="0"/>
+          </a:p>
+          <a:p>
+            <a:pPr indent="0" marL="0">
+              <a:buNone/>
+            </a:pPr>
+            <a:r>
+              <a:rPr lang="en-US" sz="700" dirty="0">
+                <a:solidFill>
+                  <a:srgbClr val="334155"/>
+                </a:solidFill>
+                <a:latin typeface="Calibri" pitchFamily="34" charset="0"/>
+                <a:ea typeface="Calibri" pitchFamily="34" charset="-122"/>
+                <a:cs typeface="Calibri" pitchFamily="34" charset="-120"/>
+              </a:rPr>
+              <a:t>Don't publish commodity takes.</a:t>
+            </a:r>
+            <a:endParaRPr lang="en-US" sz="700" dirty="0"/>
+          </a:p>
+        </p:txBody>
+      </p:sp>
+    </p:spTree>
+  </p:cSld>
+  <p:clrMapOvr>
+    <a:masterClrMapping/>
+  </p:clrMapOvr>
+</p:sld>
+</file>
+
+<file path=ppt/slides/slide15.xml><?xml version="1.0" encoding="utf-8"?>
+<p:sld xmlns:a="http://schemas.openxmlformats.org/drawingml/2006/main" xmlns:r="http://schemas.openxmlformats.org/officeDocument/2006/relationships" xmlns:p="http://schemas.openxmlformats.org/presentationml/2006/main">
+  <p:cSld name="Slide 15">
+    <p:bg>
+      <p:bgPr>
+        <a:solidFill>
+          <a:srgbClr val="F8FAFC"/>
+        </a:solidFill>
+      </p:bgPr>
+    </p:bg>
+    <p:spTree>
+      <p:nvGrpSpPr>
+        <p:cNvPr id="1" name=""/>
+        <p:cNvGrpSpPr/>
+        <p:nvPr/>
+      </p:nvGrpSpPr>
+      <p:grpSpPr>
+        <a:xfrm>
+          <a:off x="0" y="0"/>
+          <a:ext cx="0" cy="0"/>
+          <a:chOff x="0" y="0"/>
+          <a:chExt cx="0" cy="0"/>
+        </a:xfrm>
+      </p:grpSpPr>
+      <p:sp>
+        <p:nvSpPr>
+          <p:cNvPr id="2" name="Text 0"/>
+          <p:cNvSpPr/>
+          <p:nvPr/>
+        </p:nvSpPr>
+        <p:spPr>
+          <a:xfrm>
+            <a:off x="731520" y="274320"/>
+            <a:ext cx="7315200" cy="274320"/>
+          </a:xfrm>
+          <a:prstGeom prst="rect">
+            <a:avLst/>
+          </a:prstGeom>
+          <a:noFill/>
+          <a:ln/>
+        </p:spPr>
+        <p:txBody>
+          <a:bodyPr wrap="square" lIns="0" tIns="0" rIns="0" bIns="0" rtlCol="0" anchor="ctr"/>
+          <a:lstStyle/>
+          <a:p>
+            <a:pPr indent="0" marL="0">
+              <a:buNone/>
+            </a:pPr>
+            <a:r>
+              <a:rPr lang="en-US" sz="1100" b="1" spc="400" kern="0" dirty="0">
+                <a:solidFill>
+                  <a:srgbClr val="2563EB"/>
+                </a:solidFill>
+                <a:latin typeface="Arial" pitchFamily="34" charset="0"/>
+                <a:ea typeface="Arial" pitchFamily="34" charset="-122"/>
+                <a:cs typeface="Arial" pitchFamily="34" charset="-120"/>
+              </a:rPr>
+              <a:t>CADENCE STRATEGY</a:t>
+            </a:r>
+            <a:endParaRPr lang="en-US" sz="1100" dirty="0"/>
+          </a:p>
+        </p:txBody>
+      </p:sp>
+      <p:sp>
+        <p:nvSpPr>
+          <p:cNvPr id="3" name="Text 1"/>
+          <p:cNvSpPr/>
+          <p:nvPr/>
+        </p:nvSpPr>
+        <p:spPr>
+          <a:xfrm>
+            <a:off x="731520" y="594360"/>
+            <a:ext cx="7315200" cy="457200"/>
+          </a:xfrm>
+          <a:prstGeom prst="rect">
+            <a:avLst/>
+          </a:prstGeom>
+          <a:noFill/>
+          <a:ln/>
+        </p:spPr>
+        <p:txBody>
+          <a:bodyPr wrap="square" lIns="0" tIns="0" rIns="0" bIns="0" rtlCol="0" anchor="ctr"/>
+          <a:lstStyle/>
+          <a:p>
+            <a:pPr indent="0" marL="0">
+              <a:buNone/>
+            </a:pPr>
+            <a:r>
+              <a:rPr lang="en-US" sz="2600" dirty="0">
+                <a:solidFill>
+                  <a:srgbClr val="1A1F36"/>
+                </a:solidFill>
+                <a:latin typeface="Georgia" pitchFamily="34" charset="0"/>
+                <a:ea typeface="Georgia" pitchFamily="34" charset="-122"/>
+                <a:cs typeface="Georgia" pitchFamily="34" charset="-120"/>
+              </a:rPr>
+              <a:t>Internal Merchandising + External Distribution</a:t>
+            </a:r>
+            <a:endParaRPr lang="en-US" sz="2600" dirty="0"/>
+          </a:p>
+        </p:txBody>
+      </p:sp>
+      <p:sp>
+        <p:nvSpPr>
+          <p:cNvPr id="4" name="Shape 2"/>
+          <p:cNvSpPr/>
+          <p:nvPr/>
+        </p:nvSpPr>
+        <p:spPr>
+          <a:xfrm>
+            <a:off x="365760" y="1188720"/>
+            <a:ext cx="4114800" cy="3749040"/>
+          </a:xfrm>
+          <a:prstGeom prst="rect">
+            <a:avLst/>
+          </a:prstGeom>
+          <a:solidFill>
+            <a:srgbClr val="FFFFFF"/>
+          </a:solidFill>
+          <a:ln/>
+          <a:effectLst>
+            <a:outerShdw sx="100000" sy="100000" kx="0" ky="0" algn="bl" rotWithShape="0" blurRad="76200" dist="25400" dir="8100000">
+              <a:srgbClr val="000000">
+                <a:alpha val="10000"/>
+              </a:srgbClr>
+            </a:outerShdw>
+          </a:effectLst>
+        </p:spPr>
+      </p:sp>
+      <p:sp>
+        <p:nvSpPr>
+          <p:cNvPr id="5" name="Shape 3"/>
+          <p:cNvSpPr/>
+          <p:nvPr/>
+        </p:nvSpPr>
+        <p:spPr>
+          <a:xfrm>
+            <a:off x="365760" y="1188720"/>
+            <a:ext cx="4114800" cy="365760"/>
+          </a:xfrm>
+          <a:prstGeom prst="rect">
+            <a:avLst/>
+          </a:prstGeom>
+          <a:solidFill>
+            <a:srgbClr val="2563EB"/>
+          </a:solidFill>
+          <a:ln/>
+        </p:spPr>
+      </p:sp>
+      <p:sp>
+        <p:nvSpPr>
+          <p:cNvPr id="6" name="Text 4"/>
+          <p:cNvSpPr/>
+          <p:nvPr/>
+        </p:nvSpPr>
+        <p:spPr>
+          <a:xfrm>
+            <a:off x="502920" y="1216152"/>
+            <a:ext cx="3840480" cy="320040"/>
+          </a:xfrm>
+          <a:prstGeom prst="rect">
+            <a:avLst/>
+          </a:prstGeom>
+          <a:noFill/>
+          <a:ln/>
+        </p:spPr>
+        <p:txBody>
+          <a:bodyPr wrap="square" lIns="0" tIns="0" rIns="0" bIns="0" rtlCol="0" anchor="ctr"/>
+          <a:lstStyle/>
+          <a:p>
+            <a:pPr indent="0" marL="0">
+              <a:buNone/>
+            </a:pPr>
+            <a:r>
+              <a:rPr lang="en-US" sz="900" b="1" dirty="0">
+                <a:solidFill>
+                  <a:srgbClr val="FFFFFF"/>
+                </a:solidFill>
+                <a:latin typeface="Arial" pitchFamily="34" charset="0"/>
+                <a:ea typeface="Arial" pitchFamily="34" charset="-122"/>
+                <a:cs typeface="Arial" pitchFamily="34" charset="-120"/>
+              </a:rPr>
+              <a:t>EXTERNAL CHANNELS</a:t>
+            </a:r>
+            <a:endParaRPr lang="en-US" sz="900" dirty="0"/>
+          </a:p>
+        </p:txBody>
+      </p:sp>
+      <p:sp>
+        <p:nvSpPr>
+          <p:cNvPr id="7" name="Text 5"/>
+          <p:cNvSpPr/>
+          <p:nvPr/>
+        </p:nvSpPr>
+        <p:spPr>
+          <a:xfrm>
+            <a:off x="548640" y="1664208"/>
+            <a:ext cx="822960" cy="146304"/>
+          </a:xfrm>
+          <a:prstGeom prst="rect">
+            <a:avLst/>
+          </a:prstGeom>
+          <a:noFill/>
+          <a:ln/>
+        </p:spPr>
+        <p:txBody>
+          <a:bodyPr wrap="square" lIns="0" tIns="0" rIns="0" bIns="0" rtlCol="0" anchor="ctr"/>
+          <a:lstStyle/>
+          <a:p>
+            <a:pPr indent="0" marL="0">
+              <a:buNone/>
+            </a:pPr>
+            <a:r>
+              <a:rPr lang="en-US" sz="800" b="1" dirty="0">
+                <a:solidFill>
+                  <a:srgbClr val="1A1F36"/>
+                </a:solidFill>
+                <a:latin typeface="Calibri" pitchFamily="34" charset="0"/>
+                <a:ea typeface="Calibri" pitchFamily="34" charset="-122"/>
+                <a:cs typeface="Calibri" pitchFamily="34" charset="-120"/>
+              </a:rPr>
+              <a:t>Blog</a:t>
+            </a:r>
+            <a:endParaRPr lang="en-US" sz="800" dirty="0"/>
+          </a:p>
+        </p:txBody>
+      </p:sp>
+      <p:sp>
+        <p:nvSpPr>
+          <p:cNvPr id="8" name="Text 6"/>
+          <p:cNvSpPr/>
+          <p:nvPr/>
+        </p:nvSpPr>
+        <p:spPr>
+          <a:xfrm>
+            <a:off x="1417320" y="1664208"/>
+            <a:ext cx="731520" cy="146304"/>
+          </a:xfrm>
+          <a:prstGeom prst="rect">
+            <a:avLst/>
+          </a:prstGeom>
+          <a:noFill/>
+          <a:ln/>
+        </p:spPr>
+        <p:txBody>
+          <a:bodyPr wrap="square" lIns="0" tIns="0" rIns="0" bIns="0" rtlCol="0" anchor="ctr"/>
+          <a:lstStyle/>
+          <a:p>
+            <a:pPr indent="0" marL="0">
+              <a:buNone/>
+            </a:pPr>
+            <a:r>
+              <a:rPr lang="en-US" sz="750" b="1" dirty="0">
+                <a:solidFill>
+                  <a:srgbClr val="2563EB"/>
+                </a:solidFill>
+                <a:latin typeface="Calibri" pitchFamily="34" charset="0"/>
+                <a:ea typeface="Calibri" pitchFamily="34" charset="-122"/>
+                <a:cs typeface="Calibri" pitchFamily="34" charset="-120"/>
+              </a:rPr>
+              <a:t>3-5× / week</a:t>
+            </a:r>
+            <a:endParaRPr lang="en-US" sz="750" dirty="0"/>
+          </a:p>
+        </p:txBody>
+      </p:sp>
+      <p:sp>
+        <p:nvSpPr>
+          <p:cNvPr id="9" name="Text 7"/>
+          <p:cNvSpPr/>
+          <p:nvPr/>
+        </p:nvSpPr>
+        <p:spPr>
+          <a:xfrm>
+            <a:off x="548640" y="1819656"/>
+            <a:ext cx="3749040" cy="347472"/>
+          </a:xfrm>
+          <a:prstGeom prst="rect">
+            <a:avLst/>
+          </a:prstGeom>
+          <a:noFill/>
+          <a:ln/>
+        </p:spPr>
+        <p:txBody>
+          <a:bodyPr wrap="square" lIns="0" tIns="0" rIns="0" bIns="0" rtlCol="0" anchor="ctr"/>
+          <a:lstStyle/>
+          <a:p>
+            <a:pPr indent="0" marL="0">
+              <a:buNone/>
+            </a:pPr>
+            <a:r>
+              <a:rPr lang="en-US" sz="650" dirty="0">
+                <a:solidFill>
+                  <a:srgbClr val="64748B"/>
+                </a:solidFill>
+                <a:latin typeface="Calibri" pitchFamily="34" charset="0"/>
+                <a:ea typeface="Calibri" pitchFamily="34" charset="-122"/>
+                <a:cs typeface="Calibri" pitchFamily="34" charset="-120"/>
+              </a:rPr>
+              <a:t>Canonical home for all stories. Mix of scheduled reports</a:t>
+            </a:r>
+            <a:endParaRPr lang="en-US" sz="650" dirty="0"/>
+          </a:p>
+          <a:p>
+            <a:pPr indent="0" marL="0">
+              <a:buNone/>
+            </a:pPr>
+            <a:r>
+              <a:rPr lang="en-US" sz="650" dirty="0">
+                <a:solidFill>
+                  <a:srgbClr val="64748B"/>
+                </a:solidFill>
+                <a:latin typeface="Calibri" pitchFamily="34" charset="0"/>
+                <a:ea typeface="Calibri" pitchFamily="34" charset="-122"/>
+                <a:cs typeface="Calibri" pitchFamily="34" charset="-120"/>
+              </a:rPr>
+              <a:t>(gov data hooks) and anomaly-driven stories. Evergreen</a:t>
+            </a:r>
+            <a:endParaRPr lang="en-US" sz="650" dirty="0"/>
+          </a:p>
+          <a:p>
+            <a:pPr indent="0" marL="0">
+              <a:buNone/>
+            </a:pPr>
+            <a:r>
+              <a:rPr lang="en-US" sz="650" dirty="0">
+                <a:solidFill>
+                  <a:srgbClr val="64748B"/>
+                </a:solidFill>
+                <a:latin typeface="Calibri" pitchFamily="34" charset="0"/>
+                <a:ea typeface="Calibri" pitchFamily="34" charset="-122"/>
+                <a:cs typeface="Calibri" pitchFamily="34" charset="-120"/>
+              </a:rPr>
+              <a:t>SEO pages refresh on 7/14/30d cycles.</a:t>
+            </a:r>
+            <a:endParaRPr lang="en-US" sz="650" dirty="0"/>
+          </a:p>
+        </p:txBody>
+      </p:sp>
+      <p:sp>
+        <p:nvSpPr>
+          <p:cNvPr id="10" name="Text 8"/>
+          <p:cNvSpPr/>
+          <p:nvPr/>
+        </p:nvSpPr>
+        <p:spPr>
+          <a:xfrm>
+            <a:off x="548640" y="2194560"/>
+            <a:ext cx="822960" cy="146304"/>
+          </a:xfrm>
+          <a:prstGeom prst="rect">
+            <a:avLst/>
+          </a:prstGeom>
+          <a:noFill/>
+          <a:ln/>
+        </p:spPr>
+        <p:txBody>
+          <a:bodyPr wrap="square" lIns="0" tIns="0" rIns="0" bIns="0" rtlCol="0" anchor="ctr"/>
+          <a:lstStyle/>
+          <a:p>
+            <a:pPr indent="0" marL="0">
+              <a:buNone/>
+            </a:pPr>
+            <a:r>
+              <a:rPr lang="en-US" sz="800" b="1" dirty="0">
+                <a:solidFill>
+                  <a:srgbClr val="1A1F36"/>
+                </a:solidFill>
+                <a:latin typeface="Calibri" pitchFamily="34" charset="0"/>
+                <a:ea typeface="Calibri" pitchFamily="34" charset="-122"/>
+                <a:cs typeface="Calibri" pitchFamily="34" charset="-120"/>
+              </a:rPr>
+              <a:t>LinkedIn</a:t>
+            </a:r>
+            <a:endParaRPr lang="en-US" sz="800" dirty="0"/>
+          </a:p>
+        </p:txBody>
+      </p:sp>
+      <p:sp>
+        <p:nvSpPr>
+          <p:cNvPr id="11" name="Text 9"/>
+          <p:cNvSpPr/>
+          <p:nvPr/>
+        </p:nvSpPr>
+        <p:spPr>
+          <a:xfrm>
+            <a:off x="1417320" y="2194560"/>
+            <a:ext cx="731520" cy="146304"/>
+          </a:xfrm>
+          <a:prstGeom prst="rect">
+            <a:avLst/>
+          </a:prstGeom>
+          <a:noFill/>
+          <a:ln/>
+        </p:spPr>
+        <p:txBody>
+          <a:bodyPr wrap="square" lIns="0" tIns="0" rIns="0" bIns="0" rtlCol="0" anchor="ctr"/>
+          <a:lstStyle/>
+          <a:p>
+            <a:pPr indent="0" marL="0">
+              <a:buNone/>
+            </a:pPr>
+            <a:r>
+              <a:rPr lang="en-US" sz="750" b="1" dirty="0">
+                <a:solidFill>
+                  <a:srgbClr val="2563EB"/>
+                </a:solidFill>
+                <a:latin typeface="Calibri" pitchFamily="34" charset="0"/>
+                <a:ea typeface="Calibri" pitchFamily="34" charset="-122"/>
+                <a:cs typeface="Calibri" pitchFamily="34" charset="-120"/>
+              </a:rPr>
+              <a:t>3-5× / week</a:t>
+            </a:r>
+            <a:endParaRPr lang="en-US" sz="750" dirty="0"/>
+          </a:p>
+        </p:txBody>
+      </p:sp>
+      <p:sp>
+        <p:nvSpPr>
+          <p:cNvPr id="12" name="Text 10"/>
+          <p:cNvSpPr/>
+          <p:nvPr/>
+        </p:nvSpPr>
+        <p:spPr>
+          <a:xfrm>
+            <a:off x="548640" y="2350008"/>
+            <a:ext cx="3749040" cy="347472"/>
+          </a:xfrm>
+          <a:prstGeom prst="rect">
+            <a:avLst/>
+          </a:prstGeom>
+          <a:noFill/>
+          <a:ln/>
+        </p:spPr>
+        <p:txBody>
+          <a:bodyPr wrap="square" lIns="0" tIns="0" rIns="0" bIns="0" rtlCol="0" anchor="ctr"/>
+          <a:lstStyle/>
+          <a:p>
+            <a:pPr indent="0" marL="0">
+              <a:buNone/>
+            </a:pPr>
+            <a:r>
+              <a:rPr lang="en-US" sz="650" dirty="0">
+                <a:solidFill>
+                  <a:srgbClr val="64748B"/>
+                </a:solidFill>
+                <a:latin typeface="Calibri" pitchFamily="34" charset="0"/>
+                <a:ea typeface="Calibri" pitchFamily="34" charset="-122"/>
+                <a:cs typeface="Calibri" pitchFamily="34" charset="-120"/>
+              </a:rPr>
+              <a:t>Every blog post gets a LinkedIn variant. Standalone</a:t>
+            </a:r>
+            <a:endParaRPr lang="en-US" sz="650" dirty="0"/>
+          </a:p>
+          <a:p>
+            <a:pPr indent="0" marL="0">
+              <a:buNone/>
+            </a:pPr>
+            <a:r>
+              <a:rPr lang="en-US" sz="650" dirty="0">
+                <a:solidFill>
+                  <a:srgbClr val="64748B"/>
+                </a:solidFill>
+                <a:latin typeface="Calibri" pitchFamily="34" charset="0"/>
+                <a:ea typeface="Calibri" pitchFamily="34" charset="-122"/>
+                <a:cs typeface="Calibri" pitchFamily="34" charset="-120"/>
+              </a:rPr>
+              <a:t>format: hook stat, narrative arc, chart image, engagement</a:t>
+            </a:r>
+            <a:endParaRPr lang="en-US" sz="650" dirty="0"/>
+          </a:p>
+          <a:p>
+            <a:pPr indent="0" marL="0">
+              <a:buNone/>
+            </a:pPr>
+            <a:r>
+              <a:rPr lang="en-US" sz="650" dirty="0">
+                <a:solidFill>
+                  <a:srgbClr val="64748B"/>
+                </a:solidFill>
+                <a:latin typeface="Calibri" pitchFamily="34" charset="0"/>
+                <a:ea typeface="Calibri" pitchFamily="34" charset="-122"/>
+                <a:cs typeface="Calibri" pitchFamily="34" charset="-120"/>
+              </a:rPr>
+              <a:t>question. Primary distribution channel at launch.</a:t>
+            </a:r>
+            <a:endParaRPr lang="en-US" sz="650" dirty="0"/>
+          </a:p>
+        </p:txBody>
+      </p:sp>
+      <p:sp>
+        <p:nvSpPr>
+          <p:cNvPr id="13" name="Text 11"/>
+          <p:cNvSpPr/>
+          <p:nvPr/>
+        </p:nvSpPr>
+        <p:spPr>
+          <a:xfrm>
+            <a:off x="548640" y="2724912"/>
+            <a:ext cx="822960" cy="146304"/>
+          </a:xfrm>
+          <a:prstGeom prst="rect">
+            <a:avLst/>
+          </a:prstGeom>
+          <a:noFill/>
+          <a:ln/>
+        </p:spPr>
+        <p:txBody>
+          <a:bodyPr wrap="square" lIns="0" tIns="0" rIns="0" bIns="0" rtlCol="0" anchor="ctr"/>
+          <a:lstStyle/>
+          <a:p>
+            <a:pPr indent="0" marL="0">
+              <a:buNone/>
+            </a:pPr>
+            <a:r>
+              <a:rPr lang="en-US" sz="800" b="1" dirty="0">
+                <a:solidFill>
+                  <a:srgbClr val="1A1F36"/>
+                </a:solidFill>
+                <a:latin typeface="Calibri" pitchFamily="34" charset="0"/>
+                <a:ea typeface="Calibri" pitchFamily="34" charset="-122"/>
+                <a:cs typeface="Calibri" pitchFamily="34" charset="-120"/>
+              </a:rPr>
+              <a:t>X / Twitter</a:t>
+            </a:r>
+            <a:endParaRPr lang="en-US" sz="800" dirty="0"/>
+          </a:p>
+        </p:txBody>
+      </p:sp>
+      <p:sp>
+        <p:nvSpPr>
+          <p:cNvPr id="14" name="Text 12"/>
+          <p:cNvSpPr/>
+          <p:nvPr/>
+        </p:nvSpPr>
+        <p:spPr>
+          <a:xfrm>
+            <a:off x="1417320" y="2724912"/>
+            <a:ext cx="731520" cy="146304"/>
+          </a:xfrm>
+          <a:prstGeom prst="rect">
+            <a:avLst/>
+          </a:prstGeom>
+          <a:noFill/>
+          <a:ln/>
+        </p:spPr>
+        <p:txBody>
+          <a:bodyPr wrap="square" lIns="0" tIns="0" rIns="0" bIns="0" rtlCol="0" anchor="ctr"/>
+          <a:lstStyle/>
+          <a:p>
+            <a:pPr indent="0" marL="0">
+              <a:buNone/>
+            </a:pPr>
+            <a:r>
+              <a:rPr lang="en-US" sz="750" b="1" dirty="0">
+                <a:solidFill>
+                  <a:srgbClr val="2563EB"/>
+                </a:solidFill>
+                <a:latin typeface="Calibri" pitchFamily="34" charset="0"/>
+                <a:ea typeface="Calibri" pitchFamily="34" charset="-122"/>
+                <a:cs typeface="Calibri" pitchFamily="34" charset="-120"/>
+              </a:rPr>
+              <a:t>Daily</a:t>
+            </a:r>
+            <a:endParaRPr lang="en-US" sz="750" dirty="0"/>
+          </a:p>
+        </p:txBody>
+      </p:sp>
+      <p:sp>
+        <p:nvSpPr>
+          <p:cNvPr id="15" name="Text 13"/>
+          <p:cNvSpPr/>
+          <p:nvPr/>
+        </p:nvSpPr>
+        <p:spPr>
+          <a:xfrm>
+            <a:off x="548640" y="2880360"/>
+            <a:ext cx="3749040" cy="347472"/>
+          </a:xfrm>
+          <a:prstGeom prst="rect">
+            <a:avLst/>
+          </a:prstGeom>
+          <a:noFill/>
+          <a:ln/>
+        </p:spPr>
+        <p:txBody>
+          <a:bodyPr wrap="square" lIns="0" tIns="0" rIns="0" bIns="0" rtlCol="0" anchor="ctr"/>
+          <a:lstStyle/>
+          <a:p>
+            <a:pPr indent="0" marL="0">
+              <a:buNone/>
+            </a:pPr>
+            <a:r>
+              <a:rPr lang="en-US" sz="650" dirty="0">
+                <a:solidFill>
+                  <a:srgbClr val="64748B"/>
+                </a:solidFill>
+                <a:latin typeface="Calibri" pitchFamily="34" charset="0"/>
+                <a:ea typeface="Calibri" pitchFamily="34" charset="-122"/>
+                <a:cs typeface="Calibri" pitchFamily="34" charset="-120"/>
+              </a:rPr>
+              <a:t>Every story + quick-hit data points between stories.</a:t>
+            </a:r>
+            <a:endParaRPr lang="en-US" sz="650" dirty="0"/>
+          </a:p>
+          <a:p>
+            <a:pPr indent="0" marL="0">
+              <a:buNone/>
+            </a:pPr>
+            <a:r>
+              <a:rPr lang="en-US" sz="650" dirty="0">
+                <a:solidFill>
+                  <a:srgbClr val="64748B"/>
+                </a:solidFill>
+                <a:latin typeface="Calibri" pitchFamily="34" charset="0"/>
+                <a:ea typeface="Calibri" pitchFamily="34" charset="-122"/>
+                <a:cs typeface="Calibri" pitchFamily="34" charset="-120"/>
+              </a:rPr>
+              <a:t>Thread major reports. Retweet press citations.</a:t>
+            </a:r>
+            <a:endParaRPr lang="en-US" sz="650" dirty="0"/>
+          </a:p>
+          <a:p>
+            <a:pPr indent="0" marL="0">
+              <a:buNone/>
+            </a:pPr>
+            <a:r>
+              <a:rPr lang="en-US" sz="650" dirty="0">
+                <a:solidFill>
+                  <a:srgbClr val="64748B"/>
+                </a:solidFill>
+                <a:latin typeface="Calibri" pitchFamily="34" charset="0"/>
+                <a:ea typeface="Calibri" pitchFamily="34" charset="-122"/>
+                <a:cs typeface="Calibri" pitchFamily="34" charset="-120"/>
+              </a:rPr>
+              <a:t>Highest volume, lowest effort per post.</a:t>
+            </a:r>
+            <a:endParaRPr lang="en-US" sz="650" dirty="0"/>
+          </a:p>
+        </p:txBody>
+      </p:sp>
+      <p:sp>
+        <p:nvSpPr>
+          <p:cNvPr id="16" name="Text 14"/>
+          <p:cNvSpPr/>
+          <p:nvPr/>
+        </p:nvSpPr>
+        <p:spPr>
+          <a:xfrm>
+            <a:off x="548640" y="3255264"/>
+            <a:ext cx="822960" cy="146304"/>
+          </a:xfrm>
+          <a:prstGeom prst="rect">
+            <a:avLst/>
+          </a:prstGeom>
+          <a:noFill/>
+          <a:ln/>
+        </p:spPr>
+        <p:txBody>
+          <a:bodyPr wrap="square" lIns="0" tIns="0" rIns="0" bIns="0" rtlCol="0" anchor="ctr"/>
+          <a:lstStyle/>
+          <a:p>
+            <a:pPr indent="0" marL="0">
+              <a:buNone/>
+            </a:pPr>
+            <a:r>
+              <a:rPr lang="en-US" sz="800" b="1" dirty="0">
+                <a:solidFill>
+                  <a:srgbClr val="1A1F36"/>
+                </a:solidFill>
+                <a:latin typeface="Calibri" pitchFamily="34" charset="0"/>
+                <a:ea typeface="Calibri" pitchFamily="34" charset="-122"/>
+                <a:cs typeface="Calibri" pitchFamily="34" charset="-120"/>
+              </a:rPr>
+              <a:t>Reddit</a:t>
+            </a:r>
+            <a:endParaRPr lang="en-US" sz="800" dirty="0"/>
+          </a:p>
+        </p:txBody>
+      </p:sp>
+      <p:sp>
+        <p:nvSpPr>
+          <p:cNvPr id="17" name="Text 15"/>
+          <p:cNvSpPr/>
+          <p:nvPr/>
+        </p:nvSpPr>
+        <p:spPr>
+          <a:xfrm>
+            <a:off x="1417320" y="3255264"/>
+            <a:ext cx="731520" cy="146304"/>
+          </a:xfrm>
+          <a:prstGeom prst="rect">
+            <a:avLst/>
+          </a:prstGeom>
+          <a:noFill/>
+          <a:ln/>
+        </p:spPr>
+        <p:txBody>
+          <a:bodyPr wrap="square" lIns="0" tIns="0" rIns="0" bIns="0" rtlCol="0" anchor="ctr"/>
+          <a:lstStyle/>
+          <a:p>
+            <a:pPr indent="0" marL="0">
+              <a:buNone/>
+            </a:pPr>
+            <a:r>
+              <a:rPr lang="en-US" sz="750" b="1" dirty="0">
+                <a:solidFill>
+                  <a:srgbClr val="2563EB"/>
+                </a:solidFill>
+                <a:latin typeface="Calibri" pitchFamily="34" charset="0"/>
+                <a:ea typeface="Calibri" pitchFamily="34" charset="-122"/>
+                <a:cs typeface="Calibri" pitchFamily="34" charset="-120"/>
+              </a:rPr>
+              <a:t>1-2× / week</a:t>
+            </a:r>
+            <a:endParaRPr lang="en-US" sz="750" dirty="0"/>
+          </a:p>
+        </p:txBody>
+      </p:sp>
+      <p:sp>
+        <p:nvSpPr>
+          <p:cNvPr id="18" name="Text 16"/>
+          <p:cNvSpPr/>
+          <p:nvPr/>
+        </p:nvSpPr>
+        <p:spPr>
+          <a:xfrm>
+            <a:off x="548640" y="3410712"/>
+            <a:ext cx="3749040" cy="347472"/>
+          </a:xfrm>
+          <a:prstGeom prst="rect">
+            <a:avLst/>
+          </a:prstGeom>
+          <a:noFill/>
+          <a:ln/>
+        </p:spPr>
+        <p:txBody>
+          <a:bodyPr wrap="square" lIns="0" tIns="0" rIns="0" bIns="0" rtlCol="0" anchor="ctr"/>
+          <a:lstStyle/>
+          <a:p>
+            <a:pPr indent="0" marL="0">
+              <a:buNone/>
+            </a:pPr>
+            <a:r>
+              <a:rPr lang="en-US" sz="650" dirty="0">
+                <a:solidFill>
+                  <a:srgbClr val="64748B"/>
+                </a:solidFill>
+                <a:latin typeface="Calibri" pitchFamily="34" charset="0"/>
+                <a:ea typeface="Calibri" pitchFamily="34" charset="-122"/>
+                <a:cs typeface="Calibri" pitchFamily="34" charset="-120"/>
+              </a:rPr>
+              <a:t>Only strongest data stories. Chart-first, zero brand.</a:t>
+            </a:r>
+            <a:endParaRPr lang="en-US" sz="650" dirty="0"/>
+          </a:p>
+          <a:p>
+            <a:pPr indent="0" marL="0">
+              <a:buNone/>
+            </a:pPr>
+            <a:r>
+              <a:rPr lang="en-US" sz="650" dirty="0">
+                <a:solidFill>
+                  <a:srgbClr val="64748B"/>
+                </a:solidFill>
+                <a:latin typeface="Calibri" pitchFamily="34" charset="0"/>
+                <a:ea typeface="Calibri" pitchFamily="34" charset="-122"/>
+                <a:cs typeface="Calibri" pitchFamily="34" charset="-120"/>
+              </a:rPr>
+              <a:t>Subreddit-matched (salary → r/dataisbeautiful,</a:t>
+            </a:r>
+            <a:endParaRPr lang="en-US" sz="650" dirty="0"/>
+          </a:p>
+          <a:p>
+            <a:pPr indent="0" marL="0">
+              <a:buNone/>
+            </a:pPr>
+            <a:r>
+              <a:rPr lang="en-US" sz="650" dirty="0">
+                <a:solidFill>
+                  <a:srgbClr val="64748B"/>
+                </a:solidFill>
+                <a:latin typeface="Calibri" pitchFamily="34" charset="0"/>
+                <a:ea typeface="Calibri" pitchFamily="34" charset="-122"/>
+                <a:cs typeface="Calibri" pitchFamily="34" charset="-120"/>
+              </a:rPr>
+              <a:t>ghost jobs → r/recruitinghell). Quality over quantity.</a:t>
+            </a:r>
+            <a:endParaRPr lang="en-US" sz="650" dirty="0"/>
+          </a:p>
+        </p:txBody>
+      </p:sp>
+      <p:sp>
+        <p:nvSpPr>
+          <p:cNvPr id="19" name="Text 17"/>
+          <p:cNvSpPr/>
+          <p:nvPr/>
+        </p:nvSpPr>
+        <p:spPr>
+          <a:xfrm>
+            <a:off x="548640" y="3785616"/>
+            <a:ext cx="822960" cy="146304"/>
+          </a:xfrm>
+          <a:prstGeom prst="rect">
+            <a:avLst/>
+          </a:prstGeom>
+          <a:noFill/>
+          <a:ln/>
+        </p:spPr>
+        <p:txBody>
+          <a:bodyPr wrap="square" lIns="0" tIns="0" rIns="0" bIns="0" rtlCol="0" anchor="ctr"/>
+          <a:lstStyle/>
+          <a:p>
+            <a:pPr indent="0" marL="0">
+              <a:buNone/>
+            </a:pPr>
+            <a:r>
+              <a:rPr lang="en-US" sz="800" b="1" dirty="0">
+                <a:solidFill>
+                  <a:srgbClr val="1A1F36"/>
+                </a:solidFill>
+                <a:latin typeface="Calibri" pitchFamily="34" charset="0"/>
+                <a:ea typeface="Calibri" pitchFamily="34" charset="-122"/>
+                <a:cs typeface="Calibri" pitchFamily="34" charset="-120"/>
+              </a:rPr>
+              <a:t>Newsletter</a:t>
+            </a:r>
+            <a:endParaRPr lang="en-US" sz="800" dirty="0"/>
+          </a:p>
+        </p:txBody>
+      </p:sp>
+      <p:sp>
+        <p:nvSpPr>
+          <p:cNvPr id="20" name="Text 18"/>
+          <p:cNvSpPr/>
+          <p:nvPr/>
+        </p:nvSpPr>
+        <p:spPr>
+          <a:xfrm>
+            <a:off x="1417320" y="3785616"/>
+            <a:ext cx="731520" cy="146304"/>
+          </a:xfrm>
+          <a:prstGeom prst="rect">
+            <a:avLst/>
+          </a:prstGeom>
+          <a:noFill/>
+          <a:ln/>
+        </p:spPr>
+        <p:txBody>
+          <a:bodyPr wrap="square" lIns="0" tIns="0" rIns="0" bIns="0" rtlCol="0" anchor="ctr"/>
+          <a:lstStyle/>
+          <a:p>
+            <a:pPr indent="0" marL="0">
+              <a:buNone/>
+            </a:pPr>
+            <a:r>
+              <a:rPr lang="en-US" sz="750" b="1" dirty="0">
+                <a:solidFill>
+                  <a:srgbClr val="2563EB"/>
+                </a:solidFill>
+                <a:latin typeface="Calibri" pitchFamily="34" charset="0"/>
+                <a:ea typeface="Calibri" pitchFamily="34" charset="-122"/>
+                <a:cs typeface="Calibri" pitchFamily="34" charset="-120"/>
+              </a:rPr>
+              <a:t>Weekly (Fri)</a:t>
+            </a:r>
+            <a:endParaRPr lang="en-US" sz="750" dirty="0"/>
+          </a:p>
+        </p:txBody>
+      </p:sp>
+      <p:sp>
+        <p:nvSpPr>
+          <p:cNvPr id="21" name="Text 19"/>
+          <p:cNvSpPr/>
+          <p:nvPr/>
+        </p:nvSpPr>
+        <p:spPr>
+          <a:xfrm>
+            <a:off x="548640" y="3941064"/>
+            <a:ext cx="3749040" cy="347472"/>
+          </a:xfrm>
+          <a:prstGeom prst="rect">
+            <a:avLst/>
+          </a:prstGeom>
+          <a:noFill/>
+          <a:ln/>
+        </p:spPr>
+        <p:txBody>
+          <a:bodyPr wrap="square" lIns="0" tIns="0" rIns="0" bIns="0" rtlCol="0" anchor="ctr"/>
+          <a:lstStyle/>
+          <a:p>
+            <a:pPr indent="0" marL="0">
+              <a:buNone/>
+            </a:pPr>
+            <a:r>
+              <a:rPr lang="en-US" sz="650" dirty="0">
+                <a:solidFill>
+                  <a:srgbClr val="64748B"/>
+                </a:solidFill>
+                <a:latin typeface="Calibri" pitchFamily="34" charset="0"/>
+                <a:ea typeface="Calibri" pitchFamily="34" charset="-122"/>
+                <a:cs typeface="Calibri" pitchFamily="34" charset="-120"/>
+              </a:rPr>
+              <a:t>Top 3 stories + GT API trending topics + "what this</a:t>
+            </a:r>
+            <a:endParaRPr lang="en-US" sz="650" dirty="0"/>
+          </a:p>
+          <a:p>
+            <a:pPr indent="0" marL="0">
+              <a:buNone/>
+            </a:pPr>
+            <a:r>
+              <a:rPr lang="en-US" sz="650" dirty="0">
+                <a:solidFill>
+                  <a:srgbClr val="64748B"/>
+                </a:solidFill>
+                <a:latin typeface="Calibri" pitchFamily="34" charset="0"/>
+                <a:ea typeface="Calibri" pitchFamily="34" charset="-122"/>
+                <a:cs typeface="Calibri" pitchFamily="34" charset="-120"/>
+              </a:rPr>
+              <a:t>means for your search." Digest format via Resend.</a:t>
+            </a:r>
+            <a:endParaRPr lang="en-US" sz="650" dirty="0"/>
+          </a:p>
+          <a:p>
+            <a:pPr indent="0" marL="0">
+              <a:buNone/>
+            </a:pPr>
+            <a:r>
+              <a:rPr lang="en-US" sz="650" dirty="0">
+                <a:solidFill>
+                  <a:srgbClr val="64748B"/>
+                </a:solidFill>
+                <a:latin typeface="Calibri" pitchFamily="34" charset="0"/>
+                <a:ea typeface="Calibri" pitchFamily="34" charset="-122"/>
+                <a:cs typeface="Calibri" pitchFamily="34" charset="-120"/>
+              </a:rPr>
+              <a:t>Owned channel — not algorithm-dependent.</a:t>
+            </a:r>
+            <a:endParaRPr lang="en-US" sz="650" dirty="0"/>
+          </a:p>
+        </p:txBody>
+      </p:sp>
+      <p:sp>
+        <p:nvSpPr>
+          <p:cNvPr id="22" name="Text 20"/>
+          <p:cNvSpPr/>
+          <p:nvPr/>
+        </p:nvSpPr>
+        <p:spPr>
+          <a:xfrm>
+            <a:off x="548640" y="4315968"/>
+            <a:ext cx="822960" cy="146304"/>
+          </a:xfrm>
+          <a:prstGeom prst="rect">
+            <a:avLst/>
+          </a:prstGeom>
+          <a:noFill/>
+          <a:ln/>
+        </p:spPr>
+        <p:txBody>
+          <a:bodyPr wrap="square" lIns="0" tIns="0" rIns="0" bIns="0" rtlCol="0" anchor="ctr"/>
+          <a:lstStyle/>
+          <a:p>
+            <a:pPr indent="0" marL="0">
+              <a:buNone/>
+            </a:pPr>
+            <a:r>
+              <a:rPr lang="en-US" sz="800" b="1" dirty="0">
+                <a:solidFill>
+                  <a:srgbClr val="1A1F36"/>
+                </a:solidFill>
+                <a:latin typeface="Calibri" pitchFamily="34" charset="0"/>
+                <a:ea typeface="Calibri" pitchFamily="34" charset="-122"/>
+                <a:cs typeface="Calibri" pitchFamily="34" charset="-120"/>
+              </a:rPr>
+              <a:t>YouTube / Shorts</a:t>
+            </a:r>
+            <a:endParaRPr lang="en-US" sz="800" dirty="0"/>
+          </a:p>
+        </p:txBody>
+      </p:sp>
+      <p:sp>
+        <p:nvSpPr>
+          <p:cNvPr id="23" name="Text 21"/>
+          <p:cNvSpPr/>
+          <p:nvPr/>
+        </p:nvSpPr>
+        <p:spPr>
+          <a:xfrm>
+            <a:off x="1417320" y="4315968"/>
+            <a:ext cx="731520" cy="146304"/>
+          </a:xfrm>
+          <a:prstGeom prst="rect">
+            <a:avLst/>
+          </a:prstGeom>
+          <a:noFill/>
+          <a:ln/>
+        </p:spPr>
+        <p:txBody>
+          <a:bodyPr wrap="square" lIns="0" tIns="0" rIns="0" bIns="0" rtlCol="0" anchor="ctr"/>
+          <a:lstStyle/>
+          <a:p>
+            <a:pPr indent="0" marL="0">
+              <a:buNone/>
+            </a:pPr>
+            <a:r>
+              <a:rPr lang="en-US" sz="750" b="1" dirty="0">
+                <a:solidFill>
+                  <a:srgbClr val="2563EB"/>
+                </a:solidFill>
+                <a:latin typeface="Calibri" pitchFamily="34" charset="0"/>
+                <a:ea typeface="Calibri" pitchFamily="34" charset="-122"/>
+                <a:cs typeface="Calibri" pitchFamily="34" charset="-120"/>
+              </a:rPr>
+              <a:t>1-2× / week</a:t>
+            </a:r>
+            <a:endParaRPr lang="en-US" sz="750" dirty="0"/>
+          </a:p>
+        </p:txBody>
+      </p:sp>
+      <p:sp>
+        <p:nvSpPr>
+          <p:cNvPr id="24" name="Text 22"/>
+          <p:cNvSpPr/>
+          <p:nvPr/>
+        </p:nvSpPr>
+        <p:spPr>
+          <a:xfrm>
+            <a:off x="548640" y="4471416"/>
+            <a:ext cx="3749040" cy="347472"/>
+          </a:xfrm>
+          <a:prstGeom prst="rect">
+            <a:avLst/>
+          </a:prstGeom>
+          <a:noFill/>
+          <a:ln/>
+        </p:spPr>
+        <p:txBody>
+          <a:bodyPr wrap="square" lIns="0" tIns="0" rIns="0" bIns="0" rtlCol="0" anchor="ctr"/>
+          <a:lstStyle/>
+          <a:p>
+            <a:pPr indent="0" marL="0">
+              <a:buNone/>
+            </a:pPr>
+            <a:r>
+              <a:rPr lang="en-US" sz="650" dirty="0">
+                <a:solidFill>
+                  <a:srgbClr val="64748B"/>
+                </a:solidFill>
+                <a:latin typeface="Calibri" pitchFamily="34" charset="0"/>
+                <a:ea typeface="Calibri" pitchFamily="34" charset="-122"/>
+                <a:cs typeface="Calibri" pitchFamily="34" charset="-120"/>
+              </a:rPr>
+              <a:t>Strongest visual stories. 60-90s faceless format.</a:t>
+            </a:r>
+            <a:endParaRPr lang="en-US" sz="650" dirty="0"/>
+          </a:p>
+          <a:p>
+            <a:pPr indent="0" marL="0">
+              <a:buNone/>
+            </a:pPr>
+            <a:r>
+              <a:rPr lang="en-US" sz="650" dirty="0">
+                <a:solidFill>
+                  <a:srgbClr val="64748B"/>
+                </a:solidFill>
+                <a:latin typeface="Calibri" pitchFamily="34" charset="0"/>
+                <a:ea typeface="Calibri" pitchFamily="34" charset="-122"/>
+                <a:cs typeface="Calibri" pitchFamily="34" charset="-120"/>
+              </a:rPr>
+              <a:t>16:9 YouTube + 9:16 vertical cuts for Reels/TikTok.</a:t>
+            </a:r>
+            <a:endParaRPr lang="en-US" sz="650" dirty="0"/>
+          </a:p>
+          <a:p>
+            <a:pPr indent="0" marL="0">
+              <a:buNone/>
+            </a:pPr>
+            <a:r>
+              <a:rPr lang="en-US" sz="650" dirty="0">
+                <a:solidFill>
+                  <a:srgbClr val="64748B"/>
+                </a:solidFill>
+                <a:latin typeface="Calibri" pitchFamily="34" charset="0"/>
+                <a:ea typeface="Calibri" pitchFamily="34" charset="-122"/>
+                <a:cs typeface="Calibri" pitchFamily="34" charset="-120"/>
+              </a:rPr>
+              <a:t>Phase 4 (Month 2-3).</a:t>
+            </a:r>
+            <a:endParaRPr lang="en-US" sz="650" dirty="0"/>
+          </a:p>
+        </p:txBody>
+      </p:sp>
+      <p:sp>
+        <p:nvSpPr>
+          <p:cNvPr id="25" name="Shape 23"/>
+          <p:cNvSpPr/>
+          <p:nvPr/>
+        </p:nvSpPr>
+        <p:spPr>
+          <a:xfrm>
+            <a:off x="4663440" y="1188720"/>
+            <a:ext cx="4114800" cy="3749040"/>
+          </a:xfrm>
+          <a:prstGeom prst="rect">
+            <a:avLst/>
+          </a:prstGeom>
+          <a:solidFill>
+            <a:srgbClr val="FFFFFF"/>
+          </a:solidFill>
+          <a:ln/>
+          <a:effectLst>
+            <a:outerShdw sx="100000" sy="100000" kx="0" ky="0" algn="bl" rotWithShape="0" blurRad="76200" dist="25400" dir="8100000">
+              <a:srgbClr val="000000">
+                <a:alpha val="10000"/>
+              </a:srgbClr>
+            </a:outerShdw>
+          </a:effectLst>
+        </p:spPr>
+      </p:sp>
+      <p:sp>
+        <p:nvSpPr>
+          <p:cNvPr id="26" name="Shape 24"/>
+          <p:cNvSpPr/>
+          <p:nvPr/>
+        </p:nvSpPr>
+        <p:spPr>
+          <a:xfrm>
+            <a:off x="4663440" y="1188720"/>
+            <a:ext cx="4114800" cy="365760"/>
+          </a:xfrm>
+          <a:prstGeom prst="rect">
+            <a:avLst/>
+          </a:prstGeom>
+          <a:solidFill>
+            <a:srgbClr val="0D9488"/>
+          </a:solidFill>
+          <a:ln/>
+        </p:spPr>
+      </p:sp>
+      <p:sp>
+        <p:nvSpPr>
+          <p:cNvPr id="27" name="Text 25"/>
+          <p:cNvSpPr/>
+          <p:nvPr/>
+        </p:nvSpPr>
+        <p:spPr>
+          <a:xfrm>
+            <a:off x="4800600" y="1216152"/>
+            <a:ext cx="3840480" cy="320040"/>
+          </a:xfrm>
+          <a:prstGeom prst="rect">
+            <a:avLst/>
+          </a:prstGeom>
+          <a:noFill/>
+          <a:ln/>
+        </p:spPr>
+        <p:txBody>
+          <a:bodyPr wrap="square" lIns="0" tIns="0" rIns="0" bIns="0" rtlCol="0" anchor="ctr"/>
+          <a:lstStyle/>
+          <a:p>
+            <a:pPr indent="0" marL="0">
+              <a:buNone/>
+            </a:pPr>
+            <a:r>
+              <a:rPr lang="en-US" sz="900" b="1" dirty="0">
+                <a:solidFill>
+                  <a:srgbClr val="FFFFFF"/>
+                </a:solidFill>
+                <a:latin typeface="Arial" pitchFamily="34" charset="0"/>
+                <a:ea typeface="Arial" pitchFamily="34" charset="-122"/>
+                <a:cs typeface="Arial" pitchFamily="34" charset="-120"/>
+              </a:rPr>
+              <a:t>INTERNAL SURFACES</a:t>
+            </a:r>
+            <a:endParaRPr lang="en-US" sz="900" dirty="0"/>
+          </a:p>
+        </p:txBody>
+      </p:sp>
+      <p:sp>
+        <p:nvSpPr>
+          <p:cNvPr id="28" name="Text 26"/>
+          <p:cNvSpPr/>
+          <p:nvPr/>
+        </p:nvSpPr>
+        <p:spPr>
+          <a:xfrm>
+            <a:off x="4846320" y="1664208"/>
+            <a:ext cx="1828800" cy="146304"/>
+          </a:xfrm>
+          <a:prstGeom prst="rect">
+            <a:avLst/>
+          </a:prstGeom>
+          <a:noFill/>
+          <a:ln/>
+        </p:spPr>
+        <p:txBody>
+          <a:bodyPr wrap="square" lIns="0" tIns="0" rIns="0" bIns="0" rtlCol="0" anchor="ctr"/>
+          <a:lstStyle/>
+          <a:p>
+            <a:pPr indent="0" marL="0">
+              <a:buNone/>
+            </a:pPr>
+            <a:r>
+              <a:rPr lang="en-US" sz="800" b="1" dirty="0">
+                <a:solidFill>
+                  <a:srgbClr val="1A1F36"/>
+                </a:solidFill>
+                <a:latin typeface="Calibri" pitchFamily="34" charset="0"/>
+                <a:ea typeface="Calibri" pitchFamily="34" charset="-122"/>
+                <a:cs typeface="Calibri" pitchFamily="34" charset="-120"/>
+              </a:rPr>
+              <a:t>Index — Market Pulse</a:t>
+            </a:r>
+            <a:endParaRPr lang="en-US" sz="800" dirty="0"/>
+          </a:p>
+        </p:txBody>
+      </p:sp>
+      <p:sp>
+        <p:nvSpPr>
+          <p:cNvPr id="29" name="Text 27"/>
+          <p:cNvSpPr/>
+          <p:nvPr/>
+        </p:nvSpPr>
+        <p:spPr>
+          <a:xfrm>
+            <a:off x="6720840" y="1664208"/>
+            <a:ext cx="914400" cy="146304"/>
+          </a:xfrm>
+          <a:prstGeom prst="rect">
+            <a:avLst/>
+          </a:prstGeom>
+          <a:noFill/>
+          <a:ln/>
+        </p:spPr>
+        <p:txBody>
+          <a:bodyPr wrap="square" lIns="0" tIns="0" rIns="0" bIns="0" rtlCol="0" anchor="ctr"/>
+          <a:lstStyle/>
+          <a:p>
+            <a:pPr indent="0" marL="0">
+              <a:buNone/>
+            </a:pPr>
+            <a:r>
+              <a:rPr lang="en-US" sz="750" b="1" dirty="0">
+                <a:solidFill>
+                  <a:srgbClr val="0D9488"/>
+                </a:solidFill>
+                <a:latin typeface="Calibri" pitchFamily="34" charset="0"/>
+                <a:ea typeface="Calibri" pitchFamily="34" charset="-122"/>
+                <a:cs typeface="Calibri" pitchFamily="34" charset="-120"/>
+              </a:rPr>
+              <a:t>Daily (latest 3)</a:t>
+            </a:r>
+            <a:endParaRPr lang="en-US" sz="750" dirty="0"/>
+          </a:p>
+        </p:txBody>
+      </p:sp>
+      <p:sp>
+        <p:nvSpPr>
+          <p:cNvPr id="30" name="Text 28"/>
+          <p:cNvSpPr/>
+          <p:nvPr/>
+        </p:nvSpPr>
+        <p:spPr>
+          <a:xfrm>
+            <a:off x="4846320" y="1819656"/>
+            <a:ext cx="3749040" cy="411480"/>
+          </a:xfrm>
+          <a:prstGeom prst="rect">
+            <a:avLst/>
+          </a:prstGeom>
+          <a:noFill/>
+          <a:ln/>
+        </p:spPr>
+        <p:txBody>
+          <a:bodyPr wrap="square" lIns="0" tIns="0" rIns="0" bIns="0" rtlCol="0" anchor="ctr"/>
+          <a:lstStyle/>
+          <a:p>
+            <a:pPr indent="0" marL="0">
+              <a:buNone/>
+            </a:pPr>
+            <a:r>
+              <a:rPr lang="en-US" sz="650" dirty="0">
+                <a:solidFill>
+                  <a:srgbClr val="64748B"/>
+                </a:solidFill>
+                <a:latin typeface="Calibri" pitchFamily="34" charset="0"/>
+                <a:ea typeface="Calibri" pitchFamily="34" charset="-122"/>
+                <a:cs typeface="Calibri" pitchFamily="34" charset="-120"/>
+              </a:rPr>
+              <a:t>Headline + one-line summary + chart thumbnail.</a:t>
+            </a:r>
+            <a:endParaRPr lang="en-US" sz="650" dirty="0"/>
+          </a:p>
+          <a:p>
+            <a:pPr indent="0" marL="0">
+              <a:buNone/>
+            </a:pPr>
+            <a:r>
+              <a:rPr lang="en-US" sz="650" dirty="0">
+                <a:solidFill>
+                  <a:srgbClr val="64748B"/>
+                </a:solidFill>
+                <a:latin typeface="Calibri" pitchFamily="34" charset="0"/>
+                <a:ea typeface="Calibri" pitchFamily="34" charset="-122"/>
+                <a:cs typeface="Calibri" pitchFamily="34" charset="-120"/>
+              </a:rPr>
+              <a:t>Stories with highest social engagement get top spot.</a:t>
+            </a:r>
+            <a:endParaRPr lang="en-US" sz="650" dirty="0"/>
+          </a:p>
+          <a:p>
+            <a:pPr indent="0" marL="0">
+              <a:buNone/>
+            </a:pPr>
+            <a:r>
+              <a:rPr lang="en-US" sz="650" dirty="0">
+                <a:solidFill>
+                  <a:srgbClr val="64748B"/>
+                </a:solidFill>
+                <a:latin typeface="Calibri" pitchFamily="34" charset="0"/>
+                <a:ea typeface="Calibri" pitchFamily="34" charset="-122"/>
+                <a:cs typeface="Calibri" pitchFamily="34" charset="-120"/>
+              </a:rPr>
+              <a:t>First thing users see on login.</a:t>
+            </a:r>
+            <a:endParaRPr lang="en-US" sz="650" dirty="0"/>
+          </a:p>
+        </p:txBody>
+      </p:sp>
+      <p:sp>
+        <p:nvSpPr>
+          <p:cNvPr id="31" name="Text 29"/>
+          <p:cNvSpPr/>
+          <p:nvPr/>
+        </p:nvSpPr>
+        <p:spPr>
+          <a:xfrm>
+            <a:off x="4846320" y="2286000"/>
+            <a:ext cx="1828800" cy="146304"/>
+          </a:xfrm>
+          <a:prstGeom prst="rect">
+            <a:avLst/>
+          </a:prstGeom>
+          <a:noFill/>
+          <a:ln/>
+        </p:spPr>
+        <p:txBody>
+          <a:bodyPr wrap="square" lIns="0" tIns="0" rIns="0" bIns="0" rtlCol="0" anchor="ctr"/>
+          <a:lstStyle/>
+          <a:p>
+            <a:pPr indent="0" marL="0">
+              <a:buNone/>
+            </a:pPr>
+            <a:r>
+              <a:rPr lang="en-US" sz="800" b="1" dirty="0">
+                <a:solidFill>
+                  <a:srgbClr val="1A1F36"/>
+                </a:solidFill>
+                <a:latin typeface="Calibri" pitchFamily="34" charset="0"/>
+                <a:ea typeface="Calibri" pitchFamily="34" charset="-122"/>
+                <a:cs typeface="Calibri" pitchFamily="34" charset="-120"/>
+              </a:rPr>
+              <a:t>Data Lab — Trending</a:t>
+            </a:r>
+            <a:endParaRPr lang="en-US" sz="800" dirty="0"/>
+          </a:p>
+        </p:txBody>
+      </p:sp>
+      <p:sp>
+        <p:nvSpPr>
+          <p:cNvPr id="32" name="Text 30"/>
+          <p:cNvSpPr/>
+          <p:nvPr/>
+        </p:nvSpPr>
+        <p:spPr>
+          <a:xfrm>
+            <a:off x="6720840" y="2286000"/>
+            <a:ext cx="914400" cy="146304"/>
+          </a:xfrm>
+          <a:prstGeom prst="rect">
+            <a:avLst/>
+          </a:prstGeom>
+          <a:noFill/>
+          <a:ln/>
+        </p:spPr>
+        <p:txBody>
+          <a:bodyPr wrap="square" lIns="0" tIns="0" rIns="0" bIns="0" rtlCol="0" anchor="ctr"/>
+          <a:lstStyle/>
+          <a:p>
+            <a:pPr indent="0" marL="0">
+              <a:buNone/>
+            </a:pPr>
+            <a:r>
+              <a:rPr lang="en-US" sz="750" b="1" dirty="0">
+                <a:solidFill>
+                  <a:srgbClr val="0D9488"/>
+                </a:solidFill>
+                <a:latin typeface="Calibri" pitchFamily="34" charset="0"/>
+                <a:ea typeface="Calibri" pitchFamily="34" charset="-122"/>
+                <a:cs typeface="Calibri" pitchFamily="34" charset="-120"/>
+              </a:rPr>
+              <a:t>Daily (latest 5)</a:t>
+            </a:r>
+            <a:endParaRPr lang="en-US" sz="750" dirty="0"/>
+          </a:p>
+        </p:txBody>
+      </p:sp>
+      <p:sp>
+        <p:nvSpPr>
+          <p:cNvPr id="33" name="Text 31"/>
+          <p:cNvSpPr/>
+          <p:nvPr/>
+        </p:nvSpPr>
+        <p:spPr>
+          <a:xfrm>
+            <a:off x="4846320" y="2441448"/>
+            <a:ext cx="3749040" cy="411480"/>
+          </a:xfrm>
+          <a:prstGeom prst="rect">
+            <a:avLst/>
+          </a:prstGeom>
+          <a:noFill/>
+          <a:ln/>
+        </p:spPr>
+        <p:txBody>
+          <a:bodyPr wrap="square" lIns="0" tIns="0" rIns="0" bIns="0" rtlCol="0" anchor="ctr"/>
+          <a:lstStyle/>
+          <a:p>
+            <a:pPr indent="0" marL="0">
+              <a:buNone/>
+            </a:pPr>
+            <a:r>
+              <a:rPr lang="en-US" sz="650" dirty="0">
+                <a:solidFill>
+                  <a:srgbClr val="64748B"/>
+                </a:solidFill>
+                <a:latin typeface="Calibri" pitchFamily="34" charset="0"/>
+                <a:ea typeface="Calibri" pitchFamily="34" charset="-122"/>
+                <a:cs typeface="Calibri" pitchFamily="34" charset="-120"/>
+              </a:rPr>
+              <a:t>Card grid: headline + key stat. Category-balanced</a:t>
+            </a:r>
+            <a:endParaRPr lang="en-US" sz="650" dirty="0"/>
+          </a:p>
+          <a:p>
+            <a:pPr indent="0" marL="0">
+              <a:buNone/>
+            </a:pPr>
+            <a:r>
+              <a:rPr lang="en-US" sz="650" dirty="0">
+                <a:solidFill>
+                  <a:srgbClr val="64748B"/>
+                </a:solidFill>
+                <a:latin typeface="Calibri" pitchFamily="34" charset="0"/>
+                <a:ea typeface="Calibri" pitchFamily="34" charset="-122"/>
+                <a:cs typeface="Calibri" pitchFamily="34" charset="-120"/>
+              </a:rPr>
+              <a:t>(no 3 salary stories in a row). Drives exploration</a:t>
+            </a:r>
+            <a:endParaRPr lang="en-US" sz="650" dirty="0"/>
+          </a:p>
+          <a:p>
+            <a:pPr indent="0" marL="0">
+              <a:buNone/>
+            </a:pPr>
+            <a:r>
+              <a:rPr lang="en-US" sz="650" dirty="0">
+                <a:solidFill>
+                  <a:srgbClr val="64748B"/>
+                </a:solidFill>
+                <a:latin typeface="Calibri" pitchFamily="34" charset="0"/>
+                <a:ea typeface="Calibri" pitchFamily="34" charset="-122"/>
+                <a:cs typeface="Calibri" pitchFamily="34" charset="-120"/>
+              </a:rPr>
+              <a:t>into deeper data pages.</a:t>
+            </a:r>
+            <a:endParaRPr lang="en-US" sz="650" dirty="0"/>
+          </a:p>
+        </p:txBody>
+      </p:sp>
+      <p:sp>
+        <p:nvSpPr>
+          <p:cNvPr id="34" name="Text 32"/>
+          <p:cNvSpPr/>
+          <p:nvPr/>
+        </p:nvSpPr>
+        <p:spPr>
+          <a:xfrm>
+            <a:off x="4846320" y="2907792"/>
+            <a:ext cx="1828800" cy="146304"/>
+          </a:xfrm>
+          <a:prstGeom prst="rect">
+            <a:avLst/>
+          </a:prstGeom>
+          <a:noFill/>
+          <a:ln/>
+        </p:spPr>
+        <p:txBody>
+          <a:bodyPr wrap="square" lIns="0" tIns="0" rIns="0" bIns="0" rtlCol="0" anchor="ctr"/>
+          <a:lstStyle/>
+          <a:p>
+            <a:pPr indent="0" marL="0">
+              <a:buNone/>
+            </a:pPr>
+            <a:r>
+              <a:rPr lang="en-US" sz="800" b="1" dirty="0">
+                <a:solidFill>
+                  <a:srgbClr val="1A1F36"/>
+                </a:solidFill>
+                <a:latin typeface="Calibri" pitchFamily="34" charset="0"/>
+                <a:ea typeface="Calibri" pitchFamily="34" charset="-122"/>
+                <a:cs typeface="Calibri" pitchFamily="34" charset="-120"/>
+              </a:rPr>
+              <a:t>Dashboard Insight Cards</a:t>
+            </a:r>
+            <a:endParaRPr lang="en-US" sz="800" dirty="0"/>
+          </a:p>
+        </p:txBody>
+      </p:sp>
+      <p:sp>
+        <p:nvSpPr>
+          <p:cNvPr id="35" name="Text 33"/>
+          <p:cNvSpPr/>
+          <p:nvPr/>
+        </p:nvSpPr>
+        <p:spPr>
+          <a:xfrm>
+            <a:off x="6720840" y="2907792"/>
+            <a:ext cx="914400" cy="146304"/>
+          </a:xfrm>
+          <a:prstGeom prst="rect">
+            <a:avLst/>
+          </a:prstGeom>
+          <a:noFill/>
+          <a:ln/>
+        </p:spPr>
+        <p:txBody>
+          <a:bodyPr wrap="square" lIns="0" tIns="0" rIns="0" bIns="0" rtlCol="0" anchor="ctr"/>
+          <a:lstStyle/>
+          <a:p>
+            <a:pPr indent="0" marL="0">
+              <a:buNone/>
+            </a:pPr>
+            <a:r>
+              <a:rPr lang="en-US" sz="750" b="1" dirty="0">
+                <a:solidFill>
+                  <a:srgbClr val="0D9488"/>
+                </a:solidFill>
+                <a:latin typeface="Calibri" pitchFamily="34" charset="0"/>
+                <a:ea typeface="Calibri" pitchFamily="34" charset="-122"/>
+                <a:cs typeface="Calibri" pitchFamily="34" charset="-120"/>
+              </a:rPr>
+              <a:t>On login (2-3)</a:t>
+            </a:r>
+            <a:endParaRPr lang="en-US" sz="750" dirty="0"/>
+          </a:p>
+        </p:txBody>
+      </p:sp>
+      <p:sp>
+        <p:nvSpPr>
+          <p:cNvPr id="36" name="Text 34"/>
+          <p:cNvSpPr/>
+          <p:nvPr/>
+        </p:nvSpPr>
+        <p:spPr>
+          <a:xfrm>
+            <a:off x="4846320" y="3063240"/>
+            <a:ext cx="3749040" cy="411480"/>
+          </a:xfrm>
+          <a:prstGeom prst="rect">
+            <a:avLst/>
+          </a:prstGeom>
+          <a:noFill/>
+          <a:ln/>
+        </p:spPr>
+        <p:txBody>
+          <a:bodyPr wrap="square" lIns="0" tIns="0" rIns="0" bIns="0" rtlCol="0" anchor="ctr"/>
+          <a:lstStyle/>
+          <a:p>
+            <a:pPr indent="0" marL="0">
+              <a:buNone/>
+            </a:pPr>
+            <a:r>
+              <a:rPr lang="en-US" sz="650" dirty="0">
+                <a:solidFill>
+                  <a:srgbClr val="64748B"/>
+                </a:solidFill>
+                <a:latin typeface="Calibri" pitchFamily="34" charset="0"/>
+                <a:ea typeface="Calibri" pitchFamily="34" charset="-122"/>
+                <a:cs typeface="Calibri" pitchFamily="34" charset="-120"/>
+              </a:rPr>
+              <a:t>Compact card: headline + delta stat. Filter-aware —</a:t>
+            </a:r>
+            <a:endParaRPr lang="en-US" sz="650" dirty="0"/>
+          </a:p>
+          <a:p>
+            <a:pPr indent="0" marL="0">
+              <a:buNone/>
+            </a:pPr>
+            <a:r>
+              <a:rPr lang="en-US" sz="650" dirty="0">
+                <a:solidFill>
+                  <a:srgbClr val="64748B"/>
+                </a:solidFill>
+                <a:latin typeface="Calibri" pitchFamily="34" charset="0"/>
+                <a:ea typeface="Calibri" pitchFamily="34" charset="-122"/>
+                <a:cs typeface="Calibri" pitchFamily="34" charset="-120"/>
+              </a:rPr>
+              <a:t>user's saved filters determine which stories surface.</a:t>
+            </a:r>
+            <a:endParaRPr lang="en-US" sz="650" dirty="0"/>
+          </a:p>
+          <a:p>
+            <a:pPr indent="0" marL="0">
+              <a:buNone/>
+            </a:pPr>
+            <a:r>
+              <a:rPr lang="en-US" sz="650" dirty="0">
+                <a:solidFill>
+                  <a:srgbClr val="64748B"/>
+                </a:solidFill>
+                <a:latin typeface="Calibri" pitchFamily="34" charset="0"/>
+                <a:ea typeface="Calibri" pitchFamily="34" charset="-122"/>
+                <a:cs typeface="Calibri" pitchFamily="34" charset="-120"/>
+              </a:rPr>
+              <a:t>Most personalized touch.</a:t>
+            </a:r>
+            <a:endParaRPr lang="en-US" sz="650" dirty="0"/>
+          </a:p>
+        </p:txBody>
+      </p:sp>
+      <p:sp>
+        <p:nvSpPr>
+          <p:cNvPr id="37" name="Text 35"/>
+          <p:cNvSpPr/>
+          <p:nvPr/>
+        </p:nvSpPr>
+        <p:spPr>
+          <a:xfrm>
+            <a:off x="4846320" y="3529584"/>
+            <a:ext cx="1828800" cy="146304"/>
+          </a:xfrm>
+          <a:prstGeom prst="rect">
+            <a:avLst/>
+          </a:prstGeom>
+          <a:noFill/>
+          <a:ln/>
+        </p:spPr>
+        <p:txBody>
+          <a:bodyPr wrap="square" lIns="0" tIns="0" rIns="0" bIns="0" rtlCol="0" anchor="ctr"/>
+          <a:lstStyle/>
+          <a:p>
+            <a:pPr indent="0" marL="0">
+              <a:buNone/>
+            </a:pPr>
+            <a:r>
+              <a:rPr lang="en-US" sz="800" b="1" dirty="0">
+                <a:solidFill>
+                  <a:srgbClr val="1A1F36"/>
+                </a:solidFill>
+                <a:latin typeface="Calibri" pitchFamily="34" charset="0"/>
+                <a:ea typeface="Calibri" pitchFamily="34" charset="-122"/>
+                <a:cs typeface="Calibri" pitchFamily="34" charset="-120"/>
+              </a:rPr>
+              <a:t>Weekly Email Digest</a:t>
+            </a:r>
+            <a:endParaRPr lang="en-US" sz="800" dirty="0"/>
+          </a:p>
+        </p:txBody>
+      </p:sp>
+      <p:sp>
+        <p:nvSpPr>
+          <p:cNvPr id="38" name="Text 36"/>
+          <p:cNvSpPr/>
+          <p:nvPr/>
+        </p:nvSpPr>
+        <p:spPr>
+          <a:xfrm>
+            <a:off x="6720840" y="3529584"/>
+            <a:ext cx="914400" cy="146304"/>
+          </a:xfrm>
+          <a:prstGeom prst="rect">
+            <a:avLst/>
+          </a:prstGeom>
+          <a:noFill/>
+          <a:ln/>
+        </p:spPr>
+        <p:txBody>
+          <a:bodyPr wrap="square" lIns="0" tIns="0" rIns="0" bIns="0" rtlCol="0" anchor="ctr"/>
+          <a:lstStyle/>
+          <a:p>
+            <a:pPr indent="0" marL="0">
+              <a:buNone/>
+            </a:pPr>
+            <a:r>
+              <a:rPr lang="en-US" sz="750" b="1" dirty="0">
+                <a:solidFill>
+                  <a:srgbClr val="0D9488"/>
+                </a:solidFill>
+                <a:latin typeface="Calibri" pitchFamily="34" charset="0"/>
+                <a:ea typeface="Calibri" pitchFamily="34" charset="-122"/>
+                <a:cs typeface="Calibri" pitchFamily="34" charset="-120"/>
+              </a:rPr>
+              <a:t>Weekly (Fri)</a:t>
+            </a:r>
+            <a:endParaRPr lang="en-US" sz="750" dirty="0"/>
+          </a:p>
+        </p:txBody>
+      </p:sp>
+      <p:sp>
+        <p:nvSpPr>
+          <p:cNvPr id="39" name="Text 37"/>
+          <p:cNvSpPr/>
+          <p:nvPr/>
+        </p:nvSpPr>
+        <p:spPr>
+          <a:xfrm>
+            <a:off x="4846320" y="3685032"/>
+            <a:ext cx="3749040" cy="411480"/>
+          </a:xfrm>
+          <a:prstGeom prst="rect">
+            <a:avLst/>
+          </a:prstGeom>
+          <a:noFill/>
+          <a:ln/>
+        </p:spPr>
+        <p:txBody>
+          <a:bodyPr wrap="square" lIns="0" tIns="0" rIns="0" bIns="0" rtlCol="0" anchor="ctr"/>
+          <a:lstStyle/>
+          <a:p>
+            <a:pPr indent="0" marL="0">
+              <a:buNone/>
+            </a:pPr>
+            <a:r>
+              <a:rPr lang="en-US" sz="650" dirty="0">
+                <a:solidFill>
+                  <a:srgbClr val="64748B"/>
+                </a:solidFill>
+                <a:latin typeface="Calibri" pitchFamily="34" charset="0"/>
+                <a:ea typeface="Calibri" pitchFamily="34" charset="-122"/>
+                <a:cs typeface="Calibri" pitchFamily="34" charset="-120"/>
+              </a:rPr>
+              <a:t>Top 3 by combined score: social shares + internal</a:t>
+            </a:r>
+            <a:endParaRPr lang="en-US" sz="650" dirty="0"/>
+          </a:p>
+          <a:p>
+            <a:pPr indent="0" marL="0">
+              <a:buNone/>
+            </a:pPr>
+            <a:r>
+              <a:rPr lang="en-US" sz="650" dirty="0">
+                <a:solidFill>
+                  <a:srgbClr val="64748B"/>
+                </a:solidFill>
+                <a:latin typeface="Calibri" pitchFamily="34" charset="0"/>
+                <a:ea typeface="Calibri" pitchFamily="34" charset="-122"/>
+                <a:cs typeface="Calibri" pitchFamily="34" charset="-120"/>
+              </a:rPr>
+              <a:t>click-through. "What this means for your search."</a:t>
+            </a:r>
+            <a:endParaRPr lang="en-US" sz="650" dirty="0"/>
+          </a:p>
+          <a:p>
+            <a:pPr indent="0" marL="0">
+              <a:buNone/>
+            </a:pPr>
+            <a:r>
+              <a:rPr lang="en-US" sz="650" dirty="0">
+                <a:solidFill>
+                  <a:srgbClr val="64748B"/>
+                </a:solidFill>
+                <a:latin typeface="Calibri" pitchFamily="34" charset="0"/>
+                <a:ea typeface="Calibri" pitchFamily="34" charset="-122"/>
+                <a:cs typeface="Calibri" pitchFamily="34" charset="-120"/>
+              </a:rPr>
+              <a:t>Same Resend send as external newsletter.</a:t>
+            </a:r>
+            <a:endParaRPr lang="en-US" sz="650" dirty="0"/>
+          </a:p>
+        </p:txBody>
+      </p:sp>
+      <p:sp>
+        <p:nvSpPr>
+          <p:cNvPr id="40" name="Text 38"/>
+          <p:cNvSpPr/>
+          <p:nvPr/>
+        </p:nvSpPr>
+        <p:spPr>
+          <a:xfrm>
+            <a:off x="4846320" y="4151376"/>
+            <a:ext cx="1828800" cy="146304"/>
+          </a:xfrm>
+          <a:prstGeom prst="rect">
+            <a:avLst/>
+          </a:prstGeom>
+          <a:noFill/>
+          <a:ln/>
+        </p:spPr>
+        <p:txBody>
+          <a:bodyPr wrap="square" lIns="0" tIns="0" rIns="0" bIns="0" rtlCol="0" anchor="ctr"/>
+          <a:lstStyle/>
+          <a:p>
+            <a:pPr indent="0" marL="0">
+              <a:buNone/>
+            </a:pPr>
+            <a:r>
+              <a:rPr lang="en-US" sz="800" b="1" dirty="0">
+                <a:solidFill>
+                  <a:srgbClr val="1A1F36"/>
+                </a:solidFill>
+                <a:latin typeface="Calibri" pitchFamily="34" charset="0"/>
+                <a:ea typeface="Calibri" pitchFamily="34" charset="-122"/>
+                <a:cs typeface="Calibri" pitchFamily="34" charset="-120"/>
+              </a:rPr>
+              <a:t>Blog Archive</a:t>
+            </a:r>
+            <a:endParaRPr lang="en-US" sz="800" dirty="0"/>
+          </a:p>
+        </p:txBody>
+      </p:sp>
+      <p:sp>
+        <p:nvSpPr>
+          <p:cNvPr id="41" name="Text 39"/>
+          <p:cNvSpPr/>
+          <p:nvPr/>
+        </p:nvSpPr>
+        <p:spPr>
+          <a:xfrm>
+            <a:off x="6720840" y="4151376"/>
+            <a:ext cx="914400" cy="146304"/>
+          </a:xfrm>
+          <a:prstGeom prst="rect">
+            <a:avLst/>
+          </a:prstGeom>
+          <a:noFill/>
+          <a:ln/>
+        </p:spPr>
+        <p:txBody>
+          <a:bodyPr wrap="square" lIns="0" tIns="0" rIns="0" bIns="0" rtlCol="0" anchor="ctr"/>
+          <a:lstStyle/>
+          <a:p>
+            <a:pPr indent="0" marL="0">
+              <a:buNone/>
+            </a:pPr>
+            <a:r>
+              <a:rPr lang="en-US" sz="750" b="1" dirty="0">
+                <a:solidFill>
+                  <a:srgbClr val="0D9488"/>
+                </a:solidFill>
+                <a:latin typeface="Calibri" pitchFamily="34" charset="0"/>
+                <a:ea typeface="Calibri" pitchFamily="34" charset="-122"/>
+                <a:cs typeface="Calibri" pitchFamily="34" charset="-120"/>
+              </a:rPr>
+              <a:t>Continuous</a:t>
+            </a:r>
+            <a:endParaRPr lang="en-US" sz="750" dirty="0"/>
+          </a:p>
+        </p:txBody>
+      </p:sp>
+      <p:sp>
+        <p:nvSpPr>
+          <p:cNvPr id="42" name="Text 40"/>
+          <p:cNvSpPr/>
+          <p:nvPr/>
+        </p:nvSpPr>
+        <p:spPr>
+          <a:xfrm>
+            <a:off x="4846320" y="4306824"/>
+            <a:ext cx="3749040" cy="411480"/>
+          </a:xfrm>
+          <a:prstGeom prst="rect">
+            <a:avLst/>
+          </a:prstGeom>
+          <a:noFill/>
+          <a:ln/>
+        </p:spPr>
+        <p:txBody>
+          <a:bodyPr wrap="square" lIns="0" tIns="0" rIns="0" bIns="0" rtlCol="0" anchor="ctr"/>
+          <a:lstStyle/>
+          <a:p>
+            <a:pPr indent="0" marL="0">
+              <a:buNone/>
+            </a:pPr>
+            <a:r>
+              <a:rPr lang="en-US" sz="650" dirty="0">
+                <a:solidFill>
+                  <a:srgbClr val="64748B"/>
+                </a:solidFill>
+                <a:latin typeface="Calibri" pitchFamily="34" charset="0"/>
+                <a:ea typeface="Calibri" pitchFamily="34" charset="-122"/>
+                <a:cs typeface="Calibri" pitchFamily="34" charset="-120"/>
+              </a:rPr>
+              <a:t>Full article with inline charts. Canonical URL —</a:t>
+            </a:r>
+            <a:endParaRPr lang="en-US" sz="650" dirty="0"/>
+          </a:p>
+          <a:p>
+            <a:pPr indent="0" marL="0">
+              <a:buNone/>
+            </a:pPr>
+            <a:r>
+              <a:rPr lang="en-US" sz="650" dirty="0">
+                <a:solidFill>
+                  <a:srgbClr val="64748B"/>
+                </a:solidFill>
+                <a:latin typeface="Calibri" pitchFamily="34" charset="0"/>
+                <a:ea typeface="Calibri" pitchFamily="34" charset="-122"/>
+                <a:cs typeface="Calibri" pitchFamily="34" charset="-120"/>
+              </a:rPr>
+              <a:t>all external links point here for SEO authority.</a:t>
+            </a:r>
+            <a:endParaRPr lang="en-US" sz="650" dirty="0"/>
+          </a:p>
+          <a:p>
+            <a:pPr indent="0" marL="0">
+              <a:buNone/>
+            </a:pPr>
+            <a:r>
+              <a:rPr lang="en-US" sz="650" dirty="0">
+                <a:solidFill>
+                  <a:srgbClr val="64748B"/>
+                </a:solidFill>
+                <a:latin typeface="Calibri" pitchFamily="34" charset="0"/>
+                <a:ea typeface="Calibri" pitchFamily="34" charset="-122"/>
+                <a:cs typeface="Calibri" pitchFamily="34" charset="-120"/>
+              </a:rPr>
+              <a:t>Searchable, browsable by category.</a:t>
+            </a:r>
+            <a:endParaRPr lang="en-US" sz="650" dirty="0"/>
+          </a:p>
+        </p:txBody>
+      </p:sp>
+      <p:sp>
+        <p:nvSpPr>
+          <p:cNvPr id="43" name="Text 41"/>
+          <p:cNvSpPr/>
+          <p:nvPr/>
+        </p:nvSpPr>
+        <p:spPr>
+          <a:xfrm>
+            <a:off x="548640" y="4754880"/>
+            <a:ext cx="8046720" cy="274320"/>
+          </a:xfrm>
+          <a:prstGeom prst="rect">
+            <a:avLst/>
+          </a:prstGeom>
+          <a:noFill/>
+          <a:ln/>
+        </p:spPr>
+        <p:txBody>
+          <a:bodyPr wrap="square" lIns="0" tIns="0" rIns="0" bIns="0" rtlCol="0" anchor="ctr"/>
+          <a:lstStyle/>
+          <a:p>
+            <a:pPr indent="0" marL="0">
+              <a:buNone/>
+            </a:pPr>
+            <a:r>
+              <a:rPr lang="en-US" sz="900" i="1" dirty="0">
+                <a:solidFill>
+                  <a:srgbClr val="64748B"/>
+                </a:solidFill>
+                <a:latin typeface="Calibri" pitchFamily="34" charset="0"/>
+                <a:ea typeface="Calibri" pitchFamily="34" charset="-122"/>
+                <a:cs typeface="Calibri" pitchFamily="34" charset="-120"/>
+              </a:rPr>
+              <a:t>One editorial engine, two audiences: external channels build brand + backlinks + flywheel. Internal surfaces prove product value + drive retention + feed survey research.</a:t>
+            </a:r>
+            <a:endParaRPr lang="en-US" sz="900" dirty="0"/>
+          </a:p>
+        </p:txBody>
+      </p:sp>
+    </p:spTree>
+  </p:cSld>
+  <p:clrMapOvr>
+    <a:masterClrMapping/>
+  </p:clrMapOvr>
+</p:sld>
+</file>
+
+<file path=ppt/slides/slide16.xml><?xml version="1.0" encoding="utf-8"?>
+<p:sld xmlns:a="http://schemas.openxmlformats.org/drawingml/2006/main" xmlns:r="http://schemas.openxmlformats.org/officeDocument/2006/relationships" xmlns:p="http://schemas.openxmlformats.org/presentationml/2006/main">
+  <p:cSld name="Slide 16">
+    <p:bg>
+      <p:bgPr>
+        <a:solidFill>
+          <a:srgbClr val="F8FAFC"/>
+        </a:solidFill>
+      </p:bgPr>
+    </p:bg>
+    <p:spTree>
+      <p:nvGrpSpPr>
+        <p:cNvPr id="1" name=""/>
+        <p:cNvGrpSpPr/>
+        <p:nvPr/>
+      </p:nvGrpSpPr>
+      <p:grpSpPr>
+        <a:xfrm>
+          <a:off x="0" y="0"/>
+          <a:ext cx="0" cy="0"/>
+          <a:chOff x="0" y="0"/>
+          <a:chExt cx="0" cy="0"/>
+        </a:xfrm>
+      </p:grpSpPr>
+      <p:sp>
+        <p:nvSpPr>
+          <p:cNvPr id="2" name="Text 0"/>
+          <p:cNvSpPr/>
+          <p:nvPr/>
+        </p:nvSpPr>
+        <p:spPr>
+          <a:xfrm>
+            <a:off x="731520" y="365760"/>
+            <a:ext cx="7315200" cy="365760"/>
+          </a:xfrm>
+          <a:prstGeom prst="rect">
+            <a:avLst/>
+          </a:prstGeom>
+          <a:noFill/>
+          <a:ln/>
+        </p:spPr>
+        <p:txBody>
+          <a:bodyPr wrap="square" lIns="0" tIns="0" rIns="0" bIns="0" rtlCol="0" anchor="ctr"/>
+          <a:lstStyle/>
+          <a:p>
+            <a:pPr indent="0" marL="0">
+              <a:buNone/>
+            </a:pPr>
+            <a:r>
+              <a:rPr lang="en-US" sz="1100" b="1" spc="400" kern="0" dirty="0">
+                <a:solidFill>
+                  <a:srgbClr val="2563EB"/>
+                </a:solidFill>
+                <a:latin typeface="Arial" pitchFamily="34" charset="0"/>
+                <a:ea typeface="Arial" pitchFamily="34" charset="-122"/>
+                <a:cs typeface="Arial" pitchFamily="34" charset="-120"/>
+              </a:rPr>
+              <a:t>BUILD SEQUENCE</a:t>
+            </a:r>
+            <a:endParaRPr lang="en-US" sz="1100" dirty="0"/>
+          </a:p>
+        </p:txBody>
+      </p:sp>
+      <p:sp>
+        <p:nvSpPr>
+          <p:cNvPr id="3" name="Text 1"/>
+          <p:cNvSpPr/>
+          <p:nvPr/>
+        </p:nvSpPr>
+        <p:spPr>
+          <a:xfrm>
+            <a:off x="731520" y="731520"/>
+            <a:ext cx="7315200" cy="457200"/>
+          </a:xfrm>
+          <a:prstGeom prst="rect">
+            <a:avLst/>
+          </a:prstGeom>
+          <a:noFill/>
+          <a:ln/>
+        </p:spPr>
+        <p:txBody>
+          <a:bodyPr wrap="square" lIns="0" tIns="0" rIns="0" bIns="0" rtlCol="0" anchor="ctr"/>
+          <a:lstStyle/>
+          <a:p>
+            <a:pPr indent="0" marL="0">
+              <a:buNone/>
+            </a:pPr>
+            <a:r>
+              <a:rPr lang="en-US" sz="2600" dirty="0">
+                <a:solidFill>
+                  <a:srgbClr val="1A1F36"/>
+                </a:solidFill>
+                <a:latin typeface="Georgia" pitchFamily="34" charset="0"/>
+                <a:ea typeface="Georgia" pitchFamily="34" charset="-122"/>
+                <a:cs typeface="Georgia" pitchFamily="34" charset="-120"/>
+              </a:rPr>
+              <a:t>Phased Rollout — Content Engine + Distribution</a:t>
+            </a:r>
+            <a:endParaRPr lang="en-US" sz="2600" dirty="0"/>
+          </a:p>
+        </p:txBody>
+      </p:sp>
+      <p:sp>
+        <p:nvSpPr>
+          <p:cNvPr id="4" name="Shape 2"/>
+          <p:cNvSpPr/>
+          <p:nvPr/>
+        </p:nvSpPr>
+        <p:spPr>
+          <a:xfrm>
+            <a:off x="548640" y="1371600"/>
+            <a:ext cx="8046720" cy="640080"/>
+          </a:xfrm>
+          <a:prstGeom prst="rect">
+            <a:avLst/>
+          </a:prstGeom>
+          <a:solidFill>
+            <a:srgbClr val="FFFFFF"/>
+          </a:solidFill>
+          <a:ln/>
+          <a:effectLst>
+            <a:outerShdw sx="100000" sy="100000" kx="0" ky="0" algn="bl" rotWithShape="0" blurRad="76200" dist="25400" dir="8100000">
+              <a:srgbClr val="000000">
+                <a:alpha val="10000"/>
+              </a:srgbClr>
+            </a:outerShdw>
+          </a:effectLst>
+        </p:spPr>
+      </p:sp>
+      <p:sp>
+        <p:nvSpPr>
+          <p:cNvPr id="5" name="Shape 3"/>
+          <p:cNvSpPr/>
+          <p:nvPr/>
+        </p:nvSpPr>
+        <p:spPr>
+          <a:xfrm>
+            <a:off x="548640" y="1371600"/>
+            <a:ext cx="54864" cy="640080"/>
+          </a:xfrm>
+          <a:prstGeom prst="rect">
+            <a:avLst/>
+          </a:prstGeom>
+          <a:solidFill>
+            <a:srgbClr val="10B981"/>
+          </a:solidFill>
+          <a:ln/>
+        </p:spPr>
+      </p:sp>
+      <p:sp>
+        <p:nvSpPr>
+          <p:cNvPr id="6" name="Text 4"/>
+          <p:cNvSpPr/>
+          <p:nvPr/>
+        </p:nvSpPr>
+        <p:spPr>
+          <a:xfrm>
+            <a:off x="731520" y="1371600"/>
+            <a:ext cx="731520" cy="320040"/>
+          </a:xfrm>
+          <a:prstGeom prst="rect">
+            <a:avLst/>
+          </a:prstGeom>
+          <a:noFill/>
+          <a:ln/>
+        </p:spPr>
+        <p:txBody>
+          <a:bodyPr wrap="square" lIns="0" tIns="0" rIns="0" bIns="0" rtlCol="0" anchor="ctr"/>
+          <a:lstStyle/>
+          <a:p>
+            <a:pPr indent="0" marL="0">
+              <a:buNone/>
+            </a:pPr>
+            <a:r>
+              <a:rPr lang="en-US" sz="900" b="1" dirty="0">
+                <a:solidFill>
+                  <a:srgbClr val="10B981"/>
+                </a:solidFill>
+                <a:latin typeface="Arial" pitchFamily="34" charset="0"/>
+                <a:ea typeface="Arial" pitchFamily="34" charset="-122"/>
+                <a:cs typeface="Arial" pitchFamily="34" charset="-120"/>
+              </a:rPr>
+              <a:t>PHASE 1</a:t>
+            </a:r>
+            <a:endParaRPr lang="en-US" sz="900" dirty="0"/>
+          </a:p>
+        </p:txBody>
+      </p:sp>
+      <p:sp>
+        <p:nvSpPr>
+          <p:cNvPr id="7" name="Text 5"/>
+          <p:cNvSpPr/>
+          <p:nvPr/>
+        </p:nvSpPr>
+        <p:spPr>
+          <a:xfrm>
+            <a:off x="731520" y="1664208"/>
+            <a:ext cx="731520" cy="274320"/>
+          </a:xfrm>
+          <a:prstGeom prst="rect">
+            <a:avLst/>
+          </a:prstGeom>
+          <a:noFill/>
+          <a:ln/>
+        </p:spPr>
+        <p:txBody>
+          <a:bodyPr wrap="square" lIns="0" tIns="0" rIns="0" bIns="0" rtlCol="0" anchor="ctr"/>
+          <a:lstStyle/>
+          <a:p>
+            <a:pPr indent="0" marL="0">
+              <a:buNone/>
+            </a:pPr>
+            <a:r>
+              <a:rPr lang="en-US" sz="800" dirty="0">
+                <a:solidFill>
+                  <a:srgbClr val="64748B"/>
+                </a:solidFill>
+                <a:latin typeface="Calibri" pitchFamily="34" charset="0"/>
+                <a:ea typeface="Calibri" pitchFamily="34" charset="-122"/>
+                <a:cs typeface="Calibri" pitchFamily="34" charset="-120"/>
+              </a:rPr>
+              <a:t>Pre-Launch</a:t>
+            </a:r>
+            <a:endParaRPr lang="en-US" sz="800" dirty="0"/>
+          </a:p>
+        </p:txBody>
+      </p:sp>
+      <p:sp>
+        <p:nvSpPr>
+          <p:cNvPr id="8" name="Text 6"/>
+          <p:cNvSpPr/>
+          <p:nvPr/>
+        </p:nvSpPr>
+        <p:spPr>
+          <a:xfrm>
+            <a:off x="1554480" y="1371600"/>
+            <a:ext cx="731520" cy="640080"/>
+          </a:xfrm>
+          <a:prstGeom prst="rect">
+            <a:avLst/>
+          </a:prstGeom>
+          <a:noFill/>
+          <a:ln/>
+        </p:spPr>
+        <p:txBody>
+          <a:bodyPr wrap="square" lIns="0" tIns="0" rIns="0" bIns="0" rtlCol="0" anchor="ctr"/>
+          <a:lstStyle/>
+          <a:p>
+            <a:pPr indent="0" marL="0">
+              <a:buNone/>
+            </a:pPr>
+            <a:r>
+              <a:rPr lang="en-US" sz="1000" b="1" dirty="0">
+                <a:solidFill>
+                  <a:srgbClr val="1A1F36"/>
+                </a:solidFill>
+                <a:latin typeface="Georgia" pitchFamily="34" charset="0"/>
+                <a:ea typeface="Georgia" pitchFamily="34" charset="-122"/>
+                <a:cs typeface="Georgia" pitchFamily="34" charset="-120"/>
+              </a:rPr>
+              <a:t>5-7 days</a:t>
+            </a:r>
+            <a:endParaRPr lang="en-US" sz="1000" dirty="0"/>
+          </a:p>
+        </p:txBody>
+      </p:sp>
+      <p:sp>
+        <p:nvSpPr>
+          <p:cNvPr id="9" name="Text 7"/>
+          <p:cNvSpPr/>
+          <p:nvPr/>
+        </p:nvSpPr>
+        <p:spPr>
+          <a:xfrm>
+            <a:off x="2377440" y="1417320"/>
+            <a:ext cx="3657600" cy="548640"/>
+          </a:xfrm>
+          <a:prstGeom prst="rect">
+            <a:avLst/>
+          </a:prstGeom>
+          <a:noFill/>
+          <a:ln/>
+        </p:spPr>
+        <p:txBody>
+          <a:bodyPr wrap="square" lIns="0" tIns="0" rIns="0" bIns="0" rtlCol="0" anchor="ctr"/>
+          <a:lstStyle/>
+          <a:p>
+            <a:pPr indent="0" marL="0">
+              <a:buNone/>
+            </a:pPr>
+            <a:r>
+              <a:rPr lang="en-US" sz="800" dirty="0">
+                <a:solidFill>
+                  <a:srgbClr val="334155"/>
+                </a:solidFill>
+                <a:latin typeface="Calibri" pitchFamily="34" charset="0"/>
+                <a:ea typeface="Calibri" pitchFamily="34" charset="-122"/>
+                <a:cs typeface="Calibri" pitchFamily="34" charset="-120"/>
+              </a:rPr>
+              <a:t>Evergreen SEO infrastructure</a:t>
+            </a:r>
+            <a:endParaRPr lang="en-US" sz="800" dirty="0"/>
+          </a:p>
+          <a:p>
+            <a:pPr indent="0" marL="0">
+              <a:buNone/>
+            </a:pPr>
+            <a:r>
+              <a:rPr lang="en-US" sz="800" dirty="0">
+                <a:solidFill>
+                  <a:srgbClr val="334155"/>
+                </a:solidFill>
+                <a:latin typeface="Calibri" pitchFamily="34" charset="0"/>
+                <a:ea typeface="Calibri" pitchFamily="34" charset="-122"/>
+                <a:cs typeface="Calibri" pitchFamily="34" charset="-120"/>
+              </a:rPr>
+              <a:t>Trend page template engine</a:t>
+            </a:r>
+            <a:endParaRPr lang="en-US" sz="800" dirty="0"/>
+          </a:p>
+          <a:p>
+            <a:pPr indent="0" marL="0">
+              <a:buNone/>
+            </a:pPr>
+            <a:r>
+              <a:rPr lang="en-US" sz="800" dirty="0">
+                <a:solidFill>
+                  <a:srgbClr val="334155"/>
+                </a:solidFill>
+                <a:latin typeface="Calibri" pitchFamily="34" charset="0"/>
+                <a:ea typeface="Calibri" pitchFamily="34" charset="-122"/>
+                <a:cs typeface="Calibri" pitchFamily="34" charset="-120"/>
+              </a:rPr>
+              <a:t>Jobs by Location page</a:t>
+            </a:r>
+            <a:endParaRPr lang="en-US" sz="800" dirty="0"/>
+          </a:p>
+          <a:p>
+            <a:pPr indent="0" marL="0">
+              <a:buNone/>
+            </a:pPr>
+            <a:r>
+              <a:rPr lang="en-US" sz="800" dirty="0">
+                <a:solidFill>
+                  <a:srgbClr val="334155"/>
+                </a:solidFill>
+                <a:latin typeface="Calibri" pitchFamily="34" charset="0"/>
+                <a:ea typeface="Calibri" pitchFamily="34" charset="-122"/>
+                <a:cs typeface="Calibri" pitchFamily="34" charset="-120"/>
+              </a:rPr>
+              <a:t>First 10 metro comparison pages</a:t>
+            </a:r>
+            <a:endParaRPr lang="en-US" sz="800" dirty="0"/>
+          </a:p>
+          <a:p>
+            <a:pPr indent="0" marL="0">
+              <a:buNone/>
+            </a:pPr>
+            <a:r>
+              <a:rPr lang="en-US" sz="800" dirty="0">
+                <a:solidFill>
+                  <a:srgbClr val="334155"/>
+                </a:solidFill>
+                <a:latin typeface="Calibri" pitchFamily="34" charset="0"/>
+                <a:ea typeface="Calibri" pitchFamily="34" charset="-122"/>
+                <a:cs typeface="Calibri" pitchFamily="34" charset="-120"/>
+              </a:rPr>
+              <a:t>DataForSEO keyword validation</a:t>
+            </a:r>
+            <a:endParaRPr lang="en-US" sz="800" dirty="0"/>
+          </a:p>
+        </p:txBody>
+      </p:sp>
+      <p:sp>
+        <p:nvSpPr>
+          <p:cNvPr id="10" name="Text 8"/>
+          <p:cNvSpPr/>
+          <p:nvPr/>
+        </p:nvSpPr>
+        <p:spPr>
+          <a:xfrm>
+            <a:off x="6400800" y="1417320"/>
+            <a:ext cx="2011680" cy="548640"/>
+          </a:xfrm>
+          <a:prstGeom prst="rect">
+            <a:avLst/>
+          </a:prstGeom>
+          <a:noFill/>
+          <a:ln/>
+        </p:spPr>
+        <p:txBody>
+          <a:bodyPr wrap="square" lIns="0" tIns="0" rIns="0" bIns="0" rtlCol="0" anchor="ctr"/>
+          <a:lstStyle/>
+          <a:p>
+            <a:pPr indent="0" marL="0">
+              <a:buNone/>
+            </a:pPr>
+            <a:r>
+              <a:rPr lang="en-US" sz="800" dirty="0">
+                <a:solidFill>
+                  <a:srgbClr val="64748B"/>
+                </a:solidFill>
+                <a:latin typeface="Calibri" pitchFamily="34" charset="0"/>
+                <a:ea typeface="Calibri" pitchFamily="34" charset="-122"/>
+                <a:cs typeface="Calibri" pitchFamily="34" charset="-120"/>
+              </a:rPr>
+              <a:t>Pod 1 specs</a:t>
+            </a:r>
+            <a:endParaRPr lang="en-US" sz="800" dirty="0"/>
+          </a:p>
+          <a:p>
+            <a:pPr indent="0" marL="0">
+              <a:buNone/>
+            </a:pPr>
+            <a:r>
+              <a:rPr lang="en-US" sz="800" dirty="0">
+                <a:solidFill>
+                  <a:srgbClr val="64748B"/>
+                </a:solidFill>
+                <a:latin typeface="Calibri" pitchFamily="34" charset="0"/>
+                <a:ea typeface="Calibri" pitchFamily="34" charset="-122"/>
+                <a:cs typeface="Calibri" pitchFamily="34" charset="-120"/>
+              </a:rPr>
+              <a:t>Pod 2 builds</a:t>
+            </a:r>
+            <a:endParaRPr lang="en-US" sz="800" dirty="0"/>
+          </a:p>
+        </p:txBody>
+      </p:sp>
+      <p:sp>
+        <p:nvSpPr>
+          <p:cNvPr id="11" name="Shape 9"/>
+          <p:cNvSpPr/>
+          <p:nvPr/>
+        </p:nvSpPr>
+        <p:spPr>
+          <a:xfrm>
+            <a:off x="548640" y="2084832"/>
+            <a:ext cx="8046720" cy="640080"/>
+          </a:xfrm>
+          <a:prstGeom prst="rect">
+            <a:avLst/>
+          </a:prstGeom>
+          <a:solidFill>
+            <a:srgbClr val="FFFFFF"/>
+          </a:solidFill>
+          <a:ln/>
+          <a:effectLst>
+            <a:outerShdw sx="100000" sy="100000" kx="0" ky="0" algn="bl" rotWithShape="0" blurRad="76200" dist="25400" dir="8100000">
+              <a:srgbClr val="000000">
+                <a:alpha val="10000"/>
+              </a:srgbClr>
+            </a:outerShdw>
+          </a:effectLst>
+        </p:spPr>
+      </p:sp>
+      <p:sp>
+        <p:nvSpPr>
+          <p:cNvPr id="12" name="Shape 10"/>
+          <p:cNvSpPr/>
+          <p:nvPr/>
+        </p:nvSpPr>
+        <p:spPr>
+          <a:xfrm>
+            <a:off x="548640" y="2084832"/>
+            <a:ext cx="54864" cy="640080"/>
+          </a:xfrm>
+          <a:prstGeom prst="rect">
+            <a:avLst/>
+          </a:prstGeom>
+          <a:solidFill>
+            <a:srgbClr val="2563EB"/>
+          </a:solidFill>
+          <a:ln/>
+        </p:spPr>
+      </p:sp>
+      <p:sp>
+        <p:nvSpPr>
+          <p:cNvPr id="13" name="Text 11"/>
+          <p:cNvSpPr/>
+          <p:nvPr/>
+        </p:nvSpPr>
+        <p:spPr>
+          <a:xfrm>
+            <a:off x="731520" y="2084832"/>
+            <a:ext cx="731520" cy="320040"/>
+          </a:xfrm>
+          <a:prstGeom prst="rect">
+            <a:avLst/>
+          </a:prstGeom>
+          <a:noFill/>
+          <a:ln/>
+        </p:spPr>
+        <p:txBody>
+          <a:bodyPr wrap="square" lIns="0" tIns="0" rIns="0" bIns="0" rtlCol="0" anchor="ctr"/>
+          <a:lstStyle/>
+          <a:p>
+            <a:pPr indent="0" marL="0">
+              <a:buNone/>
+            </a:pPr>
+            <a:r>
+              <a:rPr lang="en-US" sz="900" b="1" dirty="0">
+                <a:solidFill>
+                  <a:srgbClr val="2563EB"/>
+                </a:solidFill>
+                <a:latin typeface="Arial" pitchFamily="34" charset="0"/>
+                <a:ea typeface="Arial" pitchFamily="34" charset="-122"/>
+                <a:cs typeface="Arial" pitchFamily="34" charset="-120"/>
+              </a:rPr>
+              <a:t>PHASE 2</a:t>
+            </a:r>
+            <a:endParaRPr lang="en-US" sz="900" dirty="0"/>
+          </a:p>
+        </p:txBody>
+      </p:sp>
+      <p:sp>
+        <p:nvSpPr>
+          <p:cNvPr id="14" name="Text 12"/>
+          <p:cNvSpPr/>
+          <p:nvPr/>
+        </p:nvSpPr>
+        <p:spPr>
+          <a:xfrm>
+            <a:off x="731520" y="2377440"/>
+            <a:ext cx="731520" cy="274320"/>
+          </a:xfrm>
+          <a:prstGeom prst="rect">
+            <a:avLst/>
+          </a:prstGeom>
+          <a:noFill/>
+          <a:ln/>
+        </p:spPr>
+        <p:txBody>
+          <a:bodyPr wrap="square" lIns="0" tIns="0" rIns="0" bIns="0" rtlCol="0" anchor="ctr"/>
+          <a:lstStyle/>
+          <a:p>
+            <a:pPr indent="0" marL="0">
+              <a:buNone/>
+            </a:pPr>
+            <a:r>
+              <a:rPr lang="en-US" sz="800" dirty="0">
+                <a:solidFill>
+                  <a:srgbClr val="64748B"/>
+                </a:solidFill>
+                <a:latin typeface="Calibri" pitchFamily="34" charset="0"/>
+                <a:ea typeface="Calibri" pitchFamily="34" charset="-122"/>
+                <a:cs typeface="Calibri" pitchFamily="34" charset="-120"/>
+              </a:rPr>
+              <a:t>Month 1</a:t>
+            </a:r>
+            <a:endParaRPr lang="en-US" sz="800" dirty="0"/>
+          </a:p>
+        </p:txBody>
+      </p:sp>
+      <p:sp>
+        <p:nvSpPr>
+          <p:cNvPr id="15" name="Text 13"/>
+          <p:cNvSpPr/>
+          <p:nvPr/>
+        </p:nvSpPr>
+        <p:spPr>
+          <a:xfrm>
+            <a:off x="1554480" y="2084832"/>
+            <a:ext cx="731520" cy="640080"/>
+          </a:xfrm>
+          <a:prstGeom prst="rect">
+            <a:avLst/>
+          </a:prstGeom>
+          <a:noFill/>
+          <a:ln/>
+        </p:spPr>
+        <p:txBody>
+          <a:bodyPr wrap="square" lIns="0" tIns="0" rIns="0" bIns="0" rtlCol="0" anchor="ctr"/>
+          <a:lstStyle/>
+          <a:p>
+            <a:pPr indent="0" marL="0">
+              <a:buNone/>
+            </a:pPr>
+            <a:r>
+              <a:rPr lang="en-US" sz="1000" b="1" dirty="0">
+                <a:solidFill>
+                  <a:srgbClr val="1A1F36"/>
+                </a:solidFill>
+                <a:latin typeface="Georgia" pitchFamily="34" charset="0"/>
+                <a:ea typeface="Georgia" pitchFamily="34" charset="-122"/>
+                <a:cs typeface="Georgia" pitchFamily="34" charset="-120"/>
+              </a:rPr>
+              <a:t>5-7 days</a:t>
+            </a:r>
+            <a:endParaRPr lang="en-US" sz="1000" dirty="0"/>
+          </a:p>
+        </p:txBody>
+      </p:sp>
+      <p:sp>
+        <p:nvSpPr>
+          <p:cNvPr id="16" name="Text 14"/>
+          <p:cNvSpPr/>
+          <p:nvPr/>
+        </p:nvSpPr>
+        <p:spPr>
+          <a:xfrm>
+            <a:off x="2377440" y="2130552"/>
+            <a:ext cx="3657600" cy="548640"/>
+          </a:xfrm>
+          <a:prstGeom prst="rect">
+            <a:avLst/>
+          </a:prstGeom>
+          <a:noFill/>
+          <a:ln/>
+        </p:spPr>
+        <p:txBody>
+          <a:bodyPr wrap="square" lIns="0" tIns="0" rIns="0" bIns="0" rtlCol="0" anchor="ctr"/>
+          <a:lstStyle/>
+          <a:p>
+            <a:pPr indent="0" marL="0">
+              <a:buNone/>
+            </a:pPr>
+            <a:r>
+              <a:rPr lang="en-US" sz="800" dirty="0">
+                <a:solidFill>
+                  <a:srgbClr val="334155"/>
+                </a:solidFill>
+                <a:latin typeface="Calibri" pitchFamily="34" charset="0"/>
+                <a:ea typeface="Calibri" pitchFamily="34" charset="-122"/>
+                <a:cs typeface="Calibri" pitchFamily="34" charset="-120"/>
+              </a:rPr>
+              <a:t>Editorial engine core</a:t>
+            </a:r>
+            <a:endParaRPr lang="en-US" sz="800" dirty="0"/>
+          </a:p>
+          <a:p>
+            <a:pPr indent="0" marL="0">
+              <a:buNone/>
+            </a:pPr>
+            <a:r>
+              <a:rPr lang="en-US" sz="800" dirty="0">
+                <a:solidFill>
+                  <a:srgbClr val="334155"/>
+                </a:solidFill>
+                <a:latin typeface="Calibri" pitchFamily="34" charset="0"/>
+                <a:ea typeface="Calibri" pitchFamily="34" charset="-122"/>
+                <a:cs typeface="Calibri" pitchFamily="34" charset="-120"/>
+              </a:rPr>
+              <a:t>Anomaly detection Edge Function</a:t>
+            </a:r>
+            <a:endParaRPr lang="en-US" sz="800" dirty="0"/>
+          </a:p>
+          <a:p>
+            <a:pPr indent="0" marL="0">
+              <a:buNone/>
+            </a:pPr>
+            <a:r>
+              <a:rPr lang="en-US" sz="800" dirty="0">
+                <a:solidFill>
+                  <a:srgbClr val="334155"/>
+                </a:solidFill>
+                <a:latin typeface="Calibri" pitchFamily="34" charset="0"/>
+                <a:ea typeface="Calibri" pitchFamily="34" charset="-122"/>
+                <a:cs typeface="Calibri" pitchFamily="34" charset="-120"/>
+              </a:rPr>
+              <a:t>Claude story generation (all variants)</a:t>
+            </a:r>
+            <a:endParaRPr lang="en-US" sz="800" dirty="0"/>
+          </a:p>
+          <a:p>
+            <a:pPr indent="0" marL="0">
+              <a:buNone/>
+            </a:pPr>
+            <a:r>
+              <a:rPr lang="en-US" sz="800" dirty="0">
+                <a:solidFill>
+                  <a:srgbClr val="334155"/>
+                </a:solidFill>
+                <a:latin typeface="Calibri" pitchFamily="34" charset="0"/>
+                <a:ea typeface="Calibri" pitchFamily="34" charset="-122"/>
+                <a:cs typeface="Calibri" pitchFamily="34" charset="-120"/>
+              </a:rPr>
+              <a:t>Admin Content tab + approval queue</a:t>
+            </a:r>
+            <a:endParaRPr lang="en-US" sz="800" dirty="0"/>
+          </a:p>
+          <a:p>
+            <a:pPr indent="0" marL="0">
+              <a:buNone/>
+            </a:pPr>
+            <a:r>
+              <a:rPr lang="en-US" sz="800" dirty="0">
+                <a:solidFill>
+                  <a:srgbClr val="334155"/>
+                </a:solidFill>
+                <a:latin typeface="Calibri" pitchFamily="34" charset="0"/>
+                <a:ea typeface="Calibri" pitchFamily="34" charset="-122"/>
+                <a:cs typeface="Calibri" pitchFamily="34" charset="-120"/>
+              </a:rPr>
+              <a:t>Brilliant Jobs LinkedIn company page</a:t>
+            </a:r>
+            <a:endParaRPr lang="en-US" sz="800" dirty="0"/>
+          </a:p>
+        </p:txBody>
+      </p:sp>
+      <p:sp>
+        <p:nvSpPr>
+          <p:cNvPr id="17" name="Text 15"/>
+          <p:cNvSpPr/>
+          <p:nvPr/>
+        </p:nvSpPr>
+        <p:spPr>
+          <a:xfrm>
+            <a:off x="6400800" y="2130552"/>
+            <a:ext cx="2011680" cy="548640"/>
+          </a:xfrm>
+          <a:prstGeom prst="rect">
+            <a:avLst/>
+          </a:prstGeom>
+          <a:noFill/>
+          <a:ln/>
+        </p:spPr>
+        <p:txBody>
+          <a:bodyPr wrap="square" lIns="0" tIns="0" rIns="0" bIns="0" rtlCol="0" anchor="ctr"/>
+          <a:lstStyle/>
+          <a:p>
+            <a:pPr indent="0" marL="0">
+              <a:buNone/>
+            </a:pPr>
+            <a:r>
+              <a:rPr lang="en-US" sz="800" dirty="0">
+                <a:solidFill>
+                  <a:srgbClr val="64748B"/>
+                </a:solidFill>
+                <a:latin typeface="Calibri" pitchFamily="34" charset="0"/>
+                <a:ea typeface="Calibri" pitchFamily="34" charset="-122"/>
+                <a:cs typeface="Calibri" pitchFamily="34" charset="-120"/>
+              </a:rPr>
+              <a:t>Pod 1 rules</a:t>
+            </a:r>
+            <a:endParaRPr lang="en-US" sz="800" dirty="0"/>
+          </a:p>
+          <a:p>
+            <a:pPr indent="0" marL="0">
+              <a:buNone/>
+            </a:pPr>
+            <a:r>
+              <a:rPr lang="en-US" sz="800" dirty="0">
+                <a:solidFill>
+                  <a:srgbClr val="64748B"/>
+                </a:solidFill>
+                <a:latin typeface="Calibri" pitchFamily="34" charset="0"/>
+                <a:ea typeface="Calibri" pitchFamily="34" charset="-122"/>
+                <a:cs typeface="Calibri" pitchFamily="34" charset="-120"/>
+              </a:rPr>
+              <a:t>Pod 2 engine</a:t>
+            </a:r>
+            <a:endParaRPr lang="en-US" sz="800" dirty="0"/>
+          </a:p>
+        </p:txBody>
+      </p:sp>
+      <p:sp>
+        <p:nvSpPr>
+          <p:cNvPr id="18" name="Shape 16"/>
+          <p:cNvSpPr/>
+          <p:nvPr/>
+        </p:nvSpPr>
+        <p:spPr>
+          <a:xfrm>
+            <a:off x="548640" y="2798064"/>
+            <a:ext cx="8046720" cy="640080"/>
+          </a:xfrm>
+          <a:prstGeom prst="rect">
+            <a:avLst/>
+          </a:prstGeom>
+          <a:solidFill>
+            <a:srgbClr val="FFFFFF"/>
+          </a:solidFill>
+          <a:ln/>
+          <a:effectLst>
+            <a:outerShdw sx="100000" sy="100000" kx="0" ky="0" algn="bl" rotWithShape="0" blurRad="76200" dist="25400" dir="8100000">
+              <a:srgbClr val="000000">
+                <a:alpha val="10000"/>
+              </a:srgbClr>
+            </a:outerShdw>
+          </a:effectLst>
+        </p:spPr>
+      </p:sp>
+      <p:sp>
+        <p:nvSpPr>
+          <p:cNvPr id="19" name="Shape 17"/>
+          <p:cNvSpPr/>
+          <p:nvPr/>
+        </p:nvSpPr>
+        <p:spPr>
+          <a:xfrm>
+            <a:off x="548640" y="2798064"/>
+            <a:ext cx="54864" cy="640080"/>
+          </a:xfrm>
+          <a:prstGeom prst="rect">
+            <a:avLst/>
+          </a:prstGeom>
+          <a:solidFill>
+            <a:srgbClr val="0D9488"/>
+          </a:solidFill>
+          <a:ln/>
+        </p:spPr>
+      </p:sp>
+      <p:sp>
+        <p:nvSpPr>
+          <p:cNvPr id="20" name="Text 18"/>
+          <p:cNvSpPr/>
+          <p:nvPr/>
+        </p:nvSpPr>
+        <p:spPr>
+          <a:xfrm>
+            <a:off x="731520" y="2798064"/>
+            <a:ext cx="731520" cy="320040"/>
+          </a:xfrm>
+          <a:prstGeom prst="rect">
+            <a:avLst/>
+          </a:prstGeom>
+          <a:noFill/>
+          <a:ln/>
+        </p:spPr>
+        <p:txBody>
+          <a:bodyPr wrap="square" lIns="0" tIns="0" rIns="0" bIns="0" rtlCol="0" anchor="ctr"/>
+          <a:lstStyle/>
+          <a:p>
+            <a:pPr indent="0" marL="0">
+              <a:buNone/>
+            </a:pPr>
+            <a:r>
+              <a:rPr lang="en-US" sz="900" b="1" dirty="0">
+                <a:solidFill>
+                  <a:srgbClr val="0D9488"/>
+                </a:solidFill>
+                <a:latin typeface="Arial" pitchFamily="34" charset="0"/>
+                <a:ea typeface="Arial" pitchFamily="34" charset="-122"/>
+                <a:cs typeface="Arial" pitchFamily="34" charset="-120"/>
+              </a:rPr>
+              <a:t>PHASE 3</a:t>
+            </a:r>
+            <a:endParaRPr lang="en-US" sz="900" dirty="0"/>
+          </a:p>
+        </p:txBody>
+      </p:sp>
+      <p:sp>
+        <p:nvSpPr>
+          <p:cNvPr id="21" name="Text 19"/>
+          <p:cNvSpPr/>
+          <p:nvPr/>
+        </p:nvSpPr>
+        <p:spPr>
+          <a:xfrm>
+            <a:off x="731520" y="3090672"/>
+            <a:ext cx="731520" cy="274320"/>
+          </a:xfrm>
+          <a:prstGeom prst="rect">
+            <a:avLst/>
+          </a:prstGeom>
+          <a:noFill/>
+          <a:ln/>
+        </p:spPr>
+        <p:txBody>
+          <a:bodyPr wrap="square" lIns="0" tIns="0" rIns="0" bIns="0" rtlCol="0" anchor="ctr"/>
+          <a:lstStyle/>
+          <a:p>
+            <a:pPr indent="0" marL="0">
+              <a:buNone/>
+            </a:pPr>
+            <a:r>
+              <a:rPr lang="en-US" sz="800" dirty="0">
+                <a:solidFill>
+                  <a:srgbClr val="64748B"/>
+                </a:solidFill>
+                <a:latin typeface="Calibri" pitchFamily="34" charset="0"/>
+                <a:ea typeface="Calibri" pitchFamily="34" charset="-122"/>
+                <a:cs typeface="Calibri" pitchFamily="34" charset="-120"/>
+              </a:rPr>
+              <a:t>Month 1-2</a:t>
+            </a:r>
+            <a:endParaRPr lang="en-US" sz="800" dirty="0"/>
+          </a:p>
+        </p:txBody>
+      </p:sp>
+      <p:sp>
+        <p:nvSpPr>
+          <p:cNvPr id="22" name="Text 20"/>
+          <p:cNvSpPr/>
+          <p:nvPr/>
+        </p:nvSpPr>
+        <p:spPr>
+          <a:xfrm>
+            <a:off x="1554480" y="2798064"/>
+            <a:ext cx="731520" cy="640080"/>
+          </a:xfrm>
+          <a:prstGeom prst="rect">
+            <a:avLst/>
+          </a:prstGeom>
+          <a:noFill/>
+          <a:ln/>
+        </p:spPr>
+        <p:txBody>
+          <a:bodyPr wrap="square" lIns="0" tIns="0" rIns="0" bIns="0" rtlCol="0" anchor="ctr"/>
+          <a:lstStyle/>
+          <a:p>
+            <a:pPr indent="0" marL="0">
+              <a:buNone/>
+            </a:pPr>
+            <a:r>
+              <a:rPr lang="en-US" sz="1000" b="1" dirty="0">
+                <a:solidFill>
+                  <a:srgbClr val="1A1F36"/>
+                </a:solidFill>
+                <a:latin typeface="Georgia" pitchFamily="34" charset="0"/>
+                <a:ea typeface="Georgia" pitchFamily="34" charset="-122"/>
+                <a:cs typeface="Georgia" pitchFamily="34" charset="-120"/>
+              </a:rPr>
+              <a:t>4-5 days</a:t>
+            </a:r>
+            <a:endParaRPr lang="en-US" sz="1000" dirty="0"/>
+          </a:p>
+        </p:txBody>
+      </p:sp>
+      <p:sp>
+        <p:nvSpPr>
+          <p:cNvPr id="23" name="Text 21"/>
+          <p:cNvSpPr/>
+          <p:nvPr/>
+        </p:nvSpPr>
+        <p:spPr>
+          <a:xfrm>
+            <a:off x="2377440" y="2843784"/>
+            <a:ext cx="3657600" cy="548640"/>
+          </a:xfrm>
+          <a:prstGeom prst="rect">
+            <a:avLst/>
+          </a:prstGeom>
+          <a:noFill/>
+          <a:ln/>
+        </p:spPr>
+        <p:txBody>
+          <a:bodyPr wrap="square" lIns="0" tIns="0" rIns="0" bIns="0" rtlCol="0" anchor="ctr"/>
+          <a:lstStyle/>
+          <a:p>
+            <a:pPr indent="0" marL="0">
+              <a:buNone/>
+            </a:pPr>
+            <a:r>
+              <a:rPr lang="en-US" sz="800" dirty="0">
+                <a:solidFill>
+                  <a:srgbClr val="334155"/>
+                </a:solidFill>
+                <a:latin typeface="Calibri" pitchFamily="34" charset="0"/>
+                <a:ea typeface="Calibri" pitchFamily="34" charset="-122"/>
+                <a:cs typeface="Calibri" pitchFamily="34" charset="-120"/>
+              </a:rPr>
+              <a:t>Blog page template (/blog/{slug})</a:t>
+            </a:r>
+            <a:endParaRPr lang="en-US" sz="800" dirty="0"/>
+          </a:p>
+          <a:p>
+            <a:pPr indent="0" marL="0">
+              <a:buNone/>
+            </a:pPr>
+            <a:r>
+              <a:rPr lang="en-US" sz="800" dirty="0">
+                <a:solidFill>
+                  <a:srgbClr val="334155"/>
+                </a:solidFill>
+                <a:latin typeface="Calibri" pitchFamily="34" charset="0"/>
+                <a:ea typeface="Calibri" pitchFamily="34" charset="-122"/>
+                <a:cs typeface="Calibri" pitchFamily="34" charset="-120"/>
+              </a:rPr>
+              <a:t>Internal merchandising (5 surfaces)</a:t>
+            </a:r>
+            <a:endParaRPr lang="en-US" sz="800" dirty="0"/>
+          </a:p>
+          <a:p>
+            <a:pPr indent="0" marL="0">
+              <a:buNone/>
+            </a:pPr>
+            <a:r>
+              <a:rPr lang="en-US" sz="800" dirty="0">
+                <a:solidFill>
+                  <a:srgbClr val="334155"/>
+                </a:solidFill>
+                <a:latin typeface="Calibri" pitchFamily="34" charset="0"/>
+                <a:ea typeface="Calibri" pitchFamily="34" charset="-122"/>
+                <a:cs typeface="Calibri" pitchFamily="34" charset="-120"/>
+              </a:rPr>
+              <a:t>Unified social API integration (Late)</a:t>
+            </a:r>
+            <a:endParaRPr lang="en-US" sz="800" dirty="0"/>
+          </a:p>
+          <a:p>
+            <a:pPr indent="0" marL="0">
+              <a:buNone/>
+            </a:pPr>
+            <a:r>
+              <a:rPr lang="en-US" sz="800" dirty="0">
+                <a:solidFill>
+                  <a:srgbClr val="334155"/>
+                </a:solidFill>
+                <a:latin typeface="Calibri" pitchFamily="34" charset="0"/>
+                <a:ea typeface="Calibri" pitchFamily="34" charset="-122"/>
+                <a:cs typeface="Calibri" pitchFamily="34" charset="-120"/>
+              </a:rPr>
+              <a:t>Social metrics webhook ingestion</a:t>
+            </a:r>
+            <a:endParaRPr lang="en-US" sz="800" dirty="0"/>
+          </a:p>
+          <a:p>
+            <a:pPr indent="0" marL="0">
+              <a:buNone/>
+            </a:pPr>
+            <a:r>
+              <a:rPr lang="en-US" sz="800" dirty="0">
+                <a:solidFill>
+                  <a:srgbClr val="334155"/>
+                </a:solidFill>
+                <a:latin typeface="Calibri" pitchFamily="34" charset="0"/>
+                <a:ea typeface="Calibri" pitchFamily="34" charset="-122"/>
+                <a:cs typeface="Calibri" pitchFamily="34" charset="-120"/>
+              </a:rPr>
+              <a:t>Newsletter integration via Resend</a:t>
+            </a:r>
+            <a:endParaRPr lang="en-US" sz="800" dirty="0"/>
+          </a:p>
+        </p:txBody>
+      </p:sp>
+      <p:sp>
+        <p:nvSpPr>
+          <p:cNvPr id="24" name="Text 22"/>
+          <p:cNvSpPr/>
+          <p:nvPr/>
+        </p:nvSpPr>
+        <p:spPr>
+          <a:xfrm>
+            <a:off x="6400800" y="2843784"/>
+            <a:ext cx="2011680" cy="548640"/>
+          </a:xfrm>
+          <a:prstGeom prst="rect">
+            <a:avLst/>
+          </a:prstGeom>
+          <a:noFill/>
+          <a:ln/>
+        </p:spPr>
+        <p:txBody>
+          <a:bodyPr wrap="square" lIns="0" tIns="0" rIns="0" bIns="0" rtlCol="0" anchor="ctr"/>
+          <a:lstStyle/>
+          <a:p>
+            <a:pPr indent="0" marL="0">
+              <a:buNone/>
+            </a:pPr>
+            <a:r>
+              <a:rPr lang="en-US" sz="800" dirty="0">
+                <a:solidFill>
+                  <a:srgbClr val="64748B"/>
+                </a:solidFill>
+                <a:latin typeface="Calibri" pitchFamily="34" charset="0"/>
+                <a:ea typeface="Calibri" pitchFamily="34" charset="-122"/>
+                <a:cs typeface="Calibri" pitchFamily="34" charset="-120"/>
+              </a:rPr>
+              <a:t>Pod 2 builds</a:t>
+            </a:r>
+            <a:endParaRPr lang="en-US" sz="800" dirty="0"/>
+          </a:p>
+          <a:p>
+            <a:pPr indent="0" marL="0">
+              <a:buNone/>
+            </a:pPr>
+            <a:r>
+              <a:rPr lang="en-US" sz="800" dirty="0">
+                <a:solidFill>
+                  <a:srgbClr val="64748B"/>
+                </a:solidFill>
+                <a:latin typeface="Calibri" pitchFamily="34" charset="0"/>
+                <a:ea typeface="Calibri" pitchFamily="34" charset="-122"/>
+                <a:cs typeface="Calibri" pitchFamily="34" charset="-120"/>
+              </a:rPr>
+              <a:t>Pod 1 placement</a:t>
+            </a:r>
+            <a:endParaRPr lang="en-US" sz="800" dirty="0"/>
+          </a:p>
+        </p:txBody>
+      </p:sp>
+      <p:sp>
+        <p:nvSpPr>
+          <p:cNvPr id="25" name="Shape 23"/>
+          <p:cNvSpPr/>
+          <p:nvPr/>
+        </p:nvSpPr>
+        <p:spPr>
+          <a:xfrm>
+            <a:off x="548640" y="3511296"/>
+            <a:ext cx="8046720" cy="640080"/>
+          </a:xfrm>
+          <a:prstGeom prst="rect">
+            <a:avLst/>
+          </a:prstGeom>
+          <a:solidFill>
+            <a:srgbClr val="FFFFFF"/>
+          </a:solidFill>
+          <a:ln/>
+          <a:effectLst>
+            <a:outerShdw sx="100000" sy="100000" kx="0" ky="0" algn="bl" rotWithShape="0" blurRad="76200" dist="25400" dir="8100000">
+              <a:srgbClr val="000000">
+                <a:alpha val="10000"/>
+              </a:srgbClr>
+            </a:outerShdw>
+          </a:effectLst>
+        </p:spPr>
+      </p:sp>
+      <p:sp>
+        <p:nvSpPr>
+          <p:cNvPr id="26" name="Shape 24"/>
+          <p:cNvSpPr/>
+          <p:nvPr/>
+        </p:nvSpPr>
+        <p:spPr>
+          <a:xfrm>
+            <a:off x="548640" y="3511296"/>
+            <a:ext cx="54864" cy="640080"/>
+          </a:xfrm>
+          <a:prstGeom prst="rect">
+            <a:avLst/>
+          </a:prstGeom>
+          <a:solidFill>
+            <a:srgbClr val="8B5CF6"/>
+          </a:solidFill>
+          <a:ln/>
+        </p:spPr>
+      </p:sp>
+      <p:sp>
+        <p:nvSpPr>
+          <p:cNvPr id="27" name="Text 25"/>
+          <p:cNvSpPr/>
+          <p:nvPr/>
+        </p:nvSpPr>
+        <p:spPr>
+          <a:xfrm>
+            <a:off x="731520" y="3511296"/>
+            <a:ext cx="731520" cy="320040"/>
+          </a:xfrm>
+          <a:prstGeom prst="rect">
+            <a:avLst/>
+          </a:prstGeom>
+          <a:noFill/>
+          <a:ln/>
+        </p:spPr>
+        <p:txBody>
+          <a:bodyPr wrap="square" lIns="0" tIns="0" rIns="0" bIns="0" rtlCol="0" anchor="ctr"/>
+          <a:lstStyle/>
+          <a:p>
+            <a:pPr indent="0" marL="0">
+              <a:buNone/>
+            </a:pPr>
+            <a:r>
+              <a:rPr lang="en-US" sz="900" b="1" dirty="0">
+                <a:solidFill>
+                  <a:srgbClr val="8B5CF6"/>
+                </a:solidFill>
+                <a:latin typeface="Arial" pitchFamily="34" charset="0"/>
+                <a:ea typeface="Arial" pitchFamily="34" charset="-122"/>
+                <a:cs typeface="Arial" pitchFamily="34" charset="-120"/>
+              </a:rPr>
+              <a:t>PHASE 4</a:t>
+            </a:r>
+            <a:endParaRPr lang="en-US" sz="900" dirty="0"/>
+          </a:p>
+        </p:txBody>
+      </p:sp>
+      <p:sp>
+        <p:nvSpPr>
+          <p:cNvPr id="28" name="Text 26"/>
+          <p:cNvSpPr/>
+          <p:nvPr/>
+        </p:nvSpPr>
+        <p:spPr>
+          <a:xfrm>
+            <a:off x="731520" y="3803904"/>
+            <a:ext cx="731520" cy="274320"/>
+          </a:xfrm>
+          <a:prstGeom prst="rect">
+            <a:avLst/>
+          </a:prstGeom>
+          <a:noFill/>
+          <a:ln/>
+        </p:spPr>
+        <p:txBody>
+          <a:bodyPr wrap="square" lIns="0" tIns="0" rIns="0" bIns="0" rtlCol="0" anchor="ctr"/>
+          <a:lstStyle/>
+          <a:p>
+            <a:pPr indent="0" marL="0">
+              <a:buNone/>
+            </a:pPr>
+            <a:r>
+              <a:rPr lang="en-US" sz="800" dirty="0">
+                <a:solidFill>
+                  <a:srgbClr val="64748B"/>
+                </a:solidFill>
+                <a:latin typeface="Calibri" pitchFamily="34" charset="0"/>
+                <a:ea typeface="Calibri" pitchFamily="34" charset="-122"/>
+                <a:cs typeface="Calibri" pitchFamily="34" charset="-120"/>
+              </a:rPr>
+              <a:t>Month 2-3</a:t>
+            </a:r>
+            <a:endParaRPr lang="en-US" sz="800" dirty="0"/>
+          </a:p>
+        </p:txBody>
+      </p:sp>
+      <p:sp>
+        <p:nvSpPr>
+          <p:cNvPr id="29" name="Text 27"/>
+          <p:cNvSpPr/>
+          <p:nvPr/>
+        </p:nvSpPr>
+        <p:spPr>
+          <a:xfrm>
+            <a:off x="1554480" y="3511296"/>
+            <a:ext cx="731520" cy="640080"/>
+          </a:xfrm>
+          <a:prstGeom prst="rect">
+            <a:avLst/>
+          </a:prstGeom>
+          <a:noFill/>
+          <a:ln/>
+        </p:spPr>
+        <p:txBody>
+          <a:bodyPr wrap="square" lIns="0" tIns="0" rIns="0" bIns="0" rtlCol="0" anchor="ctr"/>
+          <a:lstStyle/>
+          <a:p>
+            <a:pPr indent="0" marL="0">
+              <a:buNone/>
+            </a:pPr>
+            <a:r>
+              <a:rPr lang="en-US" sz="1000" b="1" dirty="0">
+                <a:solidFill>
+                  <a:srgbClr val="1A1F36"/>
+                </a:solidFill>
+                <a:latin typeface="Georgia" pitchFamily="34" charset="0"/>
+                <a:ea typeface="Georgia" pitchFamily="34" charset="-122"/>
+                <a:cs typeface="Georgia" pitchFamily="34" charset="-120"/>
+              </a:rPr>
+              <a:t>6-8 days</a:t>
+            </a:r>
+            <a:endParaRPr lang="en-US" sz="1000" dirty="0"/>
+          </a:p>
+        </p:txBody>
+      </p:sp>
+      <p:sp>
+        <p:nvSpPr>
+          <p:cNvPr id="30" name="Text 28"/>
+          <p:cNvSpPr/>
+          <p:nvPr/>
+        </p:nvSpPr>
+        <p:spPr>
+          <a:xfrm>
+            <a:off x="2377440" y="3557016"/>
+            <a:ext cx="3657600" cy="548640"/>
+          </a:xfrm>
+          <a:prstGeom prst="rect">
+            <a:avLst/>
+          </a:prstGeom>
+          <a:noFill/>
+          <a:ln/>
+        </p:spPr>
+        <p:txBody>
+          <a:bodyPr wrap="square" lIns="0" tIns="0" rIns="0" bIns="0" rtlCol="0" anchor="ctr"/>
+          <a:lstStyle/>
+          <a:p>
+            <a:pPr indent="0" marL="0">
+              <a:buNone/>
+            </a:pPr>
+            <a:r>
+              <a:rPr lang="en-US" sz="800" dirty="0">
+                <a:solidFill>
+                  <a:srgbClr val="334155"/>
+                </a:solidFill>
+                <a:latin typeface="Calibri" pitchFamily="34" charset="0"/>
+                <a:ea typeface="Calibri" pitchFamily="34" charset="-122"/>
+                <a:cs typeface="Calibri" pitchFamily="34" charset="-120"/>
+              </a:rPr>
+              <a:t>Video rendering pipeline</a:t>
+            </a:r>
+            <a:endParaRPr lang="en-US" sz="800" dirty="0"/>
+          </a:p>
+          <a:p>
+            <a:pPr indent="0" marL="0">
+              <a:buNone/>
+            </a:pPr>
+            <a:r>
+              <a:rPr lang="en-US" sz="800" dirty="0">
+                <a:solidFill>
+                  <a:srgbClr val="334155"/>
+                </a:solidFill>
+                <a:latin typeface="Calibri" pitchFamily="34" charset="0"/>
+                <a:ea typeface="Calibri" pitchFamily="34" charset="-122"/>
+                <a:cs typeface="Calibri" pitchFamily="34" charset="-120"/>
+              </a:rPr>
+              <a:t>AI voiceover + animated charts</a:t>
+            </a:r>
+            <a:endParaRPr lang="en-US" sz="800" dirty="0"/>
+          </a:p>
+          <a:p>
+            <a:pPr indent="0" marL="0">
+              <a:buNone/>
+            </a:pPr>
+            <a:r>
+              <a:rPr lang="en-US" sz="800" dirty="0">
+                <a:solidFill>
+                  <a:srgbClr val="334155"/>
+                </a:solidFill>
+                <a:latin typeface="Calibri" pitchFamily="34" charset="0"/>
+                <a:ea typeface="Calibri" pitchFamily="34" charset="-122"/>
+                <a:cs typeface="Calibri" pitchFamily="34" charset="-120"/>
+              </a:rPr>
+              <a:t>YouTube / Shorts / Reels publishing</a:t>
+            </a:r>
+            <a:endParaRPr lang="en-US" sz="800" dirty="0"/>
+          </a:p>
+          <a:p>
+            <a:pPr indent="0" marL="0">
+              <a:buNone/>
+            </a:pPr>
+            <a:r>
+              <a:rPr lang="en-US" sz="800" dirty="0">
+                <a:solidFill>
+                  <a:srgbClr val="334155"/>
+                </a:solidFill>
+                <a:latin typeface="Calibri" pitchFamily="34" charset="0"/>
+                <a:ea typeface="Calibri" pitchFamily="34" charset="-122"/>
+                <a:cs typeface="Calibri" pitchFamily="34" charset="-120"/>
+              </a:rPr>
+              <a:t>Survey research program (pop-ups)</a:t>
+            </a:r>
+            <a:endParaRPr lang="en-US" sz="800" dirty="0"/>
+          </a:p>
+          <a:p>
+            <a:pPr indent="0" marL="0">
+              <a:buNone/>
+            </a:pPr>
+            <a:r>
+              <a:rPr lang="en-US" sz="800" dirty="0">
+                <a:solidFill>
+                  <a:srgbClr val="334155"/>
+                </a:solidFill>
+                <a:latin typeface="Calibri" pitchFamily="34" charset="0"/>
+                <a:ea typeface="Calibri" pitchFamily="34" charset="-122"/>
+                <a:cs typeface="Calibri" pitchFamily="34" charset="-120"/>
+              </a:rPr>
+              <a:t>Personal journey opt-in system</a:t>
+            </a:r>
+            <a:endParaRPr lang="en-US" sz="800" dirty="0"/>
+          </a:p>
+        </p:txBody>
+      </p:sp>
+      <p:sp>
+        <p:nvSpPr>
+          <p:cNvPr id="31" name="Text 29"/>
+          <p:cNvSpPr/>
+          <p:nvPr/>
+        </p:nvSpPr>
+        <p:spPr>
+          <a:xfrm>
+            <a:off x="6400800" y="3557016"/>
+            <a:ext cx="2011680" cy="548640"/>
+          </a:xfrm>
+          <a:prstGeom prst="rect">
+            <a:avLst/>
+          </a:prstGeom>
+          <a:noFill/>
+          <a:ln/>
+        </p:spPr>
+        <p:txBody>
+          <a:bodyPr wrap="square" lIns="0" tIns="0" rIns="0" bIns="0" rtlCol="0" anchor="ctr"/>
+          <a:lstStyle/>
+          <a:p>
+            <a:pPr indent="0" marL="0">
+              <a:buNone/>
+            </a:pPr>
+            <a:r>
+              <a:rPr lang="en-US" sz="800" dirty="0">
+                <a:solidFill>
+                  <a:srgbClr val="64748B"/>
+                </a:solidFill>
+                <a:latin typeface="Calibri" pitchFamily="34" charset="0"/>
+                <a:ea typeface="Calibri" pitchFamily="34" charset="-122"/>
+                <a:cs typeface="Calibri" pitchFamily="34" charset="-120"/>
+              </a:rPr>
+              <a:t>Pod 2 builds</a:t>
+            </a:r>
+            <a:endParaRPr lang="en-US" sz="800" dirty="0"/>
+          </a:p>
+          <a:p>
+            <a:pPr indent="0" marL="0">
+              <a:buNone/>
+            </a:pPr>
+            <a:r>
+              <a:rPr lang="en-US" sz="800" dirty="0">
+                <a:solidFill>
+                  <a:srgbClr val="64748B"/>
+                </a:solidFill>
+                <a:latin typeface="Calibri" pitchFamily="34" charset="0"/>
+                <a:ea typeface="Calibri" pitchFamily="34" charset="-122"/>
+                <a:cs typeface="Calibri" pitchFamily="34" charset="-120"/>
+              </a:rPr>
+              <a:t>Pod 1 templates</a:t>
+            </a:r>
+            <a:endParaRPr lang="en-US" sz="800" dirty="0"/>
+          </a:p>
+        </p:txBody>
+      </p:sp>
+      <p:sp>
+        <p:nvSpPr>
+          <p:cNvPr id="32" name="Shape 30"/>
+          <p:cNvSpPr/>
+          <p:nvPr/>
+        </p:nvSpPr>
+        <p:spPr>
+          <a:xfrm>
+            <a:off x="548640" y="4224528"/>
+            <a:ext cx="8046720" cy="640080"/>
+          </a:xfrm>
+          <a:prstGeom prst="rect">
+            <a:avLst/>
+          </a:prstGeom>
+          <a:solidFill>
+            <a:srgbClr val="FFFFFF"/>
+          </a:solidFill>
+          <a:ln/>
+          <a:effectLst>
+            <a:outerShdw sx="100000" sy="100000" kx="0" ky="0" algn="bl" rotWithShape="0" blurRad="76200" dist="25400" dir="8100000">
+              <a:srgbClr val="000000">
+                <a:alpha val="10000"/>
+              </a:srgbClr>
+            </a:outerShdw>
+          </a:effectLst>
+        </p:spPr>
+      </p:sp>
+      <p:sp>
+        <p:nvSpPr>
+          <p:cNvPr id="33" name="Shape 31"/>
+          <p:cNvSpPr/>
+          <p:nvPr/>
+        </p:nvSpPr>
+        <p:spPr>
+          <a:xfrm>
+            <a:off x="548640" y="4224528"/>
+            <a:ext cx="54864" cy="640080"/>
+          </a:xfrm>
+          <a:prstGeom prst="rect">
+            <a:avLst/>
+          </a:prstGeom>
+          <a:solidFill>
+            <a:srgbClr val="F59E0B"/>
+          </a:solidFill>
+          <a:ln/>
+        </p:spPr>
+      </p:sp>
+      <p:sp>
+        <p:nvSpPr>
+          <p:cNvPr id="34" name="Text 32"/>
+          <p:cNvSpPr/>
+          <p:nvPr/>
+        </p:nvSpPr>
+        <p:spPr>
+          <a:xfrm>
+            <a:off x="731520" y="4224528"/>
+            <a:ext cx="731520" cy="320040"/>
+          </a:xfrm>
+          <a:prstGeom prst="rect">
+            <a:avLst/>
+          </a:prstGeom>
+          <a:noFill/>
+          <a:ln/>
+        </p:spPr>
+        <p:txBody>
+          <a:bodyPr wrap="square" lIns="0" tIns="0" rIns="0" bIns="0" rtlCol="0" anchor="ctr"/>
+          <a:lstStyle/>
+          <a:p>
+            <a:pPr indent="0" marL="0">
+              <a:buNone/>
+            </a:pPr>
+            <a:r>
+              <a:rPr lang="en-US" sz="900" b="1" dirty="0">
+                <a:solidFill>
+                  <a:srgbClr val="F59E0B"/>
+                </a:solidFill>
+                <a:latin typeface="Arial" pitchFamily="34" charset="0"/>
+                <a:ea typeface="Arial" pitchFamily="34" charset="-122"/>
+                <a:cs typeface="Arial" pitchFamily="34" charset="-120"/>
+              </a:rPr>
+              <a:t>PHASE 5</a:t>
+            </a:r>
+            <a:endParaRPr lang="en-US" sz="900" dirty="0"/>
+          </a:p>
+        </p:txBody>
+      </p:sp>
+      <p:sp>
+        <p:nvSpPr>
+          <p:cNvPr id="35" name="Text 33"/>
+          <p:cNvSpPr/>
+          <p:nvPr/>
+        </p:nvSpPr>
+        <p:spPr>
+          <a:xfrm>
+            <a:off x="731520" y="4517136"/>
+            <a:ext cx="731520" cy="274320"/>
+          </a:xfrm>
+          <a:prstGeom prst="rect">
+            <a:avLst/>
+          </a:prstGeom>
+          <a:noFill/>
+          <a:ln/>
+        </p:spPr>
+        <p:txBody>
+          <a:bodyPr wrap="square" lIns="0" tIns="0" rIns="0" bIns="0" rtlCol="0" anchor="ctr"/>
+          <a:lstStyle/>
+          <a:p>
+            <a:pPr indent="0" marL="0">
+              <a:buNone/>
+            </a:pPr>
+            <a:r>
+              <a:rPr lang="en-US" sz="800" dirty="0">
+                <a:solidFill>
+                  <a:srgbClr val="64748B"/>
+                </a:solidFill>
+                <a:latin typeface="Calibri" pitchFamily="34" charset="0"/>
+                <a:ea typeface="Calibri" pitchFamily="34" charset="-122"/>
+                <a:cs typeface="Calibri" pitchFamily="34" charset="-120"/>
+              </a:rPr>
+              <a:t>Month 3+</a:t>
+            </a:r>
+            <a:endParaRPr lang="en-US" sz="800" dirty="0"/>
+          </a:p>
+        </p:txBody>
+      </p:sp>
+      <p:sp>
+        <p:nvSpPr>
+          <p:cNvPr id="36" name="Text 34"/>
+          <p:cNvSpPr/>
+          <p:nvPr/>
+        </p:nvSpPr>
+        <p:spPr>
+          <a:xfrm>
+            <a:off x="1554480" y="4224528"/>
+            <a:ext cx="731520" cy="640080"/>
+          </a:xfrm>
+          <a:prstGeom prst="rect">
+            <a:avLst/>
+          </a:prstGeom>
+          <a:noFill/>
+          <a:ln/>
+        </p:spPr>
+        <p:txBody>
+          <a:bodyPr wrap="square" lIns="0" tIns="0" rIns="0" bIns="0" rtlCol="0" anchor="ctr"/>
+          <a:lstStyle/>
+          <a:p>
+            <a:pPr indent="0" marL="0">
+              <a:buNone/>
+            </a:pPr>
+            <a:r>
+              <a:rPr lang="en-US" sz="1000" b="1" dirty="0">
+                <a:solidFill>
+                  <a:srgbClr val="1A1F36"/>
+                </a:solidFill>
+                <a:latin typeface="Georgia" pitchFamily="34" charset="0"/>
+                <a:ea typeface="Georgia" pitchFamily="34" charset="-122"/>
+                <a:cs typeface="Georgia" pitchFamily="34" charset="-120"/>
+              </a:rPr>
+              <a:t>8-11 days</a:t>
+            </a:r>
+            <a:endParaRPr lang="en-US" sz="1000" dirty="0"/>
+          </a:p>
+        </p:txBody>
+      </p:sp>
+      <p:sp>
+        <p:nvSpPr>
+          <p:cNvPr id="37" name="Text 35"/>
+          <p:cNvSpPr/>
+          <p:nvPr/>
+        </p:nvSpPr>
+        <p:spPr>
+          <a:xfrm>
+            <a:off x="2377440" y="4270248"/>
+            <a:ext cx="3657600" cy="548640"/>
+          </a:xfrm>
+          <a:prstGeom prst="rect">
+            <a:avLst/>
+          </a:prstGeom>
+          <a:noFill/>
+          <a:ln/>
+        </p:spPr>
+        <p:txBody>
+          <a:bodyPr wrap="square" lIns="0" tIns="0" rIns="0" bIns="0" rtlCol="0" anchor="ctr"/>
+          <a:lstStyle/>
+          <a:p>
+            <a:pPr indent="0" marL="0">
+              <a:buNone/>
+            </a:pPr>
+            <a:r>
+              <a:rPr lang="en-US" sz="800" dirty="0">
+                <a:solidFill>
+                  <a:srgbClr val="334155"/>
+                </a:solidFill>
+                <a:latin typeface="Calibri" pitchFamily="34" charset="0"/>
+                <a:ea typeface="Calibri" pitchFamily="34" charset="-122"/>
+                <a:cs typeface="Calibri" pitchFamily="34" charset="-120"/>
+              </a:rPr>
+              <a:t>Economic data ingestion (BLS/FRED)</a:t>
+            </a:r>
+            <a:endParaRPr lang="en-US" sz="800" dirty="0"/>
+          </a:p>
+          <a:p>
+            <a:pPr indent="0" marL="0">
+              <a:buNone/>
+            </a:pPr>
+            <a:r>
+              <a:rPr lang="en-US" sz="800" dirty="0">
+                <a:solidFill>
+                  <a:srgbClr val="334155"/>
+                </a:solidFill>
+                <a:latin typeface="Calibri" pitchFamily="34" charset="0"/>
+                <a:ea typeface="Calibri" pitchFamily="34" charset="-122"/>
+                <a:cs typeface="Calibri" pitchFamily="34" charset="-120"/>
+              </a:rPr>
+              <a:t>Correlation engine</a:t>
+            </a:r>
+            <a:endParaRPr lang="en-US" sz="800" dirty="0"/>
+          </a:p>
+          <a:p>
+            <a:pPr indent="0" marL="0">
+              <a:buNone/>
+            </a:pPr>
+            <a:r>
+              <a:rPr lang="en-US" sz="800" dirty="0">
+                <a:solidFill>
+                  <a:srgbClr val="334155"/>
+                </a:solidFill>
+                <a:latin typeface="Calibri" pitchFamily="34" charset="0"/>
+                <a:ea typeface="Calibri" pitchFamily="34" charset="-122"/>
+                <a:cs typeface="Calibri" pitchFamily="34" charset="-120"/>
+              </a:rPr>
+              <a:t>Social → internal feedback loop</a:t>
+            </a:r>
+            <a:endParaRPr lang="en-US" sz="800" dirty="0"/>
+          </a:p>
+          <a:p>
+            <a:pPr indent="0" marL="0">
+              <a:buNone/>
+            </a:pPr>
+            <a:r>
+              <a:rPr lang="en-US" sz="800" dirty="0">
+                <a:solidFill>
+                  <a:srgbClr val="334155"/>
+                </a:solidFill>
+                <a:latin typeface="Calibri" pitchFamily="34" charset="0"/>
+                <a:ea typeface="Calibri" pitchFamily="34" charset="-122"/>
+                <a:cs typeface="Calibri" pitchFamily="34" charset="-120"/>
+              </a:rPr>
+              <a:t>Press citation tracking</a:t>
+            </a:r>
+            <a:endParaRPr lang="en-US" sz="800" dirty="0"/>
+          </a:p>
+          <a:p>
+            <a:pPr indent="0" marL="0">
+              <a:buNone/>
+            </a:pPr>
+            <a:r>
+              <a:rPr lang="en-US" sz="800" dirty="0">
+                <a:solidFill>
+                  <a:srgbClr val="334155"/>
+                </a:solidFill>
+                <a:latin typeface="Calibri" pitchFamily="34" charset="0"/>
+                <a:ea typeface="Calibri" pitchFamily="34" charset="-122"/>
+                <a:cs typeface="Calibri" pitchFamily="34" charset="-120"/>
+              </a:rPr>
+              <a:t>Auto-approve for high-score stories</a:t>
+            </a:r>
+            <a:endParaRPr lang="en-US" sz="800" dirty="0"/>
+          </a:p>
+        </p:txBody>
+      </p:sp>
+      <p:sp>
+        <p:nvSpPr>
+          <p:cNvPr id="38" name="Text 36"/>
+          <p:cNvSpPr/>
+          <p:nvPr/>
+        </p:nvSpPr>
+        <p:spPr>
+          <a:xfrm>
+            <a:off x="6400800" y="4270248"/>
+            <a:ext cx="2011680" cy="548640"/>
+          </a:xfrm>
+          <a:prstGeom prst="rect">
+            <a:avLst/>
+          </a:prstGeom>
+          <a:noFill/>
+          <a:ln/>
+        </p:spPr>
+        <p:txBody>
+          <a:bodyPr wrap="square" lIns="0" tIns="0" rIns="0" bIns="0" rtlCol="0" anchor="ctr"/>
+          <a:lstStyle/>
+          <a:p>
+            <a:pPr indent="0" marL="0">
+              <a:buNone/>
+            </a:pPr>
+            <a:r>
+              <a:rPr lang="en-US" sz="800" dirty="0">
+                <a:solidFill>
+                  <a:srgbClr val="64748B"/>
+                </a:solidFill>
+                <a:latin typeface="Calibri" pitchFamily="34" charset="0"/>
+                <a:ea typeface="Calibri" pitchFamily="34" charset="-122"/>
+                <a:cs typeface="Calibri" pitchFamily="34" charset="-120"/>
+              </a:rPr>
+              <a:t>Pod 2 builds</a:t>
+            </a:r>
+            <a:endParaRPr lang="en-US" sz="800" dirty="0"/>
+          </a:p>
+          <a:p>
+            <a:pPr indent="0" marL="0">
+              <a:buNone/>
+            </a:pPr>
+            <a:r>
+              <a:rPr lang="en-US" sz="800" dirty="0">
+                <a:solidFill>
+                  <a:srgbClr val="64748B"/>
+                </a:solidFill>
+                <a:latin typeface="Calibri" pitchFamily="34" charset="0"/>
+                <a:ea typeface="Calibri" pitchFamily="34" charset="-122"/>
+                <a:cs typeface="Calibri" pitchFamily="34" charset="-120"/>
+              </a:rPr>
+              <a:t>Pod 1 tuning</a:t>
+            </a:r>
+            <a:endParaRPr lang="en-US" sz="800" dirty="0"/>
+          </a:p>
+        </p:txBody>
+      </p:sp>
+      <p:sp>
+        <p:nvSpPr>
+          <p:cNvPr id="39" name="Text 37"/>
+          <p:cNvSpPr/>
+          <p:nvPr/>
+        </p:nvSpPr>
+        <p:spPr>
+          <a:xfrm>
+            <a:off x="731520" y="4709160"/>
+            <a:ext cx="7680960" cy="274320"/>
+          </a:xfrm>
+          <a:prstGeom prst="rect">
+            <a:avLst/>
+          </a:prstGeom>
+          <a:noFill/>
+          <a:ln/>
+        </p:spPr>
+        <p:txBody>
+          <a:bodyPr wrap="square" lIns="0" tIns="0" rIns="0" bIns="0" rtlCol="0" anchor="ctr"/>
+          <a:lstStyle/>
+          <a:p>
+            <a:pPr indent="0" marL="0">
+              <a:buNone/>
+            </a:pPr>
+            <a:r>
+              <a:rPr lang="en-US" sz="1000" b="1" dirty="0">
+                <a:solidFill>
+                  <a:srgbClr val="1A1F36"/>
+                </a:solidFill>
+                <a:latin typeface="Calibri" pitchFamily="34" charset="0"/>
+                <a:ea typeface="Calibri" pitchFamily="34" charset="-122"/>
+                <a:cs typeface="Calibri" pitchFamily="34" charset="-120"/>
+              </a:rPr>
+              <a:t>Total: 28-38 engineering days across all phases  ·  Phase 1 is launch-critical  ·  Phases 2-3 ship month 1-2  ·  Phases 4-5 are month 2-3+</a:t>
+            </a:r>
+            <a:endParaRPr lang="en-US" sz="1000" dirty="0"/>
+          </a:p>
+        </p:txBody>
+      </p:sp>
+    </p:spTree>
+  </p:cSld>
+  <p:clrMapOvr>
+    <a:masterClrMapping/>
+  </p:clrMapOvr>
+</p:sld>
+</file>
+
+<file path=ppt/slides/slide17.xml><?xml version="1.0" encoding="utf-8"?>
+<p:sld xmlns:a="http://schemas.openxmlformats.org/drawingml/2006/main" xmlns:r="http://schemas.openxmlformats.org/officeDocument/2006/relationships" xmlns:p="http://schemas.openxmlformats.org/presentationml/2006/main">
+  <p:cSld name="Slide 17">
     <p:bg>
       <p:bgPr>
         <a:solidFill>
